--- a/docs/Unified_Enterprise_AI_Agents_Platform.pptx
+++ b/docs/Unified_Enterprise_AI_Agents_Platform.pptx
@@ -1,5 +1,76 @@
 
-<file path=ppt/presentation.xml><?xml version="1.0" encoding="utf-8"?>
+<file path=docProps\app.xml><?xml version="1.0" encoding="utf-8"?>
+<Properties xmlns="http://schemas.openxmlformats.org/officeDocument/2006/extended-properties" xmlns:vt="http://schemas.openxmlformats.org/officeDocument/2006/docPropsVTypes">
+  <TotalTime>1</TotalTime>
+  <Words>0</Words>
+  <Application>Microsoft Macintosh PowerPoint</Application>
+  <PresentationFormat>On-screen Show (4:3)</PresentationFormat>
+  <Paragraphs>0</Paragraphs>
+  <Slides>0</Slides>
+  <Notes>0</Notes>
+  <HiddenSlides>0</HiddenSlides>
+  <MMClips>0</MMClips>
+  <ScaleCrop>false</ScaleCrop>
+  <HeadingPairs>
+    <vt:vector size="4" baseType="variant">
+      <vt:variant>
+        <vt:lpstr>Theme</vt:lpstr>
+      </vt:variant>
+      <vt:variant>
+        <vt:i4>1</vt:i4>
+      </vt:variant>
+      <vt:variant>
+        <vt:lpstr>Slide Titles</vt:lpstr>
+      </vt:variant>
+      <vt:variant>
+        <vt:i4>0</vt:i4>
+      </vt:variant>
+    </vt:vector>
+  </HeadingPairs>
+  <TitlesOfParts>
+    <vt:vector size="1" baseType="lpstr">
+      <vt:lpstr>Office Theme</vt:lpstr>
+    </vt:vector>
+  </TitlesOfParts>
+  <Manager/>
+  <Company/>
+  <LinksUpToDate>false</LinksUpToDate>
+  <SharedDoc>false</SharedDoc>
+  <HyperlinkBase/>
+  <HyperlinksChanged>false</HyperlinksChanged>
+  <AppVersion>14.0000</AppVersion>
+</Properties>
+</file>
+
+<file path=docProps\core.xml><?xml version="1.0" encoding="utf-8"?>
+<cp:coreProperties xmlns:cp="http://schemas.openxmlformats.org/package/2006/metadata/core-properties" xmlns:dc="http://purl.org/dc/elements/1.1/" xmlns:dcterms="http://purl.org/dc/terms/" xmlns:dcmitype="http://purl.org/dc/dcmitype/" xmlns:xsi="http://www.w3.org/2001/XMLSchema-instance">
+  <dc:title/>
+  <dc:subject/>
+  <dc:creator/>
+  <cp:keywords/>
+  <dc:description>generated using python-pptx</dc:description>
+  <cp:lastModifiedBy>Steve Canny</cp:lastModifiedBy>
+  <cp:revision>1</cp:revision>
+  <dcterms:created xsi:type="dcterms:W3CDTF">2013-01-27T09:14:16Z</dcterms:created>
+  <dcterms:modified xsi:type="dcterms:W3CDTF">2013-01-27T09:15:58Z</dcterms:modified>
+  <cp:category/>
+</cp:coreProperties>
+</file>
+
+<file path=ppt\presProps.xml><?xml version="1.0" encoding="utf-8"?>
+<p:presentationPr xmlns:a="http://schemas.openxmlformats.org/drawingml/2006/main" xmlns:r="http://schemas.openxmlformats.org/officeDocument/2006/relationships" xmlns:p="http://schemas.openxmlformats.org/presentationml/2006/main">
+  <p:extLst>
+    <p:ext uri="{E76CE94A-603C-4142-B9EB-6D1370010A27}">
+      <p14:discardImageEditData xmlns:p14="http://schemas.microsoft.com/office/powerpoint/2010/main" val="0"/>
+    </p:ext>
+    <p:ext uri="{D31A062A-798A-4329-ABDD-BBA856620510}">
+      <p14:defaultImageDpi xmlns:p14="http://schemas.microsoft.com/office/powerpoint/2010/main" val="0"/>
+    </p:ext>
+  </p:extLst>
+</p:presentationPr>
+</file>
+
+<file path=ppt\presentation.xml><?xml version="1.0" encoding="utf-8"?>
 <p:presentation xmlns:a="http://schemas.openxmlformats.org/drawingml/2006/main" xmlns:r="http://schemas.openxmlformats.org/officeDocument/2006/relationships" xmlns:p="http://schemas.openxmlformats.org/presentationml/2006/main" saveSubsetFonts="1" autoCompressPictures="0">
   <p:sldMasterIdLst>
     <p:sldMasterId id="2147483648" r:id="rId1"/>
@@ -16,7 +87,6 @@
     <p:sldId id="264" r:id="rId15"/>
     <p:sldId id="265" r:id="rId16"/>
     <p:sldId id="266" r:id="rId17"/>
-    <p:sldId id="267" r:id="rId18"/>
     <p:sldId id="268" r:id="rId19"/>
   </p:sldIdLst>
   <p:sldSz cx="12191695" cy="6858000" type="screen4x3"/>
@@ -119,7 +189,7 @@
 </p:presentation>
 </file>
 
-<file path=ppt/slideLayouts/slideLayout1.xml><?xml version="1.0" encoding="utf-8"?>
+<file path=ppt\slideLayouts\slideLayout1.xml><?xml version="1.0" encoding="utf-8"?>
 <p:sldLayout xmlns:a="http://schemas.openxmlformats.org/drawingml/2006/main" xmlns:r="http://schemas.openxmlformats.org/officeDocument/2006/relationships" xmlns:p="http://schemas.openxmlformats.org/presentationml/2006/main" type="title" preserve="1">
   <p:cSld name="Title Slide">
     <p:spTree>
@@ -361,7 +431,7 @@
 </p:sldLayout>
 </file>
 
-<file path=ppt/slideLayouts/slideLayout10.xml><?xml version="1.0" encoding="utf-8"?>
+<file path=ppt\slideLayouts\slideLayout10.xml><?xml version="1.0" encoding="utf-8"?>
 <p:sldLayout xmlns:a="http://schemas.openxmlformats.org/drawingml/2006/main" xmlns:r="http://schemas.openxmlformats.org/officeDocument/2006/relationships" xmlns:p="http://schemas.openxmlformats.org/presentationml/2006/main" type="vertTx" preserve="1">
   <p:cSld name="Title and Vertical Text">
     <p:spTree>
@@ -531,7 +601,7 @@
 </p:sldLayout>
 </file>
 
-<file path=ppt/slideLayouts/slideLayout11.xml><?xml version="1.0" encoding="utf-8"?>
+<file path=ppt\slideLayouts\slideLayout11.xml><?xml version="1.0" encoding="utf-8"?>
 <p:sldLayout xmlns:a="http://schemas.openxmlformats.org/drawingml/2006/main" xmlns:r="http://schemas.openxmlformats.org/officeDocument/2006/relationships" xmlns:p="http://schemas.openxmlformats.org/presentationml/2006/main" type="vertTitleAndTx" preserve="1">
   <p:cSld name="Vertical Title and Text">
     <p:spTree>
@@ -711,7 +781,7 @@
 </p:sldLayout>
 </file>
 
-<file path=ppt/slideLayouts/slideLayout2.xml><?xml version="1.0" encoding="utf-8"?>
+<file path=ppt\slideLayouts\slideLayout2.xml><?xml version="1.0" encoding="utf-8"?>
 <p:sldLayout xmlns:a="http://schemas.openxmlformats.org/drawingml/2006/main" xmlns:r="http://schemas.openxmlformats.org/officeDocument/2006/relationships" xmlns:p="http://schemas.openxmlformats.org/presentationml/2006/main" type="obj" preserve="1">
   <p:cSld name="Title and Content">
     <p:spTree>
@@ -881,7 +951,7 @@
 </p:sldLayout>
 </file>
 
-<file path=ppt/slideLayouts/slideLayout3.xml><?xml version="1.0" encoding="utf-8"?>
+<file path=ppt\slideLayouts\slideLayout3.xml><?xml version="1.0" encoding="utf-8"?>
 <p:sldLayout xmlns:a="http://schemas.openxmlformats.org/drawingml/2006/main" xmlns:r="http://schemas.openxmlformats.org/officeDocument/2006/relationships" xmlns:p="http://schemas.openxmlformats.org/presentationml/2006/main" type="secHead" preserve="1">
   <p:cSld name="Section Header">
     <p:spTree>
@@ -1127,7 +1197,7 @@
 </p:sldLayout>
 </file>
 
-<file path=ppt/slideLayouts/slideLayout4.xml><?xml version="1.0" encoding="utf-8"?>
+<file path=ppt\slideLayouts\slideLayout4.xml><?xml version="1.0" encoding="utf-8"?>
 <p:sldLayout xmlns:a="http://schemas.openxmlformats.org/drawingml/2006/main" xmlns:r="http://schemas.openxmlformats.org/officeDocument/2006/relationships" xmlns:p="http://schemas.openxmlformats.org/presentationml/2006/main" type="twoObj" preserve="1">
   <p:cSld name="Two Content">
     <p:spTree>
@@ -1415,7 +1485,7 @@
 </p:sldLayout>
 </file>
 
-<file path=ppt/slideLayouts/slideLayout5.xml><?xml version="1.0" encoding="utf-8"?>
+<file path=ppt\slideLayouts\slideLayout5.xml><?xml version="1.0" encoding="utf-8"?>
 <p:sldLayout xmlns:a="http://schemas.openxmlformats.org/drawingml/2006/main" xmlns:r="http://schemas.openxmlformats.org/officeDocument/2006/relationships" xmlns:p="http://schemas.openxmlformats.org/presentationml/2006/main" type="twoTxTwoObj" preserve="1">
   <p:cSld name="Comparison">
     <p:spTree>
@@ -1837,7 +1907,7 @@
 </p:sldLayout>
 </file>
 
-<file path=ppt/slideLayouts/slideLayout6.xml><?xml version="1.0" encoding="utf-8"?>
+<file path=ppt\slideLayouts\slideLayout6.xml><?xml version="1.0" encoding="utf-8"?>
 <p:sldLayout xmlns:a="http://schemas.openxmlformats.org/drawingml/2006/main" xmlns:r="http://schemas.openxmlformats.org/officeDocument/2006/relationships" xmlns:p="http://schemas.openxmlformats.org/presentationml/2006/main" type="titleOnly" preserve="1">
   <p:cSld name="Title Only">
     <p:spTree>
@@ -1955,7 +2025,7 @@
 </p:sldLayout>
 </file>
 
-<file path=ppt/slideLayouts/slideLayout7.xml><?xml version="1.0" encoding="utf-8"?>
+<file path=ppt\slideLayouts\slideLayout7.xml><?xml version="1.0" encoding="utf-8"?>
 <p:sldLayout xmlns:a="http://schemas.openxmlformats.org/drawingml/2006/main" xmlns:r="http://schemas.openxmlformats.org/officeDocument/2006/relationships" xmlns:p="http://schemas.openxmlformats.org/presentationml/2006/main" type="blank" preserve="1">
   <p:cSld name="Blank">
     <p:spTree>
@@ -2050,7 +2120,7 @@
 </p:sldLayout>
 </file>
 
-<file path=ppt/slideLayouts/slideLayout8.xml><?xml version="1.0" encoding="utf-8"?>
+<file path=ppt\slideLayouts\slideLayout8.xml><?xml version="1.0" encoding="utf-8"?>
 <p:sldLayout xmlns:a="http://schemas.openxmlformats.org/drawingml/2006/main" xmlns:r="http://schemas.openxmlformats.org/officeDocument/2006/relationships" xmlns:p="http://schemas.openxmlformats.org/presentationml/2006/main" type="objTx" preserve="1">
   <p:cSld name="Content with Caption">
     <p:spTree>
@@ -2327,7 +2397,7 @@
 </p:sldLayout>
 </file>
 
-<file path=ppt/slideLayouts/slideLayout9.xml><?xml version="1.0" encoding="utf-8"?>
+<file path=ppt\slideLayouts\slideLayout9.xml><?xml version="1.0" encoding="utf-8"?>
 <p:sldLayout xmlns:a="http://schemas.openxmlformats.org/drawingml/2006/main" xmlns:r="http://schemas.openxmlformats.org/officeDocument/2006/relationships" xmlns:p="http://schemas.openxmlformats.org/presentationml/2006/main" type="picTx" preserve="1">
   <p:cSld name="Picture with Caption">
     <p:spTree>
@@ -2580,7 +2650,7 @@
 </p:sldLayout>
 </file>
 
-<file path=ppt/slideMasters/slideMaster1.xml><?xml version="1.0" encoding="utf-8"?>
+<file path=ppt\slideMasters\slideMaster1.xml><?xml version="1.0" encoding="utf-8"?>
 <p:sldMaster xmlns:a="http://schemas.openxmlformats.org/drawingml/2006/main" xmlns:r="http://schemas.openxmlformats.org/officeDocument/2006/relationships" xmlns:p="http://schemas.openxmlformats.org/presentationml/2006/main">
   <p:cSld>
     <p:bg>
@@ -3090,7 +3160,7 @@
 </p:sldMaster>
 </file>
 
-<file path=ppt/slides/slide1.xml><?xml version="1.0" encoding="utf-8"?>
+<file path=ppt\slides\slide1.xml><?xml version="1.0" encoding="utf-8"?>
 <p:sld xmlns:a="http://schemas.openxmlformats.org/drawingml/2006/main" xmlns:p="http://schemas.openxmlformats.org/presentationml/2006/main" xmlns:r="http://schemas.openxmlformats.org/officeDocument/2006/relationships">
   <p:cSld>
     <p:spTree>
@@ -3144,41 +3214,30 @@
           </a:p>
         </p:txBody>
       </p:sp>
-      <p:sp>
-        <p:nvSpPr>
-          <p:cNvPr id="3" name="TextBox 2"/>
-          <p:cNvSpPr txBox="1"/>
-          <p:nvPr/>
-        </p:nvSpPr>
+      <p:pic>
+        <p:nvPicPr>
+          <p:cNvPr id="3" name="Capgemini Logo" descr="Capgemini logo"/>
+          <p:cNvPicPr>
+            <a:picLocks noChangeAspect="1"/>
+          </p:cNvPicPr>
+          <p:nvPr/>
+        </p:nvPicPr>
+        <p:blipFill>
+          <a:blip r:embed="rId2"/>
+          <a:stretch>
+            <a:fillRect/>
+          </a:stretch>
+        </p:blipFill>
         <p:spPr>
           <a:xfrm>
             <a:off x="548640" y="457200"/>
-            <a:ext cx="2194560" cy="502920"/>
-          </a:xfrm>
-          <a:prstGeom prst="rect">
-            <a:avLst/>
-          </a:prstGeom>
-          <a:noFill/>
-        </p:spPr>
-        <p:txBody>
-          <a:bodyPr wrap="none">
-            <a:spAutoFit/>
-          </a:bodyPr>
-          <a:lstStyle/>
-          <a:p>
-            <a:pPr algn="l"/>
-            <a:r>
-              <a:rPr sz="2400" b="1">
-                <a:solidFill>
-                  <a:srgbClr val="FFFFFF"/>
-                </a:solidFill>
-                <a:latin typeface="Georgia"/>
-              </a:rPr>
-              <a:t>Capgemini</a:t>
-            </a:r>
-          </a:p>
-        </p:txBody>
-      </p:sp>
+            <a:ext cx="1538850" cy="502920"/>
+          </a:xfrm>
+          <a:prstGeom prst="rect">
+            <a:avLst/>
+          </a:prstGeom>
+        </p:spPr>
+      </p:pic>
       <p:sp>
         <p:nvSpPr>
           <p:cNvPr id="4" name="Rectangle 3"/>
@@ -3187,8 +3246,8 @@
         </p:nvSpPr>
         <p:spPr>
           <a:xfrm>
-            <a:off x="548640" y="914400"/>
-            <a:ext cx="1051560" cy="40640"/>
+            <a:off x="548640" y="980120"/>
+            <a:ext cx="1538850" cy="40640"/>
           </a:xfrm>
           <a:prstGeom prst="rect">
             <a:avLst/>
@@ -3294,7 +3353,7 @@
               </a:lnSpc>
             </a:pPr>
             <a:r>
-              <a:rPr sz="4400" b="1" i="0">
+              <a:rPr sz="3600" b="1" i="0">
                 <a:solidFill>
                   <a:srgbClr val="FFFFFF"/>
                 </a:solidFill>
@@ -3490,7 +3549,7 @@
 </p:sld>
 </file>
 
-<file path=ppt/slides/slide10.xml><?xml version="1.0" encoding="utf-8"?>
+<file path=ppt\slides\slide10.xml><?xml version="1.0" encoding="utf-8"?>
 <p:sld xmlns:a="http://schemas.openxmlformats.org/drawingml/2006/main" xmlns:p="http://schemas.openxmlformats.org/presentationml/2006/main" xmlns:r="http://schemas.openxmlformats.org/officeDocument/2006/relationships">
   <p:cSld>
     <p:spTree>
@@ -4288,7 +4347,7 @@
 </p:sld>
 </file>
 
-<file path=ppt/slides/slide11.xml><?xml version="1.0" encoding="utf-8"?>
+<file path=ppt\slides\slide11.xml><?xml version="1.0" encoding="utf-8"?>
 <p:sld xmlns:a="http://schemas.openxmlformats.org/drawingml/2006/main" xmlns:p="http://schemas.openxmlformats.org/presentationml/2006/main" xmlns:r="http://schemas.openxmlformats.org/officeDocument/2006/relationships">
   <p:cSld>
     <p:spTree>
@@ -4787,7 +4846,7 @@
 </p:sld>
 </file>
 
-<file path=ppt/slides/slide12.xml><?xml version="1.0" encoding="utf-8"?>
+<file path=ppt\slides\slide13.xml><?xml version="1.0" encoding="utf-8"?>
 <p:sld xmlns:a="http://schemas.openxmlformats.org/drawingml/2006/main" xmlns:p="http://schemas.openxmlformats.org/presentationml/2006/main" xmlns:r="http://schemas.openxmlformats.org/officeDocument/2006/relationships">
   <p:cSld>
     <p:spTree>
@@ -4841,63 +4900,46 @@
           </a:p>
         </p:txBody>
       </p:sp>
-      <p:sp>
-        <p:nvSpPr>
-          <p:cNvPr id="3" name="TextBox 2"/>
-          <p:cNvSpPr txBox="1"/>
-          <p:nvPr/>
-        </p:nvSpPr>
-        <p:spPr>
-          <a:xfrm>
-            <a:off x="548640" y="411480"/>
-            <a:ext cx="9144000" cy="640080"/>
-          </a:xfrm>
-          <a:prstGeom prst="rect">
-            <a:avLst/>
-          </a:prstGeom>
-          <a:noFill/>
-        </p:spPr>
-        <p:txBody>
-          <a:bodyPr wrap="square" anchor="t">
-            <a:spAutoFit/>
-          </a:bodyPr>
-          <a:lstStyle/>
-          <a:p>
-            <a:pPr algn="l">
-              <a:lnSpc>
-                <a:spcPct val="100000"/>
-              </a:lnSpc>
-            </a:pPr>
-            <a:r>
-              <a:rPr sz="3000" b="1" i="0">
-                <a:solidFill>
-                  <a:srgbClr val="FFFFFF"/>
-                </a:solidFill>
-                <a:latin typeface="Georgia"/>
-              </a:rPr>
-              <a:t>Business Value &amp; Judging Criteria</a:t>
-            </a:r>
-          </a:p>
-        </p:txBody>
-      </p:sp>
-      <p:sp>
-        <p:nvSpPr>
-          <p:cNvPr id="4" name="Rounded Rectangle 3"/>
+      <p:pic>
+        <p:nvPicPr>
+          <p:cNvPr id="3" name="Capgemini Logo" descr="Capgemini logo"/>
+          <p:cNvPicPr>
+            <a:picLocks noChangeAspect="1"/>
+          </p:cNvPicPr>
+          <p:nvPr/>
+        </p:nvPicPr>
+        <p:blipFill>
+          <a:blip r:embed="rId2"/>
+          <a:stretch>
+            <a:fillRect/>
+          </a:stretch>
+        </p:blipFill>
+        <p:spPr>
+          <a:xfrm>
+            <a:off x="548640" y="457200"/>
+            <a:ext cx="1538850" cy="502920"/>
+          </a:xfrm>
+          <a:prstGeom prst="rect">
+            <a:avLst/>
+          </a:prstGeom>
+        </p:spPr>
+      </p:pic>
+      <p:sp>
+        <p:nvSpPr>
+          <p:cNvPr id="4" name="Rectangle 3"/>
           <p:cNvSpPr/>
           <p:nvPr/>
         </p:nvSpPr>
         <p:spPr>
           <a:xfrm>
-            <a:off x="731520" y="1371600"/>
-            <a:ext cx="1371600" cy="1051560"/>
-          </a:xfrm>
-          <a:prstGeom prst="roundRect">
-            <a:avLst>
-              <a:gd name="adj" fmla="val 12000"/>
-            </a:avLst>
+            <a:off x="548640" y="980120"/>
+            <a:ext cx="1538850" cy="40640"/>
+          </a:xfrm>
+          <a:prstGeom prst="rect">
+            <a:avLst/>
           </a:prstGeom>
           <a:solidFill>
-            <a:srgbClr val="29B5E8"/>
+            <a:srgbClr val="0070AD"/>
           </a:solidFill>
           <a:ln>
             <a:noFill/>
@@ -4934,8 +4976,51 @@
         </p:nvSpPr>
         <p:spPr>
           <a:xfrm>
-            <a:off x="731520" y="1627632"/>
-            <a:ext cx="1371600" cy="548640"/>
+            <a:off x="9418320" y="457200"/>
+            <a:ext cx="2377440" cy="502920"/>
+          </a:xfrm>
+          <a:prstGeom prst="rect">
+            <a:avLst/>
+          </a:prstGeom>
+          <a:noFill/>
+        </p:spPr>
+        <p:txBody>
+          <a:bodyPr wrap="none">
+            <a:spAutoFit/>
+          </a:bodyPr>
+          <a:lstStyle/>
+          <a:p>
+            <a:pPr algn="l"/>
+            <a:r>
+              <a:rPr sz="2400" b="1">
+                <a:solidFill>
+                  <a:srgbClr val="29B5E8"/>
+                </a:solidFill>
+              </a:rPr>
+              <a:t>❄ </a:t>
+            </a:r>
+            <a:r>
+              <a:rPr sz="2400" b="1">
+                <a:solidFill>
+                  <a:srgbClr val="FFFFFF"/>
+                </a:solidFill>
+                <a:latin typeface="Calibri"/>
+              </a:rPr>
+              <a:t>Snowflake</a:t>
+            </a:r>
+          </a:p>
+        </p:txBody>
+      </p:sp>
+      <p:sp>
+        <p:nvSpPr>
+          <p:cNvPr id="6" name="TextBox 5"/>
+          <p:cNvSpPr txBox="1"/>
+          <p:nvPr/>
+        </p:nvSpPr>
+        <p:spPr>
+          <a:xfrm>
+            <a:off x="914400" y="2560320"/>
+            <a:ext cx="10332720" cy="914400"/>
           </a:xfrm>
           <a:prstGeom prst="rect">
             <a:avLst/>
@@ -4954,129 +5039,33 @@
               </a:lnSpc>
             </a:pPr>
             <a:r>
-              <a:rPr sz="2400" b="1" i="0">
-                <a:solidFill>
-                  <a:srgbClr val="0B1F3A"/>
-                </a:solidFill>
-                <a:latin typeface="Calibri"/>
-              </a:rPr>
-              <a:t>30%</a:t>
-            </a:r>
-          </a:p>
-        </p:txBody>
-      </p:sp>
-      <p:sp>
-        <p:nvSpPr>
-          <p:cNvPr id="6" name="TextBox 5"/>
-          <p:cNvSpPr txBox="1"/>
-          <p:nvPr/>
-        </p:nvSpPr>
-        <p:spPr>
-          <a:xfrm>
-            <a:off x="2331720" y="1353312"/>
-            <a:ext cx="2743200" cy="365760"/>
-          </a:xfrm>
-          <a:prstGeom prst="rect">
-            <a:avLst/>
-          </a:prstGeom>
-          <a:noFill/>
-        </p:spPr>
-        <p:txBody>
-          <a:bodyPr wrap="square" anchor="t">
-            <a:spAutoFit/>
-          </a:bodyPr>
-          <a:lstStyle/>
-          <a:p>
-            <a:pPr algn="l">
-              <a:lnSpc>
-                <a:spcPct val="100000"/>
-              </a:lnSpc>
-            </a:pPr>
-            <a:r>
-              <a:rPr sz="1700" b="1" i="0">
+              <a:rPr sz="4800" b="1" i="0">
                 <a:solidFill>
                   <a:srgbClr val="FFFFFF"/>
                 </a:solidFill>
-                <a:latin typeface="Calibri"/>
-              </a:rPr>
-              <a:t>Innovation</a:t>
-            </a:r>
-          </a:p>
-        </p:txBody>
-      </p:sp>
-      <p:sp>
-        <p:nvSpPr>
-          <p:cNvPr id="7" name="TextBox 6"/>
-          <p:cNvSpPr txBox="1"/>
-          <p:nvPr/>
-        </p:nvSpPr>
-        <p:spPr>
-          <a:xfrm>
-            <a:off x="2331720" y="1737360"/>
-            <a:ext cx="8961120" cy="640080"/>
-          </a:xfrm>
-          <a:prstGeom prst="rect">
-            <a:avLst/>
-          </a:prstGeom>
-          <a:noFill/>
-        </p:spPr>
-        <p:txBody>
-          <a:bodyPr wrap="square" anchor="t">
-            <a:spAutoFit/>
-          </a:bodyPr>
-          <a:lstStyle/>
-          <a:p>
-            <a:pPr algn="l">
-              <a:lnSpc>
-                <a:spcPct val="125000"/>
-              </a:lnSpc>
-            </a:pPr>
-            <a:r>
-              <a:rPr sz="1300" b="0" i="0">
-                <a:solidFill>
-                  <a:srgbClr val="C7D6E8"/>
-                </a:solidFill>
-                <a:latin typeface="Calibri"/>
-              </a:rPr>
-              <a:t>One governed agent spanning structured, unstructured, and</a:t>
-            </a:r>
-          </a:p>
-          <a:p>
-            <a:pPr algn="l">
-              <a:lnSpc>
-                <a:spcPct val="125000"/>
-              </a:lnSpc>
-            </a:pPr>
-            <a:r>
-              <a:rPr sz="1300" b="0" i="0">
-                <a:solidFill>
-                  <a:srgbClr val="C7D6E8"/>
-                </a:solidFill>
-                <a:latin typeface="Calibri"/>
-              </a:rPr>
-              <a:t>meta (data-quality) data — not three disconnected demos.</a:t>
-            </a:r>
-          </a:p>
-        </p:txBody>
-      </p:sp>
-      <p:sp>
-        <p:nvSpPr>
-          <p:cNvPr id="8" name="Rounded Rectangle 7"/>
+                <a:latin typeface="Georgia"/>
+              </a:rPr>
+              <a:t>Thank You</a:t>
+            </a:r>
+          </a:p>
+        </p:txBody>
+      </p:sp>
+      <p:sp>
+        <p:nvSpPr>
+          <p:cNvPr id="7" name="Rectangle 6"/>
           <p:cNvSpPr/>
           <p:nvPr/>
         </p:nvSpPr>
         <p:spPr>
           <a:xfrm>
-            <a:off x="731520" y="2606040"/>
-            <a:ext cx="1371600" cy="1051560"/>
-          </a:xfrm>
-          <a:prstGeom prst="roundRect">
-            <a:avLst>
-              <a:gd name="adj" fmla="val 12000"/>
-            </a:avLst>
+            <a:off x="5394960" y="3520440"/>
+            <a:ext cx="1371600" cy="31750"/>
+          </a:xfrm>
+          <a:prstGeom prst="rect">
+            <a:avLst/>
           </a:prstGeom>
           <a:solidFill>
-            <a:srgbClr val="29B5E8"/>
+            <a:srgbClr val="E8A82A"/>
           </a:solidFill>
           <a:ln>
             <a:noFill/>
@@ -5107,14 +5096,14 @@
       </p:sp>
       <p:sp>
         <p:nvSpPr>
-          <p:cNvPr id="9" name="TextBox 8"/>
+          <p:cNvPr id="8" name="TextBox 7"/>
           <p:cNvSpPr txBox="1"/>
           <p:nvPr/>
         </p:nvSpPr>
         <p:spPr>
           <a:xfrm>
-            <a:off x="731520" y="2862072"/>
-            <a:ext cx="1371600" cy="548640"/>
+            <a:off x="914400" y="3794760"/>
+            <a:ext cx="10332720" cy="457200"/>
           </a:xfrm>
           <a:prstGeom prst="rect">
             <a:avLst/>
@@ -5133,27 +5122,27 @@
               </a:lnSpc>
             </a:pPr>
             <a:r>
-              <a:rPr sz="2400" b="1" i="0">
-                <a:solidFill>
-                  <a:srgbClr val="0B1F3A"/>
-                </a:solidFill>
-                <a:latin typeface="Calibri"/>
-              </a:rPr>
-              <a:t>25%</a:t>
-            </a:r>
-          </a:p>
-        </p:txBody>
-      </p:sp>
-      <p:sp>
-        <p:nvSpPr>
-          <p:cNvPr id="10" name="TextBox 9"/>
+              <a:rPr sz="2000" b="0" i="0">
+                <a:solidFill>
+                  <a:srgbClr val="29B5E8"/>
+                </a:solidFill>
+                <a:latin typeface="Calibri"/>
+              </a:rPr>
+              <a:t>Questions?</a:t>
+            </a:r>
+          </a:p>
+        </p:txBody>
+      </p:sp>
+      <p:sp>
+        <p:nvSpPr>
+          <p:cNvPr id="9" name="TextBox 8"/>
           <p:cNvSpPr txBox="1"/>
           <p:nvPr/>
         </p:nvSpPr>
         <p:spPr>
           <a:xfrm>
-            <a:off x="2331720" y="2587752"/>
-            <a:ext cx="2743200" cy="365760"/>
+            <a:off x="914400" y="4846320"/>
+            <a:ext cx="10332720" cy="457200"/>
           </a:xfrm>
           <a:prstGeom prst="rect">
             <a:avLst/>
@@ -5166,7 +5155,7 @@
           </a:bodyPr>
           <a:lstStyle/>
           <a:p>
-            <a:pPr algn="l">
+            <a:pPr algn="ctr">
               <a:lnSpc>
                 <a:spcPct val="100000"/>
               </a:lnSpc>
@@ -5178,21 +5167,21 @@
                 </a:solidFill>
                 <a:latin typeface="Calibri"/>
               </a:rPr>
-              <a:t>Technical Excellence</a:t>
-            </a:r>
-          </a:p>
-        </p:txBody>
-      </p:sp>
-      <p:sp>
-        <p:nvSpPr>
-          <p:cNvPr id="11" name="TextBox 10"/>
+              <a:t>Kiran Kumar Rajoju   •   Raza Hussain</a:t>
+            </a:r>
+          </a:p>
+        </p:txBody>
+      </p:sp>
+      <p:sp>
+        <p:nvSpPr>
+          <p:cNvPr id="10" name="TextBox 9"/>
           <p:cNvSpPr txBox="1"/>
           <p:nvPr/>
         </p:nvSpPr>
         <p:spPr>
           <a:xfrm>
-            <a:off x="2331720" y="2971800"/>
-            <a:ext cx="8961120" cy="640080"/>
+            <a:off x="914400" y="5349240"/>
+            <a:ext cx="10332720" cy="365760"/>
           </a:xfrm>
           <a:prstGeom prst="rect">
             <a:avLst/>
@@ -5205,9 +5194,9 @@
           </a:bodyPr>
           <a:lstStyle/>
           <a:p>
-            <a:pPr algn="l">
-              <a:lnSpc>
-                <a:spcPct val="125000"/>
+            <a:pPr algn="ctr">
+              <a:lnSpc>
+                <a:spcPct val="100000"/>
               </a:lnSpc>
             </a:pPr>
             <a:r>
@@ -5217,459 +5206,7 @@
                 </a:solidFill>
                 <a:latin typeface="Calibri"/>
               </a:rPr>
-              <a:t>Native SEMANTIC VIEW, CORTEX SEARCH SERVICE, and AGENT</a:t>
-            </a:r>
-          </a:p>
-          <a:p>
-            <a:pPr algn="l">
-              <a:lnSpc>
-                <a:spcPct val="125000"/>
-              </a:lnSpc>
-            </a:pPr>
-            <a:r>
-              <a:rPr sz="1300" b="0" i="0">
-                <a:solidFill>
-                  <a:srgbClr val="C7D6E8"/>
-                </a:solidFill>
-                <a:latin typeface="Calibri"/>
-              </a:rPr>
-              <a:t>objects — no hand-rolled RAG or orchestration code.</a:t>
-            </a:r>
-          </a:p>
-        </p:txBody>
-      </p:sp>
-      <p:sp>
-        <p:nvSpPr>
-          <p:cNvPr id="12" name="Rounded Rectangle 11"/>
-          <p:cNvSpPr/>
-          <p:nvPr/>
-        </p:nvSpPr>
-        <p:spPr>
-          <a:xfrm>
-            <a:off x="731520" y="3840480"/>
-            <a:ext cx="1371600" cy="1051560"/>
-          </a:xfrm>
-          <a:prstGeom prst="roundRect">
-            <a:avLst>
-              <a:gd name="adj" fmla="val 12000"/>
-            </a:avLst>
-          </a:prstGeom>
-          <a:solidFill>
-            <a:srgbClr val="29B5E8"/>
-          </a:solidFill>
-          <a:ln>
-            <a:noFill/>
-          </a:ln>
-          <a:effectLst/>
-        </p:spPr>
-        <p:style>
-          <a:lnRef idx="1">
-            <a:schemeClr val="accent1"/>
-          </a:lnRef>
-          <a:fillRef idx="3">
-            <a:schemeClr val="accent1"/>
-          </a:fillRef>
-          <a:effectRef idx="2">
-            <a:schemeClr val="accent1"/>
-          </a:effectRef>
-          <a:fontRef idx="minor">
-            <a:schemeClr val="lt1"/>
-          </a:fontRef>
-        </p:style>
-        <p:txBody>
-          <a:bodyPr rtlCol="0" anchor="ctr"/>
-          <a:lstStyle/>
-          <a:p>
-            <a:pPr algn="ctr"/>
-          </a:p>
-        </p:txBody>
-      </p:sp>
-      <p:sp>
-        <p:nvSpPr>
-          <p:cNvPr id="13" name="TextBox 12"/>
-          <p:cNvSpPr txBox="1"/>
-          <p:nvPr/>
-        </p:nvSpPr>
-        <p:spPr>
-          <a:xfrm>
-            <a:off x="731520" y="4096512"/>
-            <a:ext cx="1371600" cy="548640"/>
-          </a:xfrm>
-          <a:prstGeom prst="rect">
-            <a:avLst/>
-          </a:prstGeom>
-          <a:noFill/>
-        </p:spPr>
-        <p:txBody>
-          <a:bodyPr wrap="square" anchor="t">
-            <a:spAutoFit/>
-          </a:bodyPr>
-          <a:lstStyle/>
-          <a:p>
-            <a:pPr algn="ctr">
-              <a:lnSpc>
-                <a:spcPct val="100000"/>
-              </a:lnSpc>
-            </a:pPr>
-            <a:r>
-              <a:rPr sz="2400" b="1" i="0">
-                <a:solidFill>
-                  <a:srgbClr val="0B1F3A"/>
-                </a:solidFill>
-                <a:latin typeface="Calibri"/>
-              </a:rPr>
-              <a:t>25%</a:t>
-            </a:r>
-          </a:p>
-        </p:txBody>
-      </p:sp>
-      <p:sp>
-        <p:nvSpPr>
-          <p:cNvPr id="14" name="TextBox 13"/>
-          <p:cNvSpPr txBox="1"/>
-          <p:nvPr/>
-        </p:nvSpPr>
-        <p:spPr>
-          <a:xfrm>
-            <a:off x="2331720" y="3822192"/>
-            <a:ext cx="2743200" cy="365760"/>
-          </a:xfrm>
-          <a:prstGeom prst="rect">
-            <a:avLst/>
-          </a:prstGeom>
-          <a:noFill/>
-        </p:spPr>
-        <p:txBody>
-          <a:bodyPr wrap="square" anchor="t">
-            <a:spAutoFit/>
-          </a:bodyPr>
-          <a:lstStyle/>
-          <a:p>
-            <a:pPr algn="l">
-              <a:lnSpc>
-                <a:spcPct val="100000"/>
-              </a:lnSpc>
-            </a:pPr>
-            <a:r>
-              <a:rPr sz="1700" b="1" i="0">
-                <a:solidFill>
-                  <a:srgbClr val="FFFFFF"/>
-                </a:solidFill>
-                <a:latin typeface="Calibri"/>
-              </a:rPr>
-              <a:t>Business Value</a:t>
-            </a:r>
-          </a:p>
-        </p:txBody>
-      </p:sp>
-      <p:sp>
-        <p:nvSpPr>
-          <p:cNvPr id="15" name="TextBox 14"/>
-          <p:cNvSpPr txBox="1"/>
-          <p:nvPr/>
-        </p:nvSpPr>
-        <p:spPr>
-          <a:xfrm>
-            <a:off x="2331720" y="4206240"/>
-            <a:ext cx="8961120" cy="640080"/>
-          </a:xfrm>
-          <a:prstGeom prst="rect">
-            <a:avLst/>
-          </a:prstGeom>
-          <a:noFill/>
-        </p:spPr>
-        <p:txBody>
-          <a:bodyPr wrap="square" anchor="t">
-            <a:spAutoFit/>
-          </a:bodyPr>
-          <a:lstStyle/>
-          <a:p>
-            <a:pPr algn="l">
-              <a:lnSpc>
-                <a:spcPct val="125000"/>
-              </a:lnSpc>
-            </a:pPr>
-            <a:r>
-              <a:rPr sz="1300" b="0" i="0">
-                <a:solidFill>
-                  <a:srgbClr val="C7D6E8"/>
-                </a:solidFill>
-                <a:latin typeface="Calibri"/>
-              </a:rPr>
-              <a:t>Collapses three specialist workflows (SQL analyst, document</a:t>
-            </a:r>
-          </a:p>
-          <a:p>
-            <a:pPr algn="l">
-              <a:lnSpc>
-                <a:spcPct val="125000"/>
-              </a:lnSpc>
-            </a:pPr>
-            <a:r>
-              <a:rPr sz="1300" b="0" i="0">
-                <a:solidFill>
-                  <a:srgbClr val="C7D6E8"/>
-                </a:solidFill>
-                <a:latin typeface="Calibri"/>
-              </a:rPr>
-              <a:t>reviewer, DQ engineer) into one self-service chat experience.</a:t>
-            </a:r>
-          </a:p>
-        </p:txBody>
-      </p:sp>
-      <p:sp>
-        <p:nvSpPr>
-          <p:cNvPr id="16" name="Rounded Rectangle 15"/>
-          <p:cNvSpPr/>
-          <p:nvPr/>
-        </p:nvSpPr>
-        <p:spPr>
-          <a:xfrm>
-            <a:off x="731520" y="5074920"/>
-            <a:ext cx="1371600" cy="1051560"/>
-          </a:xfrm>
-          <a:prstGeom prst="roundRect">
-            <a:avLst>
-              <a:gd name="adj" fmla="val 12000"/>
-            </a:avLst>
-          </a:prstGeom>
-          <a:solidFill>
-            <a:srgbClr val="29B5E8"/>
-          </a:solidFill>
-          <a:ln>
-            <a:noFill/>
-          </a:ln>
-          <a:effectLst/>
-        </p:spPr>
-        <p:style>
-          <a:lnRef idx="1">
-            <a:schemeClr val="accent1"/>
-          </a:lnRef>
-          <a:fillRef idx="3">
-            <a:schemeClr val="accent1"/>
-          </a:fillRef>
-          <a:effectRef idx="2">
-            <a:schemeClr val="accent1"/>
-          </a:effectRef>
-          <a:fontRef idx="minor">
-            <a:schemeClr val="lt1"/>
-          </a:fontRef>
-        </p:style>
-        <p:txBody>
-          <a:bodyPr rtlCol="0" anchor="ctr"/>
-          <a:lstStyle/>
-          <a:p>
-            <a:pPr algn="ctr"/>
-          </a:p>
-        </p:txBody>
-      </p:sp>
-      <p:sp>
-        <p:nvSpPr>
-          <p:cNvPr id="17" name="TextBox 16"/>
-          <p:cNvSpPr txBox="1"/>
-          <p:nvPr/>
-        </p:nvSpPr>
-        <p:spPr>
-          <a:xfrm>
-            <a:off x="731520" y="5330952"/>
-            <a:ext cx="1371600" cy="548640"/>
-          </a:xfrm>
-          <a:prstGeom prst="rect">
-            <a:avLst/>
-          </a:prstGeom>
-          <a:noFill/>
-        </p:spPr>
-        <p:txBody>
-          <a:bodyPr wrap="square" anchor="t">
-            <a:spAutoFit/>
-          </a:bodyPr>
-          <a:lstStyle/>
-          <a:p>
-            <a:pPr algn="ctr">
-              <a:lnSpc>
-                <a:spcPct val="100000"/>
-              </a:lnSpc>
-            </a:pPr>
-            <a:r>
-              <a:rPr sz="2400" b="1" i="0">
-                <a:solidFill>
-                  <a:srgbClr val="0B1F3A"/>
-                </a:solidFill>
-                <a:latin typeface="Calibri"/>
-              </a:rPr>
-              <a:t>20%</a:t>
-            </a:r>
-          </a:p>
-        </p:txBody>
-      </p:sp>
-      <p:sp>
-        <p:nvSpPr>
-          <p:cNvPr id="18" name="TextBox 17"/>
-          <p:cNvSpPr txBox="1"/>
-          <p:nvPr/>
-        </p:nvSpPr>
-        <p:spPr>
-          <a:xfrm>
-            <a:off x="2331720" y="5056632"/>
-            <a:ext cx="2743200" cy="365760"/>
-          </a:xfrm>
-          <a:prstGeom prst="rect">
-            <a:avLst/>
-          </a:prstGeom>
-          <a:noFill/>
-        </p:spPr>
-        <p:txBody>
-          <a:bodyPr wrap="square" anchor="t">
-            <a:spAutoFit/>
-          </a:bodyPr>
-          <a:lstStyle/>
-          <a:p>
-            <a:pPr algn="l">
-              <a:lnSpc>
-                <a:spcPct val="100000"/>
-              </a:lnSpc>
-            </a:pPr>
-            <a:r>
-              <a:rPr sz="1700" b="1" i="0">
-                <a:solidFill>
-                  <a:srgbClr val="FFFFFF"/>
-                </a:solidFill>
-                <a:latin typeface="Calibri"/>
-              </a:rPr>
-              <a:t>User Experience</a:t>
-            </a:r>
-          </a:p>
-        </p:txBody>
-      </p:sp>
-      <p:sp>
-        <p:nvSpPr>
-          <p:cNvPr id="19" name="TextBox 18"/>
-          <p:cNvSpPr txBox="1"/>
-          <p:nvPr/>
-        </p:nvSpPr>
-        <p:spPr>
-          <a:xfrm>
-            <a:off x="2331720" y="5440680"/>
-            <a:ext cx="8961120" cy="640080"/>
-          </a:xfrm>
-          <a:prstGeom prst="rect">
-            <a:avLst/>
-          </a:prstGeom>
-          <a:noFill/>
-        </p:spPr>
-        <p:txBody>
-          <a:bodyPr wrap="square" anchor="t">
-            <a:spAutoFit/>
-          </a:bodyPr>
-          <a:lstStyle/>
-          <a:p>
-            <a:pPr algn="l">
-              <a:lnSpc>
-                <a:spcPct val="125000"/>
-              </a:lnSpc>
-            </a:pPr>
-            <a:r>
-              <a:rPr sz="1300" b="0" i="0">
-                <a:solidFill>
-                  <a:srgbClr val="C7D6E8"/>
-                </a:solidFill>
-                <a:latin typeface="Calibri"/>
-              </a:rPr>
-              <a:t>One chat box; every answer is explainable — SQL shown,</a:t>
-            </a:r>
-          </a:p>
-          <a:p>
-            <a:pPr algn="l">
-              <a:lnSpc>
-                <a:spcPct val="125000"/>
-              </a:lnSpc>
-            </a:pPr>
-            <a:r>
-              <a:rPr sz="1300" b="0" i="0">
-                <a:solidFill>
-                  <a:srgbClr val="C7D6E8"/>
-                </a:solidFill>
-                <a:latin typeface="Calibri"/>
-              </a:rPr>
-              <a:t>sources cited — so business users can trust and verify it.</a:t>
-            </a:r>
-          </a:p>
-        </p:txBody>
-      </p:sp>
-      <p:sp>
-        <p:nvSpPr>
-          <p:cNvPr id="20" name="TextBox 19"/>
-          <p:cNvSpPr txBox="1"/>
-          <p:nvPr/>
-        </p:nvSpPr>
-        <p:spPr>
-          <a:xfrm>
-            <a:off x="457200" y="6473952"/>
-            <a:ext cx="5486400" cy="320040"/>
-          </a:xfrm>
-          <a:prstGeom prst="rect">
-            <a:avLst/>
-          </a:prstGeom>
-          <a:noFill/>
-        </p:spPr>
-        <p:txBody>
-          <a:bodyPr wrap="square" anchor="t">
-            <a:spAutoFit/>
-          </a:bodyPr>
-          <a:lstStyle/>
-          <a:p>
-            <a:pPr algn="l">
-              <a:lnSpc>
-                <a:spcPct val="100000"/>
-              </a:lnSpc>
-            </a:pPr>
-            <a:r>
-              <a:rPr sz="900" b="0" i="1">
-                <a:solidFill>
-                  <a:srgbClr val="FFFFFF"/>
-                </a:solidFill>
-                <a:latin typeface="Calibri"/>
-              </a:rPr>
-              <a:t>Unified Enterprise AI Agents Platform  |  Capgemini x Snowflake Hackathon</a:t>
-            </a:r>
-          </a:p>
-        </p:txBody>
-      </p:sp>
-      <p:sp>
-        <p:nvSpPr>
-          <p:cNvPr id="21" name="TextBox 20"/>
-          <p:cNvSpPr txBox="1"/>
-          <p:nvPr/>
-        </p:nvSpPr>
-        <p:spPr>
-          <a:xfrm>
-            <a:off x="11247120" y="6473952"/>
-            <a:ext cx="731520" cy="320040"/>
-          </a:xfrm>
-          <a:prstGeom prst="rect">
-            <a:avLst/>
-          </a:prstGeom>
-          <a:noFill/>
-        </p:spPr>
-        <p:txBody>
-          <a:bodyPr wrap="square" anchor="t">
-            <a:spAutoFit/>
-          </a:bodyPr>
-          <a:lstStyle/>
-          <a:p>
-            <a:pPr algn="r">
-              <a:lnSpc>
-                <a:spcPct val="100000"/>
-              </a:lnSpc>
-            </a:pPr>
-            <a:r>
-              <a:rPr sz="900" b="0" i="0">
-                <a:solidFill>
-                  <a:srgbClr val="FFFFFF"/>
-                </a:solidFill>
-                <a:latin typeface="Calibri"/>
-              </a:rPr>
-              <a:t>12</a:t>
+              <a:t>github.com/kirangithub9/Insurance_AI_Hub</a:t>
             </a:r>
           </a:p>
         </p:txBody>
@@ -5682,7 +5219,7 @@
 </p:sld>
 </file>
 
-<file path=ppt/slides/slide13.xml><?xml version="1.0" encoding="utf-8"?>
+<file path=ppt\slides\slide2.xml><?xml version="1.0" encoding="utf-8"?>
 <p:sld xmlns:a="http://schemas.openxmlformats.org/drawingml/2006/main" xmlns:p="http://schemas.openxmlformats.org/presentationml/2006/main" xmlns:r="http://schemas.openxmlformats.org/officeDocument/2006/relationships">
   <p:cSld>
     <p:spTree>
@@ -5707,6 +5244,50 @@
             <a:avLst/>
           </a:prstGeom>
           <a:solidFill>
+            <a:srgbClr val="FFFFFF"/>
+          </a:solidFill>
+          <a:ln>
+            <a:noFill/>
+          </a:ln>
+          <a:effectLst/>
+        </p:spPr>
+        <p:style>
+          <a:lnRef idx="1">
+            <a:schemeClr val="accent1"/>
+          </a:lnRef>
+          <a:fillRef idx="3">
+            <a:schemeClr val="accent1"/>
+          </a:fillRef>
+          <a:effectRef idx="2">
+            <a:schemeClr val="accent1"/>
+          </a:effectRef>
+          <a:fontRef idx="minor">
+            <a:schemeClr val="lt1"/>
+          </a:fontRef>
+        </p:style>
+        <p:txBody>
+          <a:bodyPr rtlCol="0" anchor="ctr"/>
+          <a:lstStyle/>
+          <a:p>
+            <a:pPr algn="ctr"/>
+          </a:p>
+        </p:txBody>
+      </p:sp>
+      <p:sp>
+        <p:nvSpPr>
+          <p:cNvPr id="3" name="Rectangle 2"/>
+          <p:cNvSpPr/>
+          <p:nvPr/>
+        </p:nvSpPr>
+        <p:spPr>
+          <a:xfrm>
+            <a:off x="0" y="0"/>
+            <a:ext cx="12191695" cy="1051560"/>
+          </a:xfrm>
+          <a:prstGeom prst="rect">
+            <a:avLst/>
+          </a:prstGeom>
+          <a:solidFill>
             <a:srgbClr val="0B1F3A"/>
           </a:solidFill>
           <a:ln>
@@ -5738,14 +5319,53 @@
       </p:sp>
       <p:sp>
         <p:nvSpPr>
-          <p:cNvPr id="3" name="TextBox 2"/>
+          <p:cNvPr id="4" name="TextBox 3"/>
           <p:cNvSpPr txBox="1"/>
           <p:nvPr/>
         </p:nvSpPr>
         <p:spPr>
           <a:xfrm>
-            <a:off x="548640" y="457200"/>
-            <a:ext cx="2194560" cy="502920"/>
+            <a:off x="548640" y="256032"/>
+            <a:ext cx="7315200" cy="548640"/>
+          </a:xfrm>
+          <a:prstGeom prst="rect">
+            <a:avLst/>
+          </a:prstGeom>
+          <a:noFill/>
+        </p:spPr>
+        <p:txBody>
+          <a:bodyPr wrap="square" anchor="t">
+            <a:spAutoFit/>
+          </a:bodyPr>
+          <a:lstStyle/>
+          <a:p>
+            <a:pPr algn="l">
+              <a:lnSpc>
+                <a:spcPct val="100000"/>
+              </a:lnSpc>
+            </a:pPr>
+            <a:r>
+              <a:rPr sz="3000" b="1" i="0">
+                <a:solidFill>
+                  <a:srgbClr val="FFFFFF"/>
+                </a:solidFill>
+                <a:latin typeface="Georgia"/>
+              </a:rPr>
+              <a:t>Agenda</a:t>
+            </a:r>
+          </a:p>
+        </p:txBody>
+      </p:sp>
+      <p:sp>
+        <p:nvSpPr>
+          <p:cNvPr id="5" name="TextBox 4"/>
+          <p:cNvSpPr txBox="1"/>
+          <p:nvPr/>
+        </p:nvSpPr>
+        <p:spPr>
+          <a:xfrm>
+            <a:off x="8595360" y="292608"/>
+            <a:ext cx="1316736" cy="301752"/>
           </a:xfrm>
           <a:prstGeom prst="rect">
             <a:avLst/>
@@ -5760,7 +5380,7 @@
           <a:p>
             <a:pPr algn="l"/>
             <a:r>
-              <a:rPr sz="2400" b="1">
+              <a:rPr sz="1439" b="1">
                 <a:solidFill>
                   <a:srgbClr val="FFFFFF"/>
                 </a:solidFill>
@@ -5773,14 +5393,14 @@
       </p:sp>
       <p:sp>
         <p:nvSpPr>
-          <p:cNvPr id="4" name="Rectangle 3"/>
+          <p:cNvPr id="6" name="Rectangle 5"/>
           <p:cNvSpPr/>
           <p:nvPr/>
         </p:nvSpPr>
         <p:spPr>
           <a:xfrm>
-            <a:off x="548640" y="914400"/>
-            <a:ext cx="1051560" cy="40640"/>
+            <a:off x="8595360" y="566928"/>
+            <a:ext cx="630936" cy="40640"/>
           </a:xfrm>
           <a:prstGeom prst="rect">
             <a:avLst/>
@@ -5817,14 +5437,14 @@
       </p:sp>
       <p:sp>
         <p:nvSpPr>
-          <p:cNvPr id="5" name="TextBox 4"/>
+          <p:cNvPr id="7" name="TextBox 6"/>
           <p:cNvSpPr txBox="1"/>
           <p:nvPr/>
         </p:nvSpPr>
         <p:spPr>
           <a:xfrm>
-            <a:off x="9418320" y="457200"/>
-            <a:ext cx="2377440" cy="502920"/>
+            <a:off x="10241280" y="292608"/>
+            <a:ext cx="1426464" cy="301752"/>
           </a:xfrm>
           <a:prstGeom prst="rect">
             <a:avLst/>
@@ -5839,7 +5459,7 @@
           <a:p>
             <a:pPr algn="l"/>
             <a:r>
-              <a:rPr sz="2400" b="1">
+              <a:rPr sz="1439" b="1">
                 <a:solidFill>
                   <a:srgbClr val="29B5E8"/>
                 </a:solidFill>
@@ -5847,7 +5467,7 @@
               <a:t>❄ </a:t>
             </a:r>
             <a:r>
-              <a:rPr sz="2400" b="1">
+              <a:rPr sz="1439" b="1">
                 <a:solidFill>
                   <a:srgbClr val="FFFFFF"/>
                 </a:solidFill>
@@ -5860,14 +5480,149 @@
       </p:sp>
       <p:sp>
         <p:nvSpPr>
-          <p:cNvPr id="6" name="TextBox 5"/>
+          <p:cNvPr id="8" name="TextBox 7"/>
           <p:cNvSpPr txBox="1"/>
           <p:nvPr/>
         </p:nvSpPr>
         <p:spPr>
           <a:xfrm>
-            <a:off x="914400" y="2560320"/>
-            <a:ext cx="10332720" cy="914400"/>
+            <a:off x="914400" y="1645920"/>
+            <a:ext cx="10058400" cy="4572000"/>
+          </a:xfrm>
+          <a:prstGeom prst="rect">
+            <a:avLst/>
+          </a:prstGeom>
+          <a:noFill/>
+        </p:spPr>
+        <p:txBody>
+          <a:bodyPr wrap="square">
+            <a:spAutoFit/>
+          </a:bodyPr>
+          <a:lstStyle/>
+          <a:p>
+            <a:pPr>
+              <a:spcAft>
+                <a:spcPts val="1800"/>
+              </a:spcAft>
+            </a:pPr>
+            <a:r>
+              <a:rPr sz="2000">
+                <a:solidFill>
+                  <a:srgbClr val="1A1A1A"/>
+                </a:solidFill>
+                <a:latin typeface="Calibri"/>
+              </a:rPr>
+              <a:t>▸  The Problem — three specialists, three tools, too slow</a:t>
+            </a:r>
+          </a:p>
+          <a:p>
+            <a:pPr>
+              <a:spcAft>
+                <a:spcPts val="1800"/>
+              </a:spcAft>
+            </a:pPr>
+            <a:r>
+              <a:rPr sz="2000">
+                <a:solidFill>
+                  <a:srgbClr val="1A1A1A"/>
+                </a:solidFill>
+                <a:latin typeface="Calibri"/>
+              </a:rPr>
+              <a:t>▸  The Solution — one unified conversational agent</a:t>
+            </a:r>
+          </a:p>
+          <a:p>
+            <a:pPr>
+              <a:spcAft>
+                <a:spcPts val="1800"/>
+              </a:spcAft>
+            </a:pPr>
+            <a:r>
+              <a:rPr sz="2000">
+                <a:solidFill>
+                  <a:srgbClr val="1A1A1A"/>
+                </a:solidFill>
+                <a:latin typeface="Calibri"/>
+              </a:rPr>
+              <a:t>▸  Architecture — how it's built, natively on Snowflake</a:t>
+            </a:r>
+          </a:p>
+          <a:p>
+            <a:pPr>
+              <a:spcAft>
+                <a:spcPts val="1800"/>
+              </a:spcAft>
+            </a:pPr>
+            <a:r>
+              <a:rPr sz="2000">
+                <a:solidFill>
+                  <a:srgbClr val="1A1A1A"/>
+                </a:solidFill>
+                <a:latin typeface="Calibri"/>
+              </a:rPr>
+              <a:t>▸  Live Capabilities — Analytics, Document Q&amp;A, Data Quality</a:t>
+            </a:r>
+          </a:p>
+          <a:p>
+            <a:pPr>
+              <a:spcAft>
+                <a:spcPts val="1800"/>
+              </a:spcAft>
+            </a:pPr>
+            <a:r>
+              <a:rPr sz="2000">
+                <a:solidFill>
+                  <a:srgbClr val="1A1A1A"/>
+                </a:solidFill>
+                <a:latin typeface="Calibri"/>
+              </a:rPr>
+              <a:t>▸  Unified Orchestration — one chat box, automatic routing</a:t>
+            </a:r>
+          </a:p>
+          <a:p>
+            <a:pPr>
+              <a:spcAft>
+                <a:spcPts val="1800"/>
+              </a:spcAft>
+            </a:pPr>
+            <a:r>
+              <a:rPr sz="2000">
+                <a:solidFill>
+                  <a:srgbClr val="1A1A1A"/>
+                </a:solidFill>
+                <a:latin typeface="Calibri"/>
+              </a:rPr>
+              <a:t>▸  Dashboards &amp; MCP Integration — usage, trust, and extensibility</a:t>
+            </a:r>
+          </a:p>
+          <a:p>
+            <a:pPr>
+              <a:spcAft>
+                <a:spcPts val="1800"/>
+              </a:spcAft>
+            </a:pPr>
+            <a:r>
+              <a:rPr sz="2000">
+                <a:solidFill>
+                  <a:srgbClr val="1A1A1A"/>
+                </a:solidFill>
+                <a:latin typeface="Calibri"/>
+              </a:rPr>
+              <a:t>▸  Business Value &amp; Judging Criteria</a:t>
+            </a:r>
+          </a:p>
+        </p:txBody>
+      </p:sp>
+      <p:sp>
+        <p:nvSpPr>
+          <p:cNvPr id="9" name="TextBox 8"/>
+          <p:cNvSpPr txBox="1"/>
+          <p:nvPr/>
+        </p:nvSpPr>
+        <p:spPr>
+          <a:xfrm>
+            <a:off x="457200" y="6473952"/>
+            <a:ext cx="5486400" cy="320040"/>
           </a:xfrm>
           <a:prstGeom prst="rect">
             <a:avLst/>
@@ -5880,77 +5635,33 @@
           </a:bodyPr>
           <a:lstStyle/>
           <a:p>
-            <a:pPr algn="ctr">
+            <a:pPr algn="l">
               <a:lnSpc>
                 <a:spcPct val="100000"/>
               </a:lnSpc>
             </a:pPr>
             <a:r>
-              <a:rPr sz="4800" b="1" i="0">
-                <a:solidFill>
-                  <a:srgbClr val="FFFFFF"/>
-                </a:solidFill>
-                <a:latin typeface="Georgia"/>
-              </a:rPr>
-              <a:t>Thank You</a:t>
-            </a:r>
-          </a:p>
-        </p:txBody>
-      </p:sp>
-      <p:sp>
-        <p:nvSpPr>
-          <p:cNvPr id="7" name="Rectangle 6"/>
-          <p:cNvSpPr/>
-          <p:nvPr/>
-        </p:nvSpPr>
-        <p:spPr>
-          <a:xfrm>
-            <a:off x="5394960" y="3520440"/>
-            <a:ext cx="1371600" cy="31750"/>
-          </a:xfrm>
-          <a:prstGeom prst="rect">
-            <a:avLst/>
-          </a:prstGeom>
-          <a:solidFill>
-            <a:srgbClr val="E8A82A"/>
-          </a:solidFill>
-          <a:ln>
-            <a:noFill/>
-          </a:ln>
-          <a:effectLst/>
-        </p:spPr>
-        <p:style>
-          <a:lnRef idx="1">
-            <a:schemeClr val="accent1"/>
-          </a:lnRef>
-          <a:fillRef idx="3">
-            <a:schemeClr val="accent1"/>
-          </a:fillRef>
-          <a:effectRef idx="2">
-            <a:schemeClr val="accent1"/>
-          </a:effectRef>
-          <a:fontRef idx="minor">
-            <a:schemeClr val="lt1"/>
-          </a:fontRef>
-        </p:style>
-        <p:txBody>
-          <a:bodyPr rtlCol="0" anchor="ctr"/>
-          <a:lstStyle/>
-          <a:p>
-            <a:pPr algn="ctr"/>
-          </a:p>
-        </p:txBody>
-      </p:sp>
-      <p:sp>
-        <p:nvSpPr>
-          <p:cNvPr id="8" name="TextBox 7"/>
+              <a:rPr sz="900" b="0" i="1">
+                <a:solidFill>
+                  <a:srgbClr val="5A6370"/>
+                </a:solidFill>
+                <a:latin typeface="Calibri"/>
+              </a:rPr>
+              <a:t>Unified Enterprise AI Agents Platform  |  Capgemini x Snowflake Hackathon</a:t>
+            </a:r>
+          </a:p>
+        </p:txBody>
+      </p:sp>
+      <p:sp>
+        <p:nvSpPr>
+          <p:cNvPr id="10" name="TextBox 9"/>
           <p:cNvSpPr txBox="1"/>
           <p:nvPr/>
         </p:nvSpPr>
         <p:spPr>
           <a:xfrm>
-            <a:off x="914400" y="3794760"/>
-            <a:ext cx="10332720" cy="457200"/>
+            <a:off x="11247120" y="6473952"/>
+            <a:ext cx="731520" cy="320040"/>
           </a:xfrm>
           <a:prstGeom prst="rect">
             <a:avLst/>
@@ -5963,97 +5674,19 @@
           </a:bodyPr>
           <a:lstStyle/>
           <a:p>
-            <a:pPr algn="ctr">
+            <a:pPr algn="r">
               <a:lnSpc>
                 <a:spcPct val="100000"/>
               </a:lnSpc>
             </a:pPr>
             <a:r>
-              <a:rPr sz="2000" b="0" i="0">
-                <a:solidFill>
-                  <a:srgbClr val="29B5E8"/>
-                </a:solidFill>
-                <a:latin typeface="Calibri"/>
-              </a:rPr>
-              <a:t>Questions?</a:t>
-            </a:r>
-          </a:p>
-        </p:txBody>
-      </p:sp>
-      <p:sp>
-        <p:nvSpPr>
-          <p:cNvPr id="9" name="TextBox 8"/>
-          <p:cNvSpPr txBox="1"/>
-          <p:nvPr/>
-        </p:nvSpPr>
-        <p:spPr>
-          <a:xfrm>
-            <a:off x="914400" y="4846320"/>
-            <a:ext cx="10332720" cy="457200"/>
-          </a:xfrm>
-          <a:prstGeom prst="rect">
-            <a:avLst/>
-          </a:prstGeom>
-          <a:noFill/>
-        </p:spPr>
-        <p:txBody>
-          <a:bodyPr wrap="square" anchor="t">
-            <a:spAutoFit/>
-          </a:bodyPr>
-          <a:lstStyle/>
-          <a:p>
-            <a:pPr algn="ctr">
-              <a:lnSpc>
-                <a:spcPct val="100000"/>
-              </a:lnSpc>
-            </a:pPr>
-            <a:r>
-              <a:rPr sz="1700" b="1" i="0">
-                <a:solidFill>
-                  <a:srgbClr val="FFFFFF"/>
-                </a:solidFill>
-                <a:latin typeface="Calibri"/>
-              </a:rPr>
-              <a:t>Kiran Kumar Rajoju   •   Raza Hussain</a:t>
-            </a:r>
-          </a:p>
-        </p:txBody>
-      </p:sp>
-      <p:sp>
-        <p:nvSpPr>
-          <p:cNvPr id="10" name="TextBox 9"/>
-          <p:cNvSpPr txBox="1"/>
-          <p:nvPr/>
-        </p:nvSpPr>
-        <p:spPr>
-          <a:xfrm>
-            <a:off x="914400" y="5349240"/>
-            <a:ext cx="10332720" cy="365760"/>
-          </a:xfrm>
-          <a:prstGeom prst="rect">
-            <a:avLst/>
-          </a:prstGeom>
-          <a:noFill/>
-        </p:spPr>
-        <p:txBody>
-          <a:bodyPr wrap="square" anchor="t">
-            <a:spAutoFit/>
-          </a:bodyPr>
-          <a:lstStyle/>
-          <a:p>
-            <a:pPr algn="ctr">
-              <a:lnSpc>
-                <a:spcPct val="100000"/>
-              </a:lnSpc>
-            </a:pPr>
-            <a:r>
-              <a:rPr sz="1300" b="0" i="0">
-                <a:solidFill>
-                  <a:srgbClr val="C7D6E8"/>
-                </a:solidFill>
-                <a:latin typeface="Calibri"/>
-              </a:rPr>
-              <a:t>github.com/kirangithub9/Insurance_AI_Hub</a:t>
+              <a:rPr sz="900" b="0" i="0">
+                <a:solidFill>
+                  <a:srgbClr val="5A6370"/>
+                </a:solidFill>
+                <a:latin typeface="Calibri"/>
+              </a:rPr>
+              <a:t>2</a:t>
             </a:r>
           </a:p>
         </p:txBody>
@@ -6066,7 +5699,7 @@
 </p:sld>
 </file>
 
-<file path=ppt/slides/slide2.xml><?xml version="1.0" encoding="utf-8"?>
+<file path=ppt\slides\slide3.xml><?xml version="1.0" encoding="utf-8"?>
 <p:sld xmlns:a="http://schemas.openxmlformats.org/drawingml/2006/main" xmlns:p="http://schemas.openxmlformats.org/presentationml/2006/main" xmlns:r="http://schemas.openxmlformats.org/officeDocument/2006/relationships">
   <p:cSld>
     <p:spTree>
@@ -6198,7 +5831,7 @@
                 </a:solidFill>
                 <a:latin typeface="Georgia"/>
               </a:rPr>
-              <a:t>Agenda</a:t>
+              <a:t>The Problem</a:t>
             </a:r>
           </a:p>
         </p:txBody>
@@ -6211,8 +5844,8 @@
         </p:nvSpPr>
         <p:spPr>
           <a:xfrm>
-            <a:off x="8595360" y="292608"/>
-            <a:ext cx="1316736" cy="301752"/>
+            <a:off x="731520" y="1371600"/>
+            <a:ext cx="10698480" cy="822960"/>
           </a:xfrm>
           <a:prstGeom prst="rect">
             <a:avLst/>
@@ -6220,40 +5853,62 @@
           <a:noFill/>
         </p:spPr>
         <p:txBody>
-          <a:bodyPr wrap="none">
+          <a:bodyPr wrap="square" anchor="t">
             <a:spAutoFit/>
           </a:bodyPr>
           <a:lstStyle/>
           <a:p>
-            <a:pPr algn="l"/>
-            <a:r>
-              <a:rPr sz="1439" b="1">
-                <a:solidFill>
-                  <a:srgbClr val="FFFFFF"/>
-                </a:solidFill>
-                <a:latin typeface="Georgia"/>
-              </a:rPr>
-              <a:t>Capgemini</a:t>
-            </a:r>
-          </a:p>
-        </p:txBody>
-      </p:sp>
-      <p:sp>
-        <p:nvSpPr>
-          <p:cNvPr id="6" name="Rectangle 5"/>
+            <a:pPr algn="l">
+              <a:lnSpc>
+                <a:spcPct val="130000"/>
+              </a:lnSpc>
+            </a:pPr>
+            <a:r>
+              <a:rPr sz="1800" b="0" i="0">
+                <a:solidFill>
+                  <a:srgbClr val="1A1A1A"/>
+                </a:solidFill>
+                <a:latin typeface="Calibri"/>
+              </a:rPr>
+              <a:t>Business users at an insurer need answers from three different places — and today,</a:t>
+            </a:r>
+          </a:p>
+          <a:p>
+            <a:pPr algn="l">
+              <a:lnSpc>
+                <a:spcPct val="130000"/>
+              </a:lnSpc>
+            </a:pPr>
+            <a:r>
+              <a:rPr sz="1800" b="0" i="0">
+                <a:solidFill>
+                  <a:srgbClr val="1A1A1A"/>
+                </a:solidFill>
+                <a:latin typeface="Calibri"/>
+              </a:rPr>
+              <a:t>that means three different specialists.</a:t>
+            </a:r>
+          </a:p>
+        </p:txBody>
+      </p:sp>
+      <p:sp>
+        <p:nvSpPr>
+          <p:cNvPr id="6" name="Rounded Rectangle 5"/>
           <p:cNvSpPr/>
           <p:nvPr/>
         </p:nvSpPr>
         <p:spPr>
           <a:xfrm>
-            <a:off x="8595360" y="566928"/>
-            <a:ext cx="630936" cy="40640"/>
-          </a:xfrm>
-          <a:prstGeom prst="rect">
-            <a:avLst/>
+            <a:off x="731520" y="2468880"/>
+            <a:ext cx="3291840" cy="3017520"/>
+          </a:xfrm>
+          <a:prstGeom prst="roundRect">
+            <a:avLst>
+              <a:gd name="adj" fmla="val 6000"/>
+            </a:avLst>
           </a:prstGeom>
           <a:solidFill>
-            <a:srgbClr val="0070AD"/>
+            <a:srgbClr val="F4F6F9"/>
           </a:solidFill>
           <a:ln>
             <a:noFill/>
@@ -6290,186 +5945,8 @@
         </p:nvSpPr>
         <p:spPr>
           <a:xfrm>
-            <a:off x="10241280" y="292608"/>
-            <a:ext cx="1426464" cy="301752"/>
-          </a:xfrm>
-          <a:prstGeom prst="rect">
-            <a:avLst/>
-          </a:prstGeom>
-          <a:noFill/>
-        </p:spPr>
-        <p:txBody>
-          <a:bodyPr wrap="none">
-            <a:spAutoFit/>
-          </a:bodyPr>
-          <a:lstStyle/>
-          <a:p>
-            <a:pPr algn="l"/>
-            <a:r>
-              <a:rPr sz="1439" b="1">
-                <a:solidFill>
-                  <a:srgbClr val="29B5E8"/>
-                </a:solidFill>
-              </a:rPr>
-              <a:t>❄ </a:t>
-            </a:r>
-            <a:r>
-              <a:rPr sz="1439" b="1">
-                <a:solidFill>
-                  <a:srgbClr val="FFFFFF"/>
-                </a:solidFill>
-                <a:latin typeface="Calibri"/>
-              </a:rPr>
-              <a:t>Snowflake</a:t>
-            </a:r>
-          </a:p>
-        </p:txBody>
-      </p:sp>
-      <p:sp>
-        <p:nvSpPr>
-          <p:cNvPr id="8" name="TextBox 7"/>
-          <p:cNvSpPr txBox="1"/>
-          <p:nvPr/>
-        </p:nvSpPr>
-        <p:spPr>
-          <a:xfrm>
-            <a:off x="914400" y="1645920"/>
-            <a:ext cx="10058400" cy="4572000"/>
-          </a:xfrm>
-          <a:prstGeom prst="rect">
-            <a:avLst/>
-          </a:prstGeom>
-          <a:noFill/>
-        </p:spPr>
-        <p:txBody>
-          <a:bodyPr wrap="square">
-            <a:spAutoFit/>
-          </a:bodyPr>
-          <a:lstStyle/>
-          <a:p>
-            <a:pPr>
-              <a:spcAft>
-                <a:spcPts val="1800"/>
-              </a:spcAft>
-            </a:pPr>
-            <a:r>
-              <a:rPr sz="2000">
-                <a:solidFill>
-                  <a:srgbClr val="1A1A1A"/>
-                </a:solidFill>
-                <a:latin typeface="Calibri"/>
-              </a:rPr>
-              <a:t>▸  The Problem — three specialists, three tools, too slow</a:t>
-            </a:r>
-          </a:p>
-          <a:p>
-            <a:pPr>
-              <a:spcAft>
-                <a:spcPts val="1800"/>
-              </a:spcAft>
-            </a:pPr>
-            <a:r>
-              <a:rPr sz="2000">
-                <a:solidFill>
-                  <a:srgbClr val="1A1A1A"/>
-                </a:solidFill>
-                <a:latin typeface="Calibri"/>
-              </a:rPr>
-              <a:t>▸  The Solution — one unified conversational agent</a:t>
-            </a:r>
-          </a:p>
-          <a:p>
-            <a:pPr>
-              <a:spcAft>
-                <a:spcPts val="1800"/>
-              </a:spcAft>
-            </a:pPr>
-            <a:r>
-              <a:rPr sz="2000">
-                <a:solidFill>
-                  <a:srgbClr val="1A1A1A"/>
-                </a:solidFill>
-                <a:latin typeface="Calibri"/>
-              </a:rPr>
-              <a:t>▸  Architecture — how it's built, natively on Snowflake</a:t>
-            </a:r>
-          </a:p>
-          <a:p>
-            <a:pPr>
-              <a:spcAft>
-                <a:spcPts val="1800"/>
-              </a:spcAft>
-            </a:pPr>
-            <a:r>
-              <a:rPr sz="2000">
-                <a:solidFill>
-                  <a:srgbClr val="1A1A1A"/>
-                </a:solidFill>
-                <a:latin typeface="Calibri"/>
-              </a:rPr>
-              <a:t>▸  Live Capabilities — Analytics, Document Q&amp;A, Data Quality</a:t>
-            </a:r>
-          </a:p>
-          <a:p>
-            <a:pPr>
-              <a:spcAft>
-                <a:spcPts val="1800"/>
-              </a:spcAft>
-            </a:pPr>
-            <a:r>
-              <a:rPr sz="2000">
-                <a:solidFill>
-                  <a:srgbClr val="1A1A1A"/>
-                </a:solidFill>
-                <a:latin typeface="Calibri"/>
-              </a:rPr>
-              <a:t>▸  Unified Orchestration — one chat box, automatic routing</a:t>
-            </a:r>
-          </a:p>
-          <a:p>
-            <a:pPr>
-              <a:spcAft>
-                <a:spcPts val="1800"/>
-              </a:spcAft>
-            </a:pPr>
-            <a:r>
-              <a:rPr sz="2000">
-                <a:solidFill>
-                  <a:srgbClr val="1A1A1A"/>
-                </a:solidFill>
-                <a:latin typeface="Calibri"/>
-              </a:rPr>
-              <a:t>▸  Dashboards &amp; MCP Integration — usage, trust, and extensibility</a:t>
-            </a:r>
-          </a:p>
-          <a:p>
-            <a:pPr>
-              <a:spcAft>
-                <a:spcPts val="1800"/>
-              </a:spcAft>
-            </a:pPr>
-            <a:r>
-              <a:rPr sz="2000">
-                <a:solidFill>
-                  <a:srgbClr val="1A1A1A"/>
-                </a:solidFill>
-                <a:latin typeface="Calibri"/>
-              </a:rPr>
-              <a:t>▸  Business Value &amp; Judging Criteria</a:t>
-            </a:r>
-          </a:p>
-        </p:txBody>
-      </p:sp>
-      <p:sp>
-        <p:nvSpPr>
-          <p:cNvPr id="9" name="TextBox 8"/>
-          <p:cNvSpPr txBox="1"/>
-          <p:nvPr/>
-        </p:nvSpPr>
-        <p:spPr>
-          <a:xfrm>
-            <a:off x="457200" y="6473952"/>
-            <a:ext cx="5486400" cy="320040"/>
+            <a:off x="731520" y="2651760"/>
+            <a:ext cx="3291840" cy="731520"/>
           </a:xfrm>
           <a:prstGeom prst="rect">
             <a:avLst/>
@@ -6482,33 +5959,33 @@
           </a:bodyPr>
           <a:lstStyle/>
           <a:p>
-            <a:pPr algn="l">
+            <a:pPr algn="ctr">
               <a:lnSpc>
                 <a:spcPct val="100000"/>
               </a:lnSpc>
             </a:pPr>
             <a:r>
-              <a:rPr sz="900" b="0" i="1">
-                <a:solidFill>
-                  <a:srgbClr val="5A6370"/>
-                </a:solidFill>
-                <a:latin typeface="Calibri"/>
-              </a:rPr>
-              <a:t>Unified Enterprise AI Agents Platform  |  Capgemini x Snowflake Hackathon</a:t>
-            </a:r>
-          </a:p>
-        </p:txBody>
-      </p:sp>
-      <p:sp>
-        <p:nvSpPr>
-          <p:cNvPr id="10" name="TextBox 9"/>
+              <a:rPr sz="4000" b="0" i="0">
+                <a:solidFill>
+                  <a:srgbClr val="1A1A1A"/>
+                </a:solidFill>
+                <a:latin typeface="Calibri"/>
+              </a:rPr>
+              <a:t>📊</a:t>
+            </a:r>
+          </a:p>
+        </p:txBody>
+      </p:sp>
+      <p:sp>
+        <p:nvSpPr>
+          <p:cNvPr id="8" name="TextBox 7"/>
           <p:cNvSpPr txBox="1"/>
           <p:nvPr/>
         </p:nvSpPr>
         <p:spPr>
           <a:xfrm>
-            <a:off x="11247120" y="6473952"/>
-            <a:ext cx="731520" cy="320040"/>
+            <a:off x="914400" y="3429000"/>
+            <a:ext cx="2926080" cy="457200"/>
           </a:xfrm>
           <a:prstGeom prst="rect">
             <a:avLst/>
@@ -6521,6 +5998,701 @@
           </a:bodyPr>
           <a:lstStyle/>
           <a:p>
+            <a:pPr algn="ctr">
+              <a:lnSpc>
+                <a:spcPct val="100000"/>
+              </a:lnSpc>
+            </a:pPr>
+            <a:r>
+              <a:rPr sz="1700" b="1" i="0">
+                <a:solidFill>
+                  <a:srgbClr val="0070AD"/>
+                </a:solidFill>
+                <a:latin typeface="Calibri"/>
+              </a:rPr>
+              <a:t>SQL / BI Analyst</a:t>
+            </a:r>
+          </a:p>
+        </p:txBody>
+      </p:sp>
+      <p:sp>
+        <p:nvSpPr>
+          <p:cNvPr id="9" name="TextBox 8"/>
+          <p:cNvSpPr txBox="1"/>
+          <p:nvPr/>
+        </p:nvSpPr>
+        <p:spPr>
+          <a:xfrm>
+            <a:off x="960120" y="3931920"/>
+            <a:ext cx="2834640" cy="914400"/>
+          </a:xfrm>
+          <a:prstGeom prst="rect">
+            <a:avLst/>
+          </a:prstGeom>
+          <a:noFill/>
+        </p:spPr>
+        <p:txBody>
+          <a:bodyPr wrap="square" anchor="t">
+            <a:spAutoFit/>
+          </a:bodyPr>
+          <a:lstStyle/>
+          <a:p>
+            <a:pPr algn="ctr">
+              <a:lnSpc>
+                <a:spcPct val="120000"/>
+              </a:lnSpc>
+            </a:pPr>
+            <a:r>
+              <a:rPr sz="1300" b="0" i="1">
+                <a:solidFill>
+                  <a:srgbClr val="1A1A1A"/>
+                </a:solidFill>
+                <a:latin typeface="Calibri"/>
+              </a:rPr>
+              <a:t>"What's our average loss ratio</a:t>
+            </a:r>
+          </a:p>
+          <a:p>
+            <a:pPr algn="ctr">
+              <a:lnSpc>
+                <a:spcPct val="120000"/>
+              </a:lnSpc>
+            </a:pPr>
+            <a:r>
+              <a:rPr sz="1300" b="0" i="1">
+                <a:solidFill>
+                  <a:srgbClr val="1A1A1A"/>
+                </a:solidFill>
+                <a:latin typeface="Calibri"/>
+              </a:rPr>
+              <a:t>by policy type?"</a:t>
+            </a:r>
+          </a:p>
+        </p:txBody>
+      </p:sp>
+      <p:sp>
+        <p:nvSpPr>
+          <p:cNvPr id="10" name="TextBox 9"/>
+          <p:cNvSpPr txBox="1"/>
+          <p:nvPr/>
+        </p:nvSpPr>
+        <p:spPr>
+          <a:xfrm>
+            <a:off x="960120" y="4892040"/>
+            <a:ext cx="2834640" cy="548640"/>
+          </a:xfrm>
+          <a:prstGeom prst="rect">
+            <a:avLst/>
+          </a:prstGeom>
+          <a:noFill/>
+        </p:spPr>
+        <p:txBody>
+          <a:bodyPr wrap="square" anchor="t">
+            <a:spAutoFit/>
+          </a:bodyPr>
+          <a:lstStyle/>
+          <a:p>
+            <a:pPr algn="ctr">
+              <a:lnSpc>
+                <a:spcPct val="115000"/>
+              </a:lnSpc>
+            </a:pPr>
+            <a:r>
+              <a:rPr sz="1100" b="0" i="0">
+                <a:solidFill>
+                  <a:srgbClr val="5A6370"/>
+                </a:solidFill>
+                <a:latin typeface="Calibri"/>
+              </a:rPr>
+              <a:t>Structured data: policies,</a:t>
+            </a:r>
+          </a:p>
+          <a:p>
+            <a:pPr algn="ctr">
+              <a:lnSpc>
+                <a:spcPct val="115000"/>
+              </a:lnSpc>
+            </a:pPr>
+            <a:r>
+              <a:rPr sz="1100" b="0" i="0">
+                <a:solidFill>
+                  <a:srgbClr val="5A6370"/>
+                </a:solidFill>
+                <a:latin typeface="Calibri"/>
+              </a:rPr>
+              <a:t>claims, billing</a:t>
+            </a:r>
+          </a:p>
+        </p:txBody>
+      </p:sp>
+      <p:sp>
+        <p:nvSpPr>
+          <p:cNvPr id="11" name="Rounded Rectangle 10"/>
+          <p:cNvSpPr/>
+          <p:nvPr/>
+        </p:nvSpPr>
+        <p:spPr>
+          <a:xfrm>
+            <a:off x="4343400" y="2468880"/>
+            <a:ext cx="3291840" cy="3017520"/>
+          </a:xfrm>
+          <a:prstGeom prst="roundRect">
+            <a:avLst>
+              <a:gd name="adj" fmla="val 6000"/>
+            </a:avLst>
+          </a:prstGeom>
+          <a:solidFill>
+            <a:srgbClr val="F4F6F9"/>
+          </a:solidFill>
+          <a:ln>
+            <a:noFill/>
+          </a:ln>
+          <a:effectLst/>
+        </p:spPr>
+        <p:style>
+          <a:lnRef idx="1">
+            <a:schemeClr val="accent1"/>
+          </a:lnRef>
+          <a:fillRef idx="3">
+            <a:schemeClr val="accent1"/>
+          </a:fillRef>
+          <a:effectRef idx="2">
+            <a:schemeClr val="accent1"/>
+          </a:effectRef>
+          <a:fontRef idx="minor">
+            <a:schemeClr val="lt1"/>
+          </a:fontRef>
+        </p:style>
+        <p:txBody>
+          <a:bodyPr rtlCol="0" anchor="ctr"/>
+          <a:lstStyle/>
+          <a:p>
+            <a:pPr algn="ctr"/>
+          </a:p>
+        </p:txBody>
+      </p:sp>
+      <p:sp>
+        <p:nvSpPr>
+          <p:cNvPr id="12" name="TextBox 11"/>
+          <p:cNvSpPr txBox="1"/>
+          <p:nvPr/>
+        </p:nvSpPr>
+        <p:spPr>
+          <a:xfrm>
+            <a:off x="4343400" y="2651760"/>
+            <a:ext cx="3291840" cy="731520"/>
+          </a:xfrm>
+          <a:prstGeom prst="rect">
+            <a:avLst/>
+          </a:prstGeom>
+          <a:noFill/>
+        </p:spPr>
+        <p:txBody>
+          <a:bodyPr wrap="square" anchor="t">
+            <a:spAutoFit/>
+          </a:bodyPr>
+          <a:lstStyle/>
+          <a:p>
+            <a:pPr algn="ctr">
+              <a:lnSpc>
+                <a:spcPct val="100000"/>
+              </a:lnSpc>
+            </a:pPr>
+            <a:r>
+              <a:rPr sz="4000" b="0" i="0">
+                <a:solidFill>
+                  <a:srgbClr val="1A1A1A"/>
+                </a:solidFill>
+                <a:latin typeface="Calibri"/>
+              </a:rPr>
+              <a:t>📄</a:t>
+            </a:r>
+          </a:p>
+        </p:txBody>
+      </p:sp>
+      <p:sp>
+        <p:nvSpPr>
+          <p:cNvPr id="13" name="TextBox 12"/>
+          <p:cNvSpPr txBox="1"/>
+          <p:nvPr/>
+        </p:nvSpPr>
+        <p:spPr>
+          <a:xfrm>
+            <a:off x="4526280" y="3429000"/>
+            <a:ext cx="2926080" cy="457200"/>
+          </a:xfrm>
+          <a:prstGeom prst="rect">
+            <a:avLst/>
+          </a:prstGeom>
+          <a:noFill/>
+        </p:spPr>
+        <p:txBody>
+          <a:bodyPr wrap="square" anchor="t">
+            <a:spAutoFit/>
+          </a:bodyPr>
+          <a:lstStyle/>
+          <a:p>
+            <a:pPr algn="ctr">
+              <a:lnSpc>
+                <a:spcPct val="100000"/>
+              </a:lnSpc>
+            </a:pPr>
+            <a:r>
+              <a:rPr sz="1700" b="1" i="0">
+                <a:solidFill>
+                  <a:srgbClr val="0070AD"/>
+                </a:solidFill>
+                <a:latin typeface="Calibri"/>
+              </a:rPr>
+              <a:t>Document Reviewer</a:t>
+            </a:r>
+          </a:p>
+        </p:txBody>
+      </p:sp>
+      <p:sp>
+        <p:nvSpPr>
+          <p:cNvPr id="14" name="TextBox 13"/>
+          <p:cNvSpPr txBox="1"/>
+          <p:nvPr/>
+        </p:nvSpPr>
+        <p:spPr>
+          <a:xfrm>
+            <a:off x="4572000" y="3931920"/>
+            <a:ext cx="2834640" cy="914400"/>
+          </a:xfrm>
+          <a:prstGeom prst="rect">
+            <a:avLst/>
+          </a:prstGeom>
+          <a:noFill/>
+        </p:spPr>
+        <p:txBody>
+          <a:bodyPr wrap="square" anchor="t">
+            <a:spAutoFit/>
+          </a:bodyPr>
+          <a:lstStyle/>
+          <a:p>
+            <a:pPr algn="ctr">
+              <a:lnSpc>
+                <a:spcPct val="120000"/>
+              </a:lnSpc>
+            </a:pPr>
+            <a:r>
+              <a:rPr sz="1300" b="0" i="1">
+                <a:solidFill>
+                  <a:srgbClr val="1A1A1A"/>
+                </a:solidFill>
+                <a:latin typeface="Calibri"/>
+              </a:rPr>
+              <a:t>"Does this policy cover</a:t>
+            </a:r>
+          </a:p>
+          <a:p>
+            <a:pPr algn="ctr">
+              <a:lnSpc>
+                <a:spcPct val="120000"/>
+              </a:lnSpc>
+            </a:pPr>
+            <a:r>
+              <a:rPr sz="1300" b="0" i="1">
+                <a:solidFill>
+                  <a:srgbClr val="1A1A1A"/>
+                </a:solidFill>
+                <a:latin typeface="Calibri"/>
+              </a:rPr>
+              <a:t>water damage?"</a:t>
+            </a:r>
+          </a:p>
+        </p:txBody>
+      </p:sp>
+      <p:sp>
+        <p:nvSpPr>
+          <p:cNvPr id="15" name="TextBox 14"/>
+          <p:cNvSpPr txBox="1"/>
+          <p:nvPr/>
+        </p:nvSpPr>
+        <p:spPr>
+          <a:xfrm>
+            <a:off x="4572000" y="4892040"/>
+            <a:ext cx="2834640" cy="548640"/>
+          </a:xfrm>
+          <a:prstGeom prst="rect">
+            <a:avLst/>
+          </a:prstGeom>
+          <a:noFill/>
+        </p:spPr>
+        <p:txBody>
+          <a:bodyPr wrap="square" anchor="t">
+            <a:spAutoFit/>
+          </a:bodyPr>
+          <a:lstStyle/>
+          <a:p>
+            <a:pPr algn="ctr">
+              <a:lnSpc>
+                <a:spcPct val="115000"/>
+              </a:lnSpc>
+            </a:pPr>
+            <a:r>
+              <a:rPr sz="1100" b="0" i="0">
+                <a:solidFill>
+                  <a:srgbClr val="5A6370"/>
+                </a:solidFill>
+                <a:latin typeface="Calibri"/>
+              </a:rPr>
+              <a:t>Unstructured PDFs and</a:t>
+            </a:r>
+          </a:p>
+          <a:p>
+            <a:pPr algn="ctr">
+              <a:lnSpc>
+                <a:spcPct val="115000"/>
+              </a:lnSpc>
+            </a:pPr>
+            <a:r>
+              <a:rPr sz="1100" b="0" i="0">
+                <a:solidFill>
+                  <a:srgbClr val="5A6370"/>
+                </a:solidFill>
+                <a:latin typeface="Calibri"/>
+              </a:rPr>
+              <a:t>contracts</a:t>
+            </a:r>
+          </a:p>
+        </p:txBody>
+      </p:sp>
+      <p:sp>
+        <p:nvSpPr>
+          <p:cNvPr id="16" name="Rounded Rectangle 15"/>
+          <p:cNvSpPr/>
+          <p:nvPr/>
+        </p:nvSpPr>
+        <p:spPr>
+          <a:xfrm>
+            <a:off x="7955280" y="2468880"/>
+            <a:ext cx="3291840" cy="3017520"/>
+          </a:xfrm>
+          <a:prstGeom prst="roundRect">
+            <a:avLst>
+              <a:gd name="adj" fmla="val 6000"/>
+            </a:avLst>
+          </a:prstGeom>
+          <a:solidFill>
+            <a:srgbClr val="F4F6F9"/>
+          </a:solidFill>
+          <a:ln>
+            <a:noFill/>
+          </a:ln>
+          <a:effectLst/>
+        </p:spPr>
+        <p:style>
+          <a:lnRef idx="1">
+            <a:schemeClr val="accent1"/>
+          </a:lnRef>
+          <a:fillRef idx="3">
+            <a:schemeClr val="accent1"/>
+          </a:fillRef>
+          <a:effectRef idx="2">
+            <a:schemeClr val="accent1"/>
+          </a:effectRef>
+          <a:fontRef idx="minor">
+            <a:schemeClr val="lt1"/>
+          </a:fontRef>
+        </p:style>
+        <p:txBody>
+          <a:bodyPr rtlCol="0" anchor="ctr"/>
+          <a:lstStyle/>
+          <a:p>
+            <a:pPr algn="ctr"/>
+          </a:p>
+        </p:txBody>
+      </p:sp>
+      <p:sp>
+        <p:nvSpPr>
+          <p:cNvPr id="17" name="TextBox 16"/>
+          <p:cNvSpPr txBox="1"/>
+          <p:nvPr/>
+        </p:nvSpPr>
+        <p:spPr>
+          <a:xfrm>
+            <a:off x="7955280" y="2651760"/>
+            <a:ext cx="3291840" cy="731520"/>
+          </a:xfrm>
+          <a:prstGeom prst="rect">
+            <a:avLst/>
+          </a:prstGeom>
+          <a:noFill/>
+        </p:spPr>
+        <p:txBody>
+          <a:bodyPr wrap="square" anchor="t">
+            <a:spAutoFit/>
+          </a:bodyPr>
+          <a:lstStyle/>
+          <a:p>
+            <a:pPr algn="ctr">
+              <a:lnSpc>
+                <a:spcPct val="100000"/>
+              </a:lnSpc>
+            </a:pPr>
+            <a:r>
+              <a:rPr sz="4000" b="0" i="0">
+                <a:solidFill>
+                  <a:srgbClr val="1A1A1A"/>
+                </a:solidFill>
+                <a:latin typeface="Calibri"/>
+              </a:rPr>
+              <a:t>🛡</a:t>
+            </a:r>
+          </a:p>
+        </p:txBody>
+      </p:sp>
+      <p:sp>
+        <p:nvSpPr>
+          <p:cNvPr id="18" name="TextBox 17"/>
+          <p:cNvSpPr txBox="1"/>
+          <p:nvPr/>
+        </p:nvSpPr>
+        <p:spPr>
+          <a:xfrm>
+            <a:off x="8138160" y="3429000"/>
+            <a:ext cx="2926080" cy="457200"/>
+          </a:xfrm>
+          <a:prstGeom prst="rect">
+            <a:avLst/>
+          </a:prstGeom>
+          <a:noFill/>
+        </p:spPr>
+        <p:txBody>
+          <a:bodyPr wrap="square" anchor="t">
+            <a:spAutoFit/>
+          </a:bodyPr>
+          <a:lstStyle/>
+          <a:p>
+            <a:pPr algn="ctr">
+              <a:lnSpc>
+                <a:spcPct val="100000"/>
+              </a:lnSpc>
+            </a:pPr>
+            <a:r>
+              <a:rPr sz="1700" b="1" i="0">
+                <a:solidFill>
+                  <a:srgbClr val="0070AD"/>
+                </a:solidFill>
+                <a:latin typeface="Calibri"/>
+              </a:rPr>
+              <a:t>Data Engineer</a:t>
+            </a:r>
+          </a:p>
+        </p:txBody>
+      </p:sp>
+      <p:sp>
+        <p:nvSpPr>
+          <p:cNvPr id="19" name="TextBox 18"/>
+          <p:cNvSpPr txBox="1"/>
+          <p:nvPr/>
+        </p:nvSpPr>
+        <p:spPr>
+          <a:xfrm>
+            <a:off x="8183880" y="3931920"/>
+            <a:ext cx="2834640" cy="914400"/>
+          </a:xfrm>
+          <a:prstGeom prst="rect">
+            <a:avLst/>
+          </a:prstGeom>
+          <a:noFill/>
+        </p:spPr>
+        <p:txBody>
+          <a:bodyPr wrap="square" anchor="t">
+            <a:spAutoFit/>
+          </a:bodyPr>
+          <a:lstStyle/>
+          <a:p>
+            <a:pPr algn="ctr">
+              <a:lnSpc>
+                <a:spcPct val="120000"/>
+              </a:lnSpc>
+            </a:pPr>
+            <a:r>
+              <a:rPr sz="1300" b="0" i="1">
+                <a:solidFill>
+                  <a:srgbClr val="1A1A1A"/>
+                </a:solidFill>
+                <a:latin typeface="Calibri"/>
+              </a:rPr>
+              <a:t>"Why did this data quality</a:t>
+            </a:r>
+          </a:p>
+          <a:p>
+            <a:pPr algn="ctr">
+              <a:lnSpc>
+                <a:spcPct val="120000"/>
+              </a:lnSpc>
+            </a:pPr>
+            <a:r>
+              <a:rPr sz="1300" b="0" i="1">
+                <a:solidFill>
+                  <a:srgbClr val="1A1A1A"/>
+                </a:solidFill>
+                <a:latin typeface="Calibri"/>
+              </a:rPr>
+              <a:t>check fail?"</a:t>
+            </a:r>
+          </a:p>
+        </p:txBody>
+      </p:sp>
+      <p:sp>
+        <p:nvSpPr>
+          <p:cNvPr id="20" name="TextBox 19"/>
+          <p:cNvSpPr txBox="1"/>
+          <p:nvPr/>
+        </p:nvSpPr>
+        <p:spPr>
+          <a:xfrm>
+            <a:off x="8183880" y="4892040"/>
+            <a:ext cx="2834640" cy="548640"/>
+          </a:xfrm>
+          <a:prstGeom prst="rect">
+            <a:avLst/>
+          </a:prstGeom>
+          <a:noFill/>
+        </p:spPr>
+        <p:txBody>
+          <a:bodyPr wrap="square" anchor="t">
+            <a:spAutoFit/>
+          </a:bodyPr>
+          <a:lstStyle/>
+          <a:p>
+            <a:pPr algn="ctr">
+              <a:lnSpc>
+                <a:spcPct val="115000"/>
+              </a:lnSpc>
+            </a:pPr>
+            <a:r>
+              <a:rPr sz="1100" b="0" i="0">
+                <a:solidFill>
+                  <a:srgbClr val="5A6370"/>
+                </a:solidFill>
+                <a:latin typeface="Calibri"/>
+              </a:rPr>
+              <a:t>DQ rules, results,</a:t>
+            </a:r>
+          </a:p>
+          <a:p>
+            <a:pPr algn="ctr">
+              <a:lnSpc>
+                <a:spcPct val="115000"/>
+              </a:lnSpc>
+            </a:pPr>
+            <a:r>
+              <a:rPr sz="1100" b="0" i="0">
+                <a:solidFill>
+                  <a:srgbClr val="5A6370"/>
+                </a:solidFill>
+                <a:latin typeface="Calibri"/>
+              </a:rPr>
+              <a:t>and logs</a:t>
+            </a:r>
+          </a:p>
+        </p:txBody>
+      </p:sp>
+      <p:sp>
+        <p:nvSpPr>
+          <p:cNvPr id="21" name="TextBox 20"/>
+          <p:cNvSpPr txBox="1"/>
+          <p:nvPr/>
+        </p:nvSpPr>
+        <p:spPr>
+          <a:xfrm>
+            <a:off x="731520" y="5806440"/>
+            <a:ext cx="10698480" cy="457200"/>
+          </a:xfrm>
+          <a:prstGeom prst="rect">
+            <a:avLst/>
+          </a:prstGeom>
+          <a:noFill/>
+        </p:spPr>
+        <p:txBody>
+          <a:bodyPr wrap="square" anchor="t">
+            <a:spAutoFit/>
+          </a:bodyPr>
+          <a:lstStyle/>
+          <a:p>
+            <a:pPr algn="ctr">
+              <a:lnSpc>
+                <a:spcPct val="100000"/>
+              </a:lnSpc>
+            </a:pPr>
+            <a:r>
+              <a:rPr sz="1600" b="0" i="1">
+                <a:solidFill>
+                  <a:srgbClr val="5A6370"/>
+                </a:solidFill>
+                <a:latin typeface="Calibri"/>
+              </a:rPr>
+              <a:t>Slow, siloed, and dependent on whoever happens to be available.</a:t>
+            </a:r>
+          </a:p>
+        </p:txBody>
+      </p:sp>
+      <p:sp>
+        <p:nvSpPr>
+          <p:cNvPr id="22" name="TextBox 21"/>
+          <p:cNvSpPr txBox="1"/>
+          <p:nvPr/>
+        </p:nvSpPr>
+        <p:spPr>
+          <a:xfrm>
+            <a:off x="457200" y="6473952"/>
+            <a:ext cx="5486400" cy="320040"/>
+          </a:xfrm>
+          <a:prstGeom prst="rect">
+            <a:avLst/>
+          </a:prstGeom>
+          <a:noFill/>
+        </p:spPr>
+        <p:txBody>
+          <a:bodyPr wrap="square" anchor="t">
+            <a:spAutoFit/>
+          </a:bodyPr>
+          <a:lstStyle/>
+          <a:p>
+            <a:pPr algn="l">
+              <a:lnSpc>
+                <a:spcPct val="100000"/>
+              </a:lnSpc>
+            </a:pPr>
+            <a:r>
+              <a:rPr sz="900" b="0" i="1">
+                <a:solidFill>
+                  <a:srgbClr val="5A6370"/>
+                </a:solidFill>
+                <a:latin typeface="Calibri"/>
+              </a:rPr>
+              <a:t>Unified Enterprise AI Agents Platform  |  Capgemini x Snowflake Hackathon</a:t>
+            </a:r>
+          </a:p>
+        </p:txBody>
+      </p:sp>
+      <p:sp>
+        <p:nvSpPr>
+          <p:cNvPr id="23" name="TextBox 22"/>
+          <p:cNvSpPr txBox="1"/>
+          <p:nvPr/>
+        </p:nvSpPr>
+        <p:spPr>
+          <a:xfrm>
+            <a:off x="11247120" y="6473952"/>
+            <a:ext cx="731520" cy="320040"/>
+          </a:xfrm>
+          <a:prstGeom prst="rect">
+            <a:avLst/>
+          </a:prstGeom>
+          <a:noFill/>
+        </p:spPr>
+        <p:txBody>
+          <a:bodyPr wrap="square" anchor="t">
+            <a:spAutoFit/>
+          </a:bodyPr>
+          <a:lstStyle/>
+          <a:p>
             <a:pPr algn="r">
               <a:lnSpc>
                 <a:spcPct val="100000"/>
@@ -6533,7 +6705,7 @@
                 </a:solidFill>
                 <a:latin typeface="Calibri"/>
               </a:rPr>
-              <a:t>2</a:t>
+              <a:t>3</a:t>
             </a:r>
           </a:p>
         </p:txBody>
@@ -6546,7 +6718,7 @@
 </p:sld>
 </file>
 
-<file path=ppt/slides/slide3.xml><?xml version="1.0" encoding="utf-8"?>
+<file path=ppt\slides\slide4.xml><?xml version="1.0" encoding="utf-8"?>
 <p:sld xmlns:a="http://schemas.openxmlformats.org/drawingml/2006/main" xmlns:p="http://schemas.openxmlformats.org/presentationml/2006/main" xmlns:r="http://schemas.openxmlformats.org/officeDocument/2006/relationships">
   <p:cSld>
     <p:spTree>
@@ -6653,7 +6825,7 @@
         <p:spPr>
           <a:xfrm>
             <a:off x="548640" y="256032"/>
-            <a:ext cx="7315200" cy="548640"/>
+            <a:ext cx="8229600" cy="548640"/>
           </a:xfrm>
           <a:prstGeom prst="rect">
             <a:avLst/>
@@ -6678,7 +6850,7 @@
                 </a:solidFill>
                 <a:latin typeface="Georgia"/>
               </a:rPr>
-              <a:t>The Problem</a:t>
+              <a:t>The Solution</a:t>
             </a:r>
           </a:p>
         </p:txBody>
@@ -6691,7 +6863,7 @@
         </p:nvSpPr>
         <p:spPr>
           <a:xfrm>
-            <a:off x="731520" y="1371600"/>
+            <a:off x="731520" y="1325880"/>
             <a:ext cx="10698480" cy="822960"/>
           </a:xfrm>
           <a:prstGeom prst="rect">
@@ -6711,13 +6883,13 @@
               </a:lnSpc>
             </a:pPr>
             <a:r>
-              <a:rPr sz="1800" b="0" i="0">
+              <a:rPr sz="1900" b="1" i="0">
                 <a:solidFill>
                   <a:srgbClr val="1A1A1A"/>
                 </a:solidFill>
                 <a:latin typeface="Calibri"/>
               </a:rPr>
-              <a:t>Business users at an insurer need answers from three different places — and today,</a:t>
+              <a:t>One conversational agent that replaces all three specialists —</a:t>
             </a:r>
           </a:p>
           <a:p>
@@ -6727,35 +6899,33 @@
               </a:lnSpc>
             </a:pPr>
             <a:r>
-              <a:rPr sz="1800" b="0" i="0">
+              <a:rPr sz="1900" b="1" i="0">
                 <a:solidFill>
                   <a:srgbClr val="1A1A1A"/>
                 </a:solidFill>
                 <a:latin typeface="Calibri"/>
               </a:rPr>
-              <a:t>that means three different specialists.</a:t>
-            </a:r>
-          </a:p>
-        </p:txBody>
-      </p:sp>
-      <p:sp>
-        <p:nvSpPr>
-          <p:cNvPr id="6" name="Rounded Rectangle 5"/>
+              <a:t>built entirely with native Snowflake Cortex features.</a:t>
+            </a:r>
+          </a:p>
+        </p:txBody>
+      </p:sp>
+      <p:sp>
+        <p:nvSpPr>
+          <p:cNvPr id="6" name="Rectangle 5"/>
           <p:cNvSpPr/>
           <p:nvPr/>
         </p:nvSpPr>
         <p:spPr>
           <a:xfrm>
             <a:off x="731520" y="2468880"/>
-            <a:ext cx="3291840" cy="3017520"/>
-          </a:xfrm>
-          <a:prstGeom prst="roundRect">
-            <a:avLst>
-              <a:gd name="adj" fmla="val 6000"/>
-            </a:avLst>
+            <a:ext cx="109728" cy="960120"/>
+          </a:xfrm>
+          <a:prstGeom prst="rect">
+            <a:avLst/>
           </a:prstGeom>
           <a:solidFill>
-            <a:srgbClr val="F4F6F9"/>
+            <a:srgbClr val="29B5E8"/>
           </a:solidFill>
           <a:ln>
             <a:noFill/>
@@ -6792,8 +6962,8 @@
         </p:nvSpPr>
         <p:spPr>
           <a:xfrm>
-            <a:off x="731520" y="2651760"/>
-            <a:ext cx="3291840" cy="731520"/>
+            <a:off x="1005840" y="2423160"/>
+            <a:ext cx="10058400" cy="411480"/>
           </a:xfrm>
           <a:prstGeom prst="rect">
             <a:avLst/>
@@ -6806,19 +6976,19 @@
           </a:bodyPr>
           <a:lstStyle/>
           <a:p>
-            <a:pPr algn="ctr">
+            <a:pPr algn="l">
               <a:lnSpc>
                 <a:spcPct val="100000"/>
               </a:lnSpc>
             </a:pPr>
             <a:r>
-              <a:rPr sz="4000" b="0" i="0">
-                <a:solidFill>
-                  <a:srgbClr val="1A1A1A"/>
-                </a:solidFill>
-                <a:latin typeface="Calibri"/>
-              </a:rPr>
-              <a:t>📊</a:t>
+              <a:rPr sz="1900" b="1" i="0">
+                <a:solidFill>
+                  <a:srgbClr val="0B1F3A"/>
+                </a:solidFill>
+                <a:latin typeface="Calibri"/>
+              </a:rPr>
+              <a:t>📊  Self-Service Analytics</a:t>
             </a:r>
           </a:p>
         </p:txBody>
@@ -6831,8 +7001,8 @@
         </p:nvSpPr>
         <p:spPr>
           <a:xfrm>
-            <a:off x="914400" y="3429000"/>
-            <a:ext cx="2926080" cy="457200"/>
+            <a:off x="1005840" y="2852928"/>
+            <a:ext cx="10058400" cy="594360"/>
           </a:xfrm>
           <a:prstGeom prst="rect">
             <a:avLst/>
@@ -6845,151 +7015,55 @@
           </a:bodyPr>
           <a:lstStyle/>
           <a:p>
-            <a:pPr algn="ctr">
-              <a:lnSpc>
-                <a:spcPct val="100000"/>
-              </a:lnSpc>
-            </a:pPr>
-            <a:r>
-              <a:rPr sz="1700" b="1" i="0">
-                <a:solidFill>
-                  <a:srgbClr val="0070AD"/>
-                </a:solidFill>
-                <a:latin typeface="Calibri"/>
-              </a:rPr>
-              <a:t>SQL / BI Analyst</a:t>
-            </a:r>
-          </a:p>
-        </p:txBody>
-      </p:sp>
-      <p:sp>
-        <p:nvSpPr>
-          <p:cNvPr id="9" name="TextBox 8"/>
-          <p:cNvSpPr txBox="1"/>
-          <p:nvPr/>
-        </p:nvSpPr>
-        <p:spPr>
-          <a:xfrm>
-            <a:off x="960120" y="3931920"/>
-            <a:ext cx="2834640" cy="914400"/>
-          </a:xfrm>
-          <a:prstGeom prst="rect">
-            <a:avLst/>
-          </a:prstGeom>
-          <a:noFill/>
-        </p:spPr>
-        <p:txBody>
-          <a:bodyPr wrap="square" anchor="t">
-            <a:spAutoFit/>
-          </a:bodyPr>
-          <a:lstStyle/>
-          <a:p>
-            <a:pPr algn="ctr">
-              <a:lnSpc>
-                <a:spcPct val="120000"/>
-              </a:lnSpc>
-            </a:pPr>
-            <a:r>
-              <a:rPr sz="1300" b="0" i="1">
-                <a:solidFill>
-                  <a:srgbClr val="1A1A1A"/>
-                </a:solidFill>
-                <a:latin typeface="Calibri"/>
-              </a:rPr>
-              <a:t>"What's our average loss ratio</a:t>
-            </a:r>
-          </a:p>
-          <a:p>
-            <a:pPr algn="ctr">
-              <a:lnSpc>
-                <a:spcPct val="120000"/>
-              </a:lnSpc>
-            </a:pPr>
-            <a:r>
-              <a:rPr sz="1300" b="0" i="1">
-                <a:solidFill>
-                  <a:srgbClr val="1A1A1A"/>
-                </a:solidFill>
-                <a:latin typeface="Calibri"/>
-              </a:rPr>
-              <a:t>by policy type?"</a:t>
-            </a:r>
-          </a:p>
-        </p:txBody>
-      </p:sp>
-      <p:sp>
-        <p:nvSpPr>
-          <p:cNvPr id="10" name="TextBox 9"/>
-          <p:cNvSpPr txBox="1"/>
-          <p:nvPr/>
-        </p:nvSpPr>
-        <p:spPr>
-          <a:xfrm>
-            <a:off x="960120" y="4892040"/>
-            <a:ext cx="2834640" cy="548640"/>
-          </a:xfrm>
-          <a:prstGeom prst="rect">
-            <a:avLst/>
-          </a:prstGeom>
-          <a:noFill/>
-        </p:spPr>
-        <p:txBody>
-          <a:bodyPr wrap="square" anchor="t">
-            <a:spAutoFit/>
-          </a:bodyPr>
-          <a:lstStyle/>
-          <a:p>
-            <a:pPr algn="ctr">
-              <a:lnSpc>
-                <a:spcPct val="115000"/>
-              </a:lnSpc>
-            </a:pPr>
-            <a:r>
-              <a:rPr sz="1100" b="0" i="0">
+            <a:pPr algn="l">
+              <a:lnSpc>
+                <a:spcPct val="125000"/>
+              </a:lnSpc>
+            </a:pPr>
+            <a:r>
+              <a:rPr sz="1400" b="0" i="0">
                 <a:solidFill>
                   <a:srgbClr val="5A6370"/>
                 </a:solidFill>
                 <a:latin typeface="Calibri"/>
               </a:rPr>
-              <a:t>Structured data: policies,</a:t>
-            </a:r>
-          </a:p>
-          <a:p>
-            <a:pPr algn="ctr">
-              <a:lnSpc>
-                <a:spcPct val="115000"/>
-              </a:lnSpc>
-            </a:pPr>
-            <a:r>
-              <a:rPr sz="1100" b="0" i="0">
+              <a:t>Cortex Analyst turns plain English into governed SQL</a:t>
+            </a:r>
+          </a:p>
+          <a:p>
+            <a:pPr algn="l">
+              <a:lnSpc>
+                <a:spcPct val="125000"/>
+              </a:lnSpc>
+            </a:pPr>
+            <a:r>
+              <a:rPr sz="1400" b="0" i="0">
                 <a:solidFill>
                   <a:srgbClr val="5A6370"/>
                 </a:solidFill>
                 <a:latin typeface="Calibri"/>
               </a:rPr>
-              <a:t>claims, billing</a:t>
-            </a:r>
-          </a:p>
-        </p:txBody>
-      </p:sp>
-      <p:sp>
-        <p:nvSpPr>
-          <p:cNvPr id="11" name="Rounded Rectangle 10"/>
+              <a:t>against a native SEMANTIC VIEW.</a:t>
+            </a:r>
+          </a:p>
+        </p:txBody>
+      </p:sp>
+      <p:sp>
+        <p:nvSpPr>
+          <p:cNvPr id="9" name="Rectangle 8"/>
           <p:cNvSpPr/>
           <p:nvPr/>
         </p:nvSpPr>
         <p:spPr>
           <a:xfrm>
-            <a:off x="4343400" y="2468880"/>
-            <a:ext cx="3291840" cy="3017520"/>
-          </a:xfrm>
-          <a:prstGeom prst="roundRect">
-            <a:avLst>
-              <a:gd name="adj" fmla="val 6000"/>
-            </a:avLst>
+            <a:off x="731520" y="3657600"/>
+            <a:ext cx="109728" cy="960120"/>
+          </a:xfrm>
+          <a:prstGeom prst="rect">
+            <a:avLst/>
           </a:prstGeom>
           <a:solidFill>
-            <a:srgbClr val="F4F6F9"/>
+            <a:srgbClr val="29B5E8"/>
           </a:solidFill>
           <a:ln>
             <a:noFill/>
@@ -7020,14 +7094,14 @@
       </p:sp>
       <p:sp>
         <p:nvSpPr>
-          <p:cNvPr id="12" name="TextBox 11"/>
+          <p:cNvPr id="10" name="TextBox 9"/>
           <p:cNvSpPr txBox="1"/>
           <p:nvPr/>
         </p:nvSpPr>
         <p:spPr>
           <a:xfrm>
-            <a:off x="4343400" y="2651760"/>
-            <a:ext cx="3291840" cy="731520"/>
+            <a:off x="1005840" y="3611880"/>
+            <a:ext cx="10058400" cy="411480"/>
           </a:xfrm>
           <a:prstGeom prst="rect">
             <a:avLst/>
@@ -7040,33 +7114,33 @@
           </a:bodyPr>
           <a:lstStyle/>
           <a:p>
-            <a:pPr algn="ctr">
+            <a:pPr algn="l">
               <a:lnSpc>
                 <a:spcPct val="100000"/>
               </a:lnSpc>
             </a:pPr>
             <a:r>
-              <a:rPr sz="4000" b="0" i="0">
-                <a:solidFill>
-                  <a:srgbClr val="1A1A1A"/>
-                </a:solidFill>
-                <a:latin typeface="Calibri"/>
-              </a:rPr>
-              <a:t>📄</a:t>
-            </a:r>
-          </a:p>
-        </p:txBody>
-      </p:sp>
-      <p:sp>
-        <p:nvSpPr>
-          <p:cNvPr id="13" name="TextBox 12"/>
+              <a:rPr sz="1900" b="1" i="0">
+                <a:solidFill>
+                  <a:srgbClr val="0B1F3A"/>
+                </a:solidFill>
+                <a:latin typeface="Calibri"/>
+              </a:rPr>
+              <a:t>📄  Document Q&amp;A (RAG)</a:t>
+            </a:r>
+          </a:p>
+        </p:txBody>
+      </p:sp>
+      <p:sp>
+        <p:nvSpPr>
+          <p:cNvPr id="11" name="TextBox 10"/>
           <p:cNvSpPr txBox="1"/>
           <p:nvPr/>
         </p:nvSpPr>
         <p:spPr>
           <a:xfrm>
-            <a:off x="4526280" y="3429000"/>
-            <a:ext cx="2926080" cy="457200"/>
+            <a:off x="1005840" y="4041648"/>
+            <a:ext cx="10058400" cy="594360"/>
           </a:xfrm>
           <a:prstGeom prst="rect">
             <a:avLst/>
@@ -7079,151 +7153,55 @@
           </a:bodyPr>
           <a:lstStyle/>
           <a:p>
-            <a:pPr algn="ctr">
-              <a:lnSpc>
-                <a:spcPct val="100000"/>
-              </a:lnSpc>
-            </a:pPr>
-            <a:r>
-              <a:rPr sz="1700" b="1" i="0">
-                <a:solidFill>
-                  <a:srgbClr val="0070AD"/>
-                </a:solidFill>
-                <a:latin typeface="Calibri"/>
-              </a:rPr>
-              <a:t>Document Reviewer</a:t>
-            </a:r>
-          </a:p>
-        </p:txBody>
-      </p:sp>
-      <p:sp>
-        <p:nvSpPr>
-          <p:cNvPr id="14" name="TextBox 13"/>
-          <p:cNvSpPr txBox="1"/>
-          <p:nvPr/>
-        </p:nvSpPr>
-        <p:spPr>
-          <a:xfrm>
-            <a:off x="4572000" y="3931920"/>
-            <a:ext cx="2834640" cy="914400"/>
-          </a:xfrm>
-          <a:prstGeom prst="rect">
-            <a:avLst/>
-          </a:prstGeom>
-          <a:noFill/>
-        </p:spPr>
-        <p:txBody>
-          <a:bodyPr wrap="square" anchor="t">
-            <a:spAutoFit/>
-          </a:bodyPr>
-          <a:lstStyle/>
-          <a:p>
-            <a:pPr algn="ctr">
-              <a:lnSpc>
-                <a:spcPct val="120000"/>
-              </a:lnSpc>
-            </a:pPr>
-            <a:r>
-              <a:rPr sz="1300" b="0" i="1">
-                <a:solidFill>
-                  <a:srgbClr val="1A1A1A"/>
-                </a:solidFill>
-                <a:latin typeface="Calibri"/>
-              </a:rPr>
-              <a:t>"Does this policy cover</a:t>
-            </a:r>
-          </a:p>
-          <a:p>
-            <a:pPr algn="ctr">
-              <a:lnSpc>
-                <a:spcPct val="120000"/>
-              </a:lnSpc>
-            </a:pPr>
-            <a:r>
-              <a:rPr sz="1300" b="0" i="1">
-                <a:solidFill>
-                  <a:srgbClr val="1A1A1A"/>
-                </a:solidFill>
-                <a:latin typeface="Calibri"/>
-              </a:rPr>
-              <a:t>water damage?"</a:t>
-            </a:r>
-          </a:p>
-        </p:txBody>
-      </p:sp>
-      <p:sp>
-        <p:nvSpPr>
-          <p:cNvPr id="15" name="TextBox 14"/>
-          <p:cNvSpPr txBox="1"/>
-          <p:nvPr/>
-        </p:nvSpPr>
-        <p:spPr>
-          <a:xfrm>
-            <a:off x="4572000" y="4892040"/>
-            <a:ext cx="2834640" cy="548640"/>
-          </a:xfrm>
-          <a:prstGeom prst="rect">
-            <a:avLst/>
-          </a:prstGeom>
-          <a:noFill/>
-        </p:spPr>
-        <p:txBody>
-          <a:bodyPr wrap="square" anchor="t">
-            <a:spAutoFit/>
-          </a:bodyPr>
-          <a:lstStyle/>
-          <a:p>
-            <a:pPr algn="ctr">
-              <a:lnSpc>
-                <a:spcPct val="115000"/>
-              </a:lnSpc>
-            </a:pPr>
-            <a:r>
-              <a:rPr sz="1100" b="0" i="0">
+            <a:pPr algn="l">
+              <a:lnSpc>
+                <a:spcPct val="125000"/>
+              </a:lnSpc>
+            </a:pPr>
+            <a:r>
+              <a:rPr sz="1400" b="0" i="0">
                 <a:solidFill>
                   <a:srgbClr val="5A6370"/>
                 </a:solidFill>
                 <a:latin typeface="Calibri"/>
               </a:rPr>
-              <a:t>Unstructured PDFs and</a:t>
-            </a:r>
-          </a:p>
-          <a:p>
-            <a:pPr algn="ctr">
-              <a:lnSpc>
-                <a:spcPct val="115000"/>
-              </a:lnSpc>
-            </a:pPr>
-            <a:r>
-              <a:rPr sz="1100" b="0" i="0">
+              <a:t>Cortex Search auto-embeds and indexes policy documents</a:t>
+            </a:r>
+          </a:p>
+          <a:p>
+            <a:pPr algn="l">
+              <a:lnSpc>
+                <a:spcPct val="125000"/>
+              </a:lnSpc>
+            </a:pPr>
+            <a:r>
+              <a:rPr sz="1400" b="0" i="0">
                 <a:solidFill>
                   <a:srgbClr val="5A6370"/>
                 </a:solidFill>
                 <a:latin typeface="Calibri"/>
               </a:rPr>
-              <a:t>contracts</a:t>
-            </a:r>
-          </a:p>
-        </p:txBody>
-      </p:sp>
-      <p:sp>
-        <p:nvSpPr>
-          <p:cNvPr id="16" name="Rounded Rectangle 15"/>
+              <a:t>— no external vector database.</a:t>
+            </a:r>
+          </a:p>
+        </p:txBody>
+      </p:sp>
+      <p:sp>
+        <p:nvSpPr>
+          <p:cNvPr id="12" name="Rectangle 11"/>
           <p:cNvSpPr/>
           <p:nvPr/>
         </p:nvSpPr>
         <p:spPr>
           <a:xfrm>
-            <a:off x="7955280" y="2468880"/>
-            <a:ext cx="3291840" cy="3017520"/>
-          </a:xfrm>
-          <a:prstGeom prst="roundRect">
-            <a:avLst>
-              <a:gd name="adj" fmla="val 6000"/>
-            </a:avLst>
+            <a:off x="731520" y="4846320"/>
+            <a:ext cx="109728" cy="960120"/>
+          </a:xfrm>
+          <a:prstGeom prst="rect">
+            <a:avLst/>
           </a:prstGeom>
           <a:solidFill>
-            <a:srgbClr val="F4F6F9"/>
+            <a:srgbClr val="29B5E8"/>
           </a:solidFill>
           <a:ln>
             <a:noFill/>
@@ -7254,14 +7232,14 @@
       </p:sp>
       <p:sp>
         <p:nvSpPr>
-          <p:cNvPr id="17" name="TextBox 16"/>
+          <p:cNvPr id="13" name="TextBox 12"/>
           <p:cNvSpPr txBox="1"/>
           <p:nvPr/>
         </p:nvSpPr>
         <p:spPr>
           <a:xfrm>
-            <a:off x="7955280" y="2651760"/>
-            <a:ext cx="3291840" cy="731520"/>
+            <a:off x="1005840" y="4800600"/>
+            <a:ext cx="10058400" cy="411480"/>
           </a:xfrm>
           <a:prstGeom prst="rect">
             <a:avLst/>
@@ -7274,33 +7252,33 @@
           </a:bodyPr>
           <a:lstStyle/>
           <a:p>
-            <a:pPr algn="ctr">
+            <a:pPr algn="l">
               <a:lnSpc>
                 <a:spcPct val="100000"/>
               </a:lnSpc>
             </a:pPr>
             <a:r>
-              <a:rPr sz="4000" b="0" i="0">
-                <a:solidFill>
-                  <a:srgbClr val="1A1A1A"/>
-                </a:solidFill>
-                <a:latin typeface="Calibri"/>
-              </a:rPr>
-              <a:t>🛡</a:t>
-            </a:r>
-          </a:p>
-        </p:txBody>
-      </p:sp>
-      <p:sp>
-        <p:nvSpPr>
-          <p:cNvPr id="18" name="TextBox 17"/>
+              <a:rPr sz="1900" b="1" i="0">
+                <a:solidFill>
+                  <a:srgbClr val="0B1F3A"/>
+                </a:solidFill>
+                <a:latin typeface="Calibri"/>
+              </a:rPr>
+              <a:t>🛡  Data Quality Root Cause</a:t>
+            </a:r>
+          </a:p>
+        </p:txBody>
+      </p:sp>
+      <p:sp>
+        <p:nvSpPr>
+          <p:cNvPr id="14" name="TextBox 13"/>
           <p:cNvSpPr txBox="1"/>
           <p:nvPr/>
         </p:nvSpPr>
         <p:spPr>
           <a:xfrm>
-            <a:off x="8138160" y="3429000"/>
-            <a:ext cx="2926080" cy="457200"/>
+            <a:off x="1005840" y="5230368"/>
+            <a:ext cx="10058400" cy="594360"/>
           </a:xfrm>
           <a:prstGeom prst="rect">
             <a:avLst/>
@@ -7313,33 +7291,95 @@
           </a:bodyPr>
           <a:lstStyle/>
           <a:p>
-            <a:pPr algn="ctr">
-              <a:lnSpc>
-                <a:spcPct val="100000"/>
-              </a:lnSpc>
-            </a:pPr>
-            <a:r>
-              <a:rPr sz="1700" b="1" i="0">
-                <a:solidFill>
-                  <a:srgbClr val="0070AD"/>
-                </a:solidFill>
-                <a:latin typeface="Calibri"/>
-              </a:rPr>
-              <a:t>Data Engineer</a:t>
-            </a:r>
-          </a:p>
-        </p:txBody>
-      </p:sp>
-      <p:sp>
-        <p:nvSpPr>
-          <p:cNvPr id="19" name="TextBox 18"/>
+            <a:pPr algn="l">
+              <a:lnSpc>
+                <a:spcPct val="125000"/>
+              </a:lnSpc>
+            </a:pPr>
+            <a:r>
+              <a:rPr sz="1400" b="0" i="0">
+                <a:solidFill>
+                  <a:srgbClr val="5A6370"/>
+                </a:solidFill>
+                <a:latin typeface="Calibri"/>
+              </a:rPr>
+              <a:t>A second semantic view lets business users ask “why did</a:t>
+            </a:r>
+          </a:p>
+          <a:p>
+            <a:pPr algn="l">
+              <a:lnSpc>
+                <a:spcPct val="125000"/>
+              </a:lnSpc>
+            </a:pPr>
+            <a:r>
+              <a:rPr sz="1400" b="0" i="0">
+                <a:solidFill>
+                  <a:srgbClr val="5A6370"/>
+                </a:solidFill>
+                <a:latin typeface="Calibri"/>
+              </a:rPr>
+              <a:t>this fail?” and get a real answer.</a:t>
+            </a:r>
+          </a:p>
+        </p:txBody>
+      </p:sp>
+      <p:sp>
+        <p:nvSpPr>
+          <p:cNvPr id="15" name="Rounded Rectangle 14"/>
+          <p:cNvSpPr/>
+          <p:nvPr/>
+        </p:nvSpPr>
+        <p:spPr>
+          <a:xfrm>
+            <a:off x="731520" y="5989320"/>
+            <a:ext cx="10698480" cy="502920"/>
+          </a:xfrm>
+          <a:prstGeom prst="roundRect">
+            <a:avLst>
+              <a:gd name="adj" fmla="val 15000"/>
+            </a:avLst>
+          </a:prstGeom>
+          <a:solidFill>
+            <a:srgbClr val="0B1F3A"/>
+          </a:solidFill>
+          <a:ln>
+            <a:noFill/>
+          </a:ln>
+          <a:effectLst/>
+        </p:spPr>
+        <p:style>
+          <a:lnRef idx="1">
+            <a:schemeClr val="accent1"/>
+          </a:lnRef>
+          <a:fillRef idx="3">
+            <a:schemeClr val="accent1"/>
+          </a:fillRef>
+          <a:effectRef idx="2">
+            <a:schemeClr val="accent1"/>
+          </a:effectRef>
+          <a:fontRef idx="minor">
+            <a:schemeClr val="lt1"/>
+          </a:fontRef>
+        </p:style>
+        <p:txBody>
+          <a:bodyPr rtlCol="0" anchor="ctr"/>
+          <a:lstStyle/>
+          <a:p>
+            <a:pPr algn="ctr"/>
+          </a:p>
+        </p:txBody>
+      </p:sp>
+      <p:sp>
+        <p:nvSpPr>
+          <p:cNvPr id="16" name="TextBox 15"/>
           <p:cNvSpPr txBox="1"/>
           <p:nvPr/>
         </p:nvSpPr>
         <p:spPr>
           <a:xfrm>
-            <a:off x="8183880" y="3931920"/>
-            <a:ext cx="2834640" cy="914400"/>
+            <a:off x="731520" y="6053328"/>
+            <a:ext cx="10698480" cy="365760"/>
           </a:xfrm>
           <a:prstGeom prst="rect">
             <a:avLst/>
@@ -7354,205 +7394,17 @@
           <a:p>
             <a:pPr algn="ctr">
               <a:lnSpc>
-                <a:spcPct val="120000"/>
-              </a:lnSpc>
-            </a:pPr>
-            <a:r>
-              <a:rPr sz="1300" b="0" i="1">
-                <a:solidFill>
-                  <a:srgbClr val="1A1A1A"/>
-                </a:solidFill>
-                <a:latin typeface="Calibri"/>
-              </a:rPr>
-              <a:t>"Why did this data quality</a:t>
-            </a:r>
-          </a:p>
-          <a:p>
-            <a:pPr algn="ctr">
-              <a:lnSpc>
-                <a:spcPct val="120000"/>
-              </a:lnSpc>
-            </a:pPr>
-            <a:r>
-              <a:rPr sz="1300" b="0" i="1">
-                <a:solidFill>
-                  <a:srgbClr val="1A1A1A"/>
-                </a:solidFill>
-                <a:latin typeface="Calibri"/>
-              </a:rPr>
-              <a:t>check fail?"</a:t>
-            </a:r>
-          </a:p>
-        </p:txBody>
-      </p:sp>
-      <p:sp>
-        <p:nvSpPr>
-          <p:cNvPr id="20" name="TextBox 19"/>
-          <p:cNvSpPr txBox="1"/>
-          <p:nvPr/>
-        </p:nvSpPr>
-        <p:spPr>
-          <a:xfrm>
-            <a:off x="8183880" y="4892040"/>
-            <a:ext cx="2834640" cy="548640"/>
-          </a:xfrm>
-          <a:prstGeom prst="rect">
-            <a:avLst/>
-          </a:prstGeom>
-          <a:noFill/>
-        </p:spPr>
-        <p:txBody>
-          <a:bodyPr wrap="square" anchor="t">
-            <a:spAutoFit/>
-          </a:bodyPr>
-          <a:lstStyle/>
-          <a:p>
-            <a:pPr algn="ctr">
-              <a:lnSpc>
-                <a:spcPct val="115000"/>
-              </a:lnSpc>
-            </a:pPr>
-            <a:r>
-              <a:rPr sz="1100" b="0" i="0">
-                <a:solidFill>
-                  <a:srgbClr val="5A6370"/>
-                </a:solidFill>
-                <a:latin typeface="Calibri"/>
-              </a:rPr>
-              <a:t>DQ rules, results,</a:t>
-            </a:r>
-          </a:p>
-          <a:p>
-            <a:pPr algn="ctr">
-              <a:lnSpc>
-                <a:spcPct val="115000"/>
-              </a:lnSpc>
-            </a:pPr>
-            <a:r>
-              <a:rPr sz="1100" b="0" i="0">
-                <a:solidFill>
-                  <a:srgbClr val="5A6370"/>
-                </a:solidFill>
-                <a:latin typeface="Calibri"/>
-              </a:rPr>
-              <a:t>and logs</a:t>
-            </a:r>
-          </a:p>
-        </p:txBody>
-      </p:sp>
-      <p:sp>
-        <p:nvSpPr>
-          <p:cNvPr id="21" name="TextBox 20"/>
-          <p:cNvSpPr txBox="1"/>
-          <p:nvPr/>
-        </p:nvSpPr>
-        <p:spPr>
-          <a:xfrm>
-            <a:off x="731520" y="5806440"/>
-            <a:ext cx="10698480" cy="457200"/>
-          </a:xfrm>
-          <a:prstGeom prst="rect">
-            <a:avLst/>
-          </a:prstGeom>
-          <a:noFill/>
-        </p:spPr>
-        <p:txBody>
-          <a:bodyPr wrap="square" anchor="t">
-            <a:spAutoFit/>
-          </a:bodyPr>
-          <a:lstStyle/>
-          <a:p>
-            <a:pPr algn="ctr">
-              <a:lnSpc>
                 <a:spcPct val="100000"/>
               </a:lnSpc>
             </a:pPr>
             <a:r>
-              <a:rPr sz="1600" b="0" i="1">
-                <a:solidFill>
-                  <a:srgbClr val="5A6370"/>
-                </a:solidFill>
-                <a:latin typeface="Calibri"/>
-              </a:rPr>
-              <a:t>Slow, siloed, and dependent on whoever happens to be available.</a:t>
-            </a:r>
-          </a:p>
-        </p:txBody>
-      </p:sp>
-      <p:sp>
-        <p:nvSpPr>
-          <p:cNvPr id="22" name="TextBox 21"/>
-          <p:cNvSpPr txBox="1"/>
-          <p:nvPr/>
-        </p:nvSpPr>
-        <p:spPr>
-          <a:xfrm>
-            <a:off x="457200" y="6473952"/>
-            <a:ext cx="5486400" cy="320040"/>
-          </a:xfrm>
-          <a:prstGeom prst="rect">
-            <a:avLst/>
-          </a:prstGeom>
-          <a:noFill/>
-        </p:spPr>
-        <p:txBody>
-          <a:bodyPr wrap="square" anchor="t">
-            <a:spAutoFit/>
-          </a:bodyPr>
-          <a:lstStyle/>
-          <a:p>
-            <a:pPr algn="l">
-              <a:lnSpc>
-                <a:spcPct val="100000"/>
-              </a:lnSpc>
-            </a:pPr>
-            <a:r>
-              <a:rPr sz="900" b="0" i="1">
-                <a:solidFill>
-                  <a:srgbClr val="5A6370"/>
-                </a:solidFill>
-                <a:latin typeface="Calibri"/>
-              </a:rPr>
-              <a:t>Unified Enterprise AI Agents Platform  |  Capgemini x Snowflake Hackathon</a:t>
-            </a:r>
-          </a:p>
-        </p:txBody>
-      </p:sp>
-      <p:sp>
-        <p:nvSpPr>
-          <p:cNvPr id="23" name="TextBox 22"/>
-          <p:cNvSpPr txBox="1"/>
-          <p:nvPr/>
-        </p:nvSpPr>
-        <p:spPr>
-          <a:xfrm>
-            <a:off x="11247120" y="6473952"/>
-            <a:ext cx="731520" cy="320040"/>
-          </a:xfrm>
-          <a:prstGeom prst="rect">
-            <a:avLst/>
-          </a:prstGeom>
-          <a:noFill/>
-        </p:spPr>
-        <p:txBody>
-          <a:bodyPr wrap="square" anchor="t">
-            <a:spAutoFit/>
-          </a:bodyPr>
-          <a:lstStyle/>
-          <a:p>
-            <a:pPr algn="r">
-              <a:lnSpc>
-                <a:spcPct val="100000"/>
-              </a:lnSpc>
-            </a:pPr>
-            <a:r>
-              <a:rPr sz="900" b="0" i="0">
-                <a:solidFill>
-                  <a:srgbClr val="5A6370"/>
-                </a:solidFill>
-                <a:latin typeface="Calibri"/>
-              </a:rPr>
-              <a:t>3</a:t>
+              <a:rPr sz="1500" b="1" i="0">
+                <a:solidFill>
+                  <a:srgbClr val="FFFFFF"/>
+                </a:solidFill>
+                <a:latin typeface="Calibri"/>
+              </a:rPr>
+              <a:t>One chat box.  One agent.  Automatic routing between all three.</a:t>
             </a:r>
           </a:p>
         </p:txBody>
@@ -7565,7 +7417,7 @@
 </p:sld>
 </file>
 
-<file path=ppt/slides/slide4.xml><?xml version="1.0" encoding="utf-8"?>
+<file path=ppt\slides\slide5.xml><?xml version="1.0" encoding="utf-8"?>
 <p:sld xmlns:a="http://schemas.openxmlformats.org/drawingml/2006/main" xmlns:p="http://schemas.openxmlformats.org/presentationml/2006/main" xmlns:r="http://schemas.openxmlformats.org/officeDocument/2006/relationships">
   <p:cSld>
     <p:spTree>
@@ -7697,21 +7549,67 @@
                 </a:solidFill>
                 <a:latin typeface="Georgia"/>
               </a:rPr>
-              <a:t>The Solution</a:t>
-            </a:r>
-          </a:p>
-        </p:txBody>
-      </p:sp>
-      <p:sp>
-        <p:nvSpPr>
-          <p:cNvPr id="5" name="TextBox 4"/>
+              <a:t>Architecture</a:t>
+            </a:r>
+          </a:p>
+        </p:txBody>
+      </p:sp>
+      <p:sp>
+        <p:nvSpPr>
+          <p:cNvPr id="5" name="Rounded Rectangle 4"/>
+          <p:cNvSpPr/>
+          <p:nvPr/>
+        </p:nvSpPr>
+        <p:spPr>
+          <a:xfrm>
+            <a:off x="4480560" y="1371600"/>
+            <a:ext cx="3200400" cy="640080"/>
+          </a:xfrm>
+          <a:prstGeom prst="roundRect">
+            <a:avLst>
+              <a:gd name="adj" fmla="val 15000"/>
+            </a:avLst>
+          </a:prstGeom>
+          <a:solidFill>
+            <a:srgbClr val="FF4B4B"/>
+          </a:solidFill>
+          <a:ln>
+            <a:noFill/>
+          </a:ln>
+          <a:effectLst/>
+        </p:spPr>
+        <p:style>
+          <a:lnRef idx="1">
+            <a:schemeClr val="accent1"/>
+          </a:lnRef>
+          <a:fillRef idx="3">
+            <a:schemeClr val="accent1"/>
+          </a:fillRef>
+          <a:effectRef idx="2">
+            <a:schemeClr val="accent1"/>
+          </a:effectRef>
+          <a:fontRef idx="minor">
+            <a:schemeClr val="lt1"/>
+          </a:fontRef>
+        </p:style>
+        <p:txBody>
+          <a:bodyPr rtlCol="0" anchor="ctr"/>
+          <a:lstStyle/>
+          <a:p>
+            <a:pPr algn="ctr"/>
+          </a:p>
+        </p:txBody>
+      </p:sp>
+      <p:sp>
+        <p:nvSpPr>
+          <p:cNvPr id="6" name="TextBox 5"/>
           <p:cNvSpPr txBox="1"/>
           <p:nvPr/>
         </p:nvSpPr>
         <p:spPr>
           <a:xfrm>
-            <a:off x="731520" y="1325880"/>
-            <a:ext cx="10698480" cy="822960"/>
+            <a:off x="4480560" y="1508760"/>
+            <a:ext cx="3200400" cy="365760"/>
           </a:xfrm>
           <a:prstGeom prst="rect">
             <a:avLst/>
@@ -7724,52 +7622,706 @@
           </a:bodyPr>
           <a:lstStyle/>
           <a:p>
-            <a:pPr algn="l">
-              <a:lnSpc>
-                <a:spcPct val="130000"/>
-              </a:lnSpc>
-            </a:pPr>
-            <a:r>
-              <a:rPr sz="1900" b="1" i="0">
-                <a:solidFill>
-                  <a:srgbClr val="1A1A1A"/>
-                </a:solidFill>
-                <a:latin typeface="Calibri"/>
-              </a:rPr>
-              <a:t>One conversational agent that replaces all three specialists —</a:t>
-            </a:r>
-          </a:p>
-          <a:p>
-            <a:pPr algn="l">
-              <a:lnSpc>
-                <a:spcPct val="130000"/>
-              </a:lnSpc>
-            </a:pPr>
-            <a:r>
-              <a:rPr sz="1900" b="1" i="0">
-                <a:solidFill>
-                  <a:srgbClr val="1A1A1A"/>
-                </a:solidFill>
-                <a:latin typeface="Calibri"/>
-              </a:rPr>
-              <a:t>built entirely with native Snowflake Cortex features.</a:t>
-            </a:r>
-          </a:p>
-        </p:txBody>
-      </p:sp>
-      <p:sp>
-        <p:nvSpPr>
-          <p:cNvPr id="6" name="Rectangle 5"/>
+            <a:pPr algn="ctr">
+              <a:lnSpc>
+                <a:spcPct val="100000"/>
+              </a:lnSpc>
+            </a:pPr>
+            <a:r>
+              <a:rPr sz="1300" b="1" i="0">
+                <a:solidFill>
+                  <a:srgbClr val="FFFFFF"/>
+                </a:solidFill>
+                <a:latin typeface="Calibri"/>
+              </a:rPr>
+              <a:t>Streamlit-in-Snowflake  —  Chat UI</a:t>
+            </a:r>
+          </a:p>
+        </p:txBody>
+      </p:sp>
+      <p:cxnSp>
+        <p:nvCxnSpPr>
+          <p:cNvPr id="7" name="Connector 6"/>
+          <p:cNvCxnSpPr/>
+          <p:nvPr/>
+        </p:nvCxnSpPr>
+        <p:spPr>
+          <a:xfrm>
+            <a:off x="6080760" y="2011680"/>
+            <a:ext cx="0" cy="365760"/>
+          </a:xfrm>
+          <a:prstGeom prst="bentConnector3">
+            <a:avLst/>
+          </a:prstGeom>
+          <a:ln w="25400">
+            <a:solidFill>
+              <a:srgbClr val="5A6370"/>
+            </a:solidFill>
+          </a:ln>
+        </p:spPr>
+        <p:style>
+          <a:lnRef idx="2">
+            <a:schemeClr val="accent1"/>
+          </a:lnRef>
+          <a:fillRef idx="0">
+            <a:schemeClr val="accent1"/>
+          </a:fillRef>
+          <a:effectRef idx="1">
+            <a:schemeClr val="accent1"/>
+          </a:effectRef>
+          <a:fontRef idx="minor">
+            <a:schemeClr val="tx1"/>
+          </a:fontRef>
+        </p:style>
+      </p:cxnSp>
+      <p:sp>
+        <p:nvSpPr>
+          <p:cNvPr id="8" name="Rounded Rectangle 7"/>
           <p:cNvSpPr/>
           <p:nvPr/>
         </p:nvSpPr>
         <p:spPr>
           <a:xfrm>
-            <a:off x="731520" y="2468880"/>
-            <a:ext cx="109728" cy="960120"/>
-          </a:xfrm>
-          <a:prstGeom prst="rect">
-            <a:avLst/>
+            <a:off x="4023360" y="2377440"/>
+            <a:ext cx="4114800" cy="777240"/>
+          </a:xfrm>
+          <a:prstGeom prst="roundRect">
+            <a:avLst>
+              <a:gd name="adj" fmla="val 15000"/>
+            </a:avLst>
+          </a:prstGeom>
+          <a:solidFill>
+            <a:srgbClr val="0B1F3A"/>
+          </a:solidFill>
+          <a:ln>
+            <a:noFill/>
+          </a:ln>
+          <a:effectLst/>
+        </p:spPr>
+        <p:style>
+          <a:lnRef idx="1">
+            <a:schemeClr val="accent1"/>
+          </a:lnRef>
+          <a:fillRef idx="3">
+            <a:schemeClr val="accent1"/>
+          </a:fillRef>
+          <a:effectRef idx="2">
+            <a:schemeClr val="accent1"/>
+          </a:effectRef>
+          <a:fontRef idx="minor">
+            <a:schemeClr val="lt1"/>
+          </a:fontRef>
+        </p:style>
+        <p:txBody>
+          <a:bodyPr rtlCol="0" anchor="ctr"/>
+          <a:lstStyle/>
+          <a:p>
+            <a:pPr algn="ctr"/>
+          </a:p>
+        </p:txBody>
+      </p:sp>
+      <p:sp>
+        <p:nvSpPr>
+          <p:cNvPr id="9" name="TextBox 8"/>
+          <p:cNvSpPr txBox="1"/>
+          <p:nvPr/>
+        </p:nvSpPr>
+        <p:spPr>
+          <a:xfrm>
+            <a:off x="4023360" y="2487168"/>
+            <a:ext cx="4114800" cy="320040"/>
+          </a:xfrm>
+          <a:prstGeom prst="rect">
+            <a:avLst/>
+          </a:prstGeom>
+          <a:noFill/>
+        </p:spPr>
+        <p:txBody>
+          <a:bodyPr wrap="square" anchor="t">
+            <a:spAutoFit/>
+          </a:bodyPr>
+          <a:lstStyle/>
+          <a:p>
+            <a:pPr algn="ctr">
+              <a:lnSpc>
+                <a:spcPct val="100000"/>
+              </a:lnSpc>
+            </a:pPr>
+            <a:r>
+              <a:rPr sz="1500" b="1" i="0">
+                <a:solidFill>
+                  <a:srgbClr val="FFFFFF"/>
+                </a:solidFill>
+                <a:latin typeface="Calibri"/>
+              </a:rPr>
+              <a:t>ENTERPRISE_AI_AGENT</a:t>
+            </a:r>
+          </a:p>
+        </p:txBody>
+      </p:sp>
+      <p:sp>
+        <p:nvSpPr>
+          <p:cNvPr id="10" name="TextBox 9"/>
+          <p:cNvSpPr txBox="1"/>
+          <p:nvPr/>
+        </p:nvSpPr>
+        <p:spPr>
+          <a:xfrm>
+            <a:off x="4023360" y="2798064"/>
+            <a:ext cx="4114800" cy="320040"/>
+          </a:xfrm>
+          <a:prstGeom prst="rect">
+            <a:avLst/>
+          </a:prstGeom>
+          <a:noFill/>
+        </p:spPr>
+        <p:txBody>
+          <a:bodyPr wrap="square" anchor="t">
+            <a:spAutoFit/>
+          </a:bodyPr>
+          <a:lstStyle/>
+          <a:p>
+            <a:pPr algn="ctr">
+              <a:lnSpc>
+                <a:spcPct val="100000"/>
+              </a:lnSpc>
+            </a:pPr>
+            <a:r>
+              <a:rPr sz="1100" b="0" i="0">
+                <a:solidFill>
+                  <a:srgbClr val="29B5E8"/>
+                </a:solidFill>
+                <a:latin typeface="Calibri"/>
+              </a:rPr>
+              <a:t>Snowflake Cortex Agent  •  auto-orchestration</a:t>
+            </a:r>
+          </a:p>
+        </p:txBody>
+      </p:sp>
+      <p:cxnSp>
+        <p:nvCxnSpPr>
+          <p:cNvPr id="11" name="Connector 10"/>
+          <p:cNvCxnSpPr/>
+          <p:nvPr/>
+        </p:nvCxnSpPr>
+        <p:spPr>
+          <a:xfrm flipH="1">
+            <a:off x="2331720.0" y="3154680"/>
+            <a:ext cx="3749040.0" cy="411480"/>
+          </a:xfrm>
+          <a:prstGeom prst="bentConnector3">
+            <a:avLst/>
+          </a:prstGeom>
+          <a:ln w="19050">
+            <a:solidFill>
+              <a:srgbClr val="5A6370"/>
+            </a:solidFill>
+          </a:ln>
+        </p:spPr>
+        <p:style>
+          <a:lnRef idx="2">
+            <a:schemeClr val="accent1"/>
+          </a:lnRef>
+          <a:fillRef idx="0">
+            <a:schemeClr val="accent1"/>
+          </a:fillRef>
+          <a:effectRef idx="1">
+            <a:schemeClr val="accent1"/>
+          </a:effectRef>
+          <a:fontRef idx="minor">
+            <a:schemeClr val="tx1"/>
+          </a:fontRef>
+        </p:style>
+      </p:cxnSp>
+      <p:sp>
+        <p:nvSpPr>
+          <p:cNvPr id="12" name="Rounded Rectangle 11"/>
+          <p:cNvSpPr/>
+          <p:nvPr/>
+        </p:nvSpPr>
+        <p:spPr>
+          <a:xfrm>
+            <a:off x="685800" y="3566160"/>
+            <a:ext cx="3291840" cy="868680"/>
+          </a:xfrm>
+          <a:prstGeom prst="roundRect">
+            <a:avLst>
+              <a:gd name="adj" fmla="val 10000"/>
+            </a:avLst>
+          </a:prstGeom>
+          <a:solidFill>
+            <a:srgbClr val="F4F6F9"/>
+          </a:solidFill>
+          <a:ln w="19050">
+            <a:solidFill>
+              <a:srgbClr val="0070AD"/>
+            </a:solidFill>
+          </a:ln>
+          <a:effectLst/>
+        </p:spPr>
+        <p:style>
+          <a:lnRef idx="1">
+            <a:schemeClr val="accent1"/>
+          </a:lnRef>
+          <a:fillRef idx="3">
+            <a:schemeClr val="accent1"/>
+          </a:fillRef>
+          <a:effectRef idx="2">
+            <a:schemeClr val="accent1"/>
+          </a:effectRef>
+          <a:fontRef idx="minor">
+            <a:schemeClr val="lt1"/>
+          </a:fontRef>
+        </p:style>
+        <p:txBody>
+          <a:bodyPr rtlCol="0" anchor="ctr"/>
+          <a:lstStyle/>
+          <a:p>
+            <a:pPr algn="ctr"/>
+          </a:p>
+        </p:txBody>
+      </p:sp>
+      <p:sp>
+        <p:nvSpPr>
+          <p:cNvPr id="13" name="TextBox 12"/>
+          <p:cNvSpPr txBox="1"/>
+          <p:nvPr/>
+        </p:nvSpPr>
+        <p:spPr>
+          <a:xfrm>
+            <a:off x="685800" y="3639312"/>
+            <a:ext cx="3291840" cy="320040"/>
+          </a:xfrm>
+          <a:prstGeom prst="rect">
+            <a:avLst/>
+          </a:prstGeom>
+          <a:noFill/>
+        </p:spPr>
+        <p:txBody>
+          <a:bodyPr wrap="square" anchor="t">
+            <a:spAutoFit/>
+          </a:bodyPr>
+          <a:lstStyle/>
+          <a:p>
+            <a:pPr algn="ctr">
+              <a:lnSpc>
+                <a:spcPct val="100000"/>
+              </a:lnSpc>
+            </a:pPr>
+            <a:r>
+              <a:rPr sz="1400" b="1" i="0">
+                <a:solidFill>
+                  <a:srgbClr val="0B1F3A"/>
+                </a:solidFill>
+                <a:latin typeface="Calibri"/>
+              </a:rPr>
+              <a:t>AnalyticsAgent</a:t>
+            </a:r>
+          </a:p>
+        </p:txBody>
+      </p:sp>
+      <p:sp>
+        <p:nvSpPr>
+          <p:cNvPr id="14" name="TextBox 13"/>
+          <p:cNvSpPr txBox="1"/>
+          <p:nvPr/>
+        </p:nvSpPr>
+        <p:spPr>
+          <a:xfrm>
+            <a:off x="685800" y="3950208"/>
+            <a:ext cx="3291840" cy="457200"/>
+          </a:xfrm>
+          <a:prstGeom prst="rect">
+            <a:avLst/>
+          </a:prstGeom>
+          <a:noFill/>
+        </p:spPr>
+        <p:txBody>
+          <a:bodyPr wrap="square" anchor="t">
+            <a:spAutoFit/>
+          </a:bodyPr>
+          <a:lstStyle/>
+          <a:p>
+            <a:pPr algn="ctr">
+              <a:lnSpc>
+                <a:spcPct val="110000"/>
+              </a:lnSpc>
+            </a:pPr>
+            <a:r>
+              <a:rPr sz="1100" b="0" i="0">
+                <a:solidFill>
+                  <a:srgbClr val="5A6370"/>
+                </a:solidFill>
+                <a:latin typeface="Calibri"/>
+              </a:rPr>
+              <a:t>Cortex Analyst</a:t>
+            </a:r>
+          </a:p>
+          <a:p>
+            <a:pPr algn="ctr">
+              <a:lnSpc>
+                <a:spcPct val="110000"/>
+              </a:lnSpc>
+            </a:pPr>
+            <a:r>
+              <a:rPr sz="1100" b="0" i="0">
+                <a:solidFill>
+                  <a:srgbClr val="5A6370"/>
+                </a:solidFill>
+                <a:latin typeface="Calibri"/>
+              </a:rPr>
+              <a:t>(text-to-SQL)</a:t>
+            </a:r>
+          </a:p>
+        </p:txBody>
+      </p:sp>
+      <p:cxnSp>
+        <p:nvCxnSpPr>
+          <p:cNvPr id="15" name="Connector 14"/>
+          <p:cNvCxnSpPr/>
+          <p:nvPr/>
+        </p:nvCxnSpPr>
+        <p:spPr>
+          <a:xfrm>
+            <a:off x="2331720.0" y="4434840"/>
+            <a:ext cx="0.0" cy="274320"/>
+          </a:xfrm>
+          <a:prstGeom prst="bentConnector3">
+            <a:avLst/>
+          </a:prstGeom>
+          <a:ln w="19050">
+            <a:solidFill>
+              <a:srgbClr val="5A6370"/>
+            </a:solidFill>
+          </a:ln>
+        </p:spPr>
+        <p:style>
+          <a:lnRef idx="2">
+            <a:schemeClr val="accent1"/>
+          </a:lnRef>
+          <a:fillRef idx="0">
+            <a:schemeClr val="accent1"/>
+          </a:fillRef>
+          <a:effectRef idx="1">
+            <a:schemeClr val="accent1"/>
+          </a:effectRef>
+          <a:fontRef idx="minor">
+            <a:schemeClr val="tx1"/>
+          </a:fontRef>
+        </p:style>
+      </p:cxnSp>
+      <p:sp>
+        <p:nvSpPr>
+          <p:cNvPr id="16" name="Rounded Rectangle 15"/>
+          <p:cNvSpPr/>
+          <p:nvPr/>
+        </p:nvSpPr>
+        <p:spPr>
+          <a:xfrm>
+            <a:off x="685800" y="4709160"/>
+            <a:ext cx="3291840" cy="548640"/>
+          </a:xfrm>
+          <a:prstGeom prst="roundRect">
+            <a:avLst>
+              <a:gd name="adj" fmla="val 10000"/>
+            </a:avLst>
+          </a:prstGeom>
+          <a:solidFill>
+            <a:srgbClr val="0070AD"/>
+          </a:solidFill>
+          <a:ln>
+            <a:noFill/>
+          </a:ln>
+          <a:effectLst/>
+        </p:spPr>
+        <p:style>
+          <a:lnRef idx="1">
+            <a:schemeClr val="accent1"/>
+          </a:lnRef>
+          <a:fillRef idx="3">
+            <a:schemeClr val="accent1"/>
+          </a:fillRef>
+          <a:effectRef idx="2">
+            <a:schemeClr val="accent1"/>
+          </a:effectRef>
+          <a:fontRef idx="minor">
+            <a:schemeClr val="lt1"/>
+          </a:fontRef>
+        </p:style>
+        <p:txBody>
+          <a:bodyPr rtlCol="0" anchor="ctr"/>
+          <a:lstStyle/>
+          <a:p>
+            <a:pPr algn="ctr"/>
+          </a:p>
+        </p:txBody>
+      </p:sp>
+      <p:sp>
+        <p:nvSpPr>
+          <p:cNvPr id="17" name="TextBox 16"/>
+          <p:cNvSpPr txBox="1"/>
+          <p:nvPr/>
+        </p:nvSpPr>
+        <p:spPr>
+          <a:xfrm>
+            <a:off x="685800" y="4828032"/>
+            <a:ext cx="3291840" cy="365760"/>
+          </a:xfrm>
+          <a:prstGeom prst="rect">
+            <a:avLst/>
+          </a:prstGeom>
+          <a:noFill/>
+        </p:spPr>
+        <p:txBody>
+          <a:bodyPr wrap="square" anchor="t">
+            <a:spAutoFit/>
+          </a:bodyPr>
+          <a:lstStyle/>
+          <a:p>
+            <a:pPr algn="ctr">
+              <a:lnSpc>
+                <a:spcPct val="100000"/>
+              </a:lnSpc>
+            </a:pPr>
+            <a:r>
+              <a:rPr sz="1100" b="1" i="0">
+                <a:solidFill>
+                  <a:srgbClr val="FFFFFF"/>
+                </a:solidFill>
+                <a:latin typeface="Calibri"/>
+              </a:rPr>
+              <a:t>ANALYTICS_SEMANTIC_VIEW</a:t>
+            </a:r>
+          </a:p>
+        </p:txBody>
+      </p:sp>
+      <p:cxnSp>
+        <p:nvCxnSpPr>
+          <p:cNvPr id="18" name="Connector 17"/>
+          <p:cNvCxnSpPr/>
+          <p:nvPr/>
+        </p:nvCxnSpPr>
+        <p:spPr>
+          <a:xfrm>
+            <a:off x="6080760" y="3154680"/>
+            <a:ext cx="18288.0" cy="411480"/>
+          </a:xfrm>
+          <a:prstGeom prst="bentConnector3">
+            <a:avLst/>
+          </a:prstGeom>
+          <a:ln w="19050">
+            <a:solidFill>
+              <a:srgbClr val="5A6370"/>
+            </a:solidFill>
+          </a:ln>
+        </p:spPr>
+        <p:style>
+          <a:lnRef idx="2">
+            <a:schemeClr val="accent1"/>
+          </a:lnRef>
+          <a:fillRef idx="0">
+            <a:schemeClr val="accent1"/>
+          </a:fillRef>
+          <a:effectRef idx="1">
+            <a:schemeClr val="accent1"/>
+          </a:effectRef>
+          <a:fontRef idx="minor">
+            <a:schemeClr val="tx1"/>
+          </a:fontRef>
+        </p:style>
+      </p:cxnSp>
+      <p:sp>
+        <p:nvSpPr>
+          <p:cNvPr id="19" name="Rounded Rectangle 18"/>
+          <p:cNvSpPr/>
+          <p:nvPr/>
+        </p:nvSpPr>
+        <p:spPr>
+          <a:xfrm>
+            <a:off x="4453128" y="3566160"/>
+            <a:ext cx="3291840" cy="868680"/>
+          </a:xfrm>
+          <a:prstGeom prst="roundRect">
+            <a:avLst>
+              <a:gd name="adj" fmla="val 10000"/>
+            </a:avLst>
+          </a:prstGeom>
+          <a:solidFill>
+            <a:srgbClr val="F4F6F9"/>
+          </a:solidFill>
+          <a:ln w="19050">
+            <a:solidFill>
+              <a:srgbClr val="29B5E8"/>
+            </a:solidFill>
+          </a:ln>
+          <a:effectLst/>
+        </p:spPr>
+        <p:style>
+          <a:lnRef idx="1">
+            <a:schemeClr val="accent1"/>
+          </a:lnRef>
+          <a:fillRef idx="3">
+            <a:schemeClr val="accent1"/>
+          </a:fillRef>
+          <a:effectRef idx="2">
+            <a:schemeClr val="accent1"/>
+          </a:effectRef>
+          <a:fontRef idx="minor">
+            <a:schemeClr val="lt1"/>
+          </a:fontRef>
+        </p:style>
+        <p:txBody>
+          <a:bodyPr rtlCol="0" anchor="ctr"/>
+          <a:lstStyle/>
+          <a:p>
+            <a:pPr algn="ctr"/>
+          </a:p>
+        </p:txBody>
+      </p:sp>
+      <p:sp>
+        <p:nvSpPr>
+          <p:cNvPr id="20" name="TextBox 19"/>
+          <p:cNvSpPr txBox="1"/>
+          <p:nvPr/>
+        </p:nvSpPr>
+        <p:spPr>
+          <a:xfrm>
+            <a:off x="4453128" y="3639312"/>
+            <a:ext cx="3291840" cy="320040"/>
+          </a:xfrm>
+          <a:prstGeom prst="rect">
+            <a:avLst/>
+          </a:prstGeom>
+          <a:noFill/>
+        </p:spPr>
+        <p:txBody>
+          <a:bodyPr wrap="square" anchor="t">
+            <a:spAutoFit/>
+          </a:bodyPr>
+          <a:lstStyle/>
+          <a:p>
+            <a:pPr algn="ctr">
+              <a:lnSpc>
+                <a:spcPct val="100000"/>
+              </a:lnSpc>
+            </a:pPr>
+            <a:r>
+              <a:rPr sz="1400" b="1" i="0">
+                <a:solidFill>
+                  <a:srgbClr val="0B1F3A"/>
+                </a:solidFill>
+                <a:latin typeface="Calibri"/>
+              </a:rPr>
+              <a:t>DocumentQA</a:t>
+            </a:r>
+          </a:p>
+        </p:txBody>
+      </p:sp>
+      <p:sp>
+        <p:nvSpPr>
+          <p:cNvPr id="21" name="TextBox 20"/>
+          <p:cNvSpPr txBox="1"/>
+          <p:nvPr/>
+        </p:nvSpPr>
+        <p:spPr>
+          <a:xfrm>
+            <a:off x="4453128" y="3950208"/>
+            <a:ext cx="3291840" cy="457200"/>
+          </a:xfrm>
+          <a:prstGeom prst="rect">
+            <a:avLst/>
+          </a:prstGeom>
+          <a:noFill/>
+        </p:spPr>
+        <p:txBody>
+          <a:bodyPr wrap="square" anchor="t">
+            <a:spAutoFit/>
+          </a:bodyPr>
+          <a:lstStyle/>
+          <a:p>
+            <a:pPr algn="ctr">
+              <a:lnSpc>
+                <a:spcPct val="110000"/>
+              </a:lnSpc>
+            </a:pPr>
+            <a:r>
+              <a:rPr sz="1100" b="0" i="0">
+                <a:solidFill>
+                  <a:srgbClr val="5A6370"/>
+                </a:solidFill>
+                <a:latin typeface="Calibri"/>
+              </a:rPr>
+              <a:t>Cortex Search</a:t>
+            </a:r>
+          </a:p>
+          <a:p>
+            <a:pPr algn="ctr">
+              <a:lnSpc>
+                <a:spcPct val="110000"/>
+              </a:lnSpc>
+            </a:pPr>
+            <a:r>
+              <a:rPr sz="1100" b="0" i="0">
+                <a:solidFill>
+                  <a:srgbClr val="5A6370"/>
+                </a:solidFill>
+                <a:latin typeface="Calibri"/>
+              </a:rPr>
+              <a:t>(RAG)</a:t>
+            </a:r>
+          </a:p>
+        </p:txBody>
+      </p:sp>
+      <p:cxnSp>
+        <p:nvCxnSpPr>
+          <p:cNvPr id="22" name="Connector 21"/>
+          <p:cNvCxnSpPr/>
+          <p:nvPr/>
+        </p:nvCxnSpPr>
+        <p:spPr>
+          <a:xfrm>
+            <a:off x="6099048.0" y="4434840"/>
+            <a:ext cx="0.0" cy="274320"/>
+          </a:xfrm>
+          <a:prstGeom prst="bentConnector3">
+            <a:avLst/>
+          </a:prstGeom>
+          <a:ln w="19050">
+            <a:solidFill>
+              <a:srgbClr val="5A6370"/>
+            </a:solidFill>
+          </a:ln>
+        </p:spPr>
+        <p:style>
+          <a:lnRef idx="2">
+            <a:schemeClr val="accent1"/>
+          </a:lnRef>
+          <a:fillRef idx="0">
+            <a:schemeClr val="accent1"/>
+          </a:fillRef>
+          <a:effectRef idx="1">
+            <a:schemeClr val="accent1"/>
+          </a:effectRef>
+          <a:fontRef idx="minor">
+            <a:schemeClr val="tx1"/>
+          </a:fontRef>
+        </p:style>
+      </p:cxnSp>
+      <p:sp>
+        <p:nvSpPr>
+          <p:cNvPr id="23" name="Rounded Rectangle 22"/>
+          <p:cNvSpPr/>
+          <p:nvPr/>
+        </p:nvSpPr>
+        <p:spPr>
+          <a:xfrm>
+            <a:off x="4453128" y="4709160"/>
+            <a:ext cx="3291840" cy="548640"/>
+          </a:xfrm>
+          <a:prstGeom prst="roundRect">
+            <a:avLst>
+              <a:gd name="adj" fmla="val 10000"/>
+            </a:avLst>
           </a:prstGeom>
           <a:solidFill>
             <a:srgbClr val="29B5E8"/>
@@ -7803,14 +8355,14 @@
       </p:sp>
       <p:sp>
         <p:nvSpPr>
-          <p:cNvPr id="7" name="TextBox 6"/>
+          <p:cNvPr id="24" name="TextBox 23"/>
           <p:cNvSpPr txBox="1"/>
           <p:nvPr/>
         </p:nvSpPr>
         <p:spPr>
           <a:xfrm>
-            <a:off x="1005840" y="2423160"/>
-            <a:ext cx="10058400" cy="411480"/>
+            <a:off x="4453128" y="4828032"/>
+            <a:ext cx="3291840" cy="365760"/>
           </a:xfrm>
           <a:prstGeom prst="rect">
             <a:avLst/>
@@ -7823,33 +8375,116 @@
           </a:bodyPr>
           <a:lstStyle/>
           <a:p>
-            <a:pPr algn="l">
+            <a:pPr algn="ctr">
               <a:lnSpc>
                 <a:spcPct val="100000"/>
               </a:lnSpc>
             </a:pPr>
             <a:r>
-              <a:rPr sz="1900" b="1" i="0">
-                <a:solidFill>
-                  <a:srgbClr val="0B1F3A"/>
-                </a:solidFill>
-                <a:latin typeface="Calibri"/>
-              </a:rPr>
-              <a:t>📊  Self-Service Analytics</a:t>
-            </a:r>
-          </a:p>
-        </p:txBody>
-      </p:sp>
-      <p:sp>
-        <p:nvSpPr>
-          <p:cNvPr id="8" name="TextBox 7"/>
+              <a:rPr sz="1100" b="1" i="0">
+                <a:solidFill>
+                  <a:srgbClr val="FFFFFF"/>
+                </a:solidFill>
+                <a:latin typeface="Calibri"/>
+              </a:rPr>
+              <a:t>POLICY_DOCUMENT_SEARCH_SVC</a:t>
+            </a:r>
+          </a:p>
+        </p:txBody>
+      </p:sp>
+      <p:cxnSp>
+        <p:nvCxnSpPr>
+          <p:cNvPr id="25" name="Connector 24"/>
+          <p:cNvCxnSpPr/>
+          <p:nvPr/>
+        </p:nvCxnSpPr>
+        <p:spPr>
+          <a:xfrm>
+            <a:off x="6080760" y="3154680"/>
+            <a:ext cx="3776472.0" cy="411480"/>
+          </a:xfrm>
+          <a:prstGeom prst="bentConnector3">
+            <a:avLst/>
+          </a:prstGeom>
+          <a:ln w="19050">
+            <a:solidFill>
+              <a:srgbClr val="5A6370"/>
+            </a:solidFill>
+          </a:ln>
+        </p:spPr>
+        <p:style>
+          <a:lnRef idx="2">
+            <a:schemeClr val="accent1"/>
+          </a:lnRef>
+          <a:fillRef idx="0">
+            <a:schemeClr val="accent1"/>
+          </a:fillRef>
+          <a:effectRef idx="1">
+            <a:schemeClr val="accent1"/>
+          </a:effectRef>
+          <a:fontRef idx="minor">
+            <a:schemeClr val="tx1"/>
+          </a:fontRef>
+        </p:style>
+      </p:cxnSp>
+      <p:sp>
+        <p:nvSpPr>
+          <p:cNvPr id="26" name="Rounded Rectangle 25"/>
+          <p:cNvSpPr/>
+          <p:nvPr/>
+        </p:nvSpPr>
+        <p:spPr>
+          <a:xfrm>
+            <a:off x="8211312" y="3566160"/>
+            <a:ext cx="3291840" cy="868680"/>
+          </a:xfrm>
+          <a:prstGeom prst="roundRect">
+            <a:avLst>
+              <a:gd name="adj" fmla="val 10000"/>
+            </a:avLst>
+          </a:prstGeom>
+          <a:solidFill>
+            <a:srgbClr val="F4F6F9"/>
+          </a:solidFill>
+          <a:ln w="19050">
+            <a:solidFill>
+              <a:srgbClr val="E8A82A"/>
+            </a:solidFill>
+          </a:ln>
+          <a:effectLst/>
+        </p:spPr>
+        <p:style>
+          <a:lnRef idx="1">
+            <a:schemeClr val="accent1"/>
+          </a:lnRef>
+          <a:fillRef idx="3">
+            <a:schemeClr val="accent1"/>
+          </a:fillRef>
+          <a:effectRef idx="2">
+            <a:schemeClr val="accent1"/>
+          </a:effectRef>
+          <a:fontRef idx="minor">
+            <a:schemeClr val="lt1"/>
+          </a:fontRef>
+        </p:style>
+        <p:txBody>
+          <a:bodyPr rtlCol="0" anchor="ctr"/>
+          <a:lstStyle/>
+          <a:p>
+            <a:pPr algn="ctr"/>
+          </a:p>
+        </p:txBody>
+      </p:sp>
+      <p:sp>
+        <p:nvSpPr>
+          <p:cNvPr id="27" name="TextBox 26"/>
           <p:cNvSpPr txBox="1"/>
           <p:nvPr/>
         </p:nvSpPr>
         <p:spPr>
           <a:xfrm>
-            <a:off x="1005840" y="2852928"/>
-            <a:ext cx="10058400" cy="594360"/>
+            <a:off x="8211312" y="3639312"/>
+            <a:ext cx="3291840" cy="320040"/>
           </a:xfrm>
           <a:prstGeom prst="rect">
             <a:avLst/>
@@ -7862,55 +8497,131 @@
           </a:bodyPr>
           <a:lstStyle/>
           <a:p>
-            <a:pPr algn="l">
-              <a:lnSpc>
-                <a:spcPct val="125000"/>
-              </a:lnSpc>
-            </a:pPr>
-            <a:r>
-              <a:rPr sz="1400" b="0" i="0">
+            <a:pPr algn="ctr">
+              <a:lnSpc>
+                <a:spcPct val="100000"/>
+              </a:lnSpc>
+            </a:pPr>
+            <a:r>
+              <a:rPr sz="1400" b="1" i="0">
+                <a:solidFill>
+                  <a:srgbClr val="0B1F3A"/>
+                </a:solidFill>
+                <a:latin typeface="Calibri"/>
+              </a:rPr>
+              <a:t>DataQualityAgent</a:t>
+            </a:r>
+          </a:p>
+        </p:txBody>
+      </p:sp>
+      <p:sp>
+        <p:nvSpPr>
+          <p:cNvPr id="28" name="TextBox 27"/>
+          <p:cNvSpPr txBox="1"/>
+          <p:nvPr/>
+        </p:nvSpPr>
+        <p:spPr>
+          <a:xfrm>
+            <a:off x="8211312" y="3950208"/>
+            <a:ext cx="3291840" cy="457200"/>
+          </a:xfrm>
+          <a:prstGeom prst="rect">
+            <a:avLst/>
+          </a:prstGeom>
+          <a:noFill/>
+        </p:spPr>
+        <p:txBody>
+          <a:bodyPr wrap="square" anchor="t">
+            <a:spAutoFit/>
+          </a:bodyPr>
+          <a:lstStyle/>
+          <a:p>
+            <a:pPr algn="ctr">
+              <a:lnSpc>
+                <a:spcPct val="110000"/>
+              </a:lnSpc>
+            </a:pPr>
+            <a:r>
+              <a:rPr sz="1100" b="0" i="0">
                 <a:solidFill>
                   <a:srgbClr val="5A6370"/>
                 </a:solidFill>
                 <a:latin typeface="Calibri"/>
               </a:rPr>
-              <a:t>Cortex Analyst turns plain English into governed SQL</a:t>
-            </a:r>
-          </a:p>
-          <a:p>
-            <a:pPr algn="l">
-              <a:lnSpc>
-                <a:spcPct val="125000"/>
-              </a:lnSpc>
-            </a:pPr>
-            <a:r>
-              <a:rPr sz="1400" b="0" i="0">
+              <a:t>Cortex Analyst</a:t>
+            </a:r>
+          </a:p>
+          <a:p>
+            <a:pPr algn="ctr">
+              <a:lnSpc>
+                <a:spcPct val="110000"/>
+              </a:lnSpc>
+            </a:pPr>
+            <a:r>
+              <a:rPr sz="1100" b="0" i="0">
                 <a:solidFill>
                   <a:srgbClr val="5A6370"/>
                 </a:solidFill>
                 <a:latin typeface="Calibri"/>
               </a:rPr>
-              <a:t>against a native SEMANTIC VIEW.</a:t>
-            </a:r>
-          </a:p>
-        </p:txBody>
-      </p:sp>
-      <p:sp>
-        <p:nvSpPr>
-          <p:cNvPr id="9" name="Rectangle 8"/>
+              <a:t>(text-to-SQL)</a:t>
+            </a:r>
+          </a:p>
+        </p:txBody>
+      </p:sp>
+      <p:cxnSp>
+        <p:nvCxnSpPr>
+          <p:cNvPr id="29" name="Connector 28"/>
+          <p:cNvCxnSpPr/>
+          <p:nvPr/>
+        </p:nvCxnSpPr>
+        <p:spPr>
+          <a:xfrm>
+            <a:off x="9857232.0" y="4434840"/>
+            <a:ext cx="0.0" cy="274320"/>
+          </a:xfrm>
+          <a:prstGeom prst="bentConnector3">
+            <a:avLst/>
+          </a:prstGeom>
+          <a:ln w="19050">
+            <a:solidFill>
+              <a:srgbClr val="5A6370"/>
+            </a:solidFill>
+          </a:ln>
+        </p:spPr>
+        <p:style>
+          <a:lnRef idx="2">
+            <a:schemeClr val="accent1"/>
+          </a:lnRef>
+          <a:fillRef idx="0">
+            <a:schemeClr val="accent1"/>
+          </a:fillRef>
+          <a:effectRef idx="1">
+            <a:schemeClr val="accent1"/>
+          </a:effectRef>
+          <a:fontRef idx="minor">
+            <a:schemeClr val="tx1"/>
+          </a:fontRef>
+        </p:style>
+      </p:cxnSp>
+      <p:sp>
+        <p:nvSpPr>
+          <p:cNvPr id="30" name="Rounded Rectangle 29"/>
           <p:cNvSpPr/>
           <p:nvPr/>
         </p:nvSpPr>
         <p:spPr>
           <a:xfrm>
-            <a:off x="731520" y="3657600"/>
-            <a:ext cx="109728" cy="960120"/>
-          </a:xfrm>
-          <a:prstGeom prst="rect">
-            <a:avLst/>
+            <a:off x="8211312" y="4709160"/>
+            <a:ext cx="3291840" cy="548640"/>
+          </a:xfrm>
+          <a:prstGeom prst="roundRect">
+            <a:avLst>
+              <a:gd name="adj" fmla="val 10000"/>
+            </a:avLst>
           </a:prstGeom>
           <a:solidFill>
-            <a:srgbClr val="29B5E8"/>
+            <a:srgbClr val="E8A82A"/>
           </a:solidFill>
           <a:ln>
             <a:noFill/>
@@ -7941,14 +8652,14 @@
       </p:sp>
       <p:sp>
         <p:nvSpPr>
-          <p:cNvPr id="10" name="TextBox 9"/>
+          <p:cNvPr id="31" name="TextBox 30"/>
           <p:cNvSpPr txBox="1"/>
           <p:nvPr/>
         </p:nvSpPr>
         <p:spPr>
           <a:xfrm>
-            <a:off x="1005840" y="3611880"/>
-            <a:ext cx="10058400" cy="411480"/>
+            <a:off x="8211312" y="4828032"/>
+            <a:ext cx="3291840" cy="365760"/>
           </a:xfrm>
           <a:prstGeom prst="rect">
             <a:avLst/>
@@ -7961,33 +8672,33 @@
           </a:bodyPr>
           <a:lstStyle/>
           <a:p>
-            <a:pPr algn="l">
+            <a:pPr algn="ctr">
               <a:lnSpc>
                 <a:spcPct val="100000"/>
               </a:lnSpc>
             </a:pPr>
             <a:r>
-              <a:rPr sz="1900" b="1" i="0">
-                <a:solidFill>
-                  <a:srgbClr val="0B1F3A"/>
-                </a:solidFill>
-                <a:latin typeface="Calibri"/>
-              </a:rPr>
-              <a:t>📄  Document Q&amp;A (RAG)</a:t>
-            </a:r>
-          </a:p>
-        </p:txBody>
-      </p:sp>
-      <p:sp>
-        <p:nvSpPr>
-          <p:cNvPr id="11" name="TextBox 10"/>
+              <a:rPr sz="1100" b="1" i="0">
+                <a:solidFill>
+                  <a:srgbClr val="FFFFFF"/>
+                </a:solidFill>
+                <a:latin typeface="Calibri"/>
+              </a:rPr>
+              <a:t>DQ_SEMANTIC_VIEW</a:t>
+            </a:r>
+          </a:p>
+        </p:txBody>
+      </p:sp>
+      <p:sp>
+        <p:nvSpPr>
+          <p:cNvPr id="32" name="TextBox 31"/>
           <p:cNvSpPr txBox="1"/>
           <p:nvPr/>
         </p:nvSpPr>
         <p:spPr>
           <a:xfrm>
-            <a:off x="1005840" y="4041648"/>
-            <a:ext cx="10058400" cy="594360"/>
+            <a:off x="731520" y="5486400"/>
+            <a:ext cx="10698480" cy="822960"/>
           </a:xfrm>
           <a:prstGeom prst="rect">
             <a:avLst/>
@@ -8000,93 +8711,49 @@
           </a:bodyPr>
           <a:lstStyle/>
           <a:p>
-            <a:pPr algn="l">
-              <a:lnSpc>
-                <a:spcPct val="125000"/>
-              </a:lnSpc>
-            </a:pPr>
-            <a:r>
-              <a:rPr sz="1400" b="0" i="0">
+            <a:pPr algn="ctr">
+              <a:lnSpc>
+                <a:spcPct val="130000"/>
+              </a:lnSpc>
+            </a:pPr>
+            <a:r>
+              <a:rPr sz="1400" b="0" i="1">
                 <a:solidFill>
                   <a:srgbClr val="5A6370"/>
                 </a:solidFill>
                 <a:latin typeface="Calibri"/>
               </a:rPr>
-              <a:t>Cortex Search auto-embeds and indexes policy documents</a:t>
-            </a:r>
-          </a:p>
-          <a:p>
-            <a:pPr algn="l">
-              <a:lnSpc>
-                <a:spcPct val="125000"/>
-              </a:lnSpc>
-            </a:pPr>
-            <a:r>
-              <a:rPr sz="1400" b="0" i="0">
+              <a:t>Everything runs natively inside Snowflake — one governance boundary, no data leaves the</a:t>
+            </a:r>
+          </a:p>
+          <a:p>
+            <a:pPr algn="ctr">
+              <a:lnSpc>
+                <a:spcPct val="130000"/>
+              </a:lnSpc>
+            </a:pPr>
+            <a:r>
+              <a:rPr sz="1400" b="0" i="1">
                 <a:solidFill>
                   <a:srgbClr val="5A6370"/>
                 </a:solidFill>
                 <a:latin typeface="Calibri"/>
               </a:rPr>
-              <a:t>— no external vector database.</a:t>
-            </a:r>
-          </a:p>
-        </p:txBody>
-      </p:sp>
-      <p:sp>
-        <p:nvSpPr>
-          <p:cNvPr id="12" name="Rectangle 11"/>
-          <p:cNvSpPr/>
-          <p:nvPr/>
-        </p:nvSpPr>
-        <p:spPr>
-          <a:xfrm>
-            <a:off x="731520" y="4846320"/>
-            <a:ext cx="109728" cy="960120"/>
-          </a:xfrm>
-          <a:prstGeom prst="rect">
-            <a:avLst/>
-          </a:prstGeom>
-          <a:solidFill>
-            <a:srgbClr val="29B5E8"/>
-          </a:solidFill>
-          <a:ln>
-            <a:noFill/>
-          </a:ln>
-          <a:effectLst/>
-        </p:spPr>
-        <p:style>
-          <a:lnRef idx="1">
-            <a:schemeClr val="accent1"/>
-          </a:lnRef>
-          <a:fillRef idx="3">
-            <a:schemeClr val="accent1"/>
-          </a:fillRef>
-          <a:effectRef idx="2">
-            <a:schemeClr val="accent1"/>
-          </a:effectRef>
-          <a:fontRef idx="minor">
-            <a:schemeClr val="lt1"/>
-          </a:fontRef>
-        </p:style>
-        <p:txBody>
-          <a:bodyPr rtlCol="0" anchor="ctr"/>
-          <a:lstStyle/>
-          <a:p>
-            <a:pPr algn="ctr"/>
-          </a:p>
-        </p:txBody>
-      </p:sp>
-      <p:sp>
-        <p:nvSpPr>
-          <p:cNvPr id="13" name="TextBox 12"/>
+              <a:t>account, no external vector DB or orchestration service required.</a:t>
+            </a:r>
+          </a:p>
+        </p:txBody>
+      </p:sp>
+      <p:sp>
+        <p:nvSpPr>
+          <p:cNvPr id="33" name="TextBox 32"/>
           <p:cNvSpPr txBox="1"/>
           <p:nvPr/>
         </p:nvSpPr>
         <p:spPr>
           <a:xfrm>
-            <a:off x="1005840" y="4800600"/>
-            <a:ext cx="10058400" cy="411480"/>
+            <a:off x="457200" y="6473952"/>
+            <a:ext cx="5486400" cy="320040"/>
           </a:xfrm>
           <a:prstGeom prst="rect">
             <a:avLst/>
@@ -8105,27 +8772,27 @@
               </a:lnSpc>
             </a:pPr>
             <a:r>
-              <a:rPr sz="1900" b="1" i="0">
-                <a:solidFill>
-                  <a:srgbClr val="0B1F3A"/>
-                </a:solidFill>
-                <a:latin typeface="Calibri"/>
-              </a:rPr>
-              <a:t>🛡  Data Quality Root Cause</a:t>
-            </a:r>
-          </a:p>
-        </p:txBody>
-      </p:sp>
-      <p:sp>
-        <p:nvSpPr>
-          <p:cNvPr id="14" name="TextBox 13"/>
+              <a:rPr sz="900" b="0" i="1">
+                <a:solidFill>
+                  <a:srgbClr val="5A6370"/>
+                </a:solidFill>
+                <a:latin typeface="Calibri"/>
+              </a:rPr>
+              <a:t>Unified Enterprise AI Agents Platform  |  Capgemini x Snowflake Hackathon</a:t>
+            </a:r>
+          </a:p>
+        </p:txBody>
+      </p:sp>
+      <p:sp>
+        <p:nvSpPr>
+          <p:cNvPr id="34" name="TextBox 33"/>
           <p:cNvSpPr txBox="1"/>
           <p:nvPr/>
         </p:nvSpPr>
         <p:spPr>
           <a:xfrm>
-            <a:off x="1005840" y="5230368"/>
-            <a:ext cx="10058400" cy="594360"/>
+            <a:off x="11247120" y="6473952"/>
+            <a:ext cx="731520" cy="320040"/>
           </a:xfrm>
           <a:prstGeom prst="rect">
             <a:avLst/>
@@ -8138,120 +8805,19 @@
           </a:bodyPr>
           <a:lstStyle/>
           <a:p>
-            <a:pPr algn="l">
-              <a:lnSpc>
-                <a:spcPct val="125000"/>
-              </a:lnSpc>
-            </a:pPr>
-            <a:r>
-              <a:rPr sz="1400" b="0" i="0">
+            <a:pPr algn="r">
+              <a:lnSpc>
+                <a:spcPct val="100000"/>
+              </a:lnSpc>
+            </a:pPr>
+            <a:r>
+              <a:rPr sz="900" b="0" i="0">
                 <a:solidFill>
                   <a:srgbClr val="5A6370"/>
                 </a:solidFill>
                 <a:latin typeface="Calibri"/>
               </a:rPr>
-              <a:t>A second semantic view lets business users ask “why did</a:t>
-            </a:r>
-          </a:p>
-          <a:p>
-            <a:pPr algn="l">
-              <a:lnSpc>
-                <a:spcPct val="125000"/>
-              </a:lnSpc>
-            </a:pPr>
-            <a:r>
-              <a:rPr sz="1400" b="0" i="0">
-                <a:solidFill>
-                  <a:srgbClr val="5A6370"/>
-                </a:solidFill>
-                <a:latin typeface="Calibri"/>
-              </a:rPr>
-              <a:t>this fail?” and get a real answer.</a:t>
-            </a:r>
-          </a:p>
-        </p:txBody>
-      </p:sp>
-      <p:sp>
-        <p:nvSpPr>
-          <p:cNvPr id="15" name="Rounded Rectangle 14"/>
-          <p:cNvSpPr/>
-          <p:nvPr/>
-        </p:nvSpPr>
-        <p:spPr>
-          <a:xfrm>
-            <a:off x="731520" y="5989320"/>
-            <a:ext cx="10698480" cy="502920"/>
-          </a:xfrm>
-          <a:prstGeom prst="roundRect">
-            <a:avLst>
-              <a:gd name="adj" fmla="val 15000"/>
-            </a:avLst>
-          </a:prstGeom>
-          <a:solidFill>
-            <a:srgbClr val="0B1F3A"/>
-          </a:solidFill>
-          <a:ln>
-            <a:noFill/>
-          </a:ln>
-          <a:effectLst/>
-        </p:spPr>
-        <p:style>
-          <a:lnRef idx="1">
-            <a:schemeClr val="accent1"/>
-          </a:lnRef>
-          <a:fillRef idx="3">
-            <a:schemeClr val="accent1"/>
-          </a:fillRef>
-          <a:effectRef idx="2">
-            <a:schemeClr val="accent1"/>
-          </a:effectRef>
-          <a:fontRef idx="minor">
-            <a:schemeClr val="lt1"/>
-          </a:fontRef>
-        </p:style>
-        <p:txBody>
-          <a:bodyPr rtlCol="0" anchor="ctr"/>
-          <a:lstStyle/>
-          <a:p>
-            <a:pPr algn="ctr"/>
-          </a:p>
-        </p:txBody>
-      </p:sp>
-      <p:sp>
-        <p:nvSpPr>
-          <p:cNvPr id="16" name="TextBox 15"/>
-          <p:cNvSpPr txBox="1"/>
-          <p:nvPr/>
-        </p:nvSpPr>
-        <p:spPr>
-          <a:xfrm>
-            <a:off x="731520" y="6053328"/>
-            <a:ext cx="10698480" cy="365760"/>
-          </a:xfrm>
-          <a:prstGeom prst="rect">
-            <a:avLst/>
-          </a:prstGeom>
-          <a:noFill/>
-        </p:spPr>
-        <p:txBody>
-          <a:bodyPr wrap="square" anchor="t">
-            <a:spAutoFit/>
-          </a:bodyPr>
-          <a:lstStyle/>
-          <a:p>
-            <a:pPr algn="ctr">
-              <a:lnSpc>
-                <a:spcPct val="100000"/>
-              </a:lnSpc>
-            </a:pPr>
-            <a:r>
-              <a:rPr sz="1500" b="1" i="0">
-                <a:solidFill>
-                  <a:srgbClr val="FFFFFF"/>
-                </a:solidFill>
-                <a:latin typeface="Calibri"/>
-              </a:rPr>
-              <a:t>One chat box.  One agent.  Automatic routing between all three.</a:t>
+              <a:t>5</a:t>
             </a:r>
           </a:p>
         </p:txBody>
@@ -8264,7 +8830,7 @@
 </p:sld>
 </file>
 
-<file path=ppt/slides/slide5.xml><?xml version="1.0" encoding="utf-8"?>
+<file path=ppt\slides\slide6.xml><?xml version="1.0" encoding="utf-8"?>
 <p:sld xmlns:a="http://schemas.openxmlformats.org/drawingml/2006/main" xmlns:p="http://schemas.openxmlformats.org/presentationml/2006/main" xmlns:r="http://schemas.openxmlformats.org/officeDocument/2006/relationships">
   <p:cSld>
     <p:spTree>
@@ -8370,8 +8936,8 @@
         </p:nvSpPr>
         <p:spPr>
           <a:xfrm>
-            <a:off x="548640" y="256032"/>
-            <a:ext cx="8229600" cy="548640"/>
+            <a:off x="548640" y="137160"/>
+            <a:ext cx="822960" cy="822960"/>
           </a:xfrm>
           <a:prstGeom prst="rect">
             <a:avLst/>
@@ -8384,79 +8950,33 @@
           </a:bodyPr>
           <a:lstStyle/>
           <a:p>
-            <a:pPr algn="l">
+            <a:pPr algn="ctr">
               <a:lnSpc>
                 <a:spcPct val="100000"/>
               </a:lnSpc>
             </a:pPr>
             <a:r>
-              <a:rPr sz="3000" b="1" i="0">
-                <a:solidFill>
-                  <a:srgbClr val="FFFFFF"/>
-                </a:solidFill>
-                <a:latin typeface="Georgia"/>
-              </a:rPr>
-              <a:t>Architecture</a:t>
-            </a:r>
-          </a:p>
-        </p:txBody>
-      </p:sp>
-      <p:sp>
-        <p:nvSpPr>
-          <p:cNvPr id="5" name="Rounded Rectangle 4"/>
-          <p:cNvSpPr/>
-          <p:nvPr/>
-        </p:nvSpPr>
-        <p:spPr>
-          <a:xfrm>
-            <a:off x="4480560" y="1371600"/>
-            <a:ext cx="3200400" cy="640080"/>
-          </a:xfrm>
-          <a:prstGeom prst="roundRect">
-            <a:avLst>
-              <a:gd name="adj" fmla="val 15000"/>
-            </a:avLst>
-          </a:prstGeom>
-          <a:solidFill>
-            <a:srgbClr val="FF4B4B"/>
-          </a:solidFill>
-          <a:ln>
-            <a:noFill/>
-          </a:ln>
-          <a:effectLst/>
-        </p:spPr>
-        <p:style>
-          <a:lnRef idx="1">
-            <a:schemeClr val="accent1"/>
-          </a:lnRef>
-          <a:fillRef idx="3">
-            <a:schemeClr val="accent1"/>
-          </a:fillRef>
-          <a:effectRef idx="2">
-            <a:schemeClr val="accent1"/>
-          </a:effectRef>
-          <a:fontRef idx="minor">
-            <a:schemeClr val="lt1"/>
-          </a:fontRef>
-        </p:style>
-        <p:txBody>
-          <a:bodyPr rtlCol="0" anchor="ctr"/>
-          <a:lstStyle/>
-          <a:p>
-            <a:pPr algn="ctr"/>
-          </a:p>
-        </p:txBody>
-      </p:sp>
-      <p:sp>
-        <p:nvSpPr>
-          <p:cNvPr id="6" name="TextBox 5"/>
+              <a:rPr sz="4200" b="0" i="0">
+                <a:solidFill>
+                  <a:srgbClr val="1A1A1A"/>
+                </a:solidFill>
+                <a:latin typeface="Calibri"/>
+              </a:rPr>
+              <a:t>📊</a:t>
+            </a:r>
+          </a:p>
+        </p:txBody>
+      </p:sp>
+      <p:sp>
+        <p:nvSpPr>
+          <p:cNvPr id="5" name="TextBox 4"/>
           <p:cNvSpPr txBox="1"/>
           <p:nvPr/>
         </p:nvSpPr>
         <p:spPr>
           <a:xfrm>
-            <a:off x="4480560" y="1508760"/>
-            <a:ext cx="3200400" cy="365760"/>
+            <a:off x="1371600" y="164592"/>
+            <a:ext cx="8686800" cy="457200"/>
           </a:xfrm>
           <a:prstGeom prst="rect">
             <a:avLst/>
@@ -8469,58 +8989,152 @@
           </a:bodyPr>
           <a:lstStyle/>
           <a:p>
-            <a:pPr algn="ctr">
+            <a:pPr algn="l">
               <a:lnSpc>
                 <a:spcPct val="100000"/>
               </a:lnSpc>
             </a:pPr>
             <a:r>
-              <a:rPr sz="1300" b="1" i="0">
+              <a:rPr sz="2600" b="1" i="0">
                 <a:solidFill>
                   <a:srgbClr val="FFFFFF"/>
                 </a:solidFill>
-                <a:latin typeface="Calibri"/>
-              </a:rPr>
-              <a:t>Streamlit-in-Snowflake  —  Chat UI</a:t>
-            </a:r>
-          </a:p>
-        </p:txBody>
-      </p:sp>
-      <p:cxnSp>
-        <p:nvCxnSpPr>
-          <p:cNvPr id="7" name="Connector 6"/>
-          <p:cNvCxnSpPr/>
-          <p:nvPr/>
-        </p:nvCxnSpPr>
-        <p:spPr>
-          <a:xfrm>
-            <a:off x="6080760" y="2011680"/>
-            <a:ext cx="0" cy="365760"/>
-          </a:xfrm>
-          <a:prstGeom prst="bentConnector3">
-            <a:avLst/>
-          </a:prstGeom>
-          <a:ln w="25400">
-            <a:solidFill>
-              <a:srgbClr val="5A6370"/>
-            </a:solidFill>
-          </a:ln>
-        </p:spPr>
-        <p:style>
-          <a:lnRef idx="2">
-            <a:schemeClr val="accent1"/>
-          </a:lnRef>
-          <a:fillRef idx="0">
-            <a:schemeClr val="accent1"/>
-          </a:fillRef>
-          <a:effectRef idx="1">
-            <a:schemeClr val="accent1"/>
-          </a:effectRef>
-          <a:fontRef idx="minor">
-            <a:schemeClr val="tx1"/>
-          </a:fontRef>
-        </p:style>
-      </p:cxnSp>
+                <a:latin typeface="Georgia"/>
+              </a:rPr>
+              <a:t>Agent 1 — Self-Service Analytics</a:t>
+            </a:r>
+          </a:p>
+        </p:txBody>
+      </p:sp>
+      <p:sp>
+        <p:nvSpPr>
+          <p:cNvPr id="6" name="TextBox 5"/>
+          <p:cNvSpPr txBox="1"/>
+          <p:nvPr/>
+        </p:nvSpPr>
+        <p:spPr>
+          <a:xfrm>
+            <a:off x="1371600" y="621792"/>
+            <a:ext cx="8686800" cy="365760"/>
+          </a:xfrm>
+          <a:prstGeom prst="rect">
+            <a:avLst/>
+          </a:prstGeom>
+          <a:noFill/>
+        </p:spPr>
+        <p:txBody>
+          <a:bodyPr wrap="square" anchor="t">
+            <a:spAutoFit/>
+          </a:bodyPr>
+          <a:lstStyle/>
+          <a:p>
+            <a:pPr algn="l">
+              <a:lnSpc>
+                <a:spcPct val="100000"/>
+              </a:lnSpc>
+            </a:pPr>
+            <a:r>
+              <a:rPr sz="1300" b="0" i="0">
+                <a:solidFill>
+                  <a:srgbClr val="29B5E8"/>
+                </a:solidFill>
+                <a:latin typeface="Calibri"/>
+              </a:rPr>
+              <a:t>Structured data, answered in plain English</a:t>
+            </a:r>
+          </a:p>
+        </p:txBody>
+      </p:sp>
+      <p:sp>
+        <p:nvSpPr>
+          <p:cNvPr id="7" name="TextBox 6"/>
+          <p:cNvSpPr txBox="1"/>
+          <p:nvPr/>
+        </p:nvSpPr>
+        <p:spPr>
+          <a:xfrm>
+            <a:off x="731520" y="1554480"/>
+            <a:ext cx="6217920" cy="3840480"/>
+          </a:xfrm>
+          <a:prstGeom prst="rect">
+            <a:avLst/>
+          </a:prstGeom>
+          <a:noFill/>
+        </p:spPr>
+        <p:txBody>
+          <a:bodyPr wrap="square">
+            <a:spAutoFit/>
+          </a:bodyPr>
+          <a:lstStyle/>
+          <a:p>
+            <a:pPr>
+              <a:spcAft>
+                <a:spcPts val="1400"/>
+              </a:spcAft>
+            </a:pPr>
+            <a:r>
+              <a:rPr sz="1600">
+                <a:solidFill>
+                  <a:srgbClr val="1A1A1A"/>
+                </a:solidFill>
+                <a:latin typeface="Calibri"/>
+              </a:rPr>
+              <a:t>▸  Native SEMANTIC VIEW over 6 operational tables — customers,
+policies, claims, billing, agents, at-risk policies</a:t>
+            </a:r>
+          </a:p>
+          <a:p>
+            <a:pPr>
+              <a:spcAft>
+                <a:spcPts val="1400"/>
+              </a:spcAft>
+            </a:pPr>
+            <a:r>
+              <a:rPr sz="1600">
+                <a:solidFill>
+                  <a:srgbClr val="1A1A1A"/>
+                </a:solidFill>
+                <a:latin typeface="Calibri"/>
+              </a:rPr>
+              <a:t>▸  Business-friendly metrics: loss ratio, total premium, fraud
+claim count, revenue at risk, churn probability</a:t>
+            </a:r>
+          </a:p>
+          <a:p>
+            <a:pPr>
+              <a:spcAft>
+                <a:spcPts val="1400"/>
+              </a:spcAft>
+            </a:pPr>
+            <a:r>
+              <a:rPr sz="1600">
+                <a:solidFill>
+                  <a:srgbClr val="1A1A1A"/>
+                </a:solidFill>
+                <a:latin typeface="Calibri"/>
+              </a:rPr>
+              <a:t>▸  Cortex Analyst translates the question into governed SQL —
+shown inline for full transparency</a:t>
+            </a:r>
+          </a:p>
+          <a:p>
+            <a:pPr>
+              <a:spcAft>
+                <a:spcPts val="1400"/>
+              </a:spcAft>
+            </a:pPr>
+            <a:r>
+              <a:rPr sz="1600">
+                <a:solidFill>
+                  <a:srgbClr val="1A1A1A"/>
+                </a:solidFill>
+                <a:latin typeface="Calibri"/>
+              </a:rPr>
+              <a:t>▸  Relationships declared explicitly, so joins are always correct</a:t>
+            </a:r>
+          </a:p>
+        </p:txBody>
+      </p:sp>
       <p:sp>
         <p:nvSpPr>
           <p:cNvPr id="8" name="Rounded Rectangle 7"/>
@@ -8529,12 +9143,12 @@
         </p:nvSpPr>
         <p:spPr>
           <a:xfrm>
-            <a:off x="4023360" y="2377440"/>
-            <a:ext cx="4114800" cy="777240"/>
+            <a:off x="7315200" y="1554480"/>
+            <a:ext cx="4114800" cy="2743200"/>
           </a:xfrm>
           <a:prstGeom prst="roundRect">
             <a:avLst>
-              <a:gd name="adj" fmla="val 15000"/>
+              <a:gd name="adj" fmla="val 8000"/>
             </a:avLst>
           </a:prstGeom>
           <a:solidFill>
@@ -8575,8 +9189,8 @@
         </p:nvSpPr>
         <p:spPr>
           <a:xfrm>
-            <a:off x="4023360" y="2487168"/>
-            <a:ext cx="4114800" cy="320040"/>
+            <a:off x="7589520" y="1737360"/>
+            <a:ext cx="3566160" cy="365760"/>
           </a:xfrm>
           <a:prstGeom prst="rect">
             <a:avLst/>
@@ -8589,19 +9203,19 @@
           </a:bodyPr>
           <a:lstStyle/>
           <a:p>
-            <a:pPr algn="ctr">
+            <a:pPr algn="l">
               <a:lnSpc>
                 <a:spcPct val="100000"/>
               </a:lnSpc>
             </a:pPr>
             <a:r>
-              <a:rPr sz="1500" b="1" i="0">
-                <a:solidFill>
-                  <a:srgbClr val="FFFFFF"/>
-                </a:solidFill>
-                <a:latin typeface="Calibri"/>
-              </a:rPr>
-              <a:t>ENTERPRISE_AI_AGENT</a:t>
+              <a:rPr sz="1200" b="1" i="0">
+                <a:solidFill>
+                  <a:srgbClr val="29B5E8"/>
+                </a:solidFill>
+                <a:latin typeface="Calibri"/>
+              </a:rPr>
+              <a:t>Example question</a:t>
             </a:r>
           </a:p>
         </p:txBody>
@@ -8614,8 +9228,8 @@
         </p:nvSpPr>
         <p:spPr>
           <a:xfrm>
-            <a:off x="4023360" y="2798064"/>
-            <a:ext cx="4114800" cy="320040"/>
+            <a:off x="7589520" y="2148840"/>
+            <a:ext cx="3566160" cy="1097280"/>
           </a:xfrm>
           <a:prstGeom prst="rect">
             <a:avLst/>
@@ -8628,547 +9242,36 @@
           </a:bodyPr>
           <a:lstStyle/>
           <a:p>
-            <a:pPr algn="ctr">
-              <a:lnSpc>
-                <a:spcPct val="100000"/>
-              </a:lnSpc>
-            </a:pPr>
-            <a:r>
-              <a:rPr sz="1100" b="0" i="0">
-                <a:solidFill>
-                  <a:srgbClr val="29B5E8"/>
-                </a:solidFill>
-                <a:latin typeface="Calibri"/>
-              </a:rPr>
-              <a:t>Snowflake Cortex Agent  •  auto-orchestration</a:t>
-            </a:r>
-          </a:p>
-        </p:txBody>
-      </p:sp>
-      <p:cxnSp>
-        <p:nvCxnSpPr>
-          <p:cNvPr id="11" name="Connector 10"/>
-          <p:cNvCxnSpPr/>
-          <p:nvPr/>
-        </p:nvCxnSpPr>
-        <p:spPr>
-          <a:xfrm flipH="1">
-            <a:off x="2331720.0" y="3154680"/>
-            <a:ext cx="3749040.0" cy="411480"/>
-          </a:xfrm>
-          <a:prstGeom prst="bentConnector3">
-            <a:avLst/>
-          </a:prstGeom>
-          <a:ln w="19050">
-            <a:solidFill>
-              <a:srgbClr val="5A6370"/>
-            </a:solidFill>
-          </a:ln>
-        </p:spPr>
-        <p:style>
-          <a:lnRef idx="2">
-            <a:schemeClr val="accent1"/>
-          </a:lnRef>
-          <a:fillRef idx="0">
-            <a:schemeClr val="accent1"/>
-          </a:fillRef>
-          <a:effectRef idx="1">
-            <a:schemeClr val="accent1"/>
-          </a:effectRef>
-          <a:fontRef idx="minor">
-            <a:schemeClr val="tx1"/>
-          </a:fontRef>
-        </p:style>
-      </p:cxnSp>
-      <p:sp>
-        <p:nvSpPr>
-          <p:cNvPr id="12" name="Rounded Rectangle 11"/>
+            <a:pPr algn="l">
+              <a:lnSpc>
+                <a:spcPct val="130000"/>
+              </a:lnSpc>
+            </a:pPr>
+            <a:r>
+              <a:rPr sz="1500" b="0" i="1">
+                <a:solidFill>
+                  <a:srgbClr val="FFFFFF"/>
+                </a:solidFill>
+                <a:latin typeface="Calibri"/>
+              </a:rPr>
+              <a:t>“What's our average loss ratio by policy type?”</a:t>
+            </a:r>
+          </a:p>
+        </p:txBody>
+      </p:sp>
+      <p:sp>
+        <p:nvSpPr>
+          <p:cNvPr id="11" name="Rectangle 10"/>
           <p:cNvSpPr/>
           <p:nvPr/>
         </p:nvSpPr>
         <p:spPr>
           <a:xfrm>
-            <a:off x="685800" y="3566160"/>
-            <a:ext cx="3291840" cy="868680"/>
-          </a:xfrm>
-          <a:prstGeom prst="roundRect">
-            <a:avLst>
-              <a:gd name="adj" fmla="val 10000"/>
-            </a:avLst>
-          </a:prstGeom>
-          <a:solidFill>
-            <a:srgbClr val="F4F6F9"/>
-          </a:solidFill>
-          <a:ln w="19050">
-            <a:solidFill>
-              <a:srgbClr val="0070AD"/>
-            </a:solidFill>
-          </a:ln>
-          <a:effectLst/>
-        </p:spPr>
-        <p:style>
-          <a:lnRef idx="1">
-            <a:schemeClr val="accent1"/>
-          </a:lnRef>
-          <a:fillRef idx="3">
-            <a:schemeClr val="accent1"/>
-          </a:fillRef>
-          <a:effectRef idx="2">
-            <a:schemeClr val="accent1"/>
-          </a:effectRef>
-          <a:fontRef idx="minor">
-            <a:schemeClr val="lt1"/>
-          </a:fontRef>
-        </p:style>
-        <p:txBody>
-          <a:bodyPr rtlCol="0" anchor="ctr"/>
-          <a:lstStyle/>
-          <a:p>
-            <a:pPr algn="ctr"/>
-          </a:p>
-        </p:txBody>
-      </p:sp>
-      <p:sp>
-        <p:nvSpPr>
-          <p:cNvPr id="13" name="TextBox 12"/>
-          <p:cNvSpPr txBox="1"/>
-          <p:nvPr/>
-        </p:nvSpPr>
-        <p:spPr>
-          <a:xfrm>
-            <a:off x="685800" y="3639312"/>
-            <a:ext cx="3291840" cy="320040"/>
-          </a:xfrm>
-          <a:prstGeom prst="rect">
-            <a:avLst/>
-          </a:prstGeom>
-          <a:noFill/>
-        </p:spPr>
-        <p:txBody>
-          <a:bodyPr wrap="square" anchor="t">
-            <a:spAutoFit/>
-          </a:bodyPr>
-          <a:lstStyle/>
-          <a:p>
-            <a:pPr algn="ctr">
-              <a:lnSpc>
-                <a:spcPct val="100000"/>
-              </a:lnSpc>
-            </a:pPr>
-            <a:r>
-              <a:rPr sz="1400" b="1" i="0">
-                <a:solidFill>
-                  <a:srgbClr val="0B1F3A"/>
-                </a:solidFill>
-                <a:latin typeface="Calibri"/>
-              </a:rPr>
-              <a:t>AnalyticsAgent</a:t>
-            </a:r>
-          </a:p>
-        </p:txBody>
-      </p:sp>
-      <p:sp>
-        <p:nvSpPr>
-          <p:cNvPr id="14" name="TextBox 13"/>
-          <p:cNvSpPr txBox="1"/>
-          <p:nvPr/>
-        </p:nvSpPr>
-        <p:spPr>
-          <a:xfrm>
-            <a:off x="685800" y="3950208"/>
-            <a:ext cx="3291840" cy="457200"/>
-          </a:xfrm>
-          <a:prstGeom prst="rect">
-            <a:avLst/>
-          </a:prstGeom>
-          <a:noFill/>
-        </p:spPr>
-        <p:txBody>
-          <a:bodyPr wrap="square" anchor="t">
-            <a:spAutoFit/>
-          </a:bodyPr>
-          <a:lstStyle/>
-          <a:p>
-            <a:pPr algn="ctr">
-              <a:lnSpc>
-                <a:spcPct val="110000"/>
-              </a:lnSpc>
-            </a:pPr>
-            <a:r>
-              <a:rPr sz="1100" b="0" i="0">
-                <a:solidFill>
-                  <a:srgbClr val="5A6370"/>
-                </a:solidFill>
-                <a:latin typeface="Calibri"/>
-              </a:rPr>
-              <a:t>Cortex Analyst</a:t>
-            </a:r>
-          </a:p>
-          <a:p>
-            <a:pPr algn="ctr">
-              <a:lnSpc>
-                <a:spcPct val="110000"/>
-              </a:lnSpc>
-            </a:pPr>
-            <a:r>
-              <a:rPr sz="1100" b="0" i="0">
-                <a:solidFill>
-                  <a:srgbClr val="5A6370"/>
-                </a:solidFill>
-                <a:latin typeface="Calibri"/>
-              </a:rPr>
-              <a:t>(text-to-SQL)</a:t>
-            </a:r>
-          </a:p>
-        </p:txBody>
-      </p:sp>
-      <p:cxnSp>
-        <p:nvCxnSpPr>
-          <p:cNvPr id="15" name="Connector 14"/>
-          <p:cNvCxnSpPr/>
-          <p:nvPr/>
-        </p:nvCxnSpPr>
-        <p:spPr>
-          <a:xfrm>
-            <a:off x="2331720.0" y="4434840"/>
-            <a:ext cx="0.0" cy="274320"/>
-          </a:xfrm>
-          <a:prstGeom prst="bentConnector3">
-            <a:avLst/>
-          </a:prstGeom>
-          <a:ln w="19050">
-            <a:solidFill>
-              <a:srgbClr val="5A6370"/>
-            </a:solidFill>
-          </a:ln>
-        </p:spPr>
-        <p:style>
-          <a:lnRef idx="2">
-            <a:schemeClr val="accent1"/>
-          </a:lnRef>
-          <a:fillRef idx="0">
-            <a:schemeClr val="accent1"/>
-          </a:fillRef>
-          <a:effectRef idx="1">
-            <a:schemeClr val="accent1"/>
-          </a:effectRef>
-          <a:fontRef idx="minor">
-            <a:schemeClr val="tx1"/>
-          </a:fontRef>
-        </p:style>
-      </p:cxnSp>
-      <p:sp>
-        <p:nvSpPr>
-          <p:cNvPr id="16" name="Rounded Rectangle 15"/>
-          <p:cNvSpPr/>
-          <p:nvPr/>
-        </p:nvSpPr>
-        <p:spPr>
-          <a:xfrm>
-            <a:off x="685800" y="4709160"/>
-            <a:ext cx="3291840" cy="548640"/>
-          </a:xfrm>
-          <a:prstGeom prst="roundRect">
-            <a:avLst>
-              <a:gd name="adj" fmla="val 10000"/>
-            </a:avLst>
-          </a:prstGeom>
-          <a:solidFill>
-            <a:srgbClr val="0070AD"/>
-          </a:solidFill>
-          <a:ln>
-            <a:noFill/>
-          </a:ln>
-          <a:effectLst/>
-        </p:spPr>
-        <p:style>
-          <a:lnRef idx="1">
-            <a:schemeClr val="accent1"/>
-          </a:lnRef>
-          <a:fillRef idx="3">
-            <a:schemeClr val="accent1"/>
-          </a:fillRef>
-          <a:effectRef idx="2">
-            <a:schemeClr val="accent1"/>
-          </a:effectRef>
-          <a:fontRef idx="minor">
-            <a:schemeClr val="lt1"/>
-          </a:fontRef>
-        </p:style>
-        <p:txBody>
-          <a:bodyPr rtlCol="0" anchor="ctr"/>
-          <a:lstStyle/>
-          <a:p>
-            <a:pPr algn="ctr"/>
-          </a:p>
-        </p:txBody>
-      </p:sp>
-      <p:sp>
-        <p:nvSpPr>
-          <p:cNvPr id="17" name="TextBox 16"/>
-          <p:cNvSpPr txBox="1"/>
-          <p:nvPr/>
-        </p:nvSpPr>
-        <p:spPr>
-          <a:xfrm>
-            <a:off x="685800" y="4828032"/>
-            <a:ext cx="3291840" cy="365760"/>
-          </a:xfrm>
-          <a:prstGeom prst="rect">
-            <a:avLst/>
-          </a:prstGeom>
-          <a:noFill/>
-        </p:spPr>
-        <p:txBody>
-          <a:bodyPr wrap="square" anchor="t">
-            <a:spAutoFit/>
-          </a:bodyPr>
-          <a:lstStyle/>
-          <a:p>
-            <a:pPr algn="ctr">
-              <a:lnSpc>
-                <a:spcPct val="100000"/>
-              </a:lnSpc>
-            </a:pPr>
-            <a:r>
-              <a:rPr sz="1100" b="1" i="0">
-                <a:solidFill>
-                  <a:srgbClr val="FFFFFF"/>
-                </a:solidFill>
-                <a:latin typeface="Calibri"/>
-              </a:rPr>
-              <a:t>ANALYTICS_SEMANTIC_VIEW</a:t>
-            </a:r>
-          </a:p>
-        </p:txBody>
-      </p:sp>
-      <p:cxnSp>
-        <p:nvCxnSpPr>
-          <p:cNvPr id="18" name="Connector 17"/>
-          <p:cNvCxnSpPr/>
-          <p:nvPr/>
-        </p:nvCxnSpPr>
-        <p:spPr>
-          <a:xfrm>
-            <a:off x="6080760" y="3154680"/>
-            <a:ext cx="18288.0" cy="411480"/>
-          </a:xfrm>
-          <a:prstGeom prst="bentConnector3">
-            <a:avLst/>
-          </a:prstGeom>
-          <a:ln w="19050">
-            <a:solidFill>
-              <a:srgbClr val="5A6370"/>
-            </a:solidFill>
-          </a:ln>
-        </p:spPr>
-        <p:style>
-          <a:lnRef idx="2">
-            <a:schemeClr val="accent1"/>
-          </a:lnRef>
-          <a:fillRef idx="0">
-            <a:schemeClr val="accent1"/>
-          </a:fillRef>
-          <a:effectRef idx="1">
-            <a:schemeClr val="accent1"/>
-          </a:effectRef>
-          <a:fontRef idx="minor">
-            <a:schemeClr val="tx1"/>
-          </a:fontRef>
-        </p:style>
-      </p:cxnSp>
-      <p:sp>
-        <p:nvSpPr>
-          <p:cNvPr id="19" name="Rounded Rectangle 18"/>
-          <p:cNvSpPr/>
-          <p:nvPr/>
-        </p:nvSpPr>
-        <p:spPr>
-          <a:xfrm>
-            <a:off x="4453128" y="3566160"/>
-            <a:ext cx="3291840" cy="868680"/>
-          </a:xfrm>
-          <a:prstGeom prst="roundRect">
-            <a:avLst>
-              <a:gd name="adj" fmla="val 10000"/>
-            </a:avLst>
-          </a:prstGeom>
-          <a:solidFill>
-            <a:srgbClr val="F4F6F9"/>
-          </a:solidFill>
-          <a:ln w="19050">
-            <a:solidFill>
-              <a:srgbClr val="29B5E8"/>
-            </a:solidFill>
-          </a:ln>
-          <a:effectLst/>
-        </p:spPr>
-        <p:style>
-          <a:lnRef idx="1">
-            <a:schemeClr val="accent1"/>
-          </a:lnRef>
-          <a:fillRef idx="3">
-            <a:schemeClr val="accent1"/>
-          </a:fillRef>
-          <a:effectRef idx="2">
-            <a:schemeClr val="accent1"/>
-          </a:effectRef>
-          <a:fontRef idx="minor">
-            <a:schemeClr val="lt1"/>
-          </a:fontRef>
-        </p:style>
-        <p:txBody>
-          <a:bodyPr rtlCol="0" anchor="ctr"/>
-          <a:lstStyle/>
-          <a:p>
-            <a:pPr algn="ctr"/>
-          </a:p>
-        </p:txBody>
-      </p:sp>
-      <p:sp>
-        <p:nvSpPr>
-          <p:cNvPr id="20" name="TextBox 19"/>
-          <p:cNvSpPr txBox="1"/>
-          <p:nvPr/>
-        </p:nvSpPr>
-        <p:spPr>
-          <a:xfrm>
-            <a:off x="4453128" y="3639312"/>
-            <a:ext cx="3291840" cy="320040"/>
-          </a:xfrm>
-          <a:prstGeom prst="rect">
-            <a:avLst/>
-          </a:prstGeom>
-          <a:noFill/>
-        </p:spPr>
-        <p:txBody>
-          <a:bodyPr wrap="square" anchor="t">
-            <a:spAutoFit/>
-          </a:bodyPr>
-          <a:lstStyle/>
-          <a:p>
-            <a:pPr algn="ctr">
-              <a:lnSpc>
-                <a:spcPct val="100000"/>
-              </a:lnSpc>
-            </a:pPr>
-            <a:r>
-              <a:rPr sz="1400" b="1" i="0">
-                <a:solidFill>
-                  <a:srgbClr val="0B1F3A"/>
-                </a:solidFill>
-                <a:latin typeface="Calibri"/>
-              </a:rPr>
-              <a:t>DocumentQA</a:t>
-            </a:r>
-          </a:p>
-        </p:txBody>
-      </p:sp>
-      <p:sp>
-        <p:nvSpPr>
-          <p:cNvPr id="21" name="TextBox 20"/>
-          <p:cNvSpPr txBox="1"/>
-          <p:nvPr/>
-        </p:nvSpPr>
-        <p:spPr>
-          <a:xfrm>
-            <a:off x="4453128" y="3950208"/>
-            <a:ext cx="3291840" cy="457200"/>
-          </a:xfrm>
-          <a:prstGeom prst="rect">
-            <a:avLst/>
-          </a:prstGeom>
-          <a:noFill/>
-        </p:spPr>
-        <p:txBody>
-          <a:bodyPr wrap="square" anchor="t">
-            <a:spAutoFit/>
-          </a:bodyPr>
-          <a:lstStyle/>
-          <a:p>
-            <a:pPr algn="ctr">
-              <a:lnSpc>
-                <a:spcPct val="110000"/>
-              </a:lnSpc>
-            </a:pPr>
-            <a:r>
-              <a:rPr sz="1100" b="0" i="0">
-                <a:solidFill>
-                  <a:srgbClr val="5A6370"/>
-                </a:solidFill>
-                <a:latin typeface="Calibri"/>
-              </a:rPr>
-              <a:t>Cortex Search</a:t>
-            </a:r>
-          </a:p>
-          <a:p>
-            <a:pPr algn="ctr">
-              <a:lnSpc>
-                <a:spcPct val="110000"/>
-              </a:lnSpc>
-            </a:pPr>
-            <a:r>
-              <a:rPr sz="1100" b="0" i="0">
-                <a:solidFill>
-                  <a:srgbClr val="5A6370"/>
-                </a:solidFill>
-                <a:latin typeface="Calibri"/>
-              </a:rPr>
-              <a:t>(RAG)</a:t>
-            </a:r>
-          </a:p>
-        </p:txBody>
-      </p:sp>
-      <p:cxnSp>
-        <p:nvCxnSpPr>
-          <p:cNvPr id="22" name="Connector 21"/>
-          <p:cNvCxnSpPr/>
-          <p:nvPr/>
-        </p:nvCxnSpPr>
-        <p:spPr>
-          <a:xfrm>
-            <a:off x="6099048.0" y="4434840"/>
-            <a:ext cx="0.0" cy="274320"/>
-          </a:xfrm>
-          <a:prstGeom prst="bentConnector3">
-            <a:avLst/>
-          </a:prstGeom>
-          <a:ln w="19050">
-            <a:solidFill>
-              <a:srgbClr val="5A6370"/>
-            </a:solidFill>
-          </a:ln>
-        </p:spPr>
-        <p:style>
-          <a:lnRef idx="2">
-            <a:schemeClr val="accent1"/>
-          </a:lnRef>
-          <a:fillRef idx="0">
-            <a:schemeClr val="accent1"/>
-          </a:fillRef>
-          <a:effectRef idx="1">
-            <a:schemeClr val="accent1"/>
-          </a:effectRef>
-          <a:fontRef idx="minor">
-            <a:schemeClr val="tx1"/>
-          </a:fontRef>
-        </p:style>
-      </p:cxnSp>
-      <p:sp>
-        <p:nvSpPr>
-          <p:cNvPr id="23" name="Rounded Rectangle 22"/>
-          <p:cNvSpPr/>
-          <p:nvPr/>
-        </p:nvSpPr>
-        <p:spPr>
-          <a:xfrm>
-            <a:off x="4453128" y="4709160"/>
-            <a:ext cx="3291840" cy="548640"/>
-          </a:xfrm>
-          <a:prstGeom prst="roundRect">
-            <a:avLst>
-              <a:gd name="adj" fmla="val 10000"/>
-            </a:avLst>
+            <a:off x="7589520" y="3383280"/>
+            <a:ext cx="3566160" cy="19050"/>
+          </a:xfrm>
+          <a:prstGeom prst="rect">
+            <a:avLst/>
           </a:prstGeom>
           <a:solidFill>
             <a:srgbClr val="29B5E8"/>
@@ -9202,14 +9305,14 @@
       </p:sp>
       <p:sp>
         <p:nvSpPr>
-          <p:cNvPr id="24" name="TextBox 23"/>
+          <p:cNvPr id="12" name="TextBox 11"/>
           <p:cNvSpPr txBox="1"/>
           <p:nvPr/>
         </p:nvSpPr>
         <p:spPr>
           <a:xfrm>
-            <a:off x="4453128" y="4828032"/>
-            <a:ext cx="3291840" cy="365760"/>
+            <a:off x="7589520" y="3520440"/>
+            <a:ext cx="3566160" cy="685800"/>
           </a:xfrm>
           <a:prstGeom prst="rect">
             <a:avLst/>
@@ -9222,116 +9325,49 @@
           </a:bodyPr>
           <a:lstStyle/>
           <a:p>
-            <a:pPr algn="ctr">
-              <a:lnSpc>
-                <a:spcPct val="100000"/>
-              </a:lnSpc>
-            </a:pPr>
-            <a:r>
-              <a:rPr sz="1100" b="1" i="0">
-                <a:solidFill>
-                  <a:srgbClr val="FFFFFF"/>
-                </a:solidFill>
-                <a:latin typeface="Calibri"/>
-              </a:rPr>
-              <a:t>POLICY_DOCUMENT_SEARCH_SVC</a:t>
-            </a:r>
-          </a:p>
-        </p:txBody>
-      </p:sp>
-      <p:cxnSp>
-        <p:nvCxnSpPr>
-          <p:cNvPr id="25" name="Connector 24"/>
-          <p:cNvCxnSpPr/>
-          <p:nvPr/>
-        </p:nvCxnSpPr>
-        <p:spPr>
-          <a:xfrm>
-            <a:off x="6080760" y="3154680"/>
-            <a:ext cx="3776472.0" cy="411480"/>
-          </a:xfrm>
-          <a:prstGeom prst="bentConnector3">
-            <a:avLst/>
-          </a:prstGeom>
-          <a:ln w="19050">
-            <a:solidFill>
-              <a:srgbClr val="5A6370"/>
-            </a:solidFill>
-          </a:ln>
-        </p:spPr>
-        <p:style>
-          <a:lnRef idx="2">
-            <a:schemeClr val="accent1"/>
-          </a:lnRef>
-          <a:fillRef idx="0">
-            <a:schemeClr val="accent1"/>
-          </a:fillRef>
-          <a:effectRef idx="1">
-            <a:schemeClr val="accent1"/>
-          </a:effectRef>
-          <a:fontRef idx="minor">
-            <a:schemeClr val="tx1"/>
-          </a:fontRef>
-        </p:style>
-      </p:cxnSp>
-      <p:sp>
-        <p:nvSpPr>
-          <p:cNvPr id="26" name="Rounded Rectangle 25"/>
-          <p:cNvSpPr/>
-          <p:nvPr/>
-        </p:nvSpPr>
-        <p:spPr>
-          <a:xfrm>
-            <a:off x="8211312" y="3566160"/>
-            <a:ext cx="3291840" cy="868680"/>
-          </a:xfrm>
-          <a:prstGeom prst="roundRect">
-            <a:avLst>
-              <a:gd name="adj" fmla="val 10000"/>
-            </a:avLst>
-          </a:prstGeom>
-          <a:solidFill>
-            <a:srgbClr val="F4F6F9"/>
-          </a:solidFill>
-          <a:ln w="19050">
-            <a:solidFill>
-              <a:srgbClr val="E8A82A"/>
-            </a:solidFill>
-          </a:ln>
-          <a:effectLst/>
-        </p:spPr>
-        <p:style>
-          <a:lnRef idx="1">
-            <a:schemeClr val="accent1"/>
-          </a:lnRef>
-          <a:fillRef idx="3">
-            <a:schemeClr val="accent1"/>
-          </a:fillRef>
-          <a:effectRef idx="2">
-            <a:schemeClr val="accent1"/>
-          </a:effectRef>
-          <a:fontRef idx="minor">
-            <a:schemeClr val="lt1"/>
-          </a:fontRef>
-        </p:style>
-        <p:txBody>
-          <a:bodyPr rtlCol="0" anchor="ctr"/>
-          <a:lstStyle/>
-          <a:p>
-            <a:pPr algn="ctr"/>
-          </a:p>
-        </p:txBody>
-      </p:sp>
-      <p:sp>
-        <p:nvSpPr>
-          <p:cNvPr id="27" name="TextBox 26"/>
+            <a:pPr algn="l">
+              <a:lnSpc>
+                <a:spcPct val="125000"/>
+              </a:lnSpc>
+            </a:pPr>
+            <a:r>
+              <a:rPr sz="1100" b="0" i="0">
+                <a:solidFill>
+                  <a:srgbClr val="C7D6E8"/>
+                </a:solidFill>
+                <a:latin typeface="Calibri"/>
+              </a:rPr>
+              <a:t>Verified live: Life ~57.5%, Health/Home ~55.4%, Auto ~53.1%</a:t>
+            </a:r>
+          </a:p>
+          <a:p>
+            <a:pPr algn="l">
+              <a:lnSpc>
+                <a:spcPct val="125000"/>
+              </a:lnSpc>
+            </a:pPr>
+            <a:r>
+              <a:rPr sz="1100" b="0" i="0">
+                <a:solidFill>
+                  <a:srgbClr val="C7D6E8"/>
+                </a:solidFill>
+                <a:latin typeface="Calibri"/>
+              </a:rPr>
+              <a:t>— all computed from real generated SQL, not canned data.</a:t>
+            </a:r>
+          </a:p>
+        </p:txBody>
+      </p:sp>
+      <p:sp>
+        <p:nvSpPr>
+          <p:cNvPr id="13" name="TextBox 12"/>
           <p:cNvSpPr txBox="1"/>
           <p:nvPr/>
         </p:nvSpPr>
         <p:spPr>
           <a:xfrm>
-            <a:off x="8211312" y="3639312"/>
-            <a:ext cx="3291840" cy="320040"/>
+            <a:off x="457200" y="6473952"/>
+            <a:ext cx="5486400" cy="320040"/>
           </a:xfrm>
           <a:prstGeom prst="rect">
             <a:avLst/>
@@ -9344,33 +9380,33 @@
           </a:bodyPr>
           <a:lstStyle/>
           <a:p>
-            <a:pPr algn="ctr">
+            <a:pPr algn="l">
               <a:lnSpc>
                 <a:spcPct val="100000"/>
               </a:lnSpc>
             </a:pPr>
             <a:r>
-              <a:rPr sz="1400" b="1" i="0">
-                <a:solidFill>
-                  <a:srgbClr val="0B1F3A"/>
-                </a:solidFill>
-                <a:latin typeface="Calibri"/>
-              </a:rPr>
-              <a:t>DataQualityAgent</a:t>
-            </a:r>
-          </a:p>
-        </p:txBody>
-      </p:sp>
-      <p:sp>
-        <p:nvSpPr>
-          <p:cNvPr id="28" name="TextBox 27"/>
+              <a:rPr sz="900" b="0" i="1">
+                <a:solidFill>
+                  <a:srgbClr val="5A6370"/>
+                </a:solidFill>
+                <a:latin typeface="Calibri"/>
+              </a:rPr>
+              <a:t>Unified Enterprise AI Agents Platform  |  Capgemini x Snowflake Hackathon</a:t>
+            </a:r>
+          </a:p>
+        </p:txBody>
+      </p:sp>
+      <p:sp>
+        <p:nvSpPr>
+          <p:cNvPr id="14" name="TextBox 13"/>
           <p:cNvSpPr txBox="1"/>
           <p:nvPr/>
         </p:nvSpPr>
         <p:spPr>
           <a:xfrm>
-            <a:off x="8211312" y="3950208"/>
-            <a:ext cx="3291840" cy="457200"/>
+            <a:off x="11247120" y="6473952"/>
+            <a:ext cx="731520" cy="320040"/>
           </a:xfrm>
           <a:prstGeom prst="rect">
             <a:avLst/>
@@ -9383,288 +9419,19 @@
           </a:bodyPr>
           <a:lstStyle/>
           <a:p>
-            <a:pPr algn="ctr">
-              <a:lnSpc>
-                <a:spcPct val="110000"/>
-              </a:lnSpc>
-            </a:pPr>
-            <a:r>
-              <a:rPr sz="1100" b="0" i="0">
+            <a:pPr algn="r">
+              <a:lnSpc>
+                <a:spcPct val="100000"/>
+              </a:lnSpc>
+            </a:pPr>
+            <a:r>
+              <a:rPr sz="900" b="0" i="0">
                 <a:solidFill>
                   <a:srgbClr val="5A6370"/>
                 </a:solidFill>
                 <a:latin typeface="Calibri"/>
               </a:rPr>
-              <a:t>Cortex Analyst</a:t>
-            </a:r>
-          </a:p>
-          <a:p>
-            <a:pPr algn="ctr">
-              <a:lnSpc>
-                <a:spcPct val="110000"/>
-              </a:lnSpc>
-            </a:pPr>
-            <a:r>
-              <a:rPr sz="1100" b="0" i="0">
-                <a:solidFill>
-                  <a:srgbClr val="5A6370"/>
-                </a:solidFill>
-                <a:latin typeface="Calibri"/>
-              </a:rPr>
-              <a:t>(text-to-SQL)</a:t>
-            </a:r>
-          </a:p>
-        </p:txBody>
-      </p:sp>
-      <p:cxnSp>
-        <p:nvCxnSpPr>
-          <p:cNvPr id="29" name="Connector 28"/>
-          <p:cNvCxnSpPr/>
-          <p:nvPr/>
-        </p:nvCxnSpPr>
-        <p:spPr>
-          <a:xfrm>
-            <a:off x="9857232.0" y="4434840"/>
-            <a:ext cx="0.0" cy="274320"/>
-          </a:xfrm>
-          <a:prstGeom prst="bentConnector3">
-            <a:avLst/>
-          </a:prstGeom>
-          <a:ln w="19050">
-            <a:solidFill>
-              <a:srgbClr val="5A6370"/>
-            </a:solidFill>
-          </a:ln>
-        </p:spPr>
-        <p:style>
-          <a:lnRef idx="2">
-            <a:schemeClr val="accent1"/>
-          </a:lnRef>
-          <a:fillRef idx="0">
-            <a:schemeClr val="accent1"/>
-          </a:fillRef>
-          <a:effectRef idx="1">
-            <a:schemeClr val="accent1"/>
-          </a:effectRef>
-          <a:fontRef idx="minor">
-            <a:schemeClr val="tx1"/>
-          </a:fontRef>
-        </p:style>
-      </p:cxnSp>
-      <p:sp>
-        <p:nvSpPr>
-          <p:cNvPr id="30" name="Rounded Rectangle 29"/>
-          <p:cNvSpPr/>
-          <p:nvPr/>
-        </p:nvSpPr>
-        <p:spPr>
-          <a:xfrm>
-            <a:off x="8211312" y="4709160"/>
-            <a:ext cx="3291840" cy="548640"/>
-          </a:xfrm>
-          <a:prstGeom prst="roundRect">
-            <a:avLst>
-              <a:gd name="adj" fmla="val 10000"/>
-            </a:avLst>
-          </a:prstGeom>
-          <a:solidFill>
-            <a:srgbClr val="E8A82A"/>
-          </a:solidFill>
-          <a:ln>
-            <a:noFill/>
-          </a:ln>
-          <a:effectLst/>
-        </p:spPr>
-        <p:style>
-          <a:lnRef idx="1">
-            <a:schemeClr val="accent1"/>
-          </a:lnRef>
-          <a:fillRef idx="3">
-            <a:schemeClr val="accent1"/>
-          </a:fillRef>
-          <a:effectRef idx="2">
-            <a:schemeClr val="accent1"/>
-          </a:effectRef>
-          <a:fontRef idx="minor">
-            <a:schemeClr val="lt1"/>
-          </a:fontRef>
-        </p:style>
-        <p:txBody>
-          <a:bodyPr rtlCol="0" anchor="ctr"/>
-          <a:lstStyle/>
-          <a:p>
-            <a:pPr algn="ctr"/>
-          </a:p>
-        </p:txBody>
-      </p:sp>
-      <p:sp>
-        <p:nvSpPr>
-          <p:cNvPr id="31" name="TextBox 30"/>
-          <p:cNvSpPr txBox="1"/>
-          <p:nvPr/>
-        </p:nvSpPr>
-        <p:spPr>
-          <a:xfrm>
-            <a:off x="8211312" y="4828032"/>
-            <a:ext cx="3291840" cy="365760"/>
-          </a:xfrm>
-          <a:prstGeom prst="rect">
-            <a:avLst/>
-          </a:prstGeom>
-          <a:noFill/>
-        </p:spPr>
-        <p:txBody>
-          <a:bodyPr wrap="square" anchor="t">
-            <a:spAutoFit/>
-          </a:bodyPr>
-          <a:lstStyle/>
-          <a:p>
-            <a:pPr algn="ctr">
-              <a:lnSpc>
-                <a:spcPct val="100000"/>
-              </a:lnSpc>
-            </a:pPr>
-            <a:r>
-              <a:rPr sz="1100" b="1" i="0">
-                <a:solidFill>
-                  <a:srgbClr val="FFFFFF"/>
-                </a:solidFill>
-                <a:latin typeface="Calibri"/>
-              </a:rPr>
-              <a:t>DQ_SEMANTIC_VIEW</a:t>
-            </a:r>
-          </a:p>
-        </p:txBody>
-      </p:sp>
-      <p:sp>
-        <p:nvSpPr>
-          <p:cNvPr id="32" name="TextBox 31"/>
-          <p:cNvSpPr txBox="1"/>
-          <p:nvPr/>
-        </p:nvSpPr>
-        <p:spPr>
-          <a:xfrm>
-            <a:off x="731520" y="5486400"/>
-            <a:ext cx="10698480" cy="822960"/>
-          </a:xfrm>
-          <a:prstGeom prst="rect">
-            <a:avLst/>
-          </a:prstGeom>
-          <a:noFill/>
-        </p:spPr>
-        <p:txBody>
-          <a:bodyPr wrap="square" anchor="t">
-            <a:spAutoFit/>
-          </a:bodyPr>
-          <a:lstStyle/>
-          <a:p>
-            <a:pPr algn="ctr">
-              <a:lnSpc>
-                <a:spcPct val="130000"/>
-              </a:lnSpc>
-            </a:pPr>
-            <a:r>
-              <a:rPr sz="1400" b="0" i="1">
-                <a:solidFill>
-                  <a:srgbClr val="5A6370"/>
-                </a:solidFill>
-                <a:latin typeface="Calibri"/>
-              </a:rPr>
-              <a:t>Everything runs natively inside Snowflake — one governance boundary, no data leaves the</a:t>
-            </a:r>
-          </a:p>
-          <a:p>
-            <a:pPr algn="ctr">
-              <a:lnSpc>
-                <a:spcPct val="130000"/>
-              </a:lnSpc>
-            </a:pPr>
-            <a:r>
-              <a:rPr sz="1400" b="0" i="1">
-                <a:solidFill>
-                  <a:srgbClr val="5A6370"/>
-                </a:solidFill>
-                <a:latin typeface="Calibri"/>
-              </a:rPr>
-              <a:t>account, no external vector DB or orchestration service required.</a:t>
-            </a:r>
-          </a:p>
-        </p:txBody>
-      </p:sp>
-      <p:sp>
-        <p:nvSpPr>
-          <p:cNvPr id="33" name="TextBox 32"/>
-          <p:cNvSpPr txBox="1"/>
-          <p:nvPr/>
-        </p:nvSpPr>
-        <p:spPr>
-          <a:xfrm>
-            <a:off x="457200" y="6473952"/>
-            <a:ext cx="5486400" cy="320040"/>
-          </a:xfrm>
-          <a:prstGeom prst="rect">
-            <a:avLst/>
-          </a:prstGeom>
-          <a:noFill/>
-        </p:spPr>
-        <p:txBody>
-          <a:bodyPr wrap="square" anchor="t">
-            <a:spAutoFit/>
-          </a:bodyPr>
-          <a:lstStyle/>
-          <a:p>
-            <a:pPr algn="l">
-              <a:lnSpc>
-                <a:spcPct val="100000"/>
-              </a:lnSpc>
-            </a:pPr>
-            <a:r>
-              <a:rPr sz="900" b="0" i="1">
-                <a:solidFill>
-                  <a:srgbClr val="5A6370"/>
-                </a:solidFill>
-                <a:latin typeface="Calibri"/>
-              </a:rPr>
-              <a:t>Unified Enterprise AI Agents Platform  |  Capgemini x Snowflake Hackathon</a:t>
-            </a:r>
-          </a:p>
-        </p:txBody>
-      </p:sp>
-      <p:sp>
-        <p:nvSpPr>
-          <p:cNvPr id="34" name="TextBox 33"/>
-          <p:cNvSpPr txBox="1"/>
-          <p:nvPr/>
-        </p:nvSpPr>
-        <p:spPr>
-          <a:xfrm>
-            <a:off x="11247120" y="6473952"/>
-            <a:ext cx="731520" cy="320040"/>
-          </a:xfrm>
-          <a:prstGeom prst="rect">
-            <a:avLst/>
-          </a:prstGeom>
-          <a:noFill/>
-        </p:spPr>
-        <p:txBody>
-          <a:bodyPr wrap="square" anchor="t">
-            <a:spAutoFit/>
-          </a:bodyPr>
-          <a:lstStyle/>
-          <a:p>
-            <a:pPr algn="r">
-              <a:lnSpc>
-                <a:spcPct val="100000"/>
-              </a:lnSpc>
-            </a:pPr>
-            <a:r>
-              <a:rPr sz="900" b="0" i="0">
-                <a:solidFill>
-                  <a:srgbClr val="5A6370"/>
-                </a:solidFill>
-                <a:latin typeface="Calibri"/>
-              </a:rPr>
-              <a:t>5</a:t>
+              <a:t>6</a:t>
             </a:r>
           </a:p>
         </p:txBody>
@@ -9677,7 +9444,7 @@
 </p:sld>
 </file>
 
-<file path=ppt/slides/slide6.xml><?xml version="1.0" encoding="utf-8"?>
+<file path=ppt\slides\slide7.xml><?xml version="1.0" encoding="utf-8"?>
 <p:sld xmlns:a="http://schemas.openxmlformats.org/drawingml/2006/main" xmlns:p="http://schemas.openxmlformats.org/presentationml/2006/main" xmlns:r="http://schemas.openxmlformats.org/officeDocument/2006/relationships">
   <p:cSld>
     <p:spTree>
@@ -9809,7 +9576,7 @@
                 </a:solidFill>
                 <a:latin typeface="Calibri"/>
               </a:rPr>
-              <a:t>📊</a:t>
+              <a:t>📄</a:t>
             </a:r>
           </a:p>
         </p:txBody>
@@ -9848,7 +9615,7 @@
                 </a:solidFill>
                 <a:latin typeface="Georgia"/>
               </a:rPr>
-              <a:t>Agent 1 — Self-Service Analytics</a:t>
+              <a:t>Agent 2 — Document Q&amp;A (RAG)</a:t>
             </a:r>
           </a:p>
         </p:txBody>
@@ -9887,7 +9654,7 @@
                 </a:solidFill>
                 <a:latin typeface="Calibri"/>
               </a:rPr>
-              <a:t>Structured data, answered in plain English</a:t>
+              <a:t>Ask questions of unstructured policy documents</a:t>
             </a:r>
           </a:p>
         </p:txBody>
@@ -9926,8 +9693,8 @@
                 </a:solidFill>
                 <a:latin typeface="Calibri"/>
               </a:rPr>
-              <a:t>▸  Native SEMANTIC VIEW over 6 operational tables — customers,
-policies, claims, billing, agents, at-risk policies</a:t>
+              <a:t>▸  Policy documents chunked with
+SNOWFLAKE.CORTEX.SPLIT_TEXT_RECURSIVE_CHARACTER</a:t>
             </a:r>
           </a:p>
           <a:p>
@@ -9943,8 +9710,8 @@
                 </a:solidFill>
                 <a:latin typeface="Calibri"/>
               </a:rPr>
-              <a:t>▸  Business-friendly metrics: loss ratio, total premium, fraud
-claim count, revenue at risk, churn probability</a:t>
+              <a:t>▸  A CORTEX SEARCH SERVICE indexes chunk text with
+auto-managed embeddings — no external vector DB</a:t>
             </a:r>
           </a:p>
           <a:p>
@@ -9960,8 +9727,8 @@
                 </a:solidFill>
                 <a:latin typeface="Calibri"/>
               </a:rPr>
-              <a:t>▸  Cortex Analyst translates the question into governed SQL —
-shown inline for full transparency</a:t>
+              <a:t>▸  Answers cite the source document, so business users can
+verify, not just trust</a:t>
             </a:r>
           </a:p>
           <a:p>
@@ -9977,7 +9744,7 @@
                 </a:solidFill>
                 <a:latin typeface="Calibri"/>
               </a:rPr>
-              <a:t>▸  Relationships declared explicitly, so joins are always correct</a:t>
+              <a:t>▸  Filterable by policy ID, document type, and title</a:t>
             </a:r>
           </a:p>
         </p:txBody>
@@ -10101,7 +9868,7 @@
                 </a:solidFill>
                 <a:latin typeface="Calibri"/>
               </a:rPr>
-              <a:t>“What's our average loss ratio by policy type?”</a:t>
+              <a:t>“What are the exclusion clauses for water damage in the Homeowners policy?”</a:t>
             </a:r>
           </a:p>
         </p:txBody>
@@ -10184,7 +9951,7 @@
                 </a:solidFill>
                 <a:latin typeface="Calibri"/>
               </a:rPr>
-              <a:t>Verified live: Life ~57.5%, Health/Home ~55.4%, Auto ~53.1%</a:t>
+              <a:t>Verified live: correctly distinguished that flood is excluded,</a:t>
             </a:r>
           </a:p>
           <a:p>
@@ -10200,7 +9967,7 @@
                 </a:solidFill>
                 <a:latin typeface="Calibri"/>
               </a:rPr>
-              <a:t>— all computed from real generated SQL, not canned data.</a:t>
+              <a:t>while general water damage (e.g. burst pipes) is not.</a:t>
             </a:r>
           </a:p>
         </p:txBody>
@@ -10278,7 +10045,7 @@
                 </a:solidFill>
                 <a:latin typeface="Calibri"/>
               </a:rPr>
-              <a:t>6</a:t>
+              <a:t>7</a:t>
             </a:r>
           </a:p>
         </p:txBody>
@@ -10291,7 +10058,7 @@
 </p:sld>
 </file>
 
-<file path=ppt/slides/slide7.xml><?xml version="1.0" encoding="utf-8"?>
+<file path=ppt\slides\slide8.xml><?xml version="1.0" encoding="utf-8"?>
 <p:sld xmlns:a="http://schemas.openxmlformats.org/drawingml/2006/main" xmlns:p="http://schemas.openxmlformats.org/presentationml/2006/main" xmlns:r="http://schemas.openxmlformats.org/officeDocument/2006/relationships">
   <p:cSld>
     <p:spTree>
@@ -10423,7 +10190,7 @@
                 </a:solidFill>
                 <a:latin typeface="Calibri"/>
               </a:rPr>
-              <a:t>📄</a:t>
+              <a:t>🛡</a:t>
             </a:r>
           </a:p>
         </p:txBody>
@@ -10462,7 +10229,7 @@
                 </a:solidFill>
                 <a:latin typeface="Georgia"/>
               </a:rPr>
-              <a:t>Agent 2 — Document Q&amp;A (RAG)</a:t>
+              <a:t>Agent 3 — Data Quality Root Cause</a:t>
             </a:r>
           </a:p>
         </p:txBody>
@@ -10501,7 +10268,7 @@
                 </a:solidFill>
                 <a:latin typeface="Calibri"/>
               </a:rPr>
-              <a:t>Ask questions of unstructured policy documents</a:t>
+              <a:t>Conversational root-cause analysis, not a dashboard</a:t>
             </a:r>
           </a:p>
         </p:txBody>
@@ -10540,8 +10307,8 @@
                 </a:solidFill>
                 <a:latin typeface="Calibri"/>
               </a:rPr>
-              <a:t>▸  Policy documents chunked with
-SNOWFLAKE.CORTEX.SPLIT_TEXT_RECURSIVE_CHARACTER</a:t>
+              <a:t>▸  A second SEMANTIC VIEW over DQ_RULES, DQ_RESULTS,
+DQ_COLUMN_HEALTH, and DQ_SCORES</a:t>
             </a:r>
           </a:p>
           <a:p>
@@ -10557,8 +10324,8 @@
                 </a:solidFill>
                 <a:latin typeface="Calibri"/>
               </a:rPr>
-              <a:t>▸  A CORTEX SEARCH SERVICE indexes chunk text with
-auto-managed embeddings — no external vector DB</a:t>
+              <a:t>▸  Turns “why did this fail?” into an evidence-backed answer,
+not a support ticket</a:t>
             </a:r>
           </a:p>
           <a:p>
@@ -10574,8 +10341,8 @@
                 </a:solidFill>
                 <a:latin typeface="Calibri"/>
               </a:rPr>
-              <a:t>▸  Answers cite the source document, so business users can
-verify, not just trust</a:t>
+              <a:t>▸  Cites the exact rule, pass rate, and threshold that triggered
+the failure</a:t>
             </a:r>
           </a:p>
           <a:p>
@@ -10591,7 +10358,8 @@
                 </a:solidFill>
                 <a:latin typeface="Calibri"/>
               </a:rPr>
-              <a:t>▸  Filterable by policy ID, document type, and title</a:t>
+              <a:t>▸  Replaces manually opening a DQ dashboard and
+cross-referencing rule logs</a:t>
             </a:r>
           </a:p>
         </p:txBody>
@@ -10715,7 +10483,7 @@
                 </a:solidFill>
                 <a:latin typeface="Calibri"/>
               </a:rPr>
-              <a:t>“What are the exclusion clauses for water damage in the Homeowners policy?”</a:t>
+              <a:t>“Why did the DQ check on CUSTOMERS.EMAIL fail?”</a:t>
             </a:r>
           </a:p>
         </p:txBody>
@@ -10798,7 +10566,7 @@
                 </a:solidFill>
                 <a:latin typeface="Calibri"/>
               </a:rPr>
-              <a:t>Verified live: correctly distinguished that flood is excluded,</a:t>
+              <a:t>Verified live: identified the UNIQUE_CUSTOMER_EMAIL rule,</a:t>
             </a:r>
           </a:p>
           <a:p>
@@ -10814,7 +10582,7 @@
                 </a:solidFill>
                 <a:latin typeface="Calibri"/>
               </a:rPr>
-              <a:t>while general water damage (e.g. burst pipes) is not.</a:t>
+              <a:t>94% pass rate vs. 99% threshold, root cause = duplicate emails.</a:t>
             </a:r>
           </a:p>
         </p:txBody>
@@ -10892,7 +10660,7 @@
                 </a:solidFill>
                 <a:latin typeface="Calibri"/>
               </a:rPr>
-              <a:t>7</a:t>
+              <a:t>8</a:t>
             </a:r>
           </a:p>
         </p:txBody>
@@ -10905,7 +10673,7 @@
 </p:sld>
 </file>
 
-<file path=ppt/slides/slide8.xml><?xml version="1.0" encoding="utf-8"?>
+<file path=ppt\slides\slide9.xml><?xml version="1.0" encoding="utf-8"?>
 <p:sld xmlns:a="http://schemas.openxmlformats.org/drawingml/2006/main" xmlns:p="http://schemas.openxmlformats.org/presentationml/2006/main" xmlns:r="http://schemas.openxmlformats.org/officeDocument/2006/relationships">
   <p:cSld>
     <p:spTree>
@@ -11011,8 +10779,8 @@
         </p:nvSpPr>
         <p:spPr>
           <a:xfrm>
-            <a:off x="548640" y="137160"/>
-            <a:ext cx="822960" cy="822960"/>
+            <a:off x="548640" y="256032"/>
+            <a:ext cx="9144000" cy="548640"/>
           </a:xfrm>
           <a:prstGeom prst="rect">
             <a:avLst/>
@@ -11025,33 +10793,57 @@
           </a:bodyPr>
           <a:lstStyle/>
           <a:p>
-            <a:pPr algn="ctr">
+            <a:pPr algn="l">
               <a:lnSpc>
                 <a:spcPct val="100000"/>
               </a:lnSpc>
             </a:pPr>
             <a:r>
-              <a:rPr sz="4200" b="0" i="0">
-                <a:solidFill>
-                  <a:srgbClr val="1A1A1A"/>
-                </a:solidFill>
-                <a:latin typeface="Calibri"/>
-              </a:rPr>
-              <a:t>🛡</a:t>
-            </a:r>
-          </a:p>
-        </p:txBody>
-      </p:sp>
-      <p:sp>
-        <p:nvSpPr>
-          <p:cNvPr id="5" name="TextBox 4"/>
+              <a:rPr sz="2600" b="1" i="0">
+                <a:solidFill>
+                  <a:srgbClr val="FFFFFF"/>
+                </a:solidFill>
+                <a:latin typeface="Georgia"/>
+              </a:rPr>
+              <a:t>Live Proof — Data Quality Root Cause</a:t>
+            </a:r>
+          </a:p>
+        </p:txBody>
+      </p:sp>
+      <p:pic>
+        <p:nvPicPr>
+          <p:cNvPr id="5" name="Picture 4" descr="stream10.png"/>
+          <p:cNvPicPr>
+            <a:picLocks noChangeAspect="1"/>
+          </p:cNvPicPr>
+          <p:nvPr/>
+        </p:nvPicPr>
+        <p:blipFill>
+          <a:blip r:embed="rId2"/>
+          <a:stretch>
+            <a:fillRect/>
+          </a:stretch>
+        </p:blipFill>
+        <p:spPr>
+          <a:xfrm>
+            <a:off x="731520" y="1638348"/>
+            <a:ext cx="10698480" cy="4404263"/>
+          </a:xfrm>
+          <a:prstGeom prst="rect">
+            <a:avLst/>
+          </a:prstGeom>
+        </p:spPr>
+      </p:pic>
+      <p:sp>
+        <p:nvSpPr>
+          <p:cNvPr id="6" name="TextBox 5"/>
           <p:cNvSpPr txBox="1"/>
           <p:nvPr/>
         </p:nvSpPr>
         <p:spPr>
           <a:xfrm>
-            <a:off x="1371600" y="164592"/>
-            <a:ext cx="8686800" cy="457200"/>
+            <a:off x="457200" y="6473952"/>
+            <a:ext cx="5486400" cy="320040"/>
           </a:xfrm>
           <a:prstGeom prst="rect">
             <a:avLst/>
@@ -11070,27 +10862,27 @@
               </a:lnSpc>
             </a:pPr>
             <a:r>
-              <a:rPr sz="2600" b="1" i="0">
-                <a:solidFill>
-                  <a:srgbClr val="FFFFFF"/>
-                </a:solidFill>
-                <a:latin typeface="Georgia"/>
-              </a:rPr>
-              <a:t>Agent 3 — Data Quality Root Cause</a:t>
-            </a:r>
-          </a:p>
-        </p:txBody>
-      </p:sp>
-      <p:sp>
-        <p:nvSpPr>
-          <p:cNvPr id="6" name="TextBox 5"/>
+              <a:rPr sz="900" b="0" i="1">
+                <a:solidFill>
+                  <a:srgbClr val="5A6370"/>
+                </a:solidFill>
+                <a:latin typeface="Calibri"/>
+              </a:rPr>
+              <a:t>Unified Enterprise AI Agents Platform  |  Capgemini x Snowflake Hackathon</a:t>
+            </a:r>
+          </a:p>
+        </p:txBody>
+      </p:sp>
+      <p:sp>
+        <p:nvSpPr>
+          <p:cNvPr id="7" name="TextBox 6"/>
           <p:cNvSpPr txBox="1"/>
           <p:nvPr/>
         </p:nvSpPr>
         <p:spPr>
           <a:xfrm>
-            <a:off x="1371600" y="621792"/>
-            <a:ext cx="8686800" cy="365760"/>
+            <a:off x="11247120" y="6473952"/>
+            <a:ext cx="731520" cy="320040"/>
           </a:xfrm>
           <a:prstGeom prst="rect">
             <a:avLst/>
@@ -11103,411 +10895,19 @@
           </a:bodyPr>
           <a:lstStyle/>
           <a:p>
-            <a:pPr algn="l">
+            <a:pPr algn="r">
               <a:lnSpc>
                 <a:spcPct val="100000"/>
               </a:lnSpc>
             </a:pPr>
             <a:r>
-              <a:rPr sz="1300" b="0" i="0">
-                <a:solidFill>
-                  <a:srgbClr val="29B5E8"/>
-                </a:solidFill>
-                <a:latin typeface="Calibri"/>
-              </a:rPr>
-              <a:t>Conversational root-cause analysis, not a dashboard</a:t>
-            </a:r>
-          </a:p>
-        </p:txBody>
-      </p:sp>
-      <p:sp>
-        <p:nvSpPr>
-          <p:cNvPr id="7" name="TextBox 6"/>
-          <p:cNvSpPr txBox="1"/>
-          <p:nvPr/>
-        </p:nvSpPr>
-        <p:spPr>
-          <a:xfrm>
-            <a:off x="731520" y="1554480"/>
-            <a:ext cx="6217920" cy="3840480"/>
-          </a:xfrm>
-          <a:prstGeom prst="rect">
-            <a:avLst/>
-          </a:prstGeom>
-          <a:noFill/>
-        </p:spPr>
-        <p:txBody>
-          <a:bodyPr wrap="square">
-            <a:spAutoFit/>
-          </a:bodyPr>
-          <a:lstStyle/>
-          <a:p>
-            <a:pPr>
-              <a:spcAft>
-                <a:spcPts val="1400"/>
-              </a:spcAft>
-            </a:pPr>
-            <a:r>
-              <a:rPr sz="1600">
-                <a:solidFill>
-                  <a:srgbClr val="1A1A1A"/>
-                </a:solidFill>
-                <a:latin typeface="Calibri"/>
-              </a:rPr>
-              <a:t>▸  A second SEMANTIC VIEW over DQ_RULES, DQ_RESULTS,
-DQ_COLUMN_HEALTH, and DQ_SCORES</a:t>
-            </a:r>
-          </a:p>
-          <a:p>
-            <a:pPr>
-              <a:spcAft>
-                <a:spcPts val="1400"/>
-              </a:spcAft>
-            </a:pPr>
-            <a:r>
-              <a:rPr sz="1600">
-                <a:solidFill>
-                  <a:srgbClr val="1A1A1A"/>
-                </a:solidFill>
-                <a:latin typeface="Calibri"/>
-              </a:rPr>
-              <a:t>▸  Turns “why did this fail?” into an evidence-backed answer,
-not a support ticket</a:t>
-            </a:r>
-          </a:p>
-          <a:p>
-            <a:pPr>
-              <a:spcAft>
-                <a:spcPts val="1400"/>
-              </a:spcAft>
-            </a:pPr>
-            <a:r>
-              <a:rPr sz="1600">
-                <a:solidFill>
-                  <a:srgbClr val="1A1A1A"/>
-                </a:solidFill>
-                <a:latin typeface="Calibri"/>
-              </a:rPr>
-              <a:t>▸  Cites the exact rule, pass rate, and threshold that triggered
-the failure</a:t>
-            </a:r>
-          </a:p>
-          <a:p>
-            <a:pPr>
-              <a:spcAft>
-                <a:spcPts val="1400"/>
-              </a:spcAft>
-            </a:pPr>
-            <a:r>
-              <a:rPr sz="1600">
-                <a:solidFill>
-                  <a:srgbClr val="1A1A1A"/>
-                </a:solidFill>
-                <a:latin typeface="Calibri"/>
-              </a:rPr>
-              <a:t>▸  Replaces manually opening a DQ dashboard and
-cross-referencing rule logs</a:t>
-            </a:r>
-          </a:p>
-        </p:txBody>
-      </p:sp>
-      <p:sp>
-        <p:nvSpPr>
-          <p:cNvPr id="8" name="Rounded Rectangle 7"/>
-          <p:cNvSpPr/>
-          <p:nvPr/>
-        </p:nvSpPr>
-        <p:spPr>
-          <a:xfrm>
-            <a:off x="7315200" y="1554480"/>
-            <a:ext cx="4114800" cy="2743200"/>
-          </a:xfrm>
-          <a:prstGeom prst="roundRect">
-            <a:avLst>
-              <a:gd name="adj" fmla="val 8000"/>
-            </a:avLst>
-          </a:prstGeom>
-          <a:solidFill>
-            <a:srgbClr val="0B1F3A"/>
-          </a:solidFill>
-          <a:ln>
-            <a:noFill/>
-          </a:ln>
-          <a:effectLst/>
-        </p:spPr>
-        <p:style>
-          <a:lnRef idx="1">
-            <a:schemeClr val="accent1"/>
-          </a:lnRef>
-          <a:fillRef idx="3">
-            <a:schemeClr val="accent1"/>
-          </a:fillRef>
-          <a:effectRef idx="2">
-            <a:schemeClr val="accent1"/>
-          </a:effectRef>
-          <a:fontRef idx="minor">
-            <a:schemeClr val="lt1"/>
-          </a:fontRef>
-        </p:style>
-        <p:txBody>
-          <a:bodyPr rtlCol="0" anchor="ctr"/>
-          <a:lstStyle/>
-          <a:p>
-            <a:pPr algn="ctr"/>
-          </a:p>
-        </p:txBody>
-      </p:sp>
-      <p:sp>
-        <p:nvSpPr>
-          <p:cNvPr id="9" name="TextBox 8"/>
-          <p:cNvSpPr txBox="1"/>
-          <p:nvPr/>
-        </p:nvSpPr>
-        <p:spPr>
-          <a:xfrm>
-            <a:off x="7589520" y="1737360"/>
-            <a:ext cx="3566160" cy="365760"/>
-          </a:xfrm>
-          <a:prstGeom prst="rect">
-            <a:avLst/>
-          </a:prstGeom>
-          <a:noFill/>
-        </p:spPr>
-        <p:txBody>
-          <a:bodyPr wrap="square" anchor="t">
-            <a:spAutoFit/>
-          </a:bodyPr>
-          <a:lstStyle/>
-          <a:p>
-            <a:pPr algn="l">
-              <a:lnSpc>
-                <a:spcPct val="100000"/>
-              </a:lnSpc>
-            </a:pPr>
-            <a:r>
-              <a:rPr sz="1200" b="1" i="0">
-                <a:solidFill>
-                  <a:srgbClr val="29B5E8"/>
-                </a:solidFill>
-                <a:latin typeface="Calibri"/>
-              </a:rPr>
-              <a:t>Example question</a:t>
-            </a:r>
-          </a:p>
-        </p:txBody>
-      </p:sp>
-      <p:sp>
-        <p:nvSpPr>
-          <p:cNvPr id="10" name="TextBox 9"/>
-          <p:cNvSpPr txBox="1"/>
-          <p:nvPr/>
-        </p:nvSpPr>
-        <p:spPr>
-          <a:xfrm>
-            <a:off x="7589520" y="2148840"/>
-            <a:ext cx="3566160" cy="1097280"/>
-          </a:xfrm>
-          <a:prstGeom prst="rect">
-            <a:avLst/>
-          </a:prstGeom>
-          <a:noFill/>
-        </p:spPr>
-        <p:txBody>
-          <a:bodyPr wrap="square" anchor="t">
-            <a:spAutoFit/>
-          </a:bodyPr>
-          <a:lstStyle/>
-          <a:p>
-            <a:pPr algn="l">
-              <a:lnSpc>
-                <a:spcPct val="130000"/>
-              </a:lnSpc>
-            </a:pPr>
-            <a:r>
-              <a:rPr sz="1500" b="0" i="1">
-                <a:solidFill>
-                  <a:srgbClr val="FFFFFF"/>
-                </a:solidFill>
-                <a:latin typeface="Calibri"/>
-              </a:rPr>
-              <a:t>“Why did the DQ check on CUSTOMERS.EMAIL fail?”</a:t>
-            </a:r>
-          </a:p>
-        </p:txBody>
-      </p:sp>
-      <p:sp>
-        <p:nvSpPr>
-          <p:cNvPr id="11" name="Rectangle 10"/>
-          <p:cNvSpPr/>
-          <p:nvPr/>
-        </p:nvSpPr>
-        <p:spPr>
-          <a:xfrm>
-            <a:off x="7589520" y="3383280"/>
-            <a:ext cx="3566160" cy="19050"/>
-          </a:xfrm>
-          <a:prstGeom prst="rect">
-            <a:avLst/>
-          </a:prstGeom>
-          <a:solidFill>
-            <a:srgbClr val="29B5E8"/>
-          </a:solidFill>
-          <a:ln>
-            <a:noFill/>
-          </a:ln>
-          <a:effectLst/>
-        </p:spPr>
-        <p:style>
-          <a:lnRef idx="1">
-            <a:schemeClr val="accent1"/>
-          </a:lnRef>
-          <a:fillRef idx="3">
-            <a:schemeClr val="accent1"/>
-          </a:fillRef>
-          <a:effectRef idx="2">
-            <a:schemeClr val="accent1"/>
-          </a:effectRef>
-          <a:fontRef idx="minor">
-            <a:schemeClr val="lt1"/>
-          </a:fontRef>
-        </p:style>
-        <p:txBody>
-          <a:bodyPr rtlCol="0" anchor="ctr"/>
-          <a:lstStyle/>
-          <a:p>
-            <a:pPr algn="ctr"/>
-          </a:p>
-        </p:txBody>
-      </p:sp>
-      <p:sp>
-        <p:nvSpPr>
-          <p:cNvPr id="12" name="TextBox 11"/>
-          <p:cNvSpPr txBox="1"/>
-          <p:nvPr/>
-        </p:nvSpPr>
-        <p:spPr>
-          <a:xfrm>
-            <a:off x="7589520" y="3520440"/>
-            <a:ext cx="3566160" cy="685800"/>
-          </a:xfrm>
-          <a:prstGeom prst="rect">
-            <a:avLst/>
-          </a:prstGeom>
-          <a:noFill/>
-        </p:spPr>
-        <p:txBody>
-          <a:bodyPr wrap="square" anchor="t">
-            <a:spAutoFit/>
-          </a:bodyPr>
-          <a:lstStyle/>
-          <a:p>
-            <a:pPr algn="l">
-              <a:lnSpc>
-                <a:spcPct val="125000"/>
-              </a:lnSpc>
-            </a:pPr>
-            <a:r>
-              <a:rPr sz="1100" b="0" i="0">
-                <a:solidFill>
-                  <a:srgbClr val="C7D6E8"/>
-                </a:solidFill>
-                <a:latin typeface="Calibri"/>
-              </a:rPr>
-              <a:t>Verified live: identified the UNIQUE_CUSTOMER_EMAIL rule,</a:t>
-            </a:r>
-          </a:p>
-          <a:p>
-            <a:pPr algn="l">
-              <a:lnSpc>
-                <a:spcPct val="125000"/>
-              </a:lnSpc>
-            </a:pPr>
-            <a:r>
-              <a:rPr sz="1100" b="0" i="0">
-                <a:solidFill>
-                  <a:srgbClr val="C7D6E8"/>
-                </a:solidFill>
-                <a:latin typeface="Calibri"/>
-              </a:rPr>
-              <a:t>94% pass rate vs. 99% threshold, root cause = duplicate emails.</a:t>
-            </a:r>
-          </a:p>
-        </p:txBody>
-      </p:sp>
-      <p:sp>
-        <p:nvSpPr>
-          <p:cNvPr id="13" name="TextBox 12"/>
-          <p:cNvSpPr txBox="1"/>
-          <p:nvPr/>
-        </p:nvSpPr>
-        <p:spPr>
-          <a:xfrm>
-            <a:off x="457200" y="6473952"/>
-            <a:ext cx="5486400" cy="320040"/>
-          </a:xfrm>
-          <a:prstGeom prst="rect">
-            <a:avLst/>
-          </a:prstGeom>
-          <a:noFill/>
-        </p:spPr>
-        <p:txBody>
-          <a:bodyPr wrap="square" anchor="t">
-            <a:spAutoFit/>
-          </a:bodyPr>
-          <a:lstStyle/>
-          <a:p>
-            <a:pPr algn="l">
-              <a:lnSpc>
-                <a:spcPct val="100000"/>
-              </a:lnSpc>
-            </a:pPr>
-            <a:r>
-              <a:rPr sz="900" b="0" i="1">
+              <a:rPr sz="900" b="0" i="0">
                 <a:solidFill>
                   <a:srgbClr val="5A6370"/>
                 </a:solidFill>
                 <a:latin typeface="Calibri"/>
               </a:rPr>
-              <a:t>Unified Enterprise AI Agents Platform  |  Capgemini x Snowflake Hackathon</a:t>
-            </a:r>
-          </a:p>
-        </p:txBody>
-      </p:sp>
-      <p:sp>
-        <p:nvSpPr>
-          <p:cNvPr id="14" name="TextBox 13"/>
-          <p:cNvSpPr txBox="1"/>
-          <p:nvPr/>
-        </p:nvSpPr>
-        <p:spPr>
-          <a:xfrm>
-            <a:off x="11247120" y="6473952"/>
-            <a:ext cx="731520" cy="320040"/>
-          </a:xfrm>
-          <a:prstGeom prst="rect">
-            <a:avLst/>
-          </a:prstGeom>
-          <a:noFill/>
-        </p:spPr>
-        <p:txBody>
-          <a:bodyPr wrap="square" anchor="t">
-            <a:spAutoFit/>
-          </a:bodyPr>
-          <a:lstStyle/>
-          <a:p>
-            <a:pPr algn="r">
-              <a:lnSpc>
-                <a:spcPct val="100000"/>
-              </a:lnSpc>
-            </a:pPr>
-            <a:r>
-              <a:rPr sz="900" b="0" i="0">
-                <a:solidFill>
-                  <a:srgbClr val="5A6370"/>
-                </a:solidFill>
-                <a:latin typeface="Calibri"/>
-              </a:rPr>
-              <a:t>8</a:t>
+              <a:t>9</a:t>
             </a:r>
           </a:p>
         </p:txBody>
@@ -11520,254 +10920,11 @@
 </p:sld>
 </file>
 
-<file path=ppt/slides/slide9.xml><?xml version="1.0" encoding="utf-8"?>
-<p:sld xmlns:a="http://schemas.openxmlformats.org/drawingml/2006/main" xmlns:p="http://schemas.openxmlformats.org/presentationml/2006/main" xmlns:r="http://schemas.openxmlformats.org/officeDocument/2006/relationships">
-  <p:cSld>
-    <p:spTree>
-      <p:nvGrpSpPr>
-        <p:cNvPr id="1" name=""/>
-        <p:cNvGrpSpPr/>
-        <p:nvPr/>
-      </p:nvGrpSpPr>
-      <p:grpSpPr/>
-      <p:sp>
-        <p:nvSpPr>
-          <p:cNvPr id="2" name="Rectangle 1"/>
-          <p:cNvSpPr/>
-          <p:nvPr/>
-        </p:nvSpPr>
-        <p:spPr>
-          <a:xfrm>
-            <a:off x="0" y="0"/>
-            <a:ext cx="12191695" cy="6858000"/>
-          </a:xfrm>
-          <a:prstGeom prst="rect">
-            <a:avLst/>
-          </a:prstGeom>
-          <a:solidFill>
-            <a:srgbClr val="FFFFFF"/>
-          </a:solidFill>
-          <a:ln>
-            <a:noFill/>
-          </a:ln>
-          <a:effectLst/>
-        </p:spPr>
-        <p:style>
-          <a:lnRef idx="1">
-            <a:schemeClr val="accent1"/>
-          </a:lnRef>
-          <a:fillRef idx="3">
-            <a:schemeClr val="accent1"/>
-          </a:fillRef>
-          <a:effectRef idx="2">
-            <a:schemeClr val="accent1"/>
-          </a:effectRef>
-          <a:fontRef idx="minor">
-            <a:schemeClr val="lt1"/>
-          </a:fontRef>
-        </p:style>
-        <p:txBody>
-          <a:bodyPr rtlCol="0" anchor="ctr"/>
-          <a:lstStyle/>
-          <a:p>
-            <a:pPr algn="ctr"/>
-          </a:p>
-        </p:txBody>
-      </p:sp>
-      <p:sp>
-        <p:nvSpPr>
-          <p:cNvPr id="3" name="Rectangle 2"/>
-          <p:cNvSpPr/>
-          <p:nvPr/>
-        </p:nvSpPr>
-        <p:spPr>
-          <a:xfrm>
-            <a:off x="0" y="0"/>
-            <a:ext cx="12191695" cy="1051560"/>
-          </a:xfrm>
-          <a:prstGeom prst="rect">
-            <a:avLst/>
-          </a:prstGeom>
-          <a:solidFill>
-            <a:srgbClr val="0B1F3A"/>
-          </a:solidFill>
-          <a:ln>
-            <a:noFill/>
-          </a:ln>
-          <a:effectLst/>
-        </p:spPr>
-        <p:style>
-          <a:lnRef idx="1">
-            <a:schemeClr val="accent1"/>
-          </a:lnRef>
-          <a:fillRef idx="3">
-            <a:schemeClr val="accent1"/>
-          </a:fillRef>
-          <a:effectRef idx="2">
-            <a:schemeClr val="accent1"/>
-          </a:effectRef>
-          <a:fontRef idx="minor">
-            <a:schemeClr val="lt1"/>
-          </a:fontRef>
-        </p:style>
-        <p:txBody>
-          <a:bodyPr rtlCol="0" anchor="ctr"/>
-          <a:lstStyle/>
-          <a:p>
-            <a:pPr algn="ctr"/>
-          </a:p>
-        </p:txBody>
-      </p:sp>
-      <p:sp>
-        <p:nvSpPr>
-          <p:cNvPr id="4" name="TextBox 3"/>
-          <p:cNvSpPr txBox="1"/>
-          <p:nvPr/>
-        </p:nvSpPr>
-        <p:spPr>
-          <a:xfrm>
-            <a:off x="548640" y="256032"/>
-            <a:ext cx="9144000" cy="548640"/>
-          </a:xfrm>
-          <a:prstGeom prst="rect">
-            <a:avLst/>
-          </a:prstGeom>
-          <a:noFill/>
-        </p:spPr>
-        <p:txBody>
-          <a:bodyPr wrap="square" anchor="t">
-            <a:spAutoFit/>
-          </a:bodyPr>
-          <a:lstStyle/>
-          <a:p>
-            <a:pPr algn="l">
-              <a:lnSpc>
-                <a:spcPct val="100000"/>
-              </a:lnSpc>
-            </a:pPr>
-            <a:r>
-              <a:rPr sz="2600" b="1" i="0">
-                <a:solidFill>
-                  <a:srgbClr val="FFFFFF"/>
-                </a:solidFill>
-                <a:latin typeface="Georgia"/>
-              </a:rPr>
-              <a:t>Live Proof — Data Quality Root Cause</a:t>
-            </a:r>
-          </a:p>
-        </p:txBody>
-      </p:sp>
-      <p:pic>
-        <p:nvPicPr>
-          <p:cNvPr id="5" name="Picture 4" descr="stream10.png"/>
-          <p:cNvPicPr>
-            <a:picLocks noChangeAspect="1"/>
-          </p:cNvPicPr>
-          <p:nvPr/>
-        </p:nvPicPr>
-        <p:blipFill>
-          <a:blip r:embed="rId2"/>
-          <a:stretch>
-            <a:fillRect/>
-          </a:stretch>
-        </p:blipFill>
-        <p:spPr>
-          <a:xfrm>
-            <a:off x="731520" y="1638348"/>
-            <a:ext cx="10698480" cy="4404263"/>
-          </a:xfrm>
-          <a:prstGeom prst="rect">
-            <a:avLst/>
-          </a:prstGeom>
-        </p:spPr>
-      </p:pic>
-      <p:sp>
-        <p:nvSpPr>
-          <p:cNvPr id="6" name="TextBox 5"/>
-          <p:cNvSpPr txBox="1"/>
-          <p:nvPr/>
-        </p:nvSpPr>
-        <p:spPr>
-          <a:xfrm>
-            <a:off x="457200" y="6473952"/>
-            <a:ext cx="5486400" cy="320040"/>
-          </a:xfrm>
-          <a:prstGeom prst="rect">
-            <a:avLst/>
-          </a:prstGeom>
-          <a:noFill/>
-        </p:spPr>
-        <p:txBody>
-          <a:bodyPr wrap="square" anchor="t">
-            <a:spAutoFit/>
-          </a:bodyPr>
-          <a:lstStyle/>
-          <a:p>
-            <a:pPr algn="l">
-              <a:lnSpc>
-                <a:spcPct val="100000"/>
-              </a:lnSpc>
-            </a:pPr>
-            <a:r>
-              <a:rPr sz="900" b="0" i="1">
-                <a:solidFill>
-                  <a:srgbClr val="5A6370"/>
-                </a:solidFill>
-                <a:latin typeface="Calibri"/>
-              </a:rPr>
-              <a:t>Unified Enterprise AI Agents Platform  |  Capgemini x Snowflake Hackathon</a:t>
-            </a:r>
-          </a:p>
-        </p:txBody>
-      </p:sp>
-      <p:sp>
-        <p:nvSpPr>
-          <p:cNvPr id="7" name="TextBox 6"/>
-          <p:cNvSpPr txBox="1"/>
-          <p:nvPr/>
-        </p:nvSpPr>
-        <p:spPr>
-          <a:xfrm>
-            <a:off x="11247120" y="6473952"/>
-            <a:ext cx="731520" cy="320040"/>
-          </a:xfrm>
-          <a:prstGeom prst="rect">
-            <a:avLst/>
-          </a:prstGeom>
-          <a:noFill/>
-        </p:spPr>
-        <p:txBody>
-          <a:bodyPr wrap="square" anchor="t">
-            <a:spAutoFit/>
-          </a:bodyPr>
-          <a:lstStyle/>
-          <a:p>
-            <a:pPr algn="r">
-              <a:lnSpc>
-                <a:spcPct val="100000"/>
-              </a:lnSpc>
-            </a:pPr>
-            <a:r>
-              <a:rPr sz="900" b="0" i="0">
-                <a:solidFill>
-                  <a:srgbClr val="5A6370"/>
-                </a:solidFill>
-                <a:latin typeface="Calibri"/>
-              </a:rPr>
-              <a:t>9</a:t>
-            </a:r>
-          </a:p>
-        </p:txBody>
-      </p:sp>
-    </p:spTree>
-  </p:cSld>
-  <p:clrMapOvr>
-    <a:masterClrMapping/>
-  </p:clrMapOvr>
-</p:sld>
+<file path=ppt\tableStyles.xml><?xml version="1.0" encoding="utf-8"?>
+<a:tblStyleLst xmlns:a="http://schemas.openxmlformats.org/drawingml/2006/main" def="{5C22544A-7EE6-4342-B048-85BDC9FD1C3A}"/>
 </file>
 
-<file path=ppt/theme/theme1.xml><?xml version="1.0" encoding="utf-8"?>
+<file path=ppt\theme\theme1.xml><?xml version="1.0" encoding="utf-8"?>
 <a:theme xmlns:a="http://schemas.openxmlformats.org/drawingml/2006/main" name="Office Theme">
   <a:themeElements>
     <a:clrScheme name="Office">
@@ -12085,4 +11242,38 @@
   </a:objectDefaults>
   <a:extraClrSchemeLst/>
 </a:theme>
+</file>
+
+<file path=ppt\viewProps.xml><?xml version="1.0" encoding="utf-8"?>
+<p:viewPr xmlns:a="http://schemas.openxmlformats.org/drawingml/2006/main" xmlns:r="http://schemas.openxmlformats.org/officeDocument/2006/relationships" xmlns:p="http://schemas.openxmlformats.org/presentationml/2006/main" lastView="sldThumbnailView">
+  <p:normalViewPr>
+    <p:restoredLeft sz="15620"/>
+    <p:restoredTop sz="94660"/>
+  </p:normalViewPr>
+  <p:slideViewPr>
+    <p:cSldViewPr snapToGrid="0" snapToObjects="1">
+      <p:cViewPr varScale="1">
+        <p:scale>
+          <a:sx n="124" d="100"/>
+          <a:sy n="124" d="100"/>
+        </p:scale>
+        <p:origin x="-1512" y="-112"/>
+      </p:cViewPr>
+      <p:guideLst>
+        <p:guide orient="horz" pos="2160"/>
+        <p:guide pos="2880"/>
+      </p:guideLst>
+    </p:cSldViewPr>
+  </p:slideViewPr>
+  <p:notesTextViewPr>
+    <p:cViewPr>
+      <p:scale>
+        <a:sx n="100" d="100"/>
+        <a:sy n="100" d="100"/>
+      </p:scale>
+      <p:origin x="0" y="0"/>
+    </p:cViewPr>
+  </p:notesTextViewPr>
+  <p:gridSpacing cx="76200" cy="76200"/>
+</p:viewPr>
 </file>
--- a/docs/Unified_Enterprise_AI_Agents_Platform.pptx
+++ b/docs/Unified_Enterprise_AI_Agents_Platform.pptx
@@ -3511,7 +3511,7 @@
         <p:spPr>
           <a:xfrm>
             <a:off x="914400" y="5257800"/>
-            <a:ext cx="10332720" cy="457200"/>
+            <a:ext cx="10332720" cy="850000"/>
           </a:xfrm>
           <a:prstGeom prst="rect">
             <a:avLst/>
@@ -3523,6 +3523,22 @@
             <a:spAutoFit/>
           </a:bodyPr>
           <a:lstStyle/>
+          <a:p>
+            <a:pPr algn="ctr">
+              <a:lnSpc>
+                <a:spcPct val="100000"/>
+              </a:lnSpc>
+            </a:pPr>
+            <a:r>
+              <a:rPr sz="1800" b="1" i="0">
+                <a:solidFill>
+                  <a:srgbClr val="E8A82A"/>
+                </a:solidFill>
+                <a:latin typeface="Calibri"/>
+              </a:rPr>
+              <a:t>Team Oscar</a:t>
+            </a:r>
+          </a:p>
           <a:p>
             <a:pPr algn="ctr">
               <a:lnSpc>
@@ -4600,26 +4616,118 @@
       </p:sp>
       <p:pic>
         <p:nvPicPr>
-          <p:cNvPr id="7" name="Picture 6" descr="streamlite15.png"/>
+          <p:cNvPr id="7" name="Dashboard Portfolio Risk Screenshot" descr="Portfolio and Risk dashboard"/>
           <p:cNvPicPr>
             <a:picLocks noChangeAspect="1"/>
           </p:cNvPicPr>
           <p:nvPr/>
         </p:nvPicPr>
         <p:blipFill>
-          <a:blip r:embed="rId2"/>
+          <a:blip r:embed="rId5"/>
           <a:stretch>
             <a:fillRect/>
           </a:stretch>
         </p:blipFill>
         <p:spPr>
           <a:xfrm>
-            <a:off x="6309360" y="1780697"/>
-            <a:ext cx="5303520" cy="2473646"/>
-          </a:xfrm>
-          <a:prstGeom prst="rect">
-            <a:avLst/>
-          </a:prstGeom>
+            <a:off x="6309360" y="1869359"/>
+            <a:ext cx="2621280" cy="1297867"/>
+          </a:xfrm>
+          <a:prstGeom prst="rect">
+            <a:avLst/>
+          </a:prstGeom>
+          <a:ln w="9525">
+            <a:solidFill>
+              <a:srgbClr val="E2E5EA"/>
+            </a:solidFill>
+          </a:ln>
+        </p:spPr>
+      </p:pic>
+      <p:pic>
+        <p:nvPicPr>
+          <p:cNvPr id="13" name="Dashboard Trend Analysis Screenshot" descr="Trend Analysis dashboard"/>
+          <p:cNvPicPr>
+            <a:picLocks noChangeAspect="1"/>
+          </p:cNvPicPr>
+          <p:nvPr/>
+        </p:nvPicPr>
+        <p:blipFill>
+          <a:blip r:embed="rId6"/>
+          <a:stretch>
+            <a:fillRect/>
+          </a:stretch>
+        </p:blipFill>
+        <p:spPr>
+          <a:xfrm>
+            <a:off x="8991600" y="1929627"/>
+            <a:ext cx="2621280" cy="1177332"/>
+          </a:xfrm>
+          <a:prstGeom prst="rect">
+            <a:avLst/>
+          </a:prstGeom>
+          <a:ln w="9525">
+            <a:solidFill>
+              <a:srgbClr val="E2E5EA"/>
+            </a:solidFill>
+          </a:ln>
+        </p:spPr>
+      </p:pic>
+      <p:pic>
+        <p:nvPicPr>
+          <p:cNvPr id="14" name="Dashboard Usage Screenshot" descr="Agent usage across all channels"/>
+          <p:cNvPicPr>
+            <a:picLocks noChangeAspect="1"/>
+          </p:cNvPicPr>
+          <p:nvPr/>
+        </p:nvPicPr>
+        <p:blipFill>
+          <a:blip r:embed="rId3"/>
+          <a:stretch>
+            <a:fillRect/>
+          </a:stretch>
+        </p:blipFill>
+        <p:spPr>
+          <a:xfrm>
+            <a:off x="6309360" y="3512857"/>
+            <a:ext cx="2621280" cy="1083174"/>
+          </a:xfrm>
+          <a:prstGeom prst="rect">
+            <a:avLst/>
+          </a:prstGeom>
+          <a:ln w="9525">
+            <a:solidFill>
+              <a:srgbClr val="E2E5EA"/>
+            </a:solidFill>
+          </a:ln>
+        </p:spPr>
+      </p:pic>
+      <p:pic>
+        <p:nvPicPr>
+          <p:cNvPr id="15" name="Dashboard Accuracy Screenshot" descr="Agent accuracy, Streamlit only"/>
+          <p:cNvPicPr>
+            <a:picLocks noChangeAspect="1"/>
+          </p:cNvPicPr>
+          <p:nvPr/>
+        </p:nvPicPr>
+        <p:blipFill>
+          <a:blip r:embed="rId4"/>
+          <a:stretch>
+            <a:fillRect/>
+          </a:stretch>
+        </p:blipFill>
+        <p:spPr>
+          <a:xfrm>
+            <a:off x="8991600" y="3497640"/>
+            <a:ext cx="2621280" cy="1113608"/>
+          </a:xfrm>
+          <a:prstGeom prst="rect">
+            <a:avLst/>
+          </a:prstGeom>
+          <a:ln w="9525">
+            <a:solidFill>
+              <a:srgbClr val="E2E5EA"/>
+            </a:solidFill>
+          </a:ln>
         </p:spPr>
       </p:pic>
       <p:sp>
@@ -5142,7 +5250,7 @@
         <p:spPr>
           <a:xfrm>
             <a:off x="914400" y="4846320"/>
-            <a:ext cx="10332720" cy="457200"/>
+            <a:ext cx="10332720" cy="877200"/>
           </a:xfrm>
           <a:prstGeom prst="rect">
             <a:avLst/>
@@ -5161,6 +5269,22 @@
               </a:lnSpc>
             </a:pPr>
             <a:r>
+              <a:rPr sz="1800" b="1" i="0">
+                <a:solidFill>
+                  <a:srgbClr val="E8A82A"/>
+                </a:solidFill>
+                <a:latin typeface="Calibri"/>
+              </a:rPr>
+              <a:t>Team Oscar</a:t>
+            </a:r>
+          </a:p>
+          <a:p>
+            <a:pPr algn="ctr">
+              <a:lnSpc>
+                <a:spcPct val="100000"/>
+              </a:lnSpc>
+            </a:pPr>
+            <a:r>
               <a:rPr sz="1700" b="1" i="0">
                 <a:solidFill>
                   <a:srgbClr val="FFFFFF"/>
@@ -5180,7 +5304,7 @@
         </p:nvSpPr>
         <p:spPr>
           <a:xfrm>
-            <a:off x="914400" y="5349240"/>
+            <a:off x="914400" y="5769240"/>
             <a:ext cx="10332720" cy="365760"/>
           </a:xfrm>
           <a:prstGeom prst="rect">
@@ -5358,128 +5482,6 @@
       </p:sp>
       <p:sp>
         <p:nvSpPr>
-          <p:cNvPr id="5" name="TextBox 4"/>
-          <p:cNvSpPr txBox="1"/>
-          <p:nvPr/>
-        </p:nvSpPr>
-        <p:spPr>
-          <a:xfrm>
-            <a:off x="8595360" y="292608"/>
-            <a:ext cx="1316736" cy="301752"/>
-          </a:xfrm>
-          <a:prstGeom prst="rect">
-            <a:avLst/>
-          </a:prstGeom>
-          <a:noFill/>
-        </p:spPr>
-        <p:txBody>
-          <a:bodyPr wrap="none">
-            <a:spAutoFit/>
-          </a:bodyPr>
-          <a:lstStyle/>
-          <a:p>
-            <a:pPr algn="l"/>
-            <a:r>
-              <a:rPr sz="1439" b="1">
-                <a:solidFill>
-                  <a:srgbClr val="FFFFFF"/>
-                </a:solidFill>
-                <a:latin typeface="Georgia"/>
-              </a:rPr>
-              <a:t>Capgemini</a:t>
-            </a:r>
-          </a:p>
-        </p:txBody>
-      </p:sp>
-      <p:sp>
-        <p:nvSpPr>
-          <p:cNvPr id="6" name="Rectangle 5"/>
-          <p:cNvSpPr/>
-          <p:nvPr/>
-        </p:nvSpPr>
-        <p:spPr>
-          <a:xfrm>
-            <a:off x="8595360" y="566928"/>
-            <a:ext cx="630936" cy="40640"/>
-          </a:xfrm>
-          <a:prstGeom prst="rect">
-            <a:avLst/>
-          </a:prstGeom>
-          <a:solidFill>
-            <a:srgbClr val="0070AD"/>
-          </a:solidFill>
-          <a:ln>
-            <a:noFill/>
-          </a:ln>
-          <a:effectLst/>
-        </p:spPr>
-        <p:style>
-          <a:lnRef idx="1">
-            <a:schemeClr val="accent1"/>
-          </a:lnRef>
-          <a:fillRef idx="3">
-            <a:schemeClr val="accent1"/>
-          </a:fillRef>
-          <a:effectRef idx="2">
-            <a:schemeClr val="accent1"/>
-          </a:effectRef>
-          <a:fontRef idx="minor">
-            <a:schemeClr val="lt1"/>
-          </a:fontRef>
-        </p:style>
-        <p:txBody>
-          <a:bodyPr rtlCol="0" anchor="ctr"/>
-          <a:lstStyle/>
-          <a:p>
-            <a:pPr algn="ctr"/>
-          </a:p>
-        </p:txBody>
-      </p:sp>
-      <p:sp>
-        <p:nvSpPr>
-          <p:cNvPr id="7" name="TextBox 6"/>
-          <p:cNvSpPr txBox="1"/>
-          <p:nvPr/>
-        </p:nvSpPr>
-        <p:spPr>
-          <a:xfrm>
-            <a:off x="10241280" y="292608"/>
-            <a:ext cx="1426464" cy="301752"/>
-          </a:xfrm>
-          <a:prstGeom prst="rect">
-            <a:avLst/>
-          </a:prstGeom>
-          <a:noFill/>
-        </p:spPr>
-        <p:txBody>
-          <a:bodyPr wrap="none">
-            <a:spAutoFit/>
-          </a:bodyPr>
-          <a:lstStyle/>
-          <a:p>
-            <a:pPr algn="l"/>
-            <a:r>
-              <a:rPr sz="1439" b="1">
-                <a:solidFill>
-                  <a:srgbClr val="29B5E8"/>
-                </a:solidFill>
-              </a:rPr>
-              <a:t>❄ </a:t>
-            </a:r>
-            <a:r>
-              <a:rPr sz="1439" b="1">
-                <a:solidFill>
-                  <a:srgbClr val="FFFFFF"/>
-                </a:solidFill>
-                <a:latin typeface="Calibri"/>
-              </a:rPr>
-              <a:t>Snowflake</a:t>
-            </a:r>
-          </a:p>
-        </p:txBody>
-      </p:sp>
-      <p:sp>
-        <p:nvSpPr>
           <p:cNvPr id="8" name="TextBox 7"/>
           <p:cNvSpPr txBox="1"/>
           <p:nvPr/>
@@ -5593,22 +5595,6 @@
                 <a:latin typeface="Calibri"/>
               </a:rPr>
               <a:t>▸  Dashboards &amp; MCP Integration — usage, trust, and extensibility</a:t>
-            </a:r>
-          </a:p>
-          <a:p>
-            <a:pPr>
-              <a:spcAft>
-                <a:spcPts val="1800"/>
-              </a:spcAft>
-            </a:pPr>
-            <a:r>
-              <a:rPr sz="2000">
-                <a:solidFill>
-                  <a:srgbClr val="1A1A1A"/>
-                </a:solidFill>
-                <a:latin typeface="Calibri"/>
-              </a:rPr>
-              <a:t>▸  Business Value &amp; Judging Criteria</a:t>
             </a:r>
           </a:p>
         </p:txBody>

--- a/docs/Unified_Enterprise_AI_Agents_Platform.pptx
+++ b/docs/Unified_Enterprise_AI_Agents_Platform.pptx
@@ -87,6 +87,8 @@
     <p:sldId id="264" r:id="rId15"/>
     <p:sldId id="265" r:id="rId16"/>
     <p:sldId id="266" r:id="rId17"/>
+    <p:sldId id="270" r:id="rId20"/>
+    <p:sldId id="271" r:id="rId21"/>
     <p:sldId id="268" r:id="rId19"/>
   </p:sldIdLst>
   <p:sldSz cx="12191695" cy="6858000" type="screen4x3"/>
@@ -5343,6 +5345,1159 @@
 </p:sld>
 </file>
 
+<file path=ppt\slides\slide15.xml><?xml version="1.0" encoding="utf-8"?>
+<p:sld xmlns:a="http://schemas.openxmlformats.org/drawingml/2006/main" xmlns:p="http://schemas.openxmlformats.org/presentationml/2006/main" xmlns:r="http://schemas.openxmlformats.org/officeDocument/2006/relationships">
+  <p:cSld>
+    <p:spTree>
+      <p:nvGrpSpPr>
+        <p:cNvPr id="1" name=""/>
+        <p:cNvGrpSpPr/>
+        <p:nvPr/>
+      </p:nvGrpSpPr>
+      <p:grpSpPr/>
+      <p:sp>
+        <p:nvSpPr>
+          <p:cNvPr id="2" name="Rectangle 1"/>
+          <p:cNvSpPr/>
+          <p:nvPr/>
+        </p:nvSpPr>
+        <p:spPr>
+          <a:xfrm>
+            <a:off x="0" y="0"/>
+            <a:ext cx="12191695" cy="6858000"/>
+          </a:xfrm>
+          <a:prstGeom prst="rect">
+            <a:avLst/>
+          </a:prstGeom>
+          <a:solidFill>
+            <a:srgbClr val="FFFFFF"/>
+          </a:solidFill>
+          <a:ln>
+            <a:noFill/>
+          </a:ln>
+          <a:effectLst/>
+        </p:spPr>
+        <p:style>
+          <a:lnRef idx="1">
+            <a:schemeClr val="accent1"/>
+          </a:lnRef>
+          <a:fillRef idx="3">
+            <a:schemeClr val="accent1"/>
+          </a:fillRef>
+          <a:effectRef idx="2">
+            <a:schemeClr val="accent1"/>
+          </a:effectRef>
+          <a:fontRef idx="minor">
+            <a:schemeClr val="lt1"/>
+          </a:fontRef>
+        </p:style>
+        <p:txBody>
+          <a:bodyPr rtlCol="0" anchor="ctr"/>
+          <a:lstStyle/>
+          <a:p>
+            <a:pPr algn="ctr"/>
+          </a:p>
+        </p:txBody>
+      </p:sp>
+      <p:sp>
+        <p:nvSpPr>
+          <p:cNvPr id="3" name="Rectangle 2"/>
+          <p:cNvSpPr/>
+          <p:nvPr/>
+        </p:nvSpPr>
+        <p:spPr>
+          <a:xfrm>
+            <a:off x="0" y="0"/>
+            <a:ext cx="12191695" cy="1051560"/>
+          </a:xfrm>
+          <a:prstGeom prst="rect">
+            <a:avLst/>
+          </a:prstGeom>
+          <a:solidFill>
+            <a:srgbClr val="0B1F3A"/>
+          </a:solidFill>
+          <a:ln>
+            <a:noFill/>
+          </a:ln>
+          <a:effectLst/>
+        </p:spPr>
+        <p:style>
+          <a:lnRef idx="1">
+            <a:schemeClr val="accent1"/>
+          </a:lnRef>
+          <a:fillRef idx="3">
+            <a:schemeClr val="accent1"/>
+          </a:fillRef>
+          <a:effectRef idx="2">
+            <a:schemeClr val="accent1"/>
+          </a:effectRef>
+          <a:fontRef idx="minor">
+            <a:schemeClr val="lt1"/>
+          </a:fontRef>
+        </p:style>
+        <p:txBody>
+          <a:bodyPr rtlCol="0" anchor="ctr"/>
+          <a:lstStyle/>
+          <a:p>
+            <a:pPr algn="ctr"/>
+          </a:p>
+        </p:txBody>
+      </p:sp>
+      <p:sp>
+        <p:nvSpPr>
+          <p:cNvPr id="4" name="TextBox 3"/>
+          <p:cNvSpPr txBox="1"/>
+          <p:nvPr/>
+        </p:nvSpPr>
+        <p:spPr>
+          <a:xfrm>
+            <a:off x="548640" y="256032"/>
+            <a:ext cx="7315200" cy="548640"/>
+          </a:xfrm>
+          <a:prstGeom prst="rect">
+            <a:avLst/>
+          </a:prstGeom>
+          <a:noFill/>
+        </p:spPr>
+        <p:txBody>
+          <a:bodyPr wrap="square" anchor="t">
+            <a:spAutoFit/>
+          </a:bodyPr>
+          <a:lstStyle/>
+          <a:p>
+            <a:pPr algn="l">
+              <a:lnSpc>
+                <a:spcPct val="100000"/>
+              </a:lnSpc>
+            </a:pPr>
+            <a:r>
+              <a:rPr sz="3000" b="1" i="0">
+                <a:solidFill>
+                  <a:srgbClr val="FFFFFF"/>
+                </a:solidFill>
+                <a:latin typeface="Georgia"/>
+              </a:rPr>
+              <a:t>Benefits</a:t>
+            </a:r>
+          </a:p>
+        </p:txBody>
+      </p:sp>
+      <p:sp>
+        <p:nvSpPr>
+          <p:cNvPr id="8" name="TextBox 7"/>
+          <p:cNvSpPr txBox="1"/>
+          <p:nvPr/>
+        </p:nvSpPr>
+        <p:spPr>
+          <a:xfrm>
+            <a:off x="914400" y="1645920"/>
+            <a:ext cx="10058400" cy="4572000"/>
+          </a:xfrm>
+          <a:prstGeom prst="rect">
+            <a:avLst/>
+          </a:prstGeom>
+          <a:noFill/>
+        </p:spPr>
+        <p:txBody>
+          <a:bodyPr wrap="square">
+            <a:spAutoFit/>
+          </a:bodyPr>
+          <a:lstStyle/>
+          <a:p>
+            <a:pPr>
+              <a:spcAft>
+                <a:spcPts val="2400"/>
+              </a:spcAft>
+            </a:pPr>
+            <a:r>
+              <a:rPr sz="2000">
+                <a:solidFill>
+                  <a:srgbClr val="1A1A1A"/>
+                </a:solidFill>
+                <a:latin typeface="Calibri"/>
+              </a:rPr>
+              <a:t>▸  Faster answers — hours of waiting on a specialist collapse into a single conversation</a:t>
+            </a:r>
+          </a:p>
+          <a:p>
+            <a:pPr>
+              <a:spcAft>
+                <a:spcPts val="2400"/>
+              </a:spcAft>
+            </a:pPr>
+            <a:r>
+              <a:rPr sz="2000">
+                <a:solidFill>
+                  <a:srgbClr val="1A1A1A"/>
+                </a:solidFill>
+                <a:latin typeface="Calibri"/>
+              </a:rPr>
+              <a:t>▸  No new tools to learn — plain English in, no SQL, no BI dashboards, no ticket queue</a:t>
+            </a:r>
+          </a:p>
+          <a:p>
+            <a:pPr>
+              <a:spcAft>
+                <a:spcPts val="2400"/>
+              </a:spcAft>
+            </a:pPr>
+            <a:r>
+              <a:rPr sz="2000">
+                <a:solidFill>
+                  <a:srgbClr val="1A1A1A"/>
+                </a:solidFill>
+                <a:latin typeface="Calibri"/>
+              </a:rPr>
+              <a:t>▸  Trustworthy by design — every answer shows its SQL or source citation, so it can be verified</a:t>
+            </a:r>
+          </a:p>
+          <a:p>
+            <a:pPr>
+              <a:spcAft>
+                <a:spcPts val="2400"/>
+              </a:spcAft>
+            </a:pPr>
+            <a:r>
+              <a:rPr sz="2000">
+                <a:solidFill>
+                  <a:srgbClr val="1A1A1A"/>
+                </a:solidFill>
+                <a:latin typeface="Calibri"/>
+              </a:rPr>
+              <a:t>▸  One integration, many channels — the same agent serves Streamlit today and any MCP client tomorrow</a:t>
+            </a:r>
+          </a:p>
+        </p:txBody>
+      </p:sp>
+      <p:sp>
+        <p:nvSpPr>
+          <p:cNvPr id="9" name="TextBox 8"/>
+          <p:cNvSpPr txBox="1"/>
+          <p:nvPr/>
+        </p:nvSpPr>
+        <p:spPr>
+          <a:xfrm>
+            <a:off x="457200" y="6473952"/>
+            <a:ext cx="5486400" cy="320040"/>
+          </a:xfrm>
+          <a:prstGeom prst="rect">
+            <a:avLst/>
+          </a:prstGeom>
+          <a:noFill/>
+        </p:spPr>
+        <p:txBody>
+          <a:bodyPr wrap="square" anchor="t">
+            <a:spAutoFit/>
+          </a:bodyPr>
+          <a:lstStyle/>
+          <a:p>
+            <a:pPr algn="l">
+              <a:lnSpc>
+                <a:spcPct val="100000"/>
+              </a:lnSpc>
+            </a:pPr>
+            <a:r>
+              <a:rPr sz="900" b="0" i="1">
+                <a:solidFill>
+                  <a:srgbClr val="5A6370"/>
+                </a:solidFill>
+                <a:latin typeface="Calibri"/>
+              </a:rPr>
+              <a:t>Unified Enterprise AI Agents Platform  |  Capgemini x Snowflake Hackathon</a:t>
+            </a:r>
+          </a:p>
+        </p:txBody>
+      </p:sp>
+      <p:sp>
+        <p:nvSpPr>
+          <p:cNvPr id="10" name="TextBox 9"/>
+          <p:cNvSpPr txBox="1"/>
+          <p:nvPr/>
+        </p:nvSpPr>
+        <p:spPr>
+          <a:xfrm>
+            <a:off x="11247120" y="6473952"/>
+            <a:ext cx="731520" cy="320040"/>
+          </a:xfrm>
+          <a:prstGeom prst="rect">
+            <a:avLst/>
+          </a:prstGeom>
+          <a:noFill/>
+        </p:spPr>
+        <p:txBody>
+          <a:bodyPr wrap="square" anchor="t">
+            <a:spAutoFit/>
+          </a:bodyPr>
+          <a:lstStyle/>
+          <a:p>
+            <a:pPr algn="r">
+              <a:lnSpc>
+                <a:spcPct val="100000"/>
+              </a:lnSpc>
+            </a:pPr>
+            <a:r>
+              <a:rPr sz="900" b="0" i="0">
+                <a:solidFill>
+                  <a:srgbClr val="5A6370"/>
+                </a:solidFill>
+                <a:latin typeface="Calibri"/>
+              </a:rPr>
+              <a:t>12</a:t>
+            </a:r>
+          </a:p>
+        </p:txBody>
+      </p:sp>
+    </p:spTree>
+  </p:cSld>
+  <p:clrMapOvr>
+    <a:masterClrMapping/>
+  </p:clrMapOvr>
+</p:sld>
+</file>
+
+<file path=ppt\slides\slide16.xml><?xml version="1.0" encoding="utf-8"?>
+<p:sld xmlns:a="http://schemas.openxmlformats.org/drawingml/2006/main" xmlns:p="http://schemas.openxmlformats.org/presentationml/2006/main" xmlns:r="http://schemas.openxmlformats.org/officeDocument/2006/relationships">
+  <p:cSld>
+    <p:spTree>
+      <p:nvGrpSpPr>
+        <p:cNvPr id="1" name=""/>
+        <p:cNvGrpSpPr/>
+        <p:nvPr/>
+      </p:nvGrpSpPr>
+      <p:grpSpPr/>
+      <p:sp>
+        <p:nvSpPr>
+          <p:cNvPr id="2" name="Rectangle 1"/>
+          <p:cNvSpPr/>
+          <p:nvPr/>
+        </p:nvSpPr>
+        <p:spPr>
+          <a:xfrm>
+            <a:off x="0" y="0"/>
+            <a:ext cx="12191695" cy="6858000"/>
+          </a:xfrm>
+          <a:prstGeom prst="rect">
+            <a:avLst/>
+          </a:prstGeom>
+          <a:solidFill>
+            <a:srgbClr val="FFFFFF"/>
+          </a:solidFill>
+          <a:ln>
+            <a:noFill/>
+          </a:ln>
+          <a:effectLst/>
+        </p:spPr>
+        <p:style>
+          <a:lnRef idx="1">
+            <a:schemeClr val="accent1"/>
+          </a:lnRef>
+          <a:fillRef idx="3">
+            <a:schemeClr val="accent1"/>
+          </a:fillRef>
+          <a:effectRef idx="2">
+            <a:schemeClr val="accent1"/>
+          </a:effectRef>
+          <a:fontRef idx="minor">
+            <a:schemeClr val="lt1"/>
+          </a:fontRef>
+        </p:style>
+        <p:txBody>
+          <a:bodyPr rtlCol="0" anchor="ctr"/>
+          <a:lstStyle/>
+          <a:p>
+            <a:pPr algn="ctr"/>
+          </a:p>
+        </p:txBody>
+      </p:sp>
+      <p:sp>
+        <p:nvSpPr>
+          <p:cNvPr id="3" name="Rectangle 2"/>
+          <p:cNvSpPr/>
+          <p:nvPr/>
+        </p:nvSpPr>
+        <p:spPr>
+          <a:xfrm>
+            <a:off x="0" y="0"/>
+            <a:ext cx="12191695" cy="1051560"/>
+          </a:xfrm>
+          <a:prstGeom prst="rect">
+            <a:avLst/>
+          </a:prstGeom>
+          <a:solidFill>
+            <a:srgbClr val="0B1F3A"/>
+          </a:solidFill>
+          <a:ln>
+            <a:noFill/>
+          </a:ln>
+          <a:effectLst/>
+        </p:spPr>
+        <p:style>
+          <a:lnRef idx="1">
+            <a:schemeClr val="accent1"/>
+          </a:lnRef>
+          <a:fillRef idx="3">
+            <a:schemeClr val="accent1"/>
+          </a:fillRef>
+          <a:effectRef idx="2">
+            <a:schemeClr val="accent1"/>
+          </a:effectRef>
+          <a:fontRef idx="minor">
+            <a:schemeClr val="lt1"/>
+          </a:fontRef>
+        </p:style>
+        <p:txBody>
+          <a:bodyPr rtlCol="0" anchor="ctr"/>
+          <a:lstStyle/>
+          <a:p>
+            <a:pPr algn="ctr"/>
+          </a:p>
+        </p:txBody>
+      </p:sp>
+      <p:sp>
+        <p:nvSpPr>
+          <p:cNvPr id="4" name="TextBox 3"/>
+          <p:cNvSpPr txBox="1"/>
+          <p:nvPr/>
+        </p:nvSpPr>
+        <p:spPr>
+          <a:xfrm>
+            <a:off x="548640" y="256032"/>
+            <a:ext cx="9601200" cy="548640"/>
+          </a:xfrm>
+          <a:prstGeom prst="rect">
+            <a:avLst/>
+          </a:prstGeom>
+          <a:noFill/>
+        </p:spPr>
+        <p:txBody>
+          <a:bodyPr wrap="square" anchor="t">
+            <a:spAutoFit/>
+          </a:bodyPr>
+          <a:lstStyle/>
+          <a:p>
+            <a:pPr algn="l">
+              <a:lnSpc>
+                <a:spcPct val="100000"/>
+              </a:lnSpc>
+            </a:pPr>
+            <a:r>
+              <a:rPr sz="2800" b="1" i="0">
+                <a:solidFill>
+                  <a:srgbClr val="FFFFFF"/>
+                </a:solidFill>
+                <a:latin typeface="Georgia"/>
+              </a:rPr>
+              <a:t>Judging Criteria</a:t>
+            </a:r>
+          </a:p>
+        </p:txBody>
+      </p:sp>
+      <p:sp>
+        <p:nvSpPr>
+          <p:cNvPr id="5" name="Card 1"/>
+          <p:cNvSpPr/>
+          <p:nvPr/>
+        </p:nvSpPr>
+        <p:spPr>
+          <a:xfrm>
+            <a:off x="731520" y="1400000"/>
+            <a:ext cx="5204307" cy="2250000"/>
+          </a:xfrm>
+          <a:prstGeom prst="roundRect">
+            <a:avLst>
+              <a:gd name="adj" fmla="val 6000"/>
+            </a:avLst>
+          </a:prstGeom>
+          <a:solidFill>
+            <a:srgbClr val="F4F6F9"/>
+          </a:solidFill>
+          <a:ln>
+            <a:noFill/>
+          </a:ln>
+          <a:effectLst/>
+        </p:spPr>
+        <p:style>
+          <a:lnRef idx="1">
+            <a:schemeClr val="accent1"/>
+          </a:lnRef>
+          <a:fillRef idx="3">
+            <a:schemeClr val="accent1"/>
+          </a:fillRef>
+          <a:effectRef idx="2">
+            <a:schemeClr val="accent1"/>
+          </a:effectRef>
+          <a:fontRef idx="minor">
+            <a:schemeClr val="lt1"/>
+          </a:fontRef>
+        </p:style>
+        <p:txBody>
+          <a:bodyPr rtlCol="0" anchor="ctr"/>
+          <a:lstStyle/>
+          <a:p>
+            <a:pPr algn="ctr"/>
+          </a:p>
+        </p:txBody>
+      </p:sp>
+      <p:sp>
+        <p:nvSpPr>
+          <p:cNvPr id="6" name="Pct 1"/>
+          <p:cNvSpPr txBox="1"/>
+          <p:nvPr/>
+        </p:nvSpPr>
+        <p:spPr>
+          <a:xfrm>
+            <a:off x="731520" y="1550000"/>
+            <a:ext cx="5204307" cy="600000"/>
+          </a:xfrm>
+          <a:prstGeom prst="rect">
+            <a:avLst/>
+          </a:prstGeom>
+          <a:noFill/>
+        </p:spPr>
+        <p:txBody>
+          <a:bodyPr wrap="square" anchor="t">
+            <a:spAutoFit/>
+          </a:bodyPr>
+          <a:lstStyle/>
+          <a:p>
+            <a:pPr algn="ctr"/>
+            <a:r>
+              <a:rPr sz="3600" b="1" i="0">
+                <a:solidFill>
+                  <a:srgbClr val="0070AD"/>
+                </a:solidFill>
+                <a:latin typeface="Calibri"/>
+              </a:rPr>
+              <a:t>30%</a:t>
+            </a:r>
+          </a:p>
+        </p:txBody>
+      </p:sp>
+      <p:sp>
+        <p:nvSpPr>
+          <p:cNvPr id="7" name="Title 1"/>
+          <p:cNvSpPr txBox="1"/>
+          <p:nvPr/>
+        </p:nvSpPr>
+        <p:spPr>
+          <a:xfrm>
+            <a:off x="731520" y="2300000"/>
+            <a:ext cx="5204307" cy="400000"/>
+          </a:xfrm>
+          <a:prstGeom prst="rect">
+            <a:avLst/>
+          </a:prstGeom>
+          <a:noFill/>
+        </p:spPr>
+        <p:txBody>
+          <a:bodyPr wrap="square" anchor="t">
+            <a:spAutoFit/>
+          </a:bodyPr>
+          <a:lstStyle/>
+          <a:p>
+            <a:pPr algn="ctr"/>
+            <a:r>
+              <a:rPr sz="1700" b="1" i="0">
+                <a:solidFill>
+                  <a:srgbClr val="1A1A1A"/>
+                </a:solidFill>
+                <a:latin typeface="Calibri"/>
+              </a:rPr>
+              <a:t>Innovation</a:t>
+            </a:r>
+          </a:p>
+        </p:txBody>
+      </p:sp>
+      <p:sp>
+        <p:nvSpPr>
+          <p:cNvPr id="8" name="Desc 1"/>
+          <p:cNvSpPr txBox="1"/>
+          <p:nvPr/>
+        </p:nvSpPr>
+        <p:spPr>
+          <a:xfrm>
+            <a:off x="1005520" y="2750000"/>
+            <a:ext cx="4656307" cy="800000"/>
+          </a:xfrm>
+          <a:prstGeom prst="rect">
+            <a:avLst/>
+          </a:prstGeom>
+          <a:noFill/>
+        </p:spPr>
+        <p:txBody>
+          <a:bodyPr wrap="square" anchor="t">
+            <a:spAutoFit/>
+          </a:bodyPr>
+          <a:lstStyle/>
+          <a:p>
+            <a:pPr algn="ctr">
+              <a:lnSpc>
+                <a:spcPct val="115000"/>
+              </a:lnSpc>
+            </a:pPr>
+            <a:r>
+              <a:rPr sz="1200" b="0" i="0">
+                <a:solidFill>
+                  <a:srgbClr val="5A6370"/>
+                </a:solidFill>
+                <a:latin typeface="Calibri"/>
+              </a:rPr>
+              <a:t>One governed agent spanning structured, unstructured, and meta (data-quality) data — not three disconnected demos.</a:t>
+            </a:r>
+          </a:p>
+        </p:txBody>
+      </p:sp>
+      <p:sp>
+        <p:nvSpPr>
+          <p:cNvPr id="9" name="Card 2"/>
+          <p:cNvSpPr/>
+          <p:nvPr/>
+        </p:nvSpPr>
+        <p:spPr>
+          <a:xfrm>
+            <a:off x="6255867" y="1400000"/>
+            <a:ext cx="5204307" cy="2250000"/>
+          </a:xfrm>
+          <a:prstGeom prst="roundRect">
+            <a:avLst>
+              <a:gd name="adj" fmla="val 6000"/>
+            </a:avLst>
+          </a:prstGeom>
+          <a:solidFill>
+            <a:srgbClr val="F4F6F9"/>
+          </a:solidFill>
+          <a:ln>
+            <a:noFill/>
+          </a:ln>
+          <a:effectLst/>
+        </p:spPr>
+        <p:style>
+          <a:lnRef idx="1">
+            <a:schemeClr val="accent1"/>
+          </a:lnRef>
+          <a:fillRef idx="3">
+            <a:schemeClr val="accent1"/>
+          </a:fillRef>
+          <a:effectRef idx="2">
+            <a:schemeClr val="accent1"/>
+          </a:effectRef>
+          <a:fontRef idx="minor">
+            <a:schemeClr val="lt1"/>
+          </a:fontRef>
+        </p:style>
+        <p:txBody>
+          <a:bodyPr rtlCol="0" anchor="ctr"/>
+          <a:lstStyle/>
+          <a:p>
+            <a:pPr algn="ctr"/>
+          </a:p>
+        </p:txBody>
+      </p:sp>
+      <p:sp>
+        <p:nvSpPr>
+          <p:cNvPr id="10" name="Pct 2"/>
+          <p:cNvSpPr txBox="1"/>
+          <p:nvPr/>
+        </p:nvSpPr>
+        <p:spPr>
+          <a:xfrm>
+            <a:off x="6255867" y="1550000"/>
+            <a:ext cx="5204307" cy="600000"/>
+          </a:xfrm>
+          <a:prstGeom prst="rect">
+            <a:avLst/>
+          </a:prstGeom>
+          <a:noFill/>
+        </p:spPr>
+        <p:txBody>
+          <a:bodyPr wrap="square" anchor="t">
+            <a:spAutoFit/>
+          </a:bodyPr>
+          <a:lstStyle/>
+          <a:p>
+            <a:pPr algn="ctr"/>
+            <a:r>
+              <a:rPr sz="3600" b="1" i="0">
+                <a:solidFill>
+                  <a:srgbClr val="0070AD"/>
+                </a:solidFill>
+                <a:latin typeface="Calibri"/>
+              </a:rPr>
+              <a:t>25%</a:t>
+            </a:r>
+          </a:p>
+        </p:txBody>
+      </p:sp>
+      <p:sp>
+        <p:nvSpPr>
+          <p:cNvPr id="11" name="Title 2"/>
+          <p:cNvSpPr txBox="1"/>
+          <p:nvPr/>
+        </p:nvSpPr>
+        <p:spPr>
+          <a:xfrm>
+            <a:off x="6255867" y="2300000"/>
+            <a:ext cx="5204307" cy="400000"/>
+          </a:xfrm>
+          <a:prstGeom prst="rect">
+            <a:avLst/>
+          </a:prstGeom>
+          <a:noFill/>
+        </p:spPr>
+        <p:txBody>
+          <a:bodyPr wrap="square" anchor="t">
+            <a:spAutoFit/>
+          </a:bodyPr>
+          <a:lstStyle/>
+          <a:p>
+            <a:pPr algn="ctr"/>
+            <a:r>
+              <a:rPr sz="1700" b="1" i="0">
+                <a:solidFill>
+                  <a:srgbClr val="1A1A1A"/>
+                </a:solidFill>
+                <a:latin typeface="Calibri"/>
+              </a:rPr>
+              <a:t>Technical Excellence</a:t>
+            </a:r>
+          </a:p>
+        </p:txBody>
+      </p:sp>
+      <p:sp>
+        <p:nvSpPr>
+          <p:cNvPr id="12" name="Desc 2"/>
+          <p:cNvSpPr txBox="1"/>
+          <p:nvPr/>
+        </p:nvSpPr>
+        <p:spPr>
+          <a:xfrm>
+            <a:off x="6529867" y="2750000"/>
+            <a:ext cx="4656307" cy="800000"/>
+          </a:xfrm>
+          <a:prstGeom prst="rect">
+            <a:avLst/>
+          </a:prstGeom>
+          <a:noFill/>
+        </p:spPr>
+        <p:txBody>
+          <a:bodyPr wrap="square" anchor="t">
+            <a:spAutoFit/>
+          </a:bodyPr>
+          <a:lstStyle/>
+          <a:p>
+            <a:pPr algn="ctr">
+              <a:lnSpc>
+                <a:spcPct val="115000"/>
+              </a:lnSpc>
+            </a:pPr>
+            <a:r>
+              <a:rPr sz="1200" b="0" i="0">
+                <a:solidFill>
+                  <a:srgbClr val="5A6370"/>
+                </a:solidFill>
+                <a:latin typeface="Calibri"/>
+              </a:rPr>
+              <a:t>Native SEMANTIC VIEW, CORTEX SEARCH SERVICE, and AGENT objects — no hand-rolled RAG or orchestration code.</a:t>
+            </a:r>
+          </a:p>
+        </p:txBody>
+      </p:sp>
+      <p:sp>
+        <p:nvSpPr>
+          <p:cNvPr id="13" name="Card 3"/>
+          <p:cNvSpPr/>
+          <p:nvPr/>
+        </p:nvSpPr>
+        <p:spPr>
+          <a:xfrm>
+            <a:off x="731520" y="3950000"/>
+            <a:ext cx="5204307" cy="2250000"/>
+          </a:xfrm>
+          <a:prstGeom prst="roundRect">
+            <a:avLst>
+              <a:gd name="adj" fmla="val 6000"/>
+            </a:avLst>
+          </a:prstGeom>
+          <a:solidFill>
+            <a:srgbClr val="F4F6F9"/>
+          </a:solidFill>
+          <a:ln>
+            <a:noFill/>
+          </a:ln>
+          <a:effectLst/>
+        </p:spPr>
+        <p:style>
+          <a:lnRef idx="1">
+            <a:schemeClr val="accent1"/>
+          </a:lnRef>
+          <a:fillRef idx="3">
+            <a:schemeClr val="accent1"/>
+          </a:fillRef>
+          <a:effectRef idx="2">
+            <a:schemeClr val="accent1"/>
+          </a:effectRef>
+          <a:fontRef idx="minor">
+            <a:schemeClr val="lt1"/>
+          </a:fontRef>
+        </p:style>
+        <p:txBody>
+          <a:bodyPr rtlCol="0" anchor="ctr"/>
+          <a:lstStyle/>
+          <a:p>
+            <a:pPr algn="ctr"/>
+          </a:p>
+        </p:txBody>
+      </p:sp>
+      <p:sp>
+        <p:nvSpPr>
+          <p:cNvPr id="14" name="Pct 3"/>
+          <p:cNvSpPr txBox="1"/>
+          <p:nvPr/>
+        </p:nvSpPr>
+        <p:spPr>
+          <a:xfrm>
+            <a:off x="731520" y="4100000"/>
+            <a:ext cx="5204307" cy="600000"/>
+          </a:xfrm>
+          <a:prstGeom prst="rect">
+            <a:avLst/>
+          </a:prstGeom>
+          <a:noFill/>
+        </p:spPr>
+        <p:txBody>
+          <a:bodyPr wrap="square" anchor="t">
+            <a:spAutoFit/>
+          </a:bodyPr>
+          <a:lstStyle/>
+          <a:p>
+            <a:pPr algn="ctr"/>
+            <a:r>
+              <a:rPr sz="3600" b="1" i="0">
+                <a:solidFill>
+                  <a:srgbClr val="0070AD"/>
+                </a:solidFill>
+                <a:latin typeface="Calibri"/>
+              </a:rPr>
+              <a:t>25%</a:t>
+            </a:r>
+          </a:p>
+        </p:txBody>
+      </p:sp>
+      <p:sp>
+        <p:nvSpPr>
+          <p:cNvPr id="15" name="Title 3"/>
+          <p:cNvSpPr txBox="1"/>
+          <p:nvPr/>
+        </p:nvSpPr>
+        <p:spPr>
+          <a:xfrm>
+            <a:off x="731520" y="4850000"/>
+            <a:ext cx="5204307" cy="400000"/>
+          </a:xfrm>
+          <a:prstGeom prst="rect">
+            <a:avLst/>
+          </a:prstGeom>
+          <a:noFill/>
+        </p:spPr>
+        <p:txBody>
+          <a:bodyPr wrap="square" anchor="t">
+            <a:spAutoFit/>
+          </a:bodyPr>
+          <a:lstStyle/>
+          <a:p>
+            <a:pPr algn="ctr"/>
+            <a:r>
+              <a:rPr sz="1700" b="1" i="0">
+                <a:solidFill>
+                  <a:srgbClr val="1A1A1A"/>
+                </a:solidFill>
+                <a:latin typeface="Calibri"/>
+              </a:rPr>
+              <a:t>Business Value</a:t>
+            </a:r>
+          </a:p>
+        </p:txBody>
+      </p:sp>
+      <p:sp>
+        <p:nvSpPr>
+          <p:cNvPr id="16" name="Desc 3"/>
+          <p:cNvSpPr txBox="1"/>
+          <p:nvPr/>
+        </p:nvSpPr>
+        <p:spPr>
+          <a:xfrm>
+            <a:off x="1005520" y="5300000"/>
+            <a:ext cx="4656307" cy="800000"/>
+          </a:xfrm>
+          <a:prstGeom prst="rect">
+            <a:avLst/>
+          </a:prstGeom>
+          <a:noFill/>
+        </p:spPr>
+        <p:txBody>
+          <a:bodyPr wrap="square" anchor="t">
+            <a:spAutoFit/>
+          </a:bodyPr>
+          <a:lstStyle/>
+          <a:p>
+            <a:pPr algn="ctr">
+              <a:lnSpc>
+                <a:spcPct val="115000"/>
+              </a:lnSpc>
+            </a:pPr>
+            <a:r>
+              <a:rPr sz="1200" b="0" i="0">
+                <a:solidFill>
+                  <a:srgbClr val="5A6370"/>
+                </a:solidFill>
+                <a:latin typeface="Calibri"/>
+              </a:rPr>
+              <a:t>Collapses three specialist workflows (SQL analyst, document reviewer, DQ engineer) into one self-service chat experience.</a:t>
+            </a:r>
+          </a:p>
+        </p:txBody>
+      </p:sp>
+      <p:sp>
+        <p:nvSpPr>
+          <p:cNvPr id="17" name="Card 4"/>
+          <p:cNvSpPr/>
+          <p:nvPr/>
+        </p:nvSpPr>
+        <p:spPr>
+          <a:xfrm>
+            <a:off x="6255867" y="3950000"/>
+            <a:ext cx="5204307" cy="2250000"/>
+          </a:xfrm>
+          <a:prstGeom prst="roundRect">
+            <a:avLst>
+              <a:gd name="adj" fmla="val 6000"/>
+            </a:avLst>
+          </a:prstGeom>
+          <a:solidFill>
+            <a:srgbClr val="F4F6F9"/>
+          </a:solidFill>
+          <a:ln>
+            <a:noFill/>
+          </a:ln>
+          <a:effectLst/>
+        </p:spPr>
+        <p:style>
+          <a:lnRef idx="1">
+            <a:schemeClr val="accent1"/>
+          </a:lnRef>
+          <a:fillRef idx="3">
+            <a:schemeClr val="accent1"/>
+          </a:fillRef>
+          <a:effectRef idx="2">
+            <a:schemeClr val="accent1"/>
+          </a:effectRef>
+          <a:fontRef idx="minor">
+            <a:schemeClr val="lt1"/>
+          </a:fontRef>
+        </p:style>
+        <p:txBody>
+          <a:bodyPr rtlCol="0" anchor="ctr"/>
+          <a:lstStyle/>
+          <a:p>
+            <a:pPr algn="ctr"/>
+          </a:p>
+        </p:txBody>
+      </p:sp>
+      <p:sp>
+        <p:nvSpPr>
+          <p:cNvPr id="18" name="Pct 4"/>
+          <p:cNvSpPr txBox="1"/>
+          <p:nvPr/>
+        </p:nvSpPr>
+        <p:spPr>
+          <a:xfrm>
+            <a:off x="6255867" y="4100000"/>
+            <a:ext cx="5204307" cy="600000"/>
+          </a:xfrm>
+          <a:prstGeom prst="rect">
+            <a:avLst/>
+          </a:prstGeom>
+          <a:noFill/>
+        </p:spPr>
+        <p:txBody>
+          <a:bodyPr wrap="square" anchor="t">
+            <a:spAutoFit/>
+          </a:bodyPr>
+          <a:lstStyle/>
+          <a:p>
+            <a:pPr algn="ctr"/>
+            <a:r>
+              <a:rPr sz="3600" b="1" i="0">
+                <a:solidFill>
+                  <a:srgbClr val="0070AD"/>
+                </a:solidFill>
+                <a:latin typeface="Calibri"/>
+              </a:rPr>
+              <a:t>20%</a:t>
+            </a:r>
+          </a:p>
+        </p:txBody>
+      </p:sp>
+      <p:sp>
+        <p:nvSpPr>
+          <p:cNvPr id="19" name="Title 4"/>
+          <p:cNvSpPr txBox="1"/>
+          <p:nvPr/>
+        </p:nvSpPr>
+        <p:spPr>
+          <a:xfrm>
+            <a:off x="6255867" y="4850000"/>
+            <a:ext cx="5204307" cy="400000"/>
+          </a:xfrm>
+          <a:prstGeom prst="rect">
+            <a:avLst/>
+          </a:prstGeom>
+          <a:noFill/>
+        </p:spPr>
+        <p:txBody>
+          <a:bodyPr wrap="square" anchor="t">
+            <a:spAutoFit/>
+          </a:bodyPr>
+          <a:lstStyle/>
+          <a:p>
+            <a:pPr algn="ctr"/>
+            <a:r>
+              <a:rPr sz="1700" b="1" i="0">
+                <a:solidFill>
+                  <a:srgbClr val="1A1A1A"/>
+                </a:solidFill>
+                <a:latin typeface="Calibri"/>
+              </a:rPr>
+              <a:t>User Experience</a:t>
+            </a:r>
+          </a:p>
+        </p:txBody>
+      </p:sp>
+      <p:sp>
+        <p:nvSpPr>
+          <p:cNvPr id="20" name="Desc 4"/>
+          <p:cNvSpPr txBox="1"/>
+          <p:nvPr/>
+        </p:nvSpPr>
+        <p:spPr>
+          <a:xfrm>
+            <a:off x="6529867" y="5300000"/>
+            <a:ext cx="4656307" cy="800000"/>
+          </a:xfrm>
+          <a:prstGeom prst="rect">
+            <a:avLst/>
+          </a:prstGeom>
+          <a:noFill/>
+        </p:spPr>
+        <p:txBody>
+          <a:bodyPr wrap="square" anchor="t">
+            <a:spAutoFit/>
+          </a:bodyPr>
+          <a:lstStyle/>
+          <a:p>
+            <a:pPr algn="ctr">
+              <a:lnSpc>
+                <a:spcPct val="115000"/>
+              </a:lnSpc>
+            </a:pPr>
+            <a:r>
+              <a:rPr sz="1200" b="0" i="0">
+                <a:solidFill>
+                  <a:srgbClr val="5A6370"/>
+                </a:solidFill>
+                <a:latin typeface="Calibri"/>
+              </a:rPr>
+              <a:t>One chat box; every answer is explainable — SQL shown, sources cited — so business users can trust and verify it.</a:t>
+            </a:r>
+          </a:p>
+        </p:txBody>
+      </p:sp>
+      <p:sp>
+        <p:nvSpPr>
+          <p:cNvPr id="21" name="TextBox 20"/>
+          <p:cNvSpPr txBox="1"/>
+          <p:nvPr/>
+        </p:nvSpPr>
+        <p:spPr>
+          <a:xfrm>
+            <a:off x="457200" y="6473952"/>
+            <a:ext cx="5486400" cy="320040"/>
+          </a:xfrm>
+          <a:prstGeom prst="rect">
+            <a:avLst/>
+          </a:prstGeom>
+          <a:noFill/>
+        </p:spPr>
+        <p:txBody>
+          <a:bodyPr wrap="square" anchor="t">
+            <a:spAutoFit/>
+          </a:bodyPr>
+          <a:lstStyle/>
+          <a:p>
+            <a:pPr algn="l">
+              <a:lnSpc>
+                <a:spcPct val="100000"/>
+              </a:lnSpc>
+            </a:pPr>
+            <a:r>
+              <a:rPr sz="900" b="0" i="1">
+                <a:solidFill>
+                  <a:srgbClr val="5A6370"/>
+                </a:solidFill>
+                <a:latin typeface="Calibri"/>
+              </a:rPr>
+              <a:t>Unified Enterprise AI Agents Platform  |  Capgemini x Snowflake Hackathon</a:t>
+            </a:r>
+          </a:p>
+        </p:txBody>
+      </p:sp>
+      <p:sp>
+        <p:nvSpPr>
+          <p:cNvPr id="22" name="TextBox 21"/>
+          <p:cNvSpPr txBox="1"/>
+          <p:nvPr/>
+        </p:nvSpPr>
+        <p:spPr>
+          <a:xfrm>
+            <a:off x="11247120" y="6473952"/>
+            <a:ext cx="731520" cy="320040"/>
+          </a:xfrm>
+          <a:prstGeom prst="rect">
+            <a:avLst/>
+          </a:prstGeom>
+          <a:noFill/>
+        </p:spPr>
+        <p:txBody>
+          <a:bodyPr wrap="square" anchor="t">
+            <a:spAutoFit/>
+          </a:bodyPr>
+          <a:lstStyle/>
+          <a:p>
+            <a:pPr algn="r">
+              <a:lnSpc>
+                <a:spcPct val="100000"/>
+              </a:lnSpc>
+            </a:pPr>
+            <a:r>
+              <a:rPr sz="900" b="0" i="0">
+                <a:solidFill>
+                  <a:srgbClr val="5A6370"/>
+                </a:solidFill>
+                <a:latin typeface="Calibri"/>
+              </a:rPr>
+              <a:t>13</a:t>
+            </a:r>
+          </a:p>
+        </p:txBody>
+      </p:sp>
+    </p:spTree>
+  </p:cSld>
+  <p:clrMapOvr>
+    <a:masterClrMapping/>
+  </p:clrMapOvr>
+</p:sld>
+</file>
+
 <file path=ppt\slides\slide2.xml><?xml version="1.0" encoding="utf-8"?>
 <p:sld xmlns:a="http://schemas.openxmlformats.org/drawingml/2006/main" xmlns:p="http://schemas.openxmlformats.org/presentationml/2006/main" xmlns:r="http://schemas.openxmlformats.org/officeDocument/2006/relationships">
   <p:cSld>
@@ -5818,6 +6973,45 @@
                 <a:latin typeface="Georgia"/>
               </a:rPr>
               <a:t>The Problem</a:t>
+            </a:r>
+          </a:p>
+        </p:txBody>
+      </p:sp>
+      <p:sp>
+        <p:nvSpPr>
+          <p:cNvPr id="24" name="TextBox 23"/>
+          <p:cNvSpPr txBox="1"/>
+          <p:nvPr/>
+        </p:nvSpPr>
+        <p:spPr>
+          <a:xfrm>
+            <a:off x="731520" y="850000"/>
+            <a:ext cx="10698480" cy="400000"/>
+          </a:xfrm>
+          <a:prstGeom prst="rect">
+            <a:avLst/>
+          </a:prstGeom>
+          <a:noFill/>
+        </p:spPr>
+        <p:txBody>
+          <a:bodyPr wrap="square" anchor="t">
+            <a:spAutoFit/>
+          </a:bodyPr>
+          <a:lstStyle/>
+          <a:p>
+            <a:pPr algn="l">
+              <a:lnSpc>
+                <a:spcPct val="100000"/>
+              </a:lnSpc>
+            </a:pPr>
+            <a:r>
+              <a:rPr sz="2000" b="1" i="0">
+                <a:solidFill>
+                  <a:srgbClr val="0070AD"/>
+                </a:solidFill>
+                <a:latin typeface="Calibri"/>
+              </a:rPr>
+              <a:t>One question. Three specialists. One bottleneck.</a:t>
             </a:r>
           </a:p>
         </p:txBody>

--- a/docs/Unified_Enterprise_AI_Agents_Platform.pptx
+++ b/docs/Unified_Enterprise_AI_Agents_Platform.pptx
@@ -1,76 +1,5 @@
 
-<file path=docProps\app.xml><?xml version="1.0" encoding="utf-8"?>
-<Properties xmlns="http://schemas.openxmlformats.org/officeDocument/2006/extended-properties" xmlns:vt="http://schemas.openxmlformats.org/officeDocument/2006/docPropsVTypes">
-  <TotalTime>1</TotalTime>
-  <Words>0</Words>
-  <Application>Microsoft Macintosh PowerPoint</Application>
-  <PresentationFormat>On-screen Show (4:3)</PresentationFormat>
-  <Paragraphs>0</Paragraphs>
-  <Slides>0</Slides>
-  <Notes>0</Notes>
-  <HiddenSlides>0</HiddenSlides>
-  <MMClips>0</MMClips>
-  <ScaleCrop>false</ScaleCrop>
-  <HeadingPairs>
-    <vt:vector size="4" baseType="variant">
-      <vt:variant>
-        <vt:lpstr>Theme</vt:lpstr>
-      </vt:variant>
-      <vt:variant>
-        <vt:i4>1</vt:i4>
-      </vt:variant>
-      <vt:variant>
-        <vt:lpstr>Slide Titles</vt:lpstr>
-      </vt:variant>
-      <vt:variant>
-        <vt:i4>0</vt:i4>
-      </vt:variant>
-    </vt:vector>
-  </HeadingPairs>
-  <TitlesOfParts>
-    <vt:vector size="1" baseType="lpstr">
-      <vt:lpstr>Office Theme</vt:lpstr>
-    </vt:vector>
-  </TitlesOfParts>
-  <Manager/>
-  <Company/>
-  <LinksUpToDate>false</LinksUpToDate>
-  <SharedDoc>false</SharedDoc>
-  <HyperlinkBase/>
-  <HyperlinksChanged>false</HyperlinksChanged>
-  <AppVersion>14.0000</AppVersion>
-</Properties>
-</file>
-
-<file path=docProps\core.xml><?xml version="1.0" encoding="utf-8"?>
-<cp:coreProperties xmlns:cp="http://schemas.openxmlformats.org/package/2006/metadata/core-properties" xmlns:dc="http://purl.org/dc/elements/1.1/" xmlns:dcterms="http://purl.org/dc/terms/" xmlns:dcmitype="http://purl.org/dc/dcmitype/" xmlns:xsi="http://www.w3.org/2001/XMLSchema-instance">
-  <dc:title/>
-  <dc:subject/>
-  <dc:creator/>
-  <cp:keywords/>
-  <dc:description>generated using python-pptx</dc:description>
-  <cp:lastModifiedBy>Steve Canny</cp:lastModifiedBy>
-  <cp:revision>1</cp:revision>
-  <dcterms:created xsi:type="dcterms:W3CDTF">2013-01-27T09:14:16Z</dcterms:created>
-  <dcterms:modified xsi:type="dcterms:W3CDTF">2013-01-27T09:15:58Z</dcterms:modified>
-  <cp:category/>
-</cp:coreProperties>
-</file>
-
-<file path=ppt\presProps.xml><?xml version="1.0" encoding="utf-8"?>
-<p:presentationPr xmlns:a="http://schemas.openxmlformats.org/drawingml/2006/main" xmlns:r="http://schemas.openxmlformats.org/officeDocument/2006/relationships" xmlns:p="http://schemas.openxmlformats.org/presentationml/2006/main">
-  <p:extLst>
-    <p:ext uri="{E76CE94A-603C-4142-B9EB-6D1370010A27}">
-      <p14:discardImageEditData xmlns:p14="http://schemas.microsoft.com/office/powerpoint/2010/main" val="0"/>
-    </p:ext>
-    <p:ext uri="{D31A062A-798A-4329-ABDD-BBA856620510}">
-      <p14:defaultImageDpi xmlns:p14="http://schemas.microsoft.com/office/powerpoint/2010/main" val="0"/>
-    </p:ext>
-  </p:extLst>
-</p:presentationPr>
-</file>
-
-<file path=ppt\presentation.xml><?xml version="1.0" encoding="utf-8"?>
+<file path=ppt/presentation.xml><?xml version="1.0" encoding="utf-8"?>
 <p:presentation xmlns:a="http://schemas.openxmlformats.org/drawingml/2006/main" xmlns:r="http://schemas.openxmlformats.org/officeDocument/2006/relationships" xmlns:p="http://schemas.openxmlformats.org/presentationml/2006/main" saveSubsetFonts="1" autoCompressPictures="0">
   <p:sldMasterIdLst>
     <p:sldMasterId id="2147483648" r:id="rId1"/>
@@ -88,7 +17,6 @@
     <p:sldId id="265" r:id="rId16"/>
     <p:sldId id="266" r:id="rId17"/>
     <p:sldId id="270" r:id="rId20"/>
-    <p:sldId id="271" r:id="rId21"/>
     <p:sldId id="268" r:id="rId19"/>
   </p:sldIdLst>
   <p:sldSz cx="12191695" cy="6858000" type="screen4x3"/>
@@ -191,7 +119,7 @@
 </p:presentation>
 </file>
 
-<file path=ppt\slideLayouts\slideLayout1.xml><?xml version="1.0" encoding="utf-8"?>
+<file path=ppt/slideLayouts/slideLayout1.xml><?xml version="1.0" encoding="utf-8"?>
 <p:sldLayout xmlns:a="http://schemas.openxmlformats.org/drawingml/2006/main" xmlns:r="http://schemas.openxmlformats.org/officeDocument/2006/relationships" xmlns:p="http://schemas.openxmlformats.org/presentationml/2006/main" type="title" preserve="1">
   <p:cSld name="Title Slide">
     <p:spTree>
@@ -433,7 +361,7 @@
 </p:sldLayout>
 </file>
 
-<file path=ppt\slideLayouts\slideLayout10.xml><?xml version="1.0" encoding="utf-8"?>
+<file path=ppt/slideLayouts/slideLayout10.xml><?xml version="1.0" encoding="utf-8"?>
 <p:sldLayout xmlns:a="http://schemas.openxmlformats.org/drawingml/2006/main" xmlns:r="http://schemas.openxmlformats.org/officeDocument/2006/relationships" xmlns:p="http://schemas.openxmlformats.org/presentationml/2006/main" type="vertTx" preserve="1">
   <p:cSld name="Title and Vertical Text">
     <p:spTree>
@@ -603,7 +531,7 @@
 </p:sldLayout>
 </file>
 
-<file path=ppt\slideLayouts\slideLayout11.xml><?xml version="1.0" encoding="utf-8"?>
+<file path=ppt/slideLayouts/slideLayout11.xml><?xml version="1.0" encoding="utf-8"?>
 <p:sldLayout xmlns:a="http://schemas.openxmlformats.org/drawingml/2006/main" xmlns:r="http://schemas.openxmlformats.org/officeDocument/2006/relationships" xmlns:p="http://schemas.openxmlformats.org/presentationml/2006/main" type="vertTitleAndTx" preserve="1">
   <p:cSld name="Vertical Title and Text">
     <p:spTree>
@@ -783,7 +711,7 @@
 </p:sldLayout>
 </file>
 
-<file path=ppt\slideLayouts\slideLayout2.xml><?xml version="1.0" encoding="utf-8"?>
+<file path=ppt/slideLayouts/slideLayout2.xml><?xml version="1.0" encoding="utf-8"?>
 <p:sldLayout xmlns:a="http://schemas.openxmlformats.org/drawingml/2006/main" xmlns:r="http://schemas.openxmlformats.org/officeDocument/2006/relationships" xmlns:p="http://schemas.openxmlformats.org/presentationml/2006/main" type="obj" preserve="1">
   <p:cSld name="Title and Content">
     <p:spTree>
@@ -953,7 +881,7 @@
 </p:sldLayout>
 </file>
 
-<file path=ppt\slideLayouts\slideLayout3.xml><?xml version="1.0" encoding="utf-8"?>
+<file path=ppt/slideLayouts/slideLayout3.xml><?xml version="1.0" encoding="utf-8"?>
 <p:sldLayout xmlns:a="http://schemas.openxmlformats.org/drawingml/2006/main" xmlns:r="http://schemas.openxmlformats.org/officeDocument/2006/relationships" xmlns:p="http://schemas.openxmlformats.org/presentationml/2006/main" type="secHead" preserve="1">
   <p:cSld name="Section Header">
     <p:spTree>
@@ -1199,7 +1127,7 @@
 </p:sldLayout>
 </file>
 
-<file path=ppt\slideLayouts\slideLayout4.xml><?xml version="1.0" encoding="utf-8"?>
+<file path=ppt/slideLayouts/slideLayout4.xml><?xml version="1.0" encoding="utf-8"?>
 <p:sldLayout xmlns:a="http://schemas.openxmlformats.org/drawingml/2006/main" xmlns:r="http://schemas.openxmlformats.org/officeDocument/2006/relationships" xmlns:p="http://schemas.openxmlformats.org/presentationml/2006/main" type="twoObj" preserve="1">
   <p:cSld name="Two Content">
     <p:spTree>
@@ -1487,7 +1415,7 @@
 </p:sldLayout>
 </file>
 
-<file path=ppt\slideLayouts\slideLayout5.xml><?xml version="1.0" encoding="utf-8"?>
+<file path=ppt/slideLayouts/slideLayout5.xml><?xml version="1.0" encoding="utf-8"?>
 <p:sldLayout xmlns:a="http://schemas.openxmlformats.org/drawingml/2006/main" xmlns:r="http://schemas.openxmlformats.org/officeDocument/2006/relationships" xmlns:p="http://schemas.openxmlformats.org/presentationml/2006/main" type="twoTxTwoObj" preserve="1">
   <p:cSld name="Comparison">
     <p:spTree>
@@ -1909,7 +1837,7 @@
 </p:sldLayout>
 </file>
 
-<file path=ppt\slideLayouts\slideLayout6.xml><?xml version="1.0" encoding="utf-8"?>
+<file path=ppt/slideLayouts/slideLayout6.xml><?xml version="1.0" encoding="utf-8"?>
 <p:sldLayout xmlns:a="http://schemas.openxmlformats.org/drawingml/2006/main" xmlns:r="http://schemas.openxmlformats.org/officeDocument/2006/relationships" xmlns:p="http://schemas.openxmlformats.org/presentationml/2006/main" type="titleOnly" preserve="1">
   <p:cSld name="Title Only">
     <p:spTree>
@@ -2027,7 +1955,7 @@
 </p:sldLayout>
 </file>
 
-<file path=ppt\slideLayouts\slideLayout7.xml><?xml version="1.0" encoding="utf-8"?>
+<file path=ppt/slideLayouts/slideLayout7.xml><?xml version="1.0" encoding="utf-8"?>
 <p:sldLayout xmlns:a="http://schemas.openxmlformats.org/drawingml/2006/main" xmlns:r="http://schemas.openxmlformats.org/officeDocument/2006/relationships" xmlns:p="http://schemas.openxmlformats.org/presentationml/2006/main" type="blank" preserve="1">
   <p:cSld name="Blank">
     <p:spTree>
@@ -2122,7 +2050,7 @@
 </p:sldLayout>
 </file>
 
-<file path=ppt\slideLayouts\slideLayout8.xml><?xml version="1.0" encoding="utf-8"?>
+<file path=ppt/slideLayouts/slideLayout8.xml><?xml version="1.0" encoding="utf-8"?>
 <p:sldLayout xmlns:a="http://schemas.openxmlformats.org/drawingml/2006/main" xmlns:r="http://schemas.openxmlformats.org/officeDocument/2006/relationships" xmlns:p="http://schemas.openxmlformats.org/presentationml/2006/main" type="objTx" preserve="1">
   <p:cSld name="Content with Caption">
     <p:spTree>
@@ -2399,7 +2327,7 @@
 </p:sldLayout>
 </file>
 
-<file path=ppt\slideLayouts\slideLayout9.xml><?xml version="1.0" encoding="utf-8"?>
+<file path=ppt/slideLayouts/slideLayout9.xml><?xml version="1.0" encoding="utf-8"?>
 <p:sldLayout xmlns:a="http://schemas.openxmlformats.org/drawingml/2006/main" xmlns:r="http://schemas.openxmlformats.org/officeDocument/2006/relationships" xmlns:p="http://schemas.openxmlformats.org/presentationml/2006/main" type="picTx" preserve="1">
   <p:cSld name="Picture with Caption">
     <p:spTree>
@@ -2652,7 +2580,7 @@
 </p:sldLayout>
 </file>
 
-<file path=ppt\slideMasters\slideMaster1.xml><?xml version="1.0" encoding="utf-8"?>
+<file path=ppt/slideMasters/slideMaster1.xml><?xml version="1.0" encoding="utf-8"?>
 <p:sldMaster xmlns:a="http://schemas.openxmlformats.org/drawingml/2006/main" xmlns:r="http://schemas.openxmlformats.org/officeDocument/2006/relationships" xmlns:p="http://schemas.openxmlformats.org/presentationml/2006/main">
   <p:cSld>
     <p:bg>
@@ -3162,7 +3090,7 @@
 </p:sldMaster>
 </file>
 
-<file path=ppt\slides\slide1.xml><?xml version="1.0" encoding="utf-8"?>
+<file path=ppt/slides/slide1.xml><?xml version="1.0" encoding="utf-8"?>
 <p:sld xmlns:a="http://schemas.openxmlformats.org/drawingml/2006/main" xmlns:p="http://schemas.openxmlformats.org/presentationml/2006/main" xmlns:r="http://schemas.openxmlformats.org/officeDocument/2006/relationships">
   <p:cSld>
     <p:spTree>
@@ -3567,7 +3495,7 @@
 </p:sld>
 </file>
 
-<file path=ppt\slides\slide10.xml><?xml version="1.0" encoding="utf-8"?>
+<file path=ppt/slides/slide10.xml><?xml version="1.0" encoding="utf-8"?>
 <p:sld xmlns:a="http://schemas.openxmlformats.org/drawingml/2006/main" xmlns:p="http://schemas.openxmlformats.org/presentationml/2006/main" xmlns:r="http://schemas.openxmlformats.org/officeDocument/2006/relationships">
   <p:cSld>
     <p:spTree>
@@ -4313,7 +4241,7 @@
                 </a:solidFill>
                 <a:latin typeface="Calibri"/>
               </a:rPr>
-              <a:t>Unified Enterprise AI Agents Platform  |  Capgemini x Snowflake Hackathon</a:t>
+              <a:t>Unified Enterprise AI Agents Platform  |  Capgemini × Snowflake Hackathon</a:t>
             </a:r>
           </a:p>
         </p:txBody>
@@ -4365,7 +4293,7 @@
 </p:sld>
 </file>
 
-<file path=ppt\slides\slide11.xml><?xml version="1.0" encoding="utf-8"?>
+<file path=ppt/slides/slide11.xml><?xml version="1.0" encoding="utf-8"?>
 <p:sld xmlns:a="http://schemas.openxmlformats.org/drawingml/2006/main" xmlns:p="http://schemas.openxmlformats.org/presentationml/2006/main" xmlns:r="http://schemas.openxmlformats.org/officeDocument/2006/relationships">
   <p:cSld>
     <p:spTree>
@@ -4575,8 +4503,7 @@
                 </a:solidFill>
                 <a:latin typeface="Calibri"/>
               </a:rPr>
-              <a:t>▸  Portfolio &amp; Risk — premium, loss ratio, revenue at risk
-by policy type and region</a:t>
+              <a:t>▸  Portfolio &amp; Risk — premium, loss ratio, revenue at risk by policy type and region</a:t>
             </a:r>
           </a:p>
           <a:p>
@@ -4592,8 +4519,7 @@
                 </a:solidFill>
                 <a:latin typeface="Calibri"/>
               </a:rPr>
-              <a:t>▸  Trend Analysis — month-over-month claims,
-fraud, and churn</a:t>
+              <a:t>▸  Trend Analysis — month-over-month claims, fraud, and churn</a:t>
             </a:r>
           </a:p>
           <a:p>
@@ -4609,9 +4535,7 @@
                 </a:solidFill>
                 <a:latin typeface="Calibri"/>
               </a:rPr>
-              <a:t>▸  Agent Accuracy &amp; Usage — query volume and
-👍/👎 helpful rate per tool, live from every
-chat interaction</a:t>
+              <a:t>▸  Agent Accuracy &amp; Usage — query volume and 👍/👎 helpful rate per tool, live from every chat interaction</a:t>
             </a:r>
           </a:p>
         </p:txBody>
@@ -4904,7 +4828,7 @@
                 </a:solidFill>
                 <a:latin typeface="Calibri"/>
               </a:rPr>
-              <a:t>Unified Enterprise AI Agents Platform  |  Capgemini x Snowflake Hackathon</a:t>
+              <a:t>Unified Enterprise AI Agents Platform  |  Capgemini × Snowflake Hackathon</a:t>
             </a:r>
           </a:p>
         </p:txBody>
@@ -4956,7 +4880,7 @@
 </p:sld>
 </file>
 
-<file path=ppt\slides\slide13.xml><?xml version="1.0" encoding="utf-8"?>
+<file path=ppt/slides/slide13.xml><?xml version="1.0" encoding="utf-8"?>
 <p:sld xmlns:a="http://schemas.openxmlformats.org/drawingml/2006/main" xmlns:p="http://schemas.openxmlformats.org/presentationml/2006/main" xmlns:r="http://schemas.openxmlformats.org/officeDocument/2006/relationships">
   <p:cSld>
     <p:spTree>
@@ -5345,7 +5269,7 @@
 </p:sld>
 </file>
 
-<file path=ppt\slides\slide15.xml><?xml version="1.0" encoding="utf-8"?>
+<file path=ppt/slides/slide15.xml><?xml version="1.0" encoding="utf-8"?>
 <p:sld xmlns:a="http://schemas.openxmlformats.org/drawingml/2006/main" xmlns:p="http://schemas.openxmlformats.org/presentationml/2006/main" xmlns:r="http://schemas.openxmlformats.org/officeDocument/2006/relationships">
   <p:cSld>
     <p:spTree>
@@ -5484,14 +5408,113 @@
       </p:sp>
       <p:sp>
         <p:nvSpPr>
-          <p:cNvPr id="8" name="TextBox 7"/>
+          <p:cNvPr id="20" name="Benefit Card 1"/>
+          <p:cNvSpPr/>
+          <p:nvPr/>
+        </p:nvSpPr>
+        <p:spPr>
+          <a:xfrm>
+            <a:off x="731520" y="1417320"/>
+            <a:ext cx="5212080" cy="1920240"/>
+          </a:xfrm>
+          <a:prstGeom prst="roundRect">
+            <a:avLst>
+              <a:gd name="adj" fmla="val 8000"/>
+            </a:avLst>
+          </a:prstGeom>
+          <a:solidFill>
+            <a:srgbClr val="F4F6F9"/>
+          </a:solidFill>
+          <a:ln>
+            <a:noFill/>
+          </a:ln>
+          <a:effectLst/>
+        </p:spPr>
+        <p:style>
+          <a:lnRef idx="1">
+            <a:schemeClr val="accent1"/>
+          </a:lnRef>
+          <a:fillRef idx="3">
+            <a:schemeClr val="accent1"/>
+          </a:fillRef>
+          <a:effectRef idx="2">
+            <a:schemeClr val="accent1"/>
+          </a:effectRef>
+          <a:fontRef idx="minor">
+            <a:schemeClr val="lt1"/>
+          </a:fontRef>
+        </p:style>
+        <p:txBody>
+          <a:bodyPr wrap="square" lIns="0" tIns="0" rIns="0" bIns="0" anchor="t"/>
+          <a:lstStyle/>
+          <a:p>
+            <a:pPr algn="l"/>
+          </a:p>
+        </p:txBody>
+      </p:sp>
+      <p:sp>
+        <p:nvSpPr>
+          <p:cNvPr id="21" name="Benefit Num 1"/>
+          <p:cNvSpPr/>
+          <p:nvPr/>
+        </p:nvSpPr>
+        <p:spPr>
+          <a:xfrm>
+            <a:off x="1097280" y="1828800"/>
+            <a:ext cx="731520" cy="731520"/>
+          </a:xfrm>
+          <a:prstGeom prst="ellipse">
+            <a:avLst/>
+          </a:prstGeom>
+          <a:solidFill>
+            <a:srgbClr val="0B1F3A"/>
+          </a:solidFill>
+          <a:ln>
+            <a:noFill/>
+          </a:ln>
+          <a:effectLst/>
+        </p:spPr>
+        <p:style>
+          <a:lnRef idx="1">
+            <a:schemeClr val="accent1"/>
+          </a:lnRef>
+          <a:fillRef idx="3">
+            <a:schemeClr val="accent1"/>
+          </a:fillRef>
+          <a:effectRef idx="2">
+            <a:schemeClr val="accent1"/>
+          </a:effectRef>
+          <a:fontRef idx="minor">
+            <a:schemeClr val="lt1"/>
+          </a:fontRef>
+        </p:style>
+        <p:txBody>
+          <a:bodyPr wrap="square" lIns="0" tIns="0" rIns="0" bIns="0" anchor="ctr"/>
+          <a:lstStyle/>
+          <a:p>
+            <a:pPr algn="ctr"/>
+            <a:r>
+              <a:rPr lang="en-US" sz="2400" b="1">
+                <a:solidFill>
+                  <a:srgbClr val="FFFFFF"/>
+                </a:solidFill>
+                <a:latin typeface="Calibri"/>
+              </a:rPr>
+              <a:t>1</a:t>
+            </a:r>
+          </a:p>
+        </p:txBody>
+      </p:sp>
+      <p:sp>
+        <p:nvSpPr>
+          <p:cNvPr id="22" name="Benefit Title 1"/>
           <p:cNvSpPr txBox="1"/>
           <p:nvPr/>
         </p:nvSpPr>
         <p:spPr>
           <a:xfrm>
-            <a:off x="914400" y="1645920"/>
-            <a:ext cx="10058400" cy="4572000"/>
+            <a:off x="2103120" y="1828800"/>
+            <a:ext cx="3474720" cy="411480"/>
           </a:xfrm>
           <a:prstGeom prst="rect">
             <a:avLst/>
@@ -5499,72 +5522,562 @@
           <a:noFill/>
         </p:spPr>
         <p:txBody>
-          <a:bodyPr wrap="square">
-            <a:spAutoFit/>
-          </a:bodyPr>
-          <a:lstStyle/>
-          <a:p>
-            <a:pPr>
-              <a:spcAft>
-                <a:spcPts val="2400"/>
-              </a:spcAft>
-            </a:pPr>
-            <a:r>
-              <a:rPr sz="2000">
-                <a:solidFill>
-                  <a:srgbClr val="1A1A1A"/>
-                </a:solidFill>
-                <a:latin typeface="Calibri"/>
-              </a:rPr>
-              <a:t>▸  Faster answers — hours of waiting on a specialist collapse into a single conversation</a:t>
-            </a:r>
-          </a:p>
-          <a:p>
-            <a:pPr>
-              <a:spcAft>
-                <a:spcPts val="2400"/>
-              </a:spcAft>
-            </a:pPr>
-            <a:r>
-              <a:rPr sz="2000">
-                <a:solidFill>
-                  <a:srgbClr val="1A1A1A"/>
-                </a:solidFill>
-                <a:latin typeface="Calibri"/>
-              </a:rPr>
-              <a:t>▸  No new tools to learn — plain English in, no SQL, no BI dashboards, no ticket queue</a:t>
-            </a:r>
-          </a:p>
-          <a:p>
-            <a:pPr>
-              <a:spcAft>
-                <a:spcPts val="2400"/>
-              </a:spcAft>
-            </a:pPr>
-            <a:r>
-              <a:rPr sz="2000">
-                <a:solidFill>
-                  <a:srgbClr val="1A1A1A"/>
-                </a:solidFill>
-                <a:latin typeface="Calibri"/>
-              </a:rPr>
-              <a:t>▸  Trustworthy by design — every answer shows its SQL or source citation, so it can be verified</a:t>
-            </a:r>
-          </a:p>
-          <a:p>
-            <a:pPr>
-              <a:spcAft>
-                <a:spcPts val="2400"/>
-              </a:spcAft>
-            </a:pPr>
-            <a:r>
-              <a:rPr sz="2000">
-                <a:solidFill>
-                  <a:srgbClr val="1A1A1A"/>
-                </a:solidFill>
-                <a:latin typeface="Calibri"/>
-              </a:rPr>
-              <a:t>▸  One integration, many channels — the same agent serves Streamlit today and any MCP client tomorrow</a:t>
+          <a:bodyPr wrap="square" lIns="0" tIns="0" rIns="0" bIns="0" anchor="t"/>
+          <a:lstStyle/>
+          <a:p>
+            <a:pPr algn="l"/>
+            <a:r>
+              <a:rPr lang="en-US" sz="1800" b="1">
+                <a:solidFill>
+                  <a:srgbClr val="0B1F3A"/>
+                </a:solidFill>
+                <a:latin typeface="Calibri"/>
+              </a:rPr>
+              <a:t>Faster answers</a:t>
+            </a:r>
+          </a:p>
+        </p:txBody>
+      </p:sp>
+      <p:sp>
+        <p:nvSpPr>
+          <p:cNvPr id="23" name="Benefit Desc 1"/>
+          <p:cNvSpPr txBox="1"/>
+          <p:nvPr/>
+        </p:nvSpPr>
+        <p:spPr>
+          <a:xfrm>
+            <a:off x="2103120" y="2286000"/>
+            <a:ext cx="3474720" cy="822960"/>
+          </a:xfrm>
+          <a:prstGeom prst="rect">
+            <a:avLst/>
+          </a:prstGeom>
+          <a:noFill/>
+        </p:spPr>
+        <p:txBody>
+          <a:bodyPr wrap="square" lIns="0" tIns="0" rIns="0" bIns="0" anchor="t"/>
+          <a:lstStyle/>
+          <a:p>
+            <a:pPr algn="l">
+              <a:lnSpc>
+                <a:spcPct val="115000"/>
+              </a:lnSpc>
+            </a:pPr>
+            <a:r>
+              <a:rPr lang="en-US" sz="1400" b="0">
+                <a:solidFill>
+                  <a:srgbClr val="5A6370"/>
+                </a:solidFill>
+                <a:latin typeface="Calibri"/>
+              </a:rPr>
+              <a:t>Hours of waiting on a specialist collapse into a single conversation.</a:t>
+            </a:r>
+          </a:p>
+        </p:txBody>
+      </p:sp>
+      <p:sp>
+        <p:nvSpPr>
+          <p:cNvPr id="24" name="Benefit Card 2"/>
+          <p:cNvSpPr/>
+          <p:nvPr/>
+        </p:nvSpPr>
+        <p:spPr>
+          <a:xfrm>
+            <a:off x="6263640" y="1417320"/>
+            <a:ext cx="5212080" cy="1920240"/>
+          </a:xfrm>
+          <a:prstGeom prst="roundRect">
+            <a:avLst>
+              <a:gd name="adj" fmla="val 8000"/>
+            </a:avLst>
+          </a:prstGeom>
+          <a:solidFill>
+            <a:srgbClr val="F4F6F9"/>
+          </a:solidFill>
+          <a:ln>
+            <a:noFill/>
+          </a:ln>
+          <a:effectLst/>
+        </p:spPr>
+        <p:style>
+          <a:lnRef idx="1">
+            <a:schemeClr val="accent1"/>
+          </a:lnRef>
+          <a:fillRef idx="3">
+            <a:schemeClr val="accent1"/>
+          </a:fillRef>
+          <a:effectRef idx="2">
+            <a:schemeClr val="accent1"/>
+          </a:effectRef>
+          <a:fontRef idx="minor">
+            <a:schemeClr val="lt1"/>
+          </a:fontRef>
+        </p:style>
+        <p:txBody>
+          <a:bodyPr wrap="square" lIns="0" tIns="0" rIns="0" bIns="0" anchor="t"/>
+          <a:lstStyle/>
+          <a:p>
+            <a:pPr algn="l"/>
+          </a:p>
+        </p:txBody>
+      </p:sp>
+      <p:sp>
+        <p:nvSpPr>
+          <p:cNvPr id="25" name="Benefit Num 2"/>
+          <p:cNvSpPr/>
+          <p:nvPr/>
+        </p:nvSpPr>
+        <p:spPr>
+          <a:xfrm>
+            <a:off x="6629400" y="1828800"/>
+            <a:ext cx="731520" cy="731520"/>
+          </a:xfrm>
+          <a:prstGeom prst="ellipse">
+            <a:avLst/>
+          </a:prstGeom>
+          <a:solidFill>
+            <a:srgbClr val="0B1F3A"/>
+          </a:solidFill>
+          <a:ln>
+            <a:noFill/>
+          </a:ln>
+          <a:effectLst/>
+        </p:spPr>
+        <p:style>
+          <a:lnRef idx="1">
+            <a:schemeClr val="accent1"/>
+          </a:lnRef>
+          <a:fillRef idx="3">
+            <a:schemeClr val="accent1"/>
+          </a:fillRef>
+          <a:effectRef idx="2">
+            <a:schemeClr val="accent1"/>
+          </a:effectRef>
+          <a:fontRef idx="minor">
+            <a:schemeClr val="lt1"/>
+          </a:fontRef>
+        </p:style>
+        <p:txBody>
+          <a:bodyPr wrap="square" lIns="0" tIns="0" rIns="0" bIns="0" anchor="ctr"/>
+          <a:lstStyle/>
+          <a:p>
+            <a:pPr algn="ctr"/>
+            <a:r>
+              <a:rPr lang="en-US" sz="2400" b="1">
+                <a:solidFill>
+                  <a:srgbClr val="FFFFFF"/>
+                </a:solidFill>
+                <a:latin typeface="Calibri"/>
+              </a:rPr>
+              <a:t>2</a:t>
+            </a:r>
+          </a:p>
+        </p:txBody>
+      </p:sp>
+      <p:sp>
+        <p:nvSpPr>
+          <p:cNvPr id="26" name="Benefit Title 2"/>
+          <p:cNvSpPr txBox="1"/>
+          <p:nvPr/>
+        </p:nvSpPr>
+        <p:spPr>
+          <a:xfrm>
+            <a:off x="7635240" y="1828800"/>
+            <a:ext cx="3474720" cy="411480"/>
+          </a:xfrm>
+          <a:prstGeom prst="rect">
+            <a:avLst/>
+          </a:prstGeom>
+          <a:noFill/>
+        </p:spPr>
+        <p:txBody>
+          <a:bodyPr wrap="square" lIns="0" tIns="0" rIns="0" bIns="0" anchor="t"/>
+          <a:lstStyle/>
+          <a:p>
+            <a:pPr algn="l"/>
+            <a:r>
+              <a:rPr lang="en-US" sz="1800" b="1">
+                <a:solidFill>
+                  <a:srgbClr val="0B1F3A"/>
+                </a:solidFill>
+                <a:latin typeface="Calibri"/>
+              </a:rPr>
+              <a:t>No new tools to learn</a:t>
+            </a:r>
+          </a:p>
+        </p:txBody>
+      </p:sp>
+      <p:sp>
+        <p:nvSpPr>
+          <p:cNvPr id="27" name="Benefit Desc 2"/>
+          <p:cNvSpPr txBox="1"/>
+          <p:nvPr/>
+        </p:nvSpPr>
+        <p:spPr>
+          <a:xfrm>
+            <a:off x="7635240" y="2286000"/>
+            <a:ext cx="3474720" cy="822960"/>
+          </a:xfrm>
+          <a:prstGeom prst="rect">
+            <a:avLst/>
+          </a:prstGeom>
+          <a:noFill/>
+        </p:spPr>
+        <p:txBody>
+          <a:bodyPr wrap="square" lIns="0" tIns="0" rIns="0" bIns="0" anchor="t"/>
+          <a:lstStyle/>
+          <a:p>
+            <a:pPr algn="l">
+              <a:lnSpc>
+                <a:spcPct val="115000"/>
+              </a:lnSpc>
+            </a:pPr>
+            <a:r>
+              <a:rPr lang="en-US" sz="1400" b="0">
+                <a:solidFill>
+                  <a:srgbClr val="5A6370"/>
+                </a:solidFill>
+                <a:latin typeface="Calibri"/>
+              </a:rPr>
+              <a:t>Plain English in — no SQL, no BI dashboards, no ticket queue.</a:t>
+            </a:r>
+          </a:p>
+        </p:txBody>
+      </p:sp>
+      <p:sp>
+        <p:nvSpPr>
+          <p:cNvPr id="28" name="Benefit Card 3"/>
+          <p:cNvSpPr/>
+          <p:nvPr/>
+        </p:nvSpPr>
+        <p:spPr>
+          <a:xfrm>
+            <a:off x="731520" y="3657600"/>
+            <a:ext cx="5212080" cy="1920240"/>
+          </a:xfrm>
+          <a:prstGeom prst="roundRect">
+            <a:avLst>
+              <a:gd name="adj" fmla="val 8000"/>
+            </a:avLst>
+          </a:prstGeom>
+          <a:solidFill>
+            <a:srgbClr val="F4F6F9"/>
+          </a:solidFill>
+          <a:ln>
+            <a:noFill/>
+          </a:ln>
+          <a:effectLst/>
+        </p:spPr>
+        <p:style>
+          <a:lnRef idx="1">
+            <a:schemeClr val="accent1"/>
+          </a:lnRef>
+          <a:fillRef idx="3">
+            <a:schemeClr val="accent1"/>
+          </a:fillRef>
+          <a:effectRef idx="2">
+            <a:schemeClr val="accent1"/>
+          </a:effectRef>
+          <a:fontRef idx="minor">
+            <a:schemeClr val="lt1"/>
+          </a:fontRef>
+        </p:style>
+        <p:txBody>
+          <a:bodyPr wrap="square" lIns="0" tIns="0" rIns="0" bIns="0" anchor="t"/>
+          <a:lstStyle/>
+          <a:p>
+            <a:pPr algn="l"/>
+          </a:p>
+        </p:txBody>
+      </p:sp>
+      <p:sp>
+        <p:nvSpPr>
+          <p:cNvPr id="29" name="Benefit Num 3"/>
+          <p:cNvSpPr/>
+          <p:nvPr/>
+        </p:nvSpPr>
+        <p:spPr>
+          <a:xfrm>
+            <a:off x="1097280" y="4069080"/>
+            <a:ext cx="731520" cy="731520"/>
+          </a:xfrm>
+          <a:prstGeom prst="ellipse">
+            <a:avLst/>
+          </a:prstGeom>
+          <a:solidFill>
+            <a:srgbClr val="0B1F3A"/>
+          </a:solidFill>
+          <a:ln>
+            <a:noFill/>
+          </a:ln>
+          <a:effectLst/>
+        </p:spPr>
+        <p:style>
+          <a:lnRef idx="1">
+            <a:schemeClr val="accent1"/>
+          </a:lnRef>
+          <a:fillRef idx="3">
+            <a:schemeClr val="accent1"/>
+          </a:fillRef>
+          <a:effectRef idx="2">
+            <a:schemeClr val="accent1"/>
+          </a:effectRef>
+          <a:fontRef idx="minor">
+            <a:schemeClr val="lt1"/>
+          </a:fontRef>
+        </p:style>
+        <p:txBody>
+          <a:bodyPr wrap="square" lIns="0" tIns="0" rIns="0" bIns="0" anchor="ctr"/>
+          <a:lstStyle/>
+          <a:p>
+            <a:pPr algn="ctr"/>
+            <a:r>
+              <a:rPr lang="en-US" sz="2400" b="1">
+                <a:solidFill>
+                  <a:srgbClr val="FFFFFF"/>
+                </a:solidFill>
+                <a:latin typeface="Calibri"/>
+              </a:rPr>
+              <a:t>3</a:t>
+            </a:r>
+          </a:p>
+        </p:txBody>
+      </p:sp>
+      <p:sp>
+        <p:nvSpPr>
+          <p:cNvPr id="30" name="Benefit Title 3"/>
+          <p:cNvSpPr txBox="1"/>
+          <p:nvPr/>
+        </p:nvSpPr>
+        <p:spPr>
+          <a:xfrm>
+            <a:off x="2103120" y="4069080"/>
+            <a:ext cx="3474720" cy="411480"/>
+          </a:xfrm>
+          <a:prstGeom prst="rect">
+            <a:avLst/>
+          </a:prstGeom>
+          <a:noFill/>
+        </p:spPr>
+        <p:txBody>
+          <a:bodyPr wrap="square" lIns="0" tIns="0" rIns="0" bIns="0" anchor="t"/>
+          <a:lstStyle/>
+          <a:p>
+            <a:pPr algn="l"/>
+            <a:r>
+              <a:rPr lang="en-US" sz="1800" b="1">
+                <a:solidFill>
+                  <a:srgbClr val="0B1F3A"/>
+                </a:solidFill>
+                <a:latin typeface="Calibri"/>
+              </a:rPr>
+              <a:t>Trustworthy by design</a:t>
+            </a:r>
+          </a:p>
+        </p:txBody>
+      </p:sp>
+      <p:sp>
+        <p:nvSpPr>
+          <p:cNvPr id="31" name="Benefit Desc 3"/>
+          <p:cNvSpPr txBox="1"/>
+          <p:nvPr/>
+        </p:nvSpPr>
+        <p:spPr>
+          <a:xfrm>
+            <a:off x="2103120" y="4526280"/>
+            <a:ext cx="3474720" cy="822960"/>
+          </a:xfrm>
+          <a:prstGeom prst="rect">
+            <a:avLst/>
+          </a:prstGeom>
+          <a:noFill/>
+        </p:spPr>
+        <p:txBody>
+          <a:bodyPr wrap="square" lIns="0" tIns="0" rIns="0" bIns="0" anchor="t"/>
+          <a:lstStyle/>
+          <a:p>
+            <a:pPr algn="l">
+              <a:lnSpc>
+                <a:spcPct val="115000"/>
+              </a:lnSpc>
+            </a:pPr>
+            <a:r>
+              <a:rPr lang="en-US" sz="1400" b="0">
+                <a:solidFill>
+                  <a:srgbClr val="5A6370"/>
+                </a:solidFill>
+                <a:latin typeface="Calibri"/>
+              </a:rPr>
+              <a:t>Every answer shows its SQL or source citation, so it can be verified.</a:t>
+            </a:r>
+          </a:p>
+        </p:txBody>
+      </p:sp>
+      <p:sp>
+        <p:nvSpPr>
+          <p:cNvPr id="32" name="Benefit Card 4"/>
+          <p:cNvSpPr/>
+          <p:nvPr/>
+        </p:nvSpPr>
+        <p:spPr>
+          <a:xfrm>
+            <a:off x="6263640" y="3657600"/>
+            <a:ext cx="5212080" cy="1920240"/>
+          </a:xfrm>
+          <a:prstGeom prst="roundRect">
+            <a:avLst>
+              <a:gd name="adj" fmla="val 8000"/>
+            </a:avLst>
+          </a:prstGeom>
+          <a:solidFill>
+            <a:srgbClr val="F4F6F9"/>
+          </a:solidFill>
+          <a:ln>
+            <a:noFill/>
+          </a:ln>
+          <a:effectLst/>
+        </p:spPr>
+        <p:style>
+          <a:lnRef idx="1">
+            <a:schemeClr val="accent1"/>
+          </a:lnRef>
+          <a:fillRef idx="3">
+            <a:schemeClr val="accent1"/>
+          </a:fillRef>
+          <a:effectRef idx="2">
+            <a:schemeClr val="accent1"/>
+          </a:effectRef>
+          <a:fontRef idx="minor">
+            <a:schemeClr val="lt1"/>
+          </a:fontRef>
+        </p:style>
+        <p:txBody>
+          <a:bodyPr wrap="square" lIns="0" tIns="0" rIns="0" bIns="0" anchor="t"/>
+          <a:lstStyle/>
+          <a:p>
+            <a:pPr algn="l"/>
+          </a:p>
+        </p:txBody>
+      </p:sp>
+      <p:sp>
+        <p:nvSpPr>
+          <p:cNvPr id="33" name="Benefit Num 4"/>
+          <p:cNvSpPr/>
+          <p:nvPr/>
+        </p:nvSpPr>
+        <p:spPr>
+          <a:xfrm>
+            <a:off x="6629400" y="4069080"/>
+            <a:ext cx="731520" cy="731520"/>
+          </a:xfrm>
+          <a:prstGeom prst="ellipse">
+            <a:avLst/>
+          </a:prstGeom>
+          <a:solidFill>
+            <a:srgbClr val="0B1F3A"/>
+          </a:solidFill>
+          <a:ln>
+            <a:noFill/>
+          </a:ln>
+          <a:effectLst/>
+        </p:spPr>
+        <p:style>
+          <a:lnRef idx="1">
+            <a:schemeClr val="accent1"/>
+          </a:lnRef>
+          <a:fillRef idx="3">
+            <a:schemeClr val="accent1"/>
+          </a:fillRef>
+          <a:effectRef idx="2">
+            <a:schemeClr val="accent1"/>
+          </a:effectRef>
+          <a:fontRef idx="minor">
+            <a:schemeClr val="lt1"/>
+          </a:fontRef>
+        </p:style>
+        <p:txBody>
+          <a:bodyPr wrap="square" lIns="0" tIns="0" rIns="0" bIns="0" anchor="ctr"/>
+          <a:lstStyle/>
+          <a:p>
+            <a:pPr algn="ctr"/>
+            <a:r>
+              <a:rPr lang="en-US" sz="2400" b="1">
+                <a:solidFill>
+                  <a:srgbClr val="FFFFFF"/>
+                </a:solidFill>
+                <a:latin typeface="Calibri"/>
+              </a:rPr>
+              <a:t>4</a:t>
+            </a:r>
+          </a:p>
+        </p:txBody>
+      </p:sp>
+      <p:sp>
+        <p:nvSpPr>
+          <p:cNvPr id="34" name="Benefit Title 4"/>
+          <p:cNvSpPr txBox="1"/>
+          <p:nvPr/>
+        </p:nvSpPr>
+        <p:spPr>
+          <a:xfrm>
+            <a:off x="7635240" y="4069080"/>
+            <a:ext cx="3474720" cy="411480"/>
+          </a:xfrm>
+          <a:prstGeom prst="rect">
+            <a:avLst/>
+          </a:prstGeom>
+          <a:noFill/>
+        </p:spPr>
+        <p:txBody>
+          <a:bodyPr wrap="square" lIns="0" tIns="0" rIns="0" bIns="0" anchor="t"/>
+          <a:lstStyle/>
+          <a:p>
+            <a:pPr algn="l"/>
+            <a:r>
+              <a:rPr lang="en-US" sz="1800" b="1">
+                <a:solidFill>
+                  <a:srgbClr val="0B1F3A"/>
+                </a:solidFill>
+                <a:latin typeface="Calibri"/>
+              </a:rPr>
+              <a:t>One integration, many channels</a:t>
+            </a:r>
+          </a:p>
+        </p:txBody>
+      </p:sp>
+      <p:sp>
+        <p:nvSpPr>
+          <p:cNvPr id="35" name="Benefit Desc 4"/>
+          <p:cNvSpPr txBox="1"/>
+          <p:nvPr/>
+        </p:nvSpPr>
+        <p:spPr>
+          <a:xfrm>
+            <a:off x="7635240" y="4526280"/>
+            <a:ext cx="3474720" cy="822960"/>
+          </a:xfrm>
+          <a:prstGeom prst="rect">
+            <a:avLst/>
+          </a:prstGeom>
+          <a:noFill/>
+        </p:spPr>
+        <p:txBody>
+          <a:bodyPr wrap="square" lIns="0" tIns="0" rIns="0" bIns="0" anchor="t"/>
+          <a:lstStyle/>
+          <a:p>
+            <a:pPr algn="l">
+              <a:lnSpc>
+                <a:spcPct val="115000"/>
+              </a:lnSpc>
+            </a:pPr>
+            <a:r>
+              <a:rPr lang="en-US" sz="1400" b="0">
+                <a:solidFill>
+                  <a:srgbClr val="5A6370"/>
+                </a:solidFill>
+                <a:latin typeface="Calibri"/>
+              </a:rPr>
+              <a:t>The same agent serves Streamlit today and any MCP client tomorrow.</a:t>
             </a:r>
           </a:p>
         </p:txBody>
@@ -5603,7 +6116,7 @@
                 </a:solidFill>
                 <a:latin typeface="Calibri"/>
               </a:rPr>
-              <a:t>Unified Enterprise AI Agents Platform  |  Capgemini x Snowflake Hackathon</a:t>
+              <a:t>Unified Enterprise AI Agents Platform  |  Capgemini × Snowflake Hackathon</a:t>
             </a:r>
           </a:p>
         </p:txBody>
@@ -5655,7 +6168,7 @@
 </p:sld>
 </file>
 
-<file path=ppt\slides\slide16.xml><?xml version="1.0" encoding="utf-8"?>
+<file path=ppt/slides/slide2.xml><?xml version="1.0" encoding="utf-8"?>
 <p:sld xmlns:a="http://schemas.openxmlformats.org/drawingml/2006/main" xmlns:p="http://schemas.openxmlformats.org/presentationml/2006/main" xmlns:r="http://schemas.openxmlformats.org/officeDocument/2006/relationships">
   <p:cSld>
     <p:spTree>
@@ -5762,7 +6275,7 @@
         <p:spPr>
           <a:xfrm>
             <a:off x="548640" y="256032"/>
-            <a:ext cx="9601200" cy="548640"/>
+            <a:ext cx="7315200" cy="548640"/>
           </a:xfrm>
           <a:prstGeom prst="rect">
             <a:avLst/>
@@ -5781,73 +6294,162 @@
               </a:lnSpc>
             </a:pPr>
             <a:r>
-              <a:rPr sz="2800" b="1" i="0">
+              <a:rPr sz="3000" b="1" i="0">
                 <a:solidFill>
                   <a:srgbClr val="FFFFFF"/>
                 </a:solidFill>
                 <a:latin typeface="Georgia"/>
               </a:rPr>
-              <a:t>Judging Criteria</a:t>
-            </a:r>
-          </a:p>
-        </p:txBody>
-      </p:sp>
-      <p:sp>
-        <p:nvSpPr>
-          <p:cNvPr id="5" name="Card 1"/>
-          <p:cNvSpPr/>
-          <p:nvPr/>
-        </p:nvSpPr>
-        <p:spPr>
-          <a:xfrm>
-            <a:off x="731520" y="1400000"/>
-            <a:ext cx="5204307" cy="2250000"/>
-          </a:xfrm>
-          <a:prstGeom prst="roundRect">
-            <a:avLst>
-              <a:gd name="adj" fmla="val 6000"/>
-            </a:avLst>
-          </a:prstGeom>
-          <a:solidFill>
-            <a:srgbClr val="F4F6F9"/>
-          </a:solidFill>
-          <a:ln>
-            <a:noFill/>
-          </a:ln>
-          <a:effectLst/>
-        </p:spPr>
-        <p:style>
-          <a:lnRef idx="1">
-            <a:schemeClr val="accent1"/>
-          </a:lnRef>
-          <a:fillRef idx="3">
-            <a:schemeClr val="accent1"/>
-          </a:fillRef>
-          <a:effectRef idx="2">
-            <a:schemeClr val="accent1"/>
-          </a:effectRef>
-          <a:fontRef idx="minor">
-            <a:schemeClr val="lt1"/>
-          </a:fontRef>
-        </p:style>
-        <p:txBody>
-          <a:bodyPr rtlCol="0" anchor="ctr"/>
-          <a:lstStyle/>
-          <a:p>
-            <a:pPr algn="ctr"/>
-          </a:p>
-        </p:txBody>
-      </p:sp>
-      <p:sp>
-        <p:nvSpPr>
-          <p:cNvPr id="6" name="Pct 1"/>
+              <a:t>Agenda</a:t>
+            </a:r>
+          </a:p>
+        </p:txBody>
+      </p:sp>
+      <p:sp>
+        <p:nvSpPr>
+          <p:cNvPr id="8" name="TextBox 7"/>
           <p:cNvSpPr txBox="1"/>
           <p:nvPr/>
         </p:nvSpPr>
         <p:spPr>
           <a:xfrm>
-            <a:off x="731520" y="1550000"/>
-            <a:ext cx="5204307" cy="600000"/>
+            <a:off x="914400" y="1645920"/>
+            <a:ext cx="10058400" cy="4572000"/>
+          </a:xfrm>
+          <a:prstGeom prst="rect">
+            <a:avLst/>
+          </a:prstGeom>
+          <a:noFill/>
+        </p:spPr>
+        <p:txBody>
+          <a:bodyPr wrap="square">
+            <a:spAutoFit/>
+          </a:bodyPr>
+          <a:lstStyle/>
+          <a:p>
+            <a:pPr>
+              <a:spcAft>
+                <a:spcPts val="1800"/>
+              </a:spcAft>
+            </a:pPr>
+            <a:r>
+              <a:rPr sz="2000">
+                <a:solidFill>
+                  <a:srgbClr val="1A1A1A"/>
+                </a:solidFill>
+                <a:latin typeface="Calibri"/>
+              </a:rPr>
+              <a:t>▸  The Problem — three specialists, three tools, too slow</a:t>
+            </a:r>
+          </a:p>
+          <a:p>
+            <a:pPr>
+              <a:spcAft>
+                <a:spcPts val="1800"/>
+              </a:spcAft>
+            </a:pPr>
+            <a:r>
+              <a:rPr sz="2000">
+                <a:solidFill>
+                  <a:srgbClr val="1A1A1A"/>
+                </a:solidFill>
+                <a:latin typeface="Calibri"/>
+              </a:rPr>
+              <a:t>▸  The Solution — one unified conversational agent</a:t>
+            </a:r>
+          </a:p>
+          <a:p>
+            <a:pPr>
+              <a:spcAft>
+                <a:spcPts val="1800"/>
+              </a:spcAft>
+            </a:pPr>
+            <a:r>
+              <a:rPr sz="2000">
+                <a:solidFill>
+                  <a:srgbClr val="1A1A1A"/>
+                </a:solidFill>
+                <a:latin typeface="Calibri"/>
+              </a:rPr>
+              <a:t>▸  Architecture — how it's built, natively on Snowflake</a:t>
+            </a:r>
+          </a:p>
+          <a:p>
+            <a:pPr>
+              <a:spcAft>
+                <a:spcPts val="1800"/>
+              </a:spcAft>
+            </a:pPr>
+            <a:r>
+              <a:rPr sz="2000">
+                <a:solidFill>
+                  <a:srgbClr val="1A1A1A"/>
+                </a:solidFill>
+                <a:latin typeface="Calibri"/>
+              </a:rPr>
+              <a:t>▸  Live Capabilities — Analytics, Document Q&amp;A, Data Quality</a:t>
+            </a:r>
+          </a:p>
+          <a:p>
+            <a:pPr>
+              <a:spcAft>
+                <a:spcPts val="1800"/>
+              </a:spcAft>
+            </a:pPr>
+            <a:r>
+              <a:rPr sz="2000">
+                <a:solidFill>
+                  <a:srgbClr val="1A1A1A"/>
+                </a:solidFill>
+                <a:latin typeface="Calibri"/>
+              </a:rPr>
+              <a:t>▸  Unified Orchestration — one chat box, automatic routing</a:t>
+            </a:r>
+          </a:p>
+          <a:p>
+            <a:pPr>
+              <a:spcAft>
+                <a:spcPts val="1800"/>
+              </a:spcAft>
+            </a:pPr>
+            <a:r>
+              <a:rPr sz="2000">
+                <a:solidFill>
+                  <a:srgbClr val="1A1A1A"/>
+                </a:solidFill>
+                <a:latin typeface="Calibri"/>
+              </a:rPr>
+              <a:t>▸  Dashboards &amp; MCP Integration — usage, trust, and extensibility</a:t>
+            </a:r>
+          </a:p>
+          <a:p>
+            <a:pPr>
+              <a:spcAft>
+                <a:spcPts val="1800"/>
+              </a:spcAft>
+            </a:pPr>
+            <a:r>
+              <a:rPr sz="2000">
+                <a:solidFill>
+                  <a:srgbClr val="1A1A1A"/>
+                </a:solidFill>
+                <a:latin typeface="Calibri"/>
+              </a:rPr>
+              <a:t>▸  Benefits — faster, trusted, self-service answers</a:t>
+            </a:r>
+          </a:p>
+        </p:txBody>
+      </p:sp>
+      <p:sp>
+        <p:nvSpPr>
+          <p:cNvPr id="9" name="TextBox 8"/>
+          <p:cNvSpPr txBox="1"/>
+          <p:nvPr/>
+        </p:nvSpPr>
+        <p:spPr>
+          <a:xfrm>
+            <a:off x="457200" y="6473952"/>
+            <a:ext cx="5486400" cy="320040"/>
           </a:xfrm>
           <a:prstGeom prst="rect">
             <a:avLst/>
@@ -5860,29 +6462,33 @@
           </a:bodyPr>
           <a:lstStyle/>
           <a:p>
-            <a:pPr algn="ctr"/>
-            <a:r>
-              <a:rPr sz="3600" b="1" i="0">
-                <a:solidFill>
-                  <a:srgbClr val="0070AD"/>
-                </a:solidFill>
-                <a:latin typeface="Calibri"/>
-              </a:rPr>
-              <a:t>30%</a:t>
-            </a:r>
-          </a:p>
-        </p:txBody>
-      </p:sp>
-      <p:sp>
-        <p:nvSpPr>
-          <p:cNvPr id="7" name="Title 1"/>
+            <a:pPr algn="l">
+              <a:lnSpc>
+                <a:spcPct val="100000"/>
+              </a:lnSpc>
+            </a:pPr>
+            <a:r>
+              <a:rPr sz="900" b="0" i="1">
+                <a:solidFill>
+                  <a:srgbClr val="5A6370"/>
+                </a:solidFill>
+                <a:latin typeface="Calibri"/>
+              </a:rPr>
+              <a:t>Unified Enterprise AI Agents Platform  |  Capgemini × Snowflake Hackathon</a:t>
+            </a:r>
+          </a:p>
+        </p:txBody>
+      </p:sp>
+      <p:sp>
+        <p:nvSpPr>
+          <p:cNvPr id="10" name="TextBox 9"/>
           <p:cNvSpPr txBox="1"/>
           <p:nvPr/>
         </p:nvSpPr>
         <p:spPr>
           <a:xfrm>
-            <a:off x="731520" y="2300000"/>
-            <a:ext cx="5204307" cy="400000"/>
+            <a:off x="11247120" y="6473952"/>
+            <a:ext cx="731520" cy="320040"/>
           </a:xfrm>
           <a:prstGeom prst="rect">
             <a:avLst/>
@@ -5895,597 +6501,19 @@
           </a:bodyPr>
           <a:lstStyle/>
           <a:p>
-            <a:pPr algn="ctr"/>
-            <a:r>
-              <a:rPr sz="1700" b="1" i="0">
-                <a:solidFill>
-                  <a:srgbClr val="1A1A1A"/>
-                </a:solidFill>
-                <a:latin typeface="Calibri"/>
-              </a:rPr>
-              <a:t>Innovation</a:t>
-            </a:r>
-          </a:p>
-        </p:txBody>
-      </p:sp>
-      <p:sp>
-        <p:nvSpPr>
-          <p:cNvPr id="8" name="Desc 1"/>
-          <p:cNvSpPr txBox="1"/>
-          <p:nvPr/>
-        </p:nvSpPr>
-        <p:spPr>
-          <a:xfrm>
-            <a:off x="1005520" y="2750000"/>
-            <a:ext cx="4656307" cy="800000"/>
-          </a:xfrm>
-          <a:prstGeom prst="rect">
-            <a:avLst/>
-          </a:prstGeom>
-          <a:noFill/>
-        </p:spPr>
-        <p:txBody>
-          <a:bodyPr wrap="square" anchor="t">
-            <a:spAutoFit/>
-          </a:bodyPr>
-          <a:lstStyle/>
-          <a:p>
-            <a:pPr algn="ctr">
-              <a:lnSpc>
-                <a:spcPct val="115000"/>
-              </a:lnSpc>
-            </a:pPr>
-            <a:r>
-              <a:rPr sz="1200" b="0" i="0">
+            <a:pPr algn="r">
+              <a:lnSpc>
+                <a:spcPct val="100000"/>
+              </a:lnSpc>
+            </a:pPr>
+            <a:r>
+              <a:rPr sz="900" b="0" i="0">
                 <a:solidFill>
                   <a:srgbClr val="5A6370"/>
                 </a:solidFill>
                 <a:latin typeface="Calibri"/>
               </a:rPr>
-              <a:t>One governed agent spanning structured, unstructured, and meta (data-quality) data — not three disconnected demos.</a:t>
-            </a:r>
-          </a:p>
-        </p:txBody>
-      </p:sp>
-      <p:sp>
-        <p:nvSpPr>
-          <p:cNvPr id="9" name="Card 2"/>
-          <p:cNvSpPr/>
-          <p:nvPr/>
-        </p:nvSpPr>
-        <p:spPr>
-          <a:xfrm>
-            <a:off x="6255867" y="1400000"/>
-            <a:ext cx="5204307" cy="2250000"/>
-          </a:xfrm>
-          <a:prstGeom prst="roundRect">
-            <a:avLst>
-              <a:gd name="adj" fmla="val 6000"/>
-            </a:avLst>
-          </a:prstGeom>
-          <a:solidFill>
-            <a:srgbClr val="F4F6F9"/>
-          </a:solidFill>
-          <a:ln>
-            <a:noFill/>
-          </a:ln>
-          <a:effectLst/>
-        </p:spPr>
-        <p:style>
-          <a:lnRef idx="1">
-            <a:schemeClr val="accent1"/>
-          </a:lnRef>
-          <a:fillRef idx="3">
-            <a:schemeClr val="accent1"/>
-          </a:fillRef>
-          <a:effectRef idx="2">
-            <a:schemeClr val="accent1"/>
-          </a:effectRef>
-          <a:fontRef idx="minor">
-            <a:schemeClr val="lt1"/>
-          </a:fontRef>
-        </p:style>
-        <p:txBody>
-          <a:bodyPr rtlCol="0" anchor="ctr"/>
-          <a:lstStyle/>
-          <a:p>
-            <a:pPr algn="ctr"/>
-          </a:p>
-        </p:txBody>
-      </p:sp>
-      <p:sp>
-        <p:nvSpPr>
-          <p:cNvPr id="10" name="Pct 2"/>
-          <p:cNvSpPr txBox="1"/>
-          <p:nvPr/>
-        </p:nvSpPr>
-        <p:spPr>
-          <a:xfrm>
-            <a:off x="6255867" y="1550000"/>
-            <a:ext cx="5204307" cy="600000"/>
-          </a:xfrm>
-          <a:prstGeom prst="rect">
-            <a:avLst/>
-          </a:prstGeom>
-          <a:noFill/>
-        </p:spPr>
-        <p:txBody>
-          <a:bodyPr wrap="square" anchor="t">
-            <a:spAutoFit/>
-          </a:bodyPr>
-          <a:lstStyle/>
-          <a:p>
-            <a:pPr algn="ctr"/>
-            <a:r>
-              <a:rPr sz="3600" b="1" i="0">
-                <a:solidFill>
-                  <a:srgbClr val="0070AD"/>
-                </a:solidFill>
-                <a:latin typeface="Calibri"/>
-              </a:rPr>
-              <a:t>25%</a:t>
-            </a:r>
-          </a:p>
-        </p:txBody>
-      </p:sp>
-      <p:sp>
-        <p:nvSpPr>
-          <p:cNvPr id="11" name="Title 2"/>
-          <p:cNvSpPr txBox="1"/>
-          <p:nvPr/>
-        </p:nvSpPr>
-        <p:spPr>
-          <a:xfrm>
-            <a:off x="6255867" y="2300000"/>
-            <a:ext cx="5204307" cy="400000"/>
-          </a:xfrm>
-          <a:prstGeom prst="rect">
-            <a:avLst/>
-          </a:prstGeom>
-          <a:noFill/>
-        </p:spPr>
-        <p:txBody>
-          <a:bodyPr wrap="square" anchor="t">
-            <a:spAutoFit/>
-          </a:bodyPr>
-          <a:lstStyle/>
-          <a:p>
-            <a:pPr algn="ctr"/>
-            <a:r>
-              <a:rPr sz="1700" b="1" i="0">
-                <a:solidFill>
-                  <a:srgbClr val="1A1A1A"/>
-                </a:solidFill>
-                <a:latin typeface="Calibri"/>
-              </a:rPr>
-              <a:t>Technical Excellence</a:t>
-            </a:r>
-          </a:p>
-        </p:txBody>
-      </p:sp>
-      <p:sp>
-        <p:nvSpPr>
-          <p:cNvPr id="12" name="Desc 2"/>
-          <p:cNvSpPr txBox="1"/>
-          <p:nvPr/>
-        </p:nvSpPr>
-        <p:spPr>
-          <a:xfrm>
-            <a:off x="6529867" y="2750000"/>
-            <a:ext cx="4656307" cy="800000"/>
-          </a:xfrm>
-          <a:prstGeom prst="rect">
-            <a:avLst/>
-          </a:prstGeom>
-          <a:noFill/>
-        </p:spPr>
-        <p:txBody>
-          <a:bodyPr wrap="square" anchor="t">
-            <a:spAutoFit/>
-          </a:bodyPr>
-          <a:lstStyle/>
-          <a:p>
-            <a:pPr algn="ctr">
-              <a:lnSpc>
-                <a:spcPct val="115000"/>
-              </a:lnSpc>
-            </a:pPr>
-            <a:r>
-              <a:rPr sz="1200" b="0" i="0">
-                <a:solidFill>
-                  <a:srgbClr val="5A6370"/>
-                </a:solidFill>
-                <a:latin typeface="Calibri"/>
-              </a:rPr>
-              <a:t>Native SEMANTIC VIEW, CORTEX SEARCH SERVICE, and AGENT objects — no hand-rolled RAG or orchestration code.</a:t>
-            </a:r>
-          </a:p>
-        </p:txBody>
-      </p:sp>
-      <p:sp>
-        <p:nvSpPr>
-          <p:cNvPr id="13" name="Card 3"/>
-          <p:cNvSpPr/>
-          <p:nvPr/>
-        </p:nvSpPr>
-        <p:spPr>
-          <a:xfrm>
-            <a:off x="731520" y="3950000"/>
-            <a:ext cx="5204307" cy="2250000"/>
-          </a:xfrm>
-          <a:prstGeom prst="roundRect">
-            <a:avLst>
-              <a:gd name="adj" fmla="val 6000"/>
-            </a:avLst>
-          </a:prstGeom>
-          <a:solidFill>
-            <a:srgbClr val="F4F6F9"/>
-          </a:solidFill>
-          <a:ln>
-            <a:noFill/>
-          </a:ln>
-          <a:effectLst/>
-        </p:spPr>
-        <p:style>
-          <a:lnRef idx="1">
-            <a:schemeClr val="accent1"/>
-          </a:lnRef>
-          <a:fillRef idx="3">
-            <a:schemeClr val="accent1"/>
-          </a:fillRef>
-          <a:effectRef idx="2">
-            <a:schemeClr val="accent1"/>
-          </a:effectRef>
-          <a:fontRef idx="minor">
-            <a:schemeClr val="lt1"/>
-          </a:fontRef>
-        </p:style>
-        <p:txBody>
-          <a:bodyPr rtlCol="0" anchor="ctr"/>
-          <a:lstStyle/>
-          <a:p>
-            <a:pPr algn="ctr"/>
-          </a:p>
-        </p:txBody>
-      </p:sp>
-      <p:sp>
-        <p:nvSpPr>
-          <p:cNvPr id="14" name="Pct 3"/>
-          <p:cNvSpPr txBox="1"/>
-          <p:nvPr/>
-        </p:nvSpPr>
-        <p:spPr>
-          <a:xfrm>
-            <a:off x="731520" y="4100000"/>
-            <a:ext cx="5204307" cy="600000"/>
-          </a:xfrm>
-          <a:prstGeom prst="rect">
-            <a:avLst/>
-          </a:prstGeom>
-          <a:noFill/>
-        </p:spPr>
-        <p:txBody>
-          <a:bodyPr wrap="square" anchor="t">
-            <a:spAutoFit/>
-          </a:bodyPr>
-          <a:lstStyle/>
-          <a:p>
-            <a:pPr algn="ctr"/>
-            <a:r>
-              <a:rPr sz="3600" b="1" i="0">
-                <a:solidFill>
-                  <a:srgbClr val="0070AD"/>
-                </a:solidFill>
-                <a:latin typeface="Calibri"/>
-              </a:rPr>
-              <a:t>25%</a:t>
-            </a:r>
-          </a:p>
-        </p:txBody>
-      </p:sp>
-      <p:sp>
-        <p:nvSpPr>
-          <p:cNvPr id="15" name="Title 3"/>
-          <p:cNvSpPr txBox="1"/>
-          <p:nvPr/>
-        </p:nvSpPr>
-        <p:spPr>
-          <a:xfrm>
-            <a:off x="731520" y="4850000"/>
-            <a:ext cx="5204307" cy="400000"/>
-          </a:xfrm>
-          <a:prstGeom prst="rect">
-            <a:avLst/>
-          </a:prstGeom>
-          <a:noFill/>
-        </p:spPr>
-        <p:txBody>
-          <a:bodyPr wrap="square" anchor="t">
-            <a:spAutoFit/>
-          </a:bodyPr>
-          <a:lstStyle/>
-          <a:p>
-            <a:pPr algn="ctr"/>
-            <a:r>
-              <a:rPr sz="1700" b="1" i="0">
-                <a:solidFill>
-                  <a:srgbClr val="1A1A1A"/>
-                </a:solidFill>
-                <a:latin typeface="Calibri"/>
-              </a:rPr>
-              <a:t>Business Value</a:t>
-            </a:r>
-          </a:p>
-        </p:txBody>
-      </p:sp>
-      <p:sp>
-        <p:nvSpPr>
-          <p:cNvPr id="16" name="Desc 3"/>
-          <p:cNvSpPr txBox="1"/>
-          <p:nvPr/>
-        </p:nvSpPr>
-        <p:spPr>
-          <a:xfrm>
-            <a:off x="1005520" y="5300000"/>
-            <a:ext cx="4656307" cy="800000"/>
-          </a:xfrm>
-          <a:prstGeom prst="rect">
-            <a:avLst/>
-          </a:prstGeom>
-          <a:noFill/>
-        </p:spPr>
-        <p:txBody>
-          <a:bodyPr wrap="square" anchor="t">
-            <a:spAutoFit/>
-          </a:bodyPr>
-          <a:lstStyle/>
-          <a:p>
-            <a:pPr algn="ctr">
-              <a:lnSpc>
-                <a:spcPct val="115000"/>
-              </a:lnSpc>
-            </a:pPr>
-            <a:r>
-              <a:rPr sz="1200" b="0" i="0">
-                <a:solidFill>
-                  <a:srgbClr val="5A6370"/>
-                </a:solidFill>
-                <a:latin typeface="Calibri"/>
-              </a:rPr>
-              <a:t>Collapses three specialist workflows (SQL analyst, document reviewer, DQ engineer) into one self-service chat experience.</a:t>
-            </a:r>
-          </a:p>
-        </p:txBody>
-      </p:sp>
-      <p:sp>
-        <p:nvSpPr>
-          <p:cNvPr id="17" name="Card 4"/>
-          <p:cNvSpPr/>
-          <p:nvPr/>
-        </p:nvSpPr>
-        <p:spPr>
-          <a:xfrm>
-            <a:off x="6255867" y="3950000"/>
-            <a:ext cx="5204307" cy="2250000"/>
-          </a:xfrm>
-          <a:prstGeom prst="roundRect">
-            <a:avLst>
-              <a:gd name="adj" fmla="val 6000"/>
-            </a:avLst>
-          </a:prstGeom>
-          <a:solidFill>
-            <a:srgbClr val="F4F6F9"/>
-          </a:solidFill>
-          <a:ln>
-            <a:noFill/>
-          </a:ln>
-          <a:effectLst/>
-        </p:spPr>
-        <p:style>
-          <a:lnRef idx="1">
-            <a:schemeClr val="accent1"/>
-          </a:lnRef>
-          <a:fillRef idx="3">
-            <a:schemeClr val="accent1"/>
-          </a:fillRef>
-          <a:effectRef idx="2">
-            <a:schemeClr val="accent1"/>
-          </a:effectRef>
-          <a:fontRef idx="minor">
-            <a:schemeClr val="lt1"/>
-          </a:fontRef>
-        </p:style>
-        <p:txBody>
-          <a:bodyPr rtlCol="0" anchor="ctr"/>
-          <a:lstStyle/>
-          <a:p>
-            <a:pPr algn="ctr"/>
-          </a:p>
-        </p:txBody>
-      </p:sp>
-      <p:sp>
-        <p:nvSpPr>
-          <p:cNvPr id="18" name="Pct 4"/>
-          <p:cNvSpPr txBox="1"/>
-          <p:nvPr/>
-        </p:nvSpPr>
-        <p:spPr>
-          <a:xfrm>
-            <a:off x="6255867" y="4100000"/>
-            <a:ext cx="5204307" cy="600000"/>
-          </a:xfrm>
-          <a:prstGeom prst="rect">
-            <a:avLst/>
-          </a:prstGeom>
-          <a:noFill/>
-        </p:spPr>
-        <p:txBody>
-          <a:bodyPr wrap="square" anchor="t">
-            <a:spAutoFit/>
-          </a:bodyPr>
-          <a:lstStyle/>
-          <a:p>
-            <a:pPr algn="ctr"/>
-            <a:r>
-              <a:rPr sz="3600" b="1" i="0">
-                <a:solidFill>
-                  <a:srgbClr val="0070AD"/>
-                </a:solidFill>
-                <a:latin typeface="Calibri"/>
-              </a:rPr>
-              <a:t>20%</a:t>
-            </a:r>
-          </a:p>
-        </p:txBody>
-      </p:sp>
-      <p:sp>
-        <p:nvSpPr>
-          <p:cNvPr id="19" name="Title 4"/>
-          <p:cNvSpPr txBox="1"/>
-          <p:nvPr/>
-        </p:nvSpPr>
-        <p:spPr>
-          <a:xfrm>
-            <a:off x="6255867" y="4850000"/>
-            <a:ext cx="5204307" cy="400000"/>
-          </a:xfrm>
-          <a:prstGeom prst="rect">
-            <a:avLst/>
-          </a:prstGeom>
-          <a:noFill/>
-        </p:spPr>
-        <p:txBody>
-          <a:bodyPr wrap="square" anchor="t">
-            <a:spAutoFit/>
-          </a:bodyPr>
-          <a:lstStyle/>
-          <a:p>
-            <a:pPr algn="ctr"/>
-            <a:r>
-              <a:rPr sz="1700" b="1" i="0">
-                <a:solidFill>
-                  <a:srgbClr val="1A1A1A"/>
-                </a:solidFill>
-                <a:latin typeface="Calibri"/>
-              </a:rPr>
-              <a:t>User Experience</a:t>
-            </a:r>
-          </a:p>
-        </p:txBody>
-      </p:sp>
-      <p:sp>
-        <p:nvSpPr>
-          <p:cNvPr id="20" name="Desc 4"/>
-          <p:cNvSpPr txBox="1"/>
-          <p:nvPr/>
-        </p:nvSpPr>
-        <p:spPr>
-          <a:xfrm>
-            <a:off x="6529867" y="5300000"/>
-            <a:ext cx="4656307" cy="800000"/>
-          </a:xfrm>
-          <a:prstGeom prst="rect">
-            <a:avLst/>
-          </a:prstGeom>
-          <a:noFill/>
-        </p:spPr>
-        <p:txBody>
-          <a:bodyPr wrap="square" anchor="t">
-            <a:spAutoFit/>
-          </a:bodyPr>
-          <a:lstStyle/>
-          <a:p>
-            <a:pPr algn="ctr">
-              <a:lnSpc>
-                <a:spcPct val="115000"/>
-              </a:lnSpc>
-            </a:pPr>
-            <a:r>
-              <a:rPr sz="1200" b="0" i="0">
-                <a:solidFill>
-                  <a:srgbClr val="5A6370"/>
-                </a:solidFill>
-                <a:latin typeface="Calibri"/>
-              </a:rPr>
-              <a:t>One chat box; every answer is explainable — SQL shown, sources cited — so business users can trust and verify it.</a:t>
-            </a:r>
-          </a:p>
-        </p:txBody>
-      </p:sp>
-      <p:sp>
-        <p:nvSpPr>
-          <p:cNvPr id="21" name="TextBox 20"/>
-          <p:cNvSpPr txBox="1"/>
-          <p:nvPr/>
-        </p:nvSpPr>
-        <p:spPr>
-          <a:xfrm>
-            <a:off x="457200" y="6473952"/>
-            <a:ext cx="5486400" cy="320040"/>
-          </a:xfrm>
-          <a:prstGeom prst="rect">
-            <a:avLst/>
-          </a:prstGeom>
-          <a:noFill/>
-        </p:spPr>
-        <p:txBody>
-          <a:bodyPr wrap="square" anchor="t">
-            <a:spAutoFit/>
-          </a:bodyPr>
-          <a:lstStyle/>
-          <a:p>
-            <a:pPr algn="l">
-              <a:lnSpc>
-                <a:spcPct val="100000"/>
-              </a:lnSpc>
-            </a:pPr>
-            <a:r>
-              <a:rPr sz="900" b="0" i="1">
-                <a:solidFill>
-                  <a:srgbClr val="5A6370"/>
-                </a:solidFill>
-                <a:latin typeface="Calibri"/>
-              </a:rPr>
-              <a:t>Unified Enterprise AI Agents Platform  |  Capgemini x Snowflake Hackathon</a:t>
-            </a:r>
-          </a:p>
-        </p:txBody>
-      </p:sp>
-      <p:sp>
-        <p:nvSpPr>
-          <p:cNvPr id="22" name="TextBox 21"/>
-          <p:cNvSpPr txBox="1"/>
-          <p:nvPr/>
-        </p:nvSpPr>
-        <p:spPr>
-          <a:xfrm>
-            <a:off x="11247120" y="6473952"/>
-            <a:ext cx="731520" cy="320040"/>
-          </a:xfrm>
-          <a:prstGeom prst="rect">
-            <a:avLst/>
-          </a:prstGeom>
-          <a:noFill/>
-        </p:spPr>
-        <p:txBody>
-          <a:bodyPr wrap="square" anchor="t">
-            <a:spAutoFit/>
-          </a:bodyPr>
-          <a:lstStyle/>
-          <a:p>
-            <a:pPr algn="r">
-              <a:lnSpc>
-                <a:spcPct val="100000"/>
-              </a:lnSpc>
-            </a:pPr>
-            <a:r>
-              <a:rPr sz="900" b="0" i="0">
-                <a:solidFill>
-                  <a:srgbClr val="5A6370"/>
-                </a:solidFill>
-                <a:latin typeface="Calibri"/>
-              </a:rPr>
-              <a:t>13</a:t>
+              <a:t>2</a:t>
             </a:r>
           </a:p>
         </p:txBody>
@@ -6498,7 +6526,7 @@
 </p:sld>
 </file>
 
-<file path=ppt\slides\slide2.xml><?xml version="1.0" encoding="utf-8"?>
+<file path=ppt/slides/slide3.xml><?xml version="1.0" encoding="utf-8"?>
 <p:sld xmlns:a="http://schemas.openxmlformats.org/drawingml/2006/main" xmlns:p="http://schemas.openxmlformats.org/presentationml/2006/main" xmlns:r="http://schemas.openxmlformats.org/officeDocument/2006/relationships">
   <p:cSld>
     <p:spTree>
@@ -6630,140 +6658,21 @@
                 </a:solidFill>
                 <a:latin typeface="Georgia"/>
               </a:rPr>
-              <a:t>Agenda</a:t>
-            </a:r>
-          </a:p>
-        </p:txBody>
-      </p:sp>
-      <p:sp>
-        <p:nvSpPr>
-          <p:cNvPr id="8" name="TextBox 7"/>
+              <a:t>The Problem</a:t>
+            </a:r>
+          </a:p>
+        </p:txBody>
+      </p:sp>
+      <p:sp>
+        <p:nvSpPr>
+          <p:cNvPr id="24" name="TextBox 23"/>
           <p:cNvSpPr txBox="1"/>
           <p:nvPr/>
         </p:nvSpPr>
         <p:spPr>
           <a:xfrm>
-            <a:off x="914400" y="1645920"/>
-            <a:ext cx="10058400" cy="4572000"/>
-          </a:xfrm>
-          <a:prstGeom prst="rect">
-            <a:avLst/>
-          </a:prstGeom>
-          <a:noFill/>
-        </p:spPr>
-        <p:txBody>
-          <a:bodyPr wrap="square">
-            <a:spAutoFit/>
-          </a:bodyPr>
-          <a:lstStyle/>
-          <a:p>
-            <a:pPr>
-              <a:spcAft>
-                <a:spcPts val="1800"/>
-              </a:spcAft>
-            </a:pPr>
-            <a:r>
-              <a:rPr sz="2000">
-                <a:solidFill>
-                  <a:srgbClr val="1A1A1A"/>
-                </a:solidFill>
-                <a:latin typeface="Calibri"/>
-              </a:rPr>
-              <a:t>▸  The Problem — three specialists, three tools, too slow</a:t>
-            </a:r>
-          </a:p>
-          <a:p>
-            <a:pPr>
-              <a:spcAft>
-                <a:spcPts val="1800"/>
-              </a:spcAft>
-            </a:pPr>
-            <a:r>
-              <a:rPr sz="2000">
-                <a:solidFill>
-                  <a:srgbClr val="1A1A1A"/>
-                </a:solidFill>
-                <a:latin typeface="Calibri"/>
-              </a:rPr>
-              <a:t>▸  The Solution — one unified conversational agent</a:t>
-            </a:r>
-          </a:p>
-          <a:p>
-            <a:pPr>
-              <a:spcAft>
-                <a:spcPts val="1800"/>
-              </a:spcAft>
-            </a:pPr>
-            <a:r>
-              <a:rPr sz="2000">
-                <a:solidFill>
-                  <a:srgbClr val="1A1A1A"/>
-                </a:solidFill>
-                <a:latin typeface="Calibri"/>
-              </a:rPr>
-              <a:t>▸  Architecture — how it's built, natively on Snowflake</a:t>
-            </a:r>
-          </a:p>
-          <a:p>
-            <a:pPr>
-              <a:spcAft>
-                <a:spcPts val="1800"/>
-              </a:spcAft>
-            </a:pPr>
-            <a:r>
-              <a:rPr sz="2000">
-                <a:solidFill>
-                  <a:srgbClr val="1A1A1A"/>
-                </a:solidFill>
-                <a:latin typeface="Calibri"/>
-              </a:rPr>
-              <a:t>▸  Live Capabilities — Analytics, Document Q&amp;A, Data Quality</a:t>
-            </a:r>
-          </a:p>
-          <a:p>
-            <a:pPr>
-              <a:spcAft>
-                <a:spcPts val="1800"/>
-              </a:spcAft>
-            </a:pPr>
-            <a:r>
-              <a:rPr sz="2000">
-                <a:solidFill>
-                  <a:srgbClr val="1A1A1A"/>
-                </a:solidFill>
-                <a:latin typeface="Calibri"/>
-              </a:rPr>
-              <a:t>▸  Unified Orchestration — one chat box, automatic routing</a:t>
-            </a:r>
-          </a:p>
-          <a:p>
-            <a:pPr>
-              <a:spcAft>
-                <a:spcPts val="1800"/>
-              </a:spcAft>
-            </a:pPr>
-            <a:r>
-              <a:rPr sz="2000">
-                <a:solidFill>
-                  <a:srgbClr val="1A1A1A"/>
-                </a:solidFill>
-                <a:latin typeface="Calibri"/>
-              </a:rPr>
-              <a:t>▸  Dashboards &amp; MCP Integration — usage, trust, and extensibility</a:t>
-            </a:r>
-          </a:p>
-        </p:txBody>
-      </p:sp>
-      <p:sp>
-        <p:nvSpPr>
-          <p:cNvPr id="9" name="TextBox 8"/>
-          <p:cNvSpPr txBox="1"/>
-          <p:nvPr/>
-        </p:nvSpPr>
-        <p:spPr>
-          <a:xfrm>
-            <a:off x="457200" y="6473952"/>
-            <a:ext cx="5486400" cy="320040"/>
+            <a:off x="731520" y="1180000"/>
+            <a:ext cx="10698480" cy="400000"/>
           </a:xfrm>
           <a:prstGeom prst="rect">
             <a:avLst/>
@@ -6782,27 +6691,27 @@
               </a:lnSpc>
             </a:pPr>
             <a:r>
-              <a:rPr sz="900" b="0" i="1">
-                <a:solidFill>
-                  <a:srgbClr val="5A6370"/>
-                </a:solidFill>
-                <a:latin typeface="Calibri"/>
-              </a:rPr>
-              <a:t>Unified Enterprise AI Agents Platform  |  Capgemini x Snowflake Hackathon</a:t>
-            </a:r>
-          </a:p>
-        </p:txBody>
-      </p:sp>
-      <p:sp>
-        <p:nvSpPr>
-          <p:cNvPr id="10" name="TextBox 9"/>
+              <a:rPr sz="2000" b="1" i="0">
+                <a:solidFill>
+                  <a:srgbClr val="0070AD"/>
+                </a:solidFill>
+                <a:latin typeface="Calibri"/>
+              </a:rPr>
+              <a:t>One question. Three specialists. One bottleneck.</a:t>
+            </a:r>
+          </a:p>
+        </p:txBody>
+      </p:sp>
+      <p:sp>
+        <p:nvSpPr>
+          <p:cNvPr id="5" name="TextBox 4"/>
           <p:cNvSpPr txBox="1"/>
           <p:nvPr/>
         </p:nvSpPr>
         <p:spPr>
           <a:xfrm>
-            <a:off x="11247120" y="6473952"/>
-            <a:ext cx="731520" cy="320040"/>
+            <a:off x="731520" y="1600000"/>
+            <a:ext cx="10698480" cy="780000"/>
           </a:xfrm>
           <a:prstGeom prst="rect">
             <a:avLst/>
@@ -6815,6 +6724,841 @@
           </a:bodyPr>
           <a:lstStyle/>
           <a:p>
+            <a:pPr algn="l">
+              <a:lnSpc>
+                <a:spcPct val="130000"/>
+              </a:lnSpc>
+            </a:pPr>
+            <a:r>
+              <a:rPr sz="1800" b="0" i="0">
+                <a:solidFill>
+                  <a:srgbClr val="1A1A1A"/>
+                </a:solidFill>
+                <a:latin typeface="Calibri"/>
+              </a:rPr>
+              <a:t>Business users at an insurer need answers from three different places — and today,</a:t>
+            </a:r>
+          </a:p>
+          <a:p>
+            <a:pPr algn="l">
+              <a:lnSpc>
+                <a:spcPct val="130000"/>
+              </a:lnSpc>
+            </a:pPr>
+            <a:r>
+              <a:rPr sz="1800" b="0" i="0">
+                <a:solidFill>
+                  <a:srgbClr val="1A1A1A"/>
+                </a:solidFill>
+                <a:latin typeface="Calibri"/>
+              </a:rPr>
+              <a:t>that means three different specialists.</a:t>
+            </a:r>
+          </a:p>
+        </p:txBody>
+      </p:sp>
+      <p:sp>
+        <p:nvSpPr>
+          <p:cNvPr id="6" name="Rounded Rectangle 5"/>
+          <p:cNvSpPr/>
+          <p:nvPr/>
+        </p:nvSpPr>
+        <p:spPr>
+          <a:xfrm>
+            <a:off x="731520" y="2468880"/>
+            <a:ext cx="3291840" cy="3017520"/>
+          </a:xfrm>
+          <a:prstGeom prst="roundRect">
+            <a:avLst>
+              <a:gd name="adj" fmla="val 6000"/>
+            </a:avLst>
+          </a:prstGeom>
+          <a:solidFill>
+            <a:srgbClr val="F4F6F9"/>
+          </a:solidFill>
+          <a:ln>
+            <a:noFill/>
+          </a:ln>
+          <a:effectLst/>
+        </p:spPr>
+        <p:style>
+          <a:lnRef idx="1">
+            <a:schemeClr val="accent1"/>
+          </a:lnRef>
+          <a:fillRef idx="3">
+            <a:schemeClr val="accent1"/>
+          </a:fillRef>
+          <a:effectRef idx="2">
+            <a:schemeClr val="accent1"/>
+          </a:effectRef>
+          <a:fontRef idx="minor">
+            <a:schemeClr val="lt1"/>
+          </a:fontRef>
+        </p:style>
+        <p:txBody>
+          <a:bodyPr rtlCol="0" anchor="ctr"/>
+          <a:lstStyle/>
+          <a:p>
+            <a:pPr algn="ctr"/>
+          </a:p>
+        </p:txBody>
+      </p:sp>
+      <p:sp>
+        <p:nvSpPr>
+          <p:cNvPr id="7" name="TextBox 6"/>
+          <p:cNvSpPr txBox="1"/>
+          <p:nvPr/>
+        </p:nvSpPr>
+        <p:spPr>
+          <a:xfrm>
+            <a:off x="731520" y="2651760"/>
+            <a:ext cx="3291840" cy="731520"/>
+          </a:xfrm>
+          <a:prstGeom prst="rect">
+            <a:avLst/>
+          </a:prstGeom>
+          <a:noFill/>
+        </p:spPr>
+        <p:txBody>
+          <a:bodyPr wrap="square" anchor="t">
+            <a:spAutoFit/>
+          </a:bodyPr>
+          <a:lstStyle/>
+          <a:p>
+            <a:pPr algn="ctr">
+              <a:lnSpc>
+                <a:spcPct val="100000"/>
+              </a:lnSpc>
+            </a:pPr>
+            <a:r>
+              <a:rPr sz="4000" b="0" i="0">
+                <a:solidFill>
+                  <a:srgbClr val="1A1A1A"/>
+                </a:solidFill>
+                <a:latin typeface="Calibri"/>
+              </a:rPr>
+              <a:t>📊</a:t>
+            </a:r>
+          </a:p>
+        </p:txBody>
+      </p:sp>
+      <p:sp>
+        <p:nvSpPr>
+          <p:cNvPr id="8" name="TextBox 7"/>
+          <p:cNvSpPr txBox="1"/>
+          <p:nvPr/>
+        </p:nvSpPr>
+        <p:spPr>
+          <a:xfrm>
+            <a:off x="914400" y="3429000"/>
+            <a:ext cx="2926080" cy="457200"/>
+          </a:xfrm>
+          <a:prstGeom prst="rect">
+            <a:avLst/>
+          </a:prstGeom>
+          <a:noFill/>
+        </p:spPr>
+        <p:txBody>
+          <a:bodyPr wrap="square" anchor="t">
+            <a:spAutoFit/>
+          </a:bodyPr>
+          <a:lstStyle/>
+          <a:p>
+            <a:pPr algn="ctr">
+              <a:lnSpc>
+                <a:spcPct val="100000"/>
+              </a:lnSpc>
+            </a:pPr>
+            <a:r>
+              <a:rPr sz="1700" b="1" i="0">
+                <a:solidFill>
+                  <a:srgbClr val="0070AD"/>
+                </a:solidFill>
+                <a:latin typeface="Calibri"/>
+              </a:rPr>
+              <a:t>SQL / BI Analyst</a:t>
+            </a:r>
+          </a:p>
+        </p:txBody>
+      </p:sp>
+      <p:sp>
+        <p:nvSpPr>
+          <p:cNvPr id="9" name="TextBox 8"/>
+          <p:cNvSpPr txBox="1"/>
+          <p:nvPr/>
+        </p:nvSpPr>
+        <p:spPr>
+          <a:xfrm>
+            <a:off x="960120" y="3931920"/>
+            <a:ext cx="2834640" cy="914400"/>
+          </a:xfrm>
+          <a:prstGeom prst="rect">
+            <a:avLst/>
+          </a:prstGeom>
+          <a:noFill/>
+        </p:spPr>
+        <p:txBody>
+          <a:bodyPr wrap="square" anchor="t">
+            <a:spAutoFit/>
+          </a:bodyPr>
+          <a:lstStyle/>
+          <a:p>
+            <a:pPr algn="ctr">
+              <a:lnSpc>
+                <a:spcPct val="120000"/>
+              </a:lnSpc>
+            </a:pPr>
+            <a:r>
+              <a:rPr sz="1300" b="0" i="1">
+                <a:solidFill>
+                  <a:srgbClr val="1A1A1A"/>
+                </a:solidFill>
+                <a:latin typeface="Calibri"/>
+              </a:rPr>
+              <a:t>"What's our average loss ratio</a:t>
+            </a:r>
+          </a:p>
+          <a:p>
+            <a:pPr algn="ctr">
+              <a:lnSpc>
+                <a:spcPct val="120000"/>
+              </a:lnSpc>
+            </a:pPr>
+            <a:r>
+              <a:rPr sz="1300" b="0" i="1">
+                <a:solidFill>
+                  <a:srgbClr val="1A1A1A"/>
+                </a:solidFill>
+                <a:latin typeface="Calibri"/>
+              </a:rPr>
+              <a:t>by policy type?"</a:t>
+            </a:r>
+          </a:p>
+        </p:txBody>
+      </p:sp>
+      <p:sp>
+        <p:nvSpPr>
+          <p:cNvPr id="10" name="TextBox 9"/>
+          <p:cNvSpPr txBox="1"/>
+          <p:nvPr/>
+        </p:nvSpPr>
+        <p:spPr>
+          <a:xfrm>
+            <a:off x="960120" y="4892040"/>
+            <a:ext cx="2834640" cy="548640"/>
+          </a:xfrm>
+          <a:prstGeom prst="rect">
+            <a:avLst/>
+          </a:prstGeom>
+          <a:noFill/>
+        </p:spPr>
+        <p:txBody>
+          <a:bodyPr wrap="square" anchor="t">
+            <a:spAutoFit/>
+          </a:bodyPr>
+          <a:lstStyle/>
+          <a:p>
+            <a:pPr algn="ctr">
+              <a:lnSpc>
+                <a:spcPct val="115000"/>
+              </a:lnSpc>
+            </a:pPr>
+            <a:r>
+              <a:rPr sz="1100" b="0" i="0">
+                <a:solidFill>
+                  <a:srgbClr val="5A6370"/>
+                </a:solidFill>
+                <a:latin typeface="Calibri"/>
+              </a:rPr>
+              <a:t>Structured data: policies,</a:t>
+            </a:r>
+          </a:p>
+          <a:p>
+            <a:pPr algn="ctr">
+              <a:lnSpc>
+                <a:spcPct val="115000"/>
+              </a:lnSpc>
+            </a:pPr>
+            <a:r>
+              <a:rPr sz="1100" b="0" i="0">
+                <a:solidFill>
+                  <a:srgbClr val="5A6370"/>
+                </a:solidFill>
+                <a:latin typeface="Calibri"/>
+              </a:rPr>
+              <a:t>claims, billing</a:t>
+            </a:r>
+          </a:p>
+        </p:txBody>
+      </p:sp>
+      <p:sp>
+        <p:nvSpPr>
+          <p:cNvPr id="11" name="Rounded Rectangle 10"/>
+          <p:cNvSpPr/>
+          <p:nvPr/>
+        </p:nvSpPr>
+        <p:spPr>
+          <a:xfrm>
+            <a:off x="4343400" y="2468880"/>
+            <a:ext cx="3291840" cy="3017520"/>
+          </a:xfrm>
+          <a:prstGeom prst="roundRect">
+            <a:avLst>
+              <a:gd name="adj" fmla="val 6000"/>
+            </a:avLst>
+          </a:prstGeom>
+          <a:solidFill>
+            <a:srgbClr val="F4F6F9"/>
+          </a:solidFill>
+          <a:ln>
+            <a:noFill/>
+          </a:ln>
+          <a:effectLst/>
+        </p:spPr>
+        <p:style>
+          <a:lnRef idx="1">
+            <a:schemeClr val="accent1"/>
+          </a:lnRef>
+          <a:fillRef idx="3">
+            <a:schemeClr val="accent1"/>
+          </a:fillRef>
+          <a:effectRef idx="2">
+            <a:schemeClr val="accent1"/>
+          </a:effectRef>
+          <a:fontRef idx="minor">
+            <a:schemeClr val="lt1"/>
+          </a:fontRef>
+        </p:style>
+        <p:txBody>
+          <a:bodyPr rtlCol="0" anchor="ctr"/>
+          <a:lstStyle/>
+          <a:p>
+            <a:pPr algn="ctr"/>
+          </a:p>
+        </p:txBody>
+      </p:sp>
+      <p:sp>
+        <p:nvSpPr>
+          <p:cNvPr id="12" name="TextBox 11"/>
+          <p:cNvSpPr txBox="1"/>
+          <p:nvPr/>
+        </p:nvSpPr>
+        <p:spPr>
+          <a:xfrm>
+            <a:off x="4343400" y="2651760"/>
+            <a:ext cx="3291840" cy="731520"/>
+          </a:xfrm>
+          <a:prstGeom prst="rect">
+            <a:avLst/>
+          </a:prstGeom>
+          <a:noFill/>
+        </p:spPr>
+        <p:txBody>
+          <a:bodyPr wrap="square" anchor="t">
+            <a:spAutoFit/>
+          </a:bodyPr>
+          <a:lstStyle/>
+          <a:p>
+            <a:pPr algn="ctr">
+              <a:lnSpc>
+                <a:spcPct val="100000"/>
+              </a:lnSpc>
+            </a:pPr>
+            <a:r>
+              <a:rPr sz="4000" b="0" i="0">
+                <a:solidFill>
+                  <a:srgbClr val="1A1A1A"/>
+                </a:solidFill>
+                <a:latin typeface="Calibri"/>
+              </a:rPr>
+              <a:t>📄</a:t>
+            </a:r>
+          </a:p>
+        </p:txBody>
+      </p:sp>
+      <p:sp>
+        <p:nvSpPr>
+          <p:cNvPr id="13" name="TextBox 12"/>
+          <p:cNvSpPr txBox="1"/>
+          <p:nvPr/>
+        </p:nvSpPr>
+        <p:spPr>
+          <a:xfrm>
+            <a:off x="4526280" y="3429000"/>
+            <a:ext cx="2926080" cy="457200"/>
+          </a:xfrm>
+          <a:prstGeom prst="rect">
+            <a:avLst/>
+          </a:prstGeom>
+          <a:noFill/>
+        </p:spPr>
+        <p:txBody>
+          <a:bodyPr wrap="square" anchor="t">
+            <a:spAutoFit/>
+          </a:bodyPr>
+          <a:lstStyle/>
+          <a:p>
+            <a:pPr algn="ctr">
+              <a:lnSpc>
+                <a:spcPct val="100000"/>
+              </a:lnSpc>
+            </a:pPr>
+            <a:r>
+              <a:rPr sz="1700" b="1" i="0">
+                <a:solidFill>
+                  <a:srgbClr val="0070AD"/>
+                </a:solidFill>
+                <a:latin typeface="Calibri"/>
+              </a:rPr>
+              <a:t>Document Reviewer</a:t>
+            </a:r>
+          </a:p>
+        </p:txBody>
+      </p:sp>
+      <p:sp>
+        <p:nvSpPr>
+          <p:cNvPr id="14" name="TextBox 13"/>
+          <p:cNvSpPr txBox="1"/>
+          <p:nvPr/>
+        </p:nvSpPr>
+        <p:spPr>
+          <a:xfrm>
+            <a:off x="4572000" y="3931920"/>
+            <a:ext cx="2834640" cy="914400"/>
+          </a:xfrm>
+          <a:prstGeom prst="rect">
+            <a:avLst/>
+          </a:prstGeom>
+          <a:noFill/>
+        </p:spPr>
+        <p:txBody>
+          <a:bodyPr wrap="square" anchor="t">
+            <a:spAutoFit/>
+          </a:bodyPr>
+          <a:lstStyle/>
+          <a:p>
+            <a:pPr algn="ctr">
+              <a:lnSpc>
+                <a:spcPct val="120000"/>
+              </a:lnSpc>
+            </a:pPr>
+            <a:r>
+              <a:rPr sz="1300" b="0" i="1">
+                <a:solidFill>
+                  <a:srgbClr val="1A1A1A"/>
+                </a:solidFill>
+                <a:latin typeface="Calibri"/>
+              </a:rPr>
+              <a:t>"Does this policy cover</a:t>
+            </a:r>
+          </a:p>
+          <a:p>
+            <a:pPr algn="ctr">
+              <a:lnSpc>
+                <a:spcPct val="120000"/>
+              </a:lnSpc>
+            </a:pPr>
+            <a:r>
+              <a:rPr sz="1300" b="0" i="1">
+                <a:solidFill>
+                  <a:srgbClr val="1A1A1A"/>
+                </a:solidFill>
+                <a:latin typeface="Calibri"/>
+              </a:rPr>
+              <a:t>water damage?"</a:t>
+            </a:r>
+          </a:p>
+        </p:txBody>
+      </p:sp>
+      <p:sp>
+        <p:nvSpPr>
+          <p:cNvPr id="15" name="TextBox 14"/>
+          <p:cNvSpPr txBox="1"/>
+          <p:nvPr/>
+        </p:nvSpPr>
+        <p:spPr>
+          <a:xfrm>
+            <a:off x="4572000" y="4892040"/>
+            <a:ext cx="2834640" cy="548640"/>
+          </a:xfrm>
+          <a:prstGeom prst="rect">
+            <a:avLst/>
+          </a:prstGeom>
+          <a:noFill/>
+        </p:spPr>
+        <p:txBody>
+          <a:bodyPr wrap="square" anchor="t">
+            <a:spAutoFit/>
+          </a:bodyPr>
+          <a:lstStyle/>
+          <a:p>
+            <a:pPr algn="ctr">
+              <a:lnSpc>
+                <a:spcPct val="115000"/>
+              </a:lnSpc>
+            </a:pPr>
+            <a:r>
+              <a:rPr sz="1100" b="0" i="0">
+                <a:solidFill>
+                  <a:srgbClr val="5A6370"/>
+                </a:solidFill>
+                <a:latin typeface="Calibri"/>
+              </a:rPr>
+              <a:t>Unstructured PDFs and</a:t>
+            </a:r>
+          </a:p>
+          <a:p>
+            <a:pPr algn="ctr">
+              <a:lnSpc>
+                <a:spcPct val="115000"/>
+              </a:lnSpc>
+            </a:pPr>
+            <a:r>
+              <a:rPr sz="1100" b="0" i="0">
+                <a:solidFill>
+                  <a:srgbClr val="5A6370"/>
+                </a:solidFill>
+                <a:latin typeface="Calibri"/>
+              </a:rPr>
+              <a:t>contracts</a:t>
+            </a:r>
+          </a:p>
+        </p:txBody>
+      </p:sp>
+      <p:sp>
+        <p:nvSpPr>
+          <p:cNvPr id="16" name="Rounded Rectangle 15"/>
+          <p:cNvSpPr/>
+          <p:nvPr/>
+        </p:nvSpPr>
+        <p:spPr>
+          <a:xfrm>
+            <a:off x="7955280" y="2468880"/>
+            <a:ext cx="3291840" cy="3017520"/>
+          </a:xfrm>
+          <a:prstGeom prst="roundRect">
+            <a:avLst>
+              <a:gd name="adj" fmla="val 6000"/>
+            </a:avLst>
+          </a:prstGeom>
+          <a:solidFill>
+            <a:srgbClr val="F4F6F9"/>
+          </a:solidFill>
+          <a:ln>
+            <a:noFill/>
+          </a:ln>
+          <a:effectLst/>
+        </p:spPr>
+        <p:style>
+          <a:lnRef idx="1">
+            <a:schemeClr val="accent1"/>
+          </a:lnRef>
+          <a:fillRef idx="3">
+            <a:schemeClr val="accent1"/>
+          </a:fillRef>
+          <a:effectRef idx="2">
+            <a:schemeClr val="accent1"/>
+          </a:effectRef>
+          <a:fontRef idx="minor">
+            <a:schemeClr val="lt1"/>
+          </a:fontRef>
+        </p:style>
+        <p:txBody>
+          <a:bodyPr rtlCol="0" anchor="ctr"/>
+          <a:lstStyle/>
+          <a:p>
+            <a:pPr algn="ctr"/>
+          </a:p>
+        </p:txBody>
+      </p:sp>
+      <p:sp>
+        <p:nvSpPr>
+          <p:cNvPr id="17" name="TextBox 16"/>
+          <p:cNvSpPr txBox="1"/>
+          <p:nvPr/>
+        </p:nvSpPr>
+        <p:spPr>
+          <a:xfrm>
+            <a:off x="7955280" y="2651760"/>
+            <a:ext cx="3291840" cy="731520"/>
+          </a:xfrm>
+          <a:prstGeom prst="rect">
+            <a:avLst/>
+          </a:prstGeom>
+          <a:noFill/>
+        </p:spPr>
+        <p:txBody>
+          <a:bodyPr wrap="square" anchor="t">
+            <a:spAutoFit/>
+          </a:bodyPr>
+          <a:lstStyle/>
+          <a:p>
+            <a:pPr algn="ctr">
+              <a:lnSpc>
+                <a:spcPct val="100000"/>
+              </a:lnSpc>
+            </a:pPr>
+            <a:r>
+              <a:rPr sz="4000" b="0" i="0">
+                <a:solidFill>
+                  <a:srgbClr val="1A1A1A"/>
+                </a:solidFill>
+                <a:latin typeface="Calibri"/>
+              </a:rPr>
+              <a:t>🛡</a:t>
+            </a:r>
+          </a:p>
+        </p:txBody>
+      </p:sp>
+      <p:sp>
+        <p:nvSpPr>
+          <p:cNvPr id="18" name="TextBox 17"/>
+          <p:cNvSpPr txBox="1"/>
+          <p:nvPr/>
+        </p:nvSpPr>
+        <p:spPr>
+          <a:xfrm>
+            <a:off x="8138160" y="3429000"/>
+            <a:ext cx="2926080" cy="457200"/>
+          </a:xfrm>
+          <a:prstGeom prst="rect">
+            <a:avLst/>
+          </a:prstGeom>
+          <a:noFill/>
+        </p:spPr>
+        <p:txBody>
+          <a:bodyPr wrap="square" anchor="t">
+            <a:spAutoFit/>
+          </a:bodyPr>
+          <a:lstStyle/>
+          <a:p>
+            <a:pPr algn="ctr">
+              <a:lnSpc>
+                <a:spcPct val="100000"/>
+              </a:lnSpc>
+            </a:pPr>
+            <a:r>
+              <a:rPr sz="1700" b="1" i="0">
+                <a:solidFill>
+                  <a:srgbClr val="0070AD"/>
+                </a:solidFill>
+                <a:latin typeface="Calibri"/>
+              </a:rPr>
+              <a:t>Data Engineer</a:t>
+            </a:r>
+          </a:p>
+        </p:txBody>
+      </p:sp>
+      <p:sp>
+        <p:nvSpPr>
+          <p:cNvPr id="19" name="TextBox 18"/>
+          <p:cNvSpPr txBox="1"/>
+          <p:nvPr/>
+        </p:nvSpPr>
+        <p:spPr>
+          <a:xfrm>
+            <a:off x="8183880" y="3931920"/>
+            <a:ext cx="2834640" cy="914400"/>
+          </a:xfrm>
+          <a:prstGeom prst="rect">
+            <a:avLst/>
+          </a:prstGeom>
+          <a:noFill/>
+        </p:spPr>
+        <p:txBody>
+          <a:bodyPr wrap="square" anchor="t">
+            <a:spAutoFit/>
+          </a:bodyPr>
+          <a:lstStyle/>
+          <a:p>
+            <a:pPr algn="ctr">
+              <a:lnSpc>
+                <a:spcPct val="120000"/>
+              </a:lnSpc>
+            </a:pPr>
+            <a:r>
+              <a:rPr sz="1300" b="0" i="1">
+                <a:solidFill>
+                  <a:srgbClr val="1A1A1A"/>
+                </a:solidFill>
+                <a:latin typeface="Calibri"/>
+              </a:rPr>
+              <a:t>"Why did this data quality</a:t>
+            </a:r>
+          </a:p>
+          <a:p>
+            <a:pPr algn="ctr">
+              <a:lnSpc>
+                <a:spcPct val="120000"/>
+              </a:lnSpc>
+            </a:pPr>
+            <a:r>
+              <a:rPr sz="1300" b="0" i="1">
+                <a:solidFill>
+                  <a:srgbClr val="1A1A1A"/>
+                </a:solidFill>
+                <a:latin typeface="Calibri"/>
+              </a:rPr>
+              <a:t>check fail?"</a:t>
+            </a:r>
+          </a:p>
+        </p:txBody>
+      </p:sp>
+      <p:sp>
+        <p:nvSpPr>
+          <p:cNvPr id="20" name="TextBox 19"/>
+          <p:cNvSpPr txBox="1"/>
+          <p:nvPr/>
+        </p:nvSpPr>
+        <p:spPr>
+          <a:xfrm>
+            <a:off x="8183880" y="4892040"/>
+            <a:ext cx="2834640" cy="548640"/>
+          </a:xfrm>
+          <a:prstGeom prst="rect">
+            <a:avLst/>
+          </a:prstGeom>
+          <a:noFill/>
+        </p:spPr>
+        <p:txBody>
+          <a:bodyPr wrap="square" anchor="t">
+            <a:spAutoFit/>
+          </a:bodyPr>
+          <a:lstStyle/>
+          <a:p>
+            <a:pPr algn="ctr">
+              <a:lnSpc>
+                <a:spcPct val="115000"/>
+              </a:lnSpc>
+            </a:pPr>
+            <a:r>
+              <a:rPr sz="1100" b="0" i="0">
+                <a:solidFill>
+                  <a:srgbClr val="5A6370"/>
+                </a:solidFill>
+                <a:latin typeface="Calibri"/>
+              </a:rPr>
+              <a:t>DQ rules, results,</a:t>
+            </a:r>
+          </a:p>
+          <a:p>
+            <a:pPr algn="ctr">
+              <a:lnSpc>
+                <a:spcPct val="115000"/>
+              </a:lnSpc>
+            </a:pPr>
+            <a:r>
+              <a:rPr sz="1100" b="0" i="0">
+                <a:solidFill>
+                  <a:srgbClr val="5A6370"/>
+                </a:solidFill>
+                <a:latin typeface="Calibri"/>
+              </a:rPr>
+              <a:t>and logs</a:t>
+            </a:r>
+          </a:p>
+        </p:txBody>
+      </p:sp>
+      <p:sp>
+        <p:nvSpPr>
+          <p:cNvPr id="21" name="TextBox 20"/>
+          <p:cNvSpPr txBox="1"/>
+          <p:nvPr/>
+        </p:nvSpPr>
+        <p:spPr>
+          <a:xfrm>
+            <a:off x="731520" y="5806440"/>
+            <a:ext cx="10698480" cy="457200"/>
+          </a:xfrm>
+          <a:prstGeom prst="rect">
+            <a:avLst/>
+          </a:prstGeom>
+          <a:noFill/>
+        </p:spPr>
+        <p:txBody>
+          <a:bodyPr wrap="square" anchor="t">
+            <a:spAutoFit/>
+          </a:bodyPr>
+          <a:lstStyle/>
+          <a:p>
+            <a:pPr algn="ctr">
+              <a:lnSpc>
+                <a:spcPct val="100000"/>
+              </a:lnSpc>
+            </a:pPr>
+            <a:r>
+              <a:rPr sz="1600" b="0" i="1">
+                <a:solidFill>
+                  <a:srgbClr val="5A6370"/>
+                </a:solidFill>
+                <a:latin typeface="Calibri"/>
+              </a:rPr>
+              <a:t>Slow, siloed, and dependent on whoever happens to be available.</a:t>
+            </a:r>
+          </a:p>
+        </p:txBody>
+      </p:sp>
+      <p:sp>
+        <p:nvSpPr>
+          <p:cNvPr id="22" name="TextBox 21"/>
+          <p:cNvSpPr txBox="1"/>
+          <p:nvPr/>
+        </p:nvSpPr>
+        <p:spPr>
+          <a:xfrm>
+            <a:off x="457200" y="6473952"/>
+            <a:ext cx="5486400" cy="320040"/>
+          </a:xfrm>
+          <a:prstGeom prst="rect">
+            <a:avLst/>
+          </a:prstGeom>
+          <a:noFill/>
+        </p:spPr>
+        <p:txBody>
+          <a:bodyPr wrap="square" anchor="t">
+            <a:spAutoFit/>
+          </a:bodyPr>
+          <a:lstStyle/>
+          <a:p>
+            <a:pPr algn="l">
+              <a:lnSpc>
+                <a:spcPct val="100000"/>
+              </a:lnSpc>
+            </a:pPr>
+            <a:r>
+              <a:rPr sz="900" b="0" i="1">
+                <a:solidFill>
+                  <a:srgbClr val="5A6370"/>
+                </a:solidFill>
+                <a:latin typeface="Calibri"/>
+              </a:rPr>
+              <a:t>Unified Enterprise AI Agents Platform  |  Capgemini × Snowflake Hackathon</a:t>
+            </a:r>
+          </a:p>
+        </p:txBody>
+      </p:sp>
+      <p:sp>
+        <p:nvSpPr>
+          <p:cNvPr id="23" name="TextBox 22"/>
+          <p:cNvSpPr txBox="1"/>
+          <p:nvPr/>
+        </p:nvSpPr>
+        <p:spPr>
+          <a:xfrm>
+            <a:off x="11247120" y="6473952"/>
+            <a:ext cx="731520" cy="320040"/>
+          </a:xfrm>
+          <a:prstGeom prst="rect">
+            <a:avLst/>
+          </a:prstGeom>
+          <a:noFill/>
+        </p:spPr>
+        <p:txBody>
+          <a:bodyPr wrap="square" anchor="t">
+            <a:spAutoFit/>
+          </a:bodyPr>
+          <a:lstStyle/>
+          <a:p>
             <a:pPr algn="r">
               <a:lnSpc>
                 <a:spcPct val="100000"/>
@@ -6827,7 +7571,7 @@
                 </a:solidFill>
                 <a:latin typeface="Calibri"/>
               </a:rPr>
-              <a:t>2</a:t>
+              <a:t>3</a:t>
             </a:r>
           </a:p>
         </p:txBody>
@@ -6840,7 +7584,7 @@
 </p:sld>
 </file>
 
-<file path=ppt\slides\slide3.xml><?xml version="1.0" encoding="utf-8"?>
+<file path=ppt/slides/slide4.xml><?xml version="1.0" encoding="utf-8"?>
 <p:sld xmlns:a="http://schemas.openxmlformats.org/drawingml/2006/main" xmlns:p="http://schemas.openxmlformats.org/presentationml/2006/main" xmlns:r="http://schemas.openxmlformats.org/officeDocument/2006/relationships">
   <p:cSld>
     <p:spTree>
@@ -6947,7 +7691,7 @@
         <p:spPr>
           <a:xfrm>
             <a:off x="548640" y="256032"/>
-            <a:ext cx="7315200" cy="548640"/>
+            <a:ext cx="8229600" cy="548640"/>
           </a:xfrm>
           <a:prstGeom prst="rect">
             <a:avLst/>
@@ -6972,21 +7716,21 @@
                 </a:solidFill>
                 <a:latin typeface="Georgia"/>
               </a:rPr>
-              <a:t>The Problem</a:t>
-            </a:r>
-          </a:p>
-        </p:txBody>
-      </p:sp>
-      <p:sp>
-        <p:nvSpPr>
-          <p:cNvPr id="24" name="TextBox 23"/>
+              <a:t>The Solution</a:t>
+            </a:r>
+          </a:p>
+        </p:txBody>
+      </p:sp>
+      <p:sp>
+        <p:nvSpPr>
+          <p:cNvPr id="5" name="TextBox 4"/>
           <p:cNvSpPr txBox="1"/>
           <p:nvPr/>
         </p:nvSpPr>
         <p:spPr>
           <a:xfrm>
-            <a:off x="731520" y="850000"/>
-            <a:ext cx="10698480" cy="400000"/>
+            <a:off x="731520" y="1325880"/>
+            <a:ext cx="10698480" cy="822960"/>
           </a:xfrm>
           <a:prstGeom prst="rect">
             <a:avLst/>
@@ -7001,42 +7745,19 @@
           <a:p>
             <a:pPr algn="l">
               <a:lnSpc>
-                <a:spcPct val="100000"/>
-              </a:lnSpc>
-            </a:pPr>
-            <a:r>
-              <a:rPr sz="2000" b="1" i="0">
-                <a:solidFill>
-                  <a:srgbClr val="0070AD"/>
-                </a:solidFill>
-                <a:latin typeface="Calibri"/>
-              </a:rPr>
-              <a:t>One question. Three specialists. One bottleneck.</a:t>
-            </a:r>
-          </a:p>
-        </p:txBody>
-      </p:sp>
-      <p:sp>
-        <p:nvSpPr>
-          <p:cNvPr id="5" name="TextBox 4"/>
-          <p:cNvSpPr txBox="1"/>
-          <p:nvPr/>
-        </p:nvSpPr>
-        <p:spPr>
-          <a:xfrm>
-            <a:off x="731520" y="1371600"/>
-            <a:ext cx="10698480" cy="822960"/>
-          </a:xfrm>
-          <a:prstGeom prst="rect">
-            <a:avLst/>
-          </a:prstGeom>
-          <a:noFill/>
-        </p:spPr>
-        <p:txBody>
-          <a:bodyPr wrap="square" anchor="t">
-            <a:spAutoFit/>
-          </a:bodyPr>
-          <a:lstStyle/>
+                <a:spcPct val="130000"/>
+              </a:lnSpc>
+            </a:pPr>
+            <a:r>
+              <a:rPr sz="1900" b="1" i="0">
+                <a:solidFill>
+                  <a:srgbClr val="1A1A1A"/>
+                </a:solidFill>
+                <a:latin typeface="Calibri"/>
+              </a:rPr>
+              <a:t>One conversational agent that replaces all three specialists —</a:t>
+            </a:r>
+          </a:p>
           <a:p>
             <a:pPr algn="l">
               <a:lnSpc>
@@ -7044,51 +7765,33 @@
               </a:lnSpc>
             </a:pPr>
             <a:r>
-              <a:rPr sz="1800" b="0" i="0">
+              <a:rPr sz="1900" b="1" i="0">
                 <a:solidFill>
                   <a:srgbClr val="1A1A1A"/>
                 </a:solidFill>
                 <a:latin typeface="Calibri"/>
               </a:rPr>
-              <a:t>Business users at an insurer need answers from three different places — and today,</a:t>
-            </a:r>
-          </a:p>
-          <a:p>
-            <a:pPr algn="l">
-              <a:lnSpc>
-                <a:spcPct val="130000"/>
-              </a:lnSpc>
-            </a:pPr>
-            <a:r>
-              <a:rPr sz="1800" b="0" i="0">
-                <a:solidFill>
-                  <a:srgbClr val="1A1A1A"/>
-                </a:solidFill>
-                <a:latin typeface="Calibri"/>
-              </a:rPr>
-              <a:t>that means three different specialists.</a:t>
-            </a:r>
-          </a:p>
-        </p:txBody>
-      </p:sp>
-      <p:sp>
-        <p:nvSpPr>
-          <p:cNvPr id="6" name="Rounded Rectangle 5"/>
+              <a:t>built entirely with native Snowflake Cortex features.</a:t>
+            </a:r>
+          </a:p>
+        </p:txBody>
+      </p:sp>
+      <p:sp>
+        <p:nvSpPr>
+          <p:cNvPr id="6" name="Rectangle 5"/>
           <p:cNvSpPr/>
           <p:nvPr/>
         </p:nvSpPr>
         <p:spPr>
           <a:xfrm>
             <a:off x="731520" y="2468880"/>
-            <a:ext cx="3291840" cy="3017520"/>
-          </a:xfrm>
-          <a:prstGeom prst="roundRect">
-            <a:avLst>
-              <a:gd name="adj" fmla="val 6000"/>
-            </a:avLst>
+            <a:ext cx="109728" cy="960120"/>
+          </a:xfrm>
+          <a:prstGeom prst="rect">
+            <a:avLst/>
           </a:prstGeom>
           <a:solidFill>
-            <a:srgbClr val="F4F6F9"/>
+            <a:srgbClr val="29B5E8"/>
           </a:solidFill>
           <a:ln>
             <a:noFill/>
@@ -7125,8 +7828,8 @@
         </p:nvSpPr>
         <p:spPr>
           <a:xfrm>
-            <a:off x="731520" y="2651760"/>
-            <a:ext cx="3291840" cy="731520"/>
+            <a:off x="1005840" y="2423160"/>
+            <a:ext cx="10058400" cy="411480"/>
           </a:xfrm>
           <a:prstGeom prst="rect">
             <a:avLst/>
@@ -7139,19 +7842,19 @@
           </a:bodyPr>
           <a:lstStyle/>
           <a:p>
-            <a:pPr algn="ctr">
+            <a:pPr algn="l">
               <a:lnSpc>
                 <a:spcPct val="100000"/>
               </a:lnSpc>
             </a:pPr>
             <a:r>
-              <a:rPr sz="4000" b="0" i="0">
-                <a:solidFill>
-                  <a:srgbClr val="1A1A1A"/>
-                </a:solidFill>
-                <a:latin typeface="Calibri"/>
-              </a:rPr>
-              <a:t>📊</a:t>
+              <a:rPr sz="1900" b="1" i="0">
+                <a:solidFill>
+                  <a:srgbClr val="0B1F3A"/>
+                </a:solidFill>
+                <a:latin typeface="Calibri"/>
+              </a:rPr>
+              <a:t>📊  Self-Service Analytics</a:t>
             </a:r>
           </a:p>
         </p:txBody>
@@ -7164,8 +7867,8 @@
         </p:nvSpPr>
         <p:spPr>
           <a:xfrm>
-            <a:off x="914400" y="3429000"/>
-            <a:ext cx="2926080" cy="457200"/>
+            <a:off x="1005840" y="2852928"/>
+            <a:ext cx="10058400" cy="594360"/>
           </a:xfrm>
           <a:prstGeom prst="rect">
             <a:avLst/>
@@ -7178,151 +7881,55 @@
           </a:bodyPr>
           <a:lstStyle/>
           <a:p>
-            <a:pPr algn="ctr">
-              <a:lnSpc>
-                <a:spcPct val="100000"/>
-              </a:lnSpc>
-            </a:pPr>
-            <a:r>
-              <a:rPr sz="1700" b="1" i="0">
-                <a:solidFill>
-                  <a:srgbClr val="0070AD"/>
-                </a:solidFill>
-                <a:latin typeface="Calibri"/>
-              </a:rPr>
-              <a:t>SQL / BI Analyst</a:t>
-            </a:r>
-          </a:p>
-        </p:txBody>
-      </p:sp>
-      <p:sp>
-        <p:nvSpPr>
-          <p:cNvPr id="9" name="TextBox 8"/>
-          <p:cNvSpPr txBox="1"/>
-          <p:nvPr/>
-        </p:nvSpPr>
-        <p:spPr>
-          <a:xfrm>
-            <a:off x="960120" y="3931920"/>
-            <a:ext cx="2834640" cy="914400"/>
-          </a:xfrm>
-          <a:prstGeom prst="rect">
-            <a:avLst/>
-          </a:prstGeom>
-          <a:noFill/>
-        </p:spPr>
-        <p:txBody>
-          <a:bodyPr wrap="square" anchor="t">
-            <a:spAutoFit/>
-          </a:bodyPr>
-          <a:lstStyle/>
-          <a:p>
-            <a:pPr algn="ctr">
-              <a:lnSpc>
-                <a:spcPct val="120000"/>
-              </a:lnSpc>
-            </a:pPr>
-            <a:r>
-              <a:rPr sz="1300" b="0" i="1">
-                <a:solidFill>
-                  <a:srgbClr val="1A1A1A"/>
-                </a:solidFill>
-                <a:latin typeface="Calibri"/>
-              </a:rPr>
-              <a:t>"What's our average loss ratio</a:t>
-            </a:r>
-          </a:p>
-          <a:p>
-            <a:pPr algn="ctr">
-              <a:lnSpc>
-                <a:spcPct val="120000"/>
-              </a:lnSpc>
-            </a:pPr>
-            <a:r>
-              <a:rPr sz="1300" b="0" i="1">
-                <a:solidFill>
-                  <a:srgbClr val="1A1A1A"/>
-                </a:solidFill>
-                <a:latin typeface="Calibri"/>
-              </a:rPr>
-              <a:t>by policy type?"</a:t>
-            </a:r>
-          </a:p>
-        </p:txBody>
-      </p:sp>
-      <p:sp>
-        <p:nvSpPr>
-          <p:cNvPr id="10" name="TextBox 9"/>
-          <p:cNvSpPr txBox="1"/>
-          <p:nvPr/>
-        </p:nvSpPr>
-        <p:spPr>
-          <a:xfrm>
-            <a:off x="960120" y="4892040"/>
-            <a:ext cx="2834640" cy="548640"/>
-          </a:xfrm>
-          <a:prstGeom prst="rect">
-            <a:avLst/>
-          </a:prstGeom>
-          <a:noFill/>
-        </p:spPr>
-        <p:txBody>
-          <a:bodyPr wrap="square" anchor="t">
-            <a:spAutoFit/>
-          </a:bodyPr>
-          <a:lstStyle/>
-          <a:p>
-            <a:pPr algn="ctr">
-              <a:lnSpc>
-                <a:spcPct val="115000"/>
-              </a:lnSpc>
-            </a:pPr>
-            <a:r>
-              <a:rPr sz="1100" b="0" i="0">
+            <a:pPr algn="l">
+              <a:lnSpc>
+                <a:spcPct val="125000"/>
+              </a:lnSpc>
+            </a:pPr>
+            <a:r>
+              <a:rPr sz="1400" b="0" i="0">
                 <a:solidFill>
                   <a:srgbClr val="5A6370"/>
                 </a:solidFill>
                 <a:latin typeface="Calibri"/>
               </a:rPr>
-              <a:t>Structured data: policies,</a:t>
-            </a:r>
-          </a:p>
-          <a:p>
-            <a:pPr algn="ctr">
-              <a:lnSpc>
-                <a:spcPct val="115000"/>
-              </a:lnSpc>
-            </a:pPr>
-            <a:r>
-              <a:rPr sz="1100" b="0" i="0">
+              <a:t>Cortex Analyst turns plain English into governed SQL</a:t>
+            </a:r>
+          </a:p>
+          <a:p>
+            <a:pPr algn="l">
+              <a:lnSpc>
+                <a:spcPct val="125000"/>
+              </a:lnSpc>
+            </a:pPr>
+            <a:r>
+              <a:rPr sz="1400" b="0" i="0">
                 <a:solidFill>
                   <a:srgbClr val="5A6370"/>
                 </a:solidFill>
                 <a:latin typeface="Calibri"/>
               </a:rPr>
-              <a:t>claims, billing</a:t>
-            </a:r>
-          </a:p>
-        </p:txBody>
-      </p:sp>
-      <p:sp>
-        <p:nvSpPr>
-          <p:cNvPr id="11" name="Rounded Rectangle 10"/>
+              <a:t>against a native SEMANTIC VIEW.</a:t>
+            </a:r>
+          </a:p>
+        </p:txBody>
+      </p:sp>
+      <p:sp>
+        <p:nvSpPr>
+          <p:cNvPr id="9" name="Rectangle 8"/>
           <p:cNvSpPr/>
           <p:nvPr/>
         </p:nvSpPr>
         <p:spPr>
           <a:xfrm>
-            <a:off x="4343400" y="2468880"/>
-            <a:ext cx="3291840" cy="3017520"/>
-          </a:xfrm>
-          <a:prstGeom prst="roundRect">
-            <a:avLst>
-              <a:gd name="adj" fmla="val 6000"/>
-            </a:avLst>
+            <a:off x="731520" y="3657600"/>
+            <a:ext cx="109728" cy="960120"/>
+          </a:xfrm>
+          <a:prstGeom prst="rect">
+            <a:avLst/>
           </a:prstGeom>
           <a:solidFill>
-            <a:srgbClr val="F4F6F9"/>
+            <a:srgbClr val="29B5E8"/>
           </a:solidFill>
           <a:ln>
             <a:noFill/>
@@ -7353,14 +7960,14 @@
       </p:sp>
       <p:sp>
         <p:nvSpPr>
-          <p:cNvPr id="12" name="TextBox 11"/>
+          <p:cNvPr id="10" name="TextBox 9"/>
           <p:cNvSpPr txBox="1"/>
           <p:nvPr/>
         </p:nvSpPr>
         <p:spPr>
           <a:xfrm>
-            <a:off x="4343400" y="2651760"/>
-            <a:ext cx="3291840" cy="731520"/>
+            <a:off x="1005840" y="3611880"/>
+            <a:ext cx="10058400" cy="411480"/>
           </a:xfrm>
           <a:prstGeom prst="rect">
             <a:avLst/>
@@ -7373,33 +7980,33 @@
           </a:bodyPr>
           <a:lstStyle/>
           <a:p>
-            <a:pPr algn="ctr">
+            <a:pPr algn="l">
               <a:lnSpc>
                 <a:spcPct val="100000"/>
               </a:lnSpc>
             </a:pPr>
             <a:r>
-              <a:rPr sz="4000" b="0" i="0">
-                <a:solidFill>
-                  <a:srgbClr val="1A1A1A"/>
-                </a:solidFill>
-                <a:latin typeface="Calibri"/>
-              </a:rPr>
-              <a:t>📄</a:t>
-            </a:r>
-          </a:p>
-        </p:txBody>
-      </p:sp>
-      <p:sp>
-        <p:nvSpPr>
-          <p:cNvPr id="13" name="TextBox 12"/>
+              <a:rPr sz="1900" b="1" i="0">
+                <a:solidFill>
+                  <a:srgbClr val="0B1F3A"/>
+                </a:solidFill>
+                <a:latin typeface="Calibri"/>
+              </a:rPr>
+              <a:t>📄  Document Q&amp;A (RAG)</a:t>
+            </a:r>
+          </a:p>
+        </p:txBody>
+      </p:sp>
+      <p:sp>
+        <p:nvSpPr>
+          <p:cNvPr id="11" name="TextBox 10"/>
           <p:cNvSpPr txBox="1"/>
           <p:nvPr/>
         </p:nvSpPr>
         <p:spPr>
           <a:xfrm>
-            <a:off x="4526280" y="3429000"/>
-            <a:ext cx="2926080" cy="457200"/>
+            <a:off x="1005840" y="4041648"/>
+            <a:ext cx="10058400" cy="594360"/>
           </a:xfrm>
           <a:prstGeom prst="rect">
             <a:avLst/>
@@ -7412,151 +8019,55 @@
           </a:bodyPr>
           <a:lstStyle/>
           <a:p>
-            <a:pPr algn="ctr">
-              <a:lnSpc>
-                <a:spcPct val="100000"/>
-              </a:lnSpc>
-            </a:pPr>
-            <a:r>
-              <a:rPr sz="1700" b="1" i="0">
-                <a:solidFill>
-                  <a:srgbClr val="0070AD"/>
-                </a:solidFill>
-                <a:latin typeface="Calibri"/>
-              </a:rPr>
-              <a:t>Document Reviewer</a:t>
-            </a:r>
-          </a:p>
-        </p:txBody>
-      </p:sp>
-      <p:sp>
-        <p:nvSpPr>
-          <p:cNvPr id="14" name="TextBox 13"/>
-          <p:cNvSpPr txBox="1"/>
-          <p:nvPr/>
-        </p:nvSpPr>
-        <p:spPr>
-          <a:xfrm>
-            <a:off x="4572000" y="3931920"/>
-            <a:ext cx="2834640" cy="914400"/>
-          </a:xfrm>
-          <a:prstGeom prst="rect">
-            <a:avLst/>
-          </a:prstGeom>
-          <a:noFill/>
-        </p:spPr>
-        <p:txBody>
-          <a:bodyPr wrap="square" anchor="t">
-            <a:spAutoFit/>
-          </a:bodyPr>
-          <a:lstStyle/>
-          <a:p>
-            <a:pPr algn="ctr">
-              <a:lnSpc>
-                <a:spcPct val="120000"/>
-              </a:lnSpc>
-            </a:pPr>
-            <a:r>
-              <a:rPr sz="1300" b="0" i="1">
-                <a:solidFill>
-                  <a:srgbClr val="1A1A1A"/>
-                </a:solidFill>
-                <a:latin typeface="Calibri"/>
-              </a:rPr>
-              <a:t>"Does this policy cover</a:t>
-            </a:r>
-          </a:p>
-          <a:p>
-            <a:pPr algn="ctr">
-              <a:lnSpc>
-                <a:spcPct val="120000"/>
-              </a:lnSpc>
-            </a:pPr>
-            <a:r>
-              <a:rPr sz="1300" b="0" i="1">
-                <a:solidFill>
-                  <a:srgbClr val="1A1A1A"/>
-                </a:solidFill>
-                <a:latin typeface="Calibri"/>
-              </a:rPr>
-              <a:t>water damage?"</a:t>
-            </a:r>
-          </a:p>
-        </p:txBody>
-      </p:sp>
-      <p:sp>
-        <p:nvSpPr>
-          <p:cNvPr id="15" name="TextBox 14"/>
-          <p:cNvSpPr txBox="1"/>
-          <p:nvPr/>
-        </p:nvSpPr>
-        <p:spPr>
-          <a:xfrm>
-            <a:off x="4572000" y="4892040"/>
-            <a:ext cx="2834640" cy="548640"/>
-          </a:xfrm>
-          <a:prstGeom prst="rect">
-            <a:avLst/>
-          </a:prstGeom>
-          <a:noFill/>
-        </p:spPr>
-        <p:txBody>
-          <a:bodyPr wrap="square" anchor="t">
-            <a:spAutoFit/>
-          </a:bodyPr>
-          <a:lstStyle/>
-          <a:p>
-            <a:pPr algn="ctr">
-              <a:lnSpc>
-                <a:spcPct val="115000"/>
-              </a:lnSpc>
-            </a:pPr>
-            <a:r>
-              <a:rPr sz="1100" b="0" i="0">
+            <a:pPr algn="l">
+              <a:lnSpc>
+                <a:spcPct val="125000"/>
+              </a:lnSpc>
+            </a:pPr>
+            <a:r>
+              <a:rPr sz="1400" b="0" i="0">
                 <a:solidFill>
                   <a:srgbClr val="5A6370"/>
                 </a:solidFill>
                 <a:latin typeface="Calibri"/>
               </a:rPr>
-              <a:t>Unstructured PDFs and</a:t>
-            </a:r>
-          </a:p>
-          <a:p>
-            <a:pPr algn="ctr">
-              <a:lnSpc>
-                <a:spcPct val="115000"/>
-              </a:lnSpc>
-            </a:pPr>
-            <a:r>
-              <a:rPr sz="1100" b="0" i="0">
+              <a:t>Cortex Search auto-embeds and indexes policy documents</a:t>
+            </a:r>
+          </a:p>
+          <a:p>
+            <a:pPr algn="l">
+              <a:lnSpc>
+                <a:spcPct val="125000"/>
+              </a:lnSpc>
+            </a:pPr>
+            <a:r>
+              <a:rPr sz="1400" b="0" i="0">
                 <a:solidFill>
                   <a:srgbClr val="5A6370"/>
                 </a:solidFill>
                 <a:latin typeface="Calibri"/>
               </a:rPr>
-              <a:t>contracts</a:t>
-            </a:r>
-          </a:p>
-        </p:txBody>
-      </p:sp>
-      <p:sp>
-        <p:nvSpPr>
-          <p:cNvPr id="16" name="Rounded Rectangle 15"/>
+              <a:t>— no external vector database.</a:t>
+            </a:r>
+          </a:p>
+        </p:txBody>
+      </p:sp>
+      <p:sp>
+        <p:nvSpPr>
+          <p:cNvPr id="12" name="Rectangle 11"/>
           <p:cNvSpPr/>
           <p:nvPr/>
         </p:nvSpPr>
         <p:spPr>
           <a:xfrm>
-            <a:off x="7955280" y="2468880"/>
-            <a:ext cx="3291840" cy="3017520"/>
-          </a:xfrm>
-          <a:prstGeom prst="roundRect">
-            <a:avLst>
-              <a:gd name="adj" fmla="val 6000"/>
-            </a:avLst>
+            <a:off x="731520" y="4846320"/>
+            <a:ext cx="109728" cy="960120"/>
+          </a:xfrm>
+          <a:prstGeom prst="rect">
+            <a:avLst/>
           </a:prstGeom>
           <a:solidFill>
-            <a:srgbClr val="F4F6F9"/>
+            <a:srgbClr val="29B5E8"/>
           </a:solidFill>
           <a:ln>
             <a:noFill/>
@@ -7587,14 +8098,14 @@
       </p:sp>
       <p:sp>
         <p:nvSpPr>
-          <p:cNvPr id="17" name="TextBox 16"/>
+          <p:cNvPr id="13" name="TextBox 12"/>
           <p:cNvSpPr txBox="1"/>
           <p:nvPr/>
         </p:nvSpPr>
         <p:spPr>
           <a:xfrm>
-            <a:off x="7955280" y="2651760"/>
-            <a:ext cx="3291840" cy="731520"/>
+            <a:off x="1005840" y="4800600"/>
+            <a:ext cx="10058400" cy="411480"/>
           </a:xfrm>
           <a:prstGeom prst="rect">
             <a:avLst/>
@@ -7607,33 +8118,33 @@
           </a:bodyPr>
           <a:lstStyle/>
           <a:p>
-            <a:pPr algn="ctr">
+            <a:pPr algn="l">
               <a:lnSpc>
                 <a:spcPct val="100000"/>
               </a:lnSpc>
             </a:pPr>
             <a:r>
-              <a:rPr sz="4000" b="0" i="0">
-                <a:solidFill>
-                  <a:srgbClr val="1A1A1A"/>
-                </a:solidFill>
-                <a:latin typeface="Calibri"/>
-              </a:rPr>
-              <a:t>🛡</a:t>
-            </a:r>
-          </a:p>
-        </p:txBody>
-      </p:sp>
-      <p:sp>
-        <p:nvSpPr>
-          <p:cNvPr id="18" name="TextBox 17"/>
+              <a:rPr sz="1900" b="1" i="0">
+                <a:solidFill>
+                  <a:srgbClr val="0B1F3A"/>
+                </a:solidFill>
+                <a:latin typeface="Calibri"/>
+              </a:rPr>
+              <a:t>🛡  Data Quality Root Cause</a:t>
+            </a:r>
+          </a:p>
+        </p:txBody>
+      </p:sp>
+      <p:sp>
+        <p:nvSpPr>
+          <p:cNvPr id="14" name="TextBox 13"/>
           <p:cNvSpPr txBox="1"/>
           <p:nvPr/>
         </p:nvSpPr>
         <p:spPr>
           <a:xfrm>
-            <a:off x="8138160" y="3429000"/>
-            <a:ext cx="2926080" cy="457200"/>
+            <a:off x="1005840" y="5230368"/>
+            <a:ext cx="10058400" cy="594360"/>
           </a:xfrm>
           <a:prstGeom prst="rect">
             <a:avLst/>
@@ -7646,33 +8157,95 @@
           </a:bodyPr>
           <a:lstStyle/>
           <a:p>
-            <a:pPr algn="ctr">
-              <a:lnSpc>
-                <a:spcPct val="100000"/>
-              </a:lnSpc>
-            </a:pPr>
-            <a:r>
-              <a:rPr sz="1700" b="1" i="0">
-                <a:solidFill>
-                  <a:srgbClr val="0070AD"/>
-                </a:solidFill>
-                <a:latin typeface="Calibri"/>
-              </a:rPr>
-              <a:t>Data Engineer</a:t>
-            </a:r>
-          </a:p>
-        </p:txBody>
-      </p:sp>
-      <p:sp>
-        <p:nvSpPr>
-          <p:cNvPr id="19" name="TextBox 18"/>
+            <a:pPr algn="l">
+              <a:lnSpc>
+                <a:spcPct val="125000"/>
+              </a:lnSpc>
+            </a:pPr>
+            <a:r>
+              <a:rPr sz="1400" b="0" i="0">
+                <a:solidFill>
+                  <a:srgbClr val="5A6370"/>
+                </a:solidFill>
+                <a:latin typeface="Calibri"/>
+              </a:rPr>
+              <a:t>A second semantic view lets business users ask “why did</a:t>
+            </a:r>
+          </a:p>
+          <a:p>
+            <a:pPr algn="l">
+              <a:lnSpc>
+                <a:spcPct val="125000"/>
+              </a:lnSpc>
+            </a:pPr>
+            <a:r>
+              <a:rPr sz="1400" b="0" i="0">
+                <a:solidFill>
+                  <a:srgbClr val="5A6370"/>
+                </a:solidFill>
+                <a:latin typeface="Calibri"/>
+              </a:rPr>
+              <a:t>this fail?” and get a real answer.</a:t>
+            </a:r>
+          </a:p>
+        </p:txBody>
+      </p:sp>
+      <p:sp>
+        <p:nvSpPr>
+          <p:cNvPr id="15" name="Rounded Rectangle 14"/>
+          <p:cNvSpPr/>
+          <p:nvPr/>
+        </p:nvSpPr>
+        <p:spPr>
+          <a:xfrm>
+            <a:off x="731520" y="5897880"/>
+            <a:ext cx="10698480" cy="502920"/>
+          </a:xfrm>
+          <a:prstGeom prst="roundRect">
+            <a:avLst>
+              <a:gd name="adj" fmla="val 15000"/>
+            </a:avLst>
+          </a:prstGeom>
+          <a:solidFill>
+            <a:srgbClr val="0B1F3A"/>
+          </a:solidFill>
+          <a:ln>
+            <a:noFill/>
+          </a:ln>
+          <a:effectLst/>
+        </p:spPr>
+        <p:style>
+          <a:lnRef idx="1">
+            <a:schemeClr val="accent1"/>
+          </a:lnRef>
+          <a:fillRef idx="3">
+            <a:schemeClr val="accent1"/>
+          </a:fillRef>
+          <a:effectRef idx="2">
+            <a:schemeClr val="accent1"/>
+          </a:effectRef>
+          <a:fontRef idx="minor">
+            <a:schemeClr val="lt1"/>
+          </a:fontRef>
+        </p:style>
+        <p:txBody>
+          <a:bodyPr rtlCol="0" anchor="ctr"/>
+          <a:lstStyle/>
+          <a:p>
+            <a:pPr algn="ctr"/>
+          </a:p>
+        </p:txBody>
+      </p:sp>
+      <p:sp>
+        <p:nvSpPr>
+          <p:cNvPr id="16" name="TextBox 15"/>
           <p:cNvSpPr txBox="1"/>
           <p:nvPr/>
         </p:nvSpPr>
         <p:spPr>
           <a:xfrm>
-            <a:off x="8183880" y="3931920"/>
-            <a:ext cx="2834640" cy="914400"/>
+            <a:off x="731520" y="5961888"/>
+            <a:ext cx="10698480" cy="365760"/>
           </a:xfrm>
           <a:prstGeom prst="rect">
             <a:avLst/>
@@ -7687,47 +8260,31 @@
           <a:p>
             <a:pPr algn="ctr">
               <a:lnSpc>
-                <a:spcPct val="120000"/>
-              </a:lnSpc>
-            </a:pPr>
-            <a:r>
-              <a:rPr sz="1300" b="0" i="1">
-                <a:solidFill>
-                  <a:srgbClr val="1A1A1A"/>
-                </a:solidFill>
-                <a:latin typeface="Calibri"/>
-              </a:rPr>
-              <a:t>"Why did this data quality</a:t>
-            </a:r>
-          </a:p>
-          <a:p>
-            <a:pPr algn="ctr">
-              <a:lnSpc>
-                <a:spcPct val="120000"/>
-              </a:lnSpc>
-            </a:pPr>
-            <a:r>
-              <a:rPr sz="1300" b="0" i="1">
-                <a:solidFill>
-                  <a:srgbClr val="1A1A1A"/>
-                </a:solidFill>
-                <a:latin typeface="Calibri"/>
-              </a:rPr>
-              <a:t>check fail?"</a:t>
-            </a:r>
-          </a:p>
-        </p:txBody>
-      </p:sp>
-      <p:sp>
-        <p:nvSpPr>
-          <p:cNvPr id="20" name="TextBox 19"/>
+                <a:spcPct val="100000"/>
+              </a:lnSpc>
+            </a:pPr>
+            <a:r>
+              <a:rPr sz="1500" b="1" i="0">
+                <a:solidFill>
+                  <a:srgbClr val="FFFFFF"/>
+                </a:solidFill>
+                <a:latin typeface="Calibri"/>
+              </a:rPr>
+              <a:t>One chat box.  One agent.  Automatic routing between all three.</a:t>
+            </a:r>
+          </a:p>
+        </p:txBody>
+      </p:sp>
+      <p:sp>
+        <p:nvSpPr>
+          <p:cNvPr id="17" name="TextBox 8"/>
           <p:cNvSpPr txBox="1"/>
           <p:nvPr/>
         </p:nvSpPr>
         <p:spPr>
           <a:xfrm>
-            <a:off x="8183880" y="4892040"/>
-            <a:ext cx="2834640" cy="548640"/>
+            <a:off x="457200" y="6473952"/>
+            <a:ext cx="5486400" cy="320040"/>
           </a:xfrm>
           <a:prstGeom prst="rect">
             <a:avLst/>
@@ -7740,49 +8297,33 @@
           </a:bodyPr>
           <a:lstStyle/>
           <a:p>
-            <a:pPr algn="ctr">
-              <a:lnSpc>
-                <a:spcPct val="115000"/>
-              </a:lnSpc>
-            </a:pPr>
-            <a:r>
-              <a:rPr sz="1100" b="0" i="0">
+            <a:pPr algn="l">
+              <a:lnSpc>
+                <a:spcPct val="100000"/>
+              </a:lnSpc>
+            </a:pPr>
+            <a:r>
+              <a:rPr sz="900" b="0" i="1">
                 <a:solidFill>
                   <a:srgbClr val="5A6370"/>
                 </a:solidFill>
                 <a:latin typeface="Calibri"/>
               </a:rPr>
-              <a:t>DQ rules, results,</a:t>
-            </a:r>
-          </a:p>
-          <a:p>
-            <a:pPr algn="ctr">
-              <a:lnSpc>
-                <a:spcPct val="115000"/>
-              </a:lnSpc>
-            </a:pPr>
-            <a:r>
-              <a:rPr sz="1100" b="0" i="0">
-                <a:solidFill>
-                  <a:srgbClr val="5A6370"/>
-                </a:solidFill>
-                <a:latin typeface="Calibri"/>
-              </a:rPr>
-              <a:t>and logs</a:t>
-            </a:r>
-          </a:p>
-        </p:txBody>
-      </p:sp>
-      <p:sp>
-        <p:nvSpPr>
-          <p:cNvPr id="21" name="TextBox 20"/>
+              <a:t>Unified Enterprise AI Agents Platform  |  Capgemini × Snowflake Hackathon</a:t>
+            </a:r>
+          </a:p>
+        </p:txBody>
+      </p:sp>
+      <p:sp>
+        <p:nvSpPr>
+          <p:cNvPr id="18" name="TextBox 9"/>
           <p:cNvSpPr txBox="1"/>
           <p:nvPr/>
         </p:nvSpPr>
         <p:spPr>
           <a:xfrm>
-            <a:off x="731520" y="5806440"/>
-            <a:ext cx="10698480" cy="457200"/>
+            <a:off x="11247120" y="6473952"/>
+            <a:ext cx="731520" cy="320040"/>
           </a:xfrm>
           <a:prstGeom prst="rect">
             <a:avLst/>
@@ -7795,97 +8336,19 @@
           </a:bodyPr>
           <a:lstStyle/>
           <a:p>
-            <a:pPr algn="ctr">
+            <a:pPr algn="r">
               <a:lnSpc>
                 <a:spcPct val="100000"/>
               </a:lnSpc>
             </a:pPr>
             <a:r>
-              <a:rPr sz="1600" b="0" i="1">
+              <a:rPr sz="900" b="0" i="0">
                 <a:solidFill>
                   <a:srgbClr val="5A6370"/>
                 </a:solidFill>
                 <a:latin typeface="Calibri"/>
               </a:rPr>
-              <a:t>Slow, siloed, and dependent on whoever happens to be available.</a:t>
-            </a:r>
-          </a:p>
-        </p:txBody>
-      </p:sp>
-      <p:sp>
-        <p:nvSpPr>
-          <p:cNvPr id="22" name="TextBox 21"/>
-          <p:cNvSpPr txBox="1"/>
-          <p:nvPr/>
-        </p:nvSpPr>
-        <p:spPr>
-          <a:xfrm>
-            <a:off x="457200" y="6473952"/>
-            <a:ext cx="5486400" cy="320040"/>
-          </a:xfrm>
-          <a:prstGeom prst="rect">
-            <a:avLst/>
-          </a:prstGeom>
-          <a:noFill/>
-        </p:spPr>
-        <p:txBody>
-          <a:bodyPr wrap="square" anchor="t">
-            <a:spAutoFit/>
-          </a:bodyPr>
-          <a:lstStyle/>
-          <a:p>
-            <a:pPr algn="l">
-              <a:lnSpc>
-                <a:spcPct val="100000"/>
-              </a:lnSpc>
-            </a:pPr>
-            <a:r>
-              <a:rPr sz="900" b="0" i="1">
-                <a:solidFill>
-                  <a:srgbClr val="5A6370"/>
-                </a:solidFill>
-                <a:latin typeface="Calibri"/>
-              </a:rPr>
-              <a:t>Unified Enterprise AI Agents Platform  |  Capgemini x Snowflake Hackathon</a:t>
-            </a:r>
-          </a:p>
-        </p:txBody>
-      </p:sp>
-      <p:sp>
-        <p:nvSpPr>
-          <p:cNvPr id="23" name="TextBox 22"/>
-          <p:cNvSpPr txBox="1"/>
-          <p:nvPr/>
-        </p:nvSpPr>
-        <p:spPr>
-          <a:xfrm>
-            <a:off x="11247120" y="6473952"/>
-            <a:ext cx="731520" cy="320040"/>
-          </a:xfrm>
-          <a:prstGeom prst="rect">
-            <a:avLst/>
-          </a:prstGeom>
-          <a:noFill/>
-        </p:spPr>
-        <p:txBody>
-          <a:bodyPr wrap="square" anchor="t">
-            <a:spAutoFit/>
-          </a:bodyPr>
-          <a:lstStyle/>
-          <a:p>
-            <a:pPr algn="r">
-              <a:lnSpc>
-                <a:spcPct val="100000"/>
-              </a:lnSpc>
-            </a:pPr>
-            <a:r>
-              <a:rPr sz="900" b="0" i="0">
-                <a:solidFill>
-                  <a:srgbClr val="5A6370"/>
-                </a:solidFill>
-                <a:latin typeface="Calibri"/>
-              </a:rPr>
-              <a:t>3</a:t>
+              <a:t>4</a:t>
             </a:r>
           </a:p>
         </p:txBody>
@@ -7898,7 +8361,7 @@
 </p:sld>
 </file>
 
-<file path=ppt\slides\slide4.xml><?xml version="1.0" encoding="utf-8"?>
+<file path=ppt/slides/slide5.xml><?xml version="1.0" encoding="utf-8"?>
 <p:sld xmlns:a="http://schemas.openxmlformats.org/drawingml/2006/main" xmlns:p="http://schemas.openxmlformats.org/presentationml/2006/main" xmlns:r="http://schemas.openxmlformats.org/officeDocument/2006/relationships">
   <p:cSld>
     <p:spTree>
@@ -8030,21 +8493,67 @@
                 </a:solidFill>
                 <a:latin typeface="Georgia"/>
               </a:rPr>
-              <a:t>The Solution</a:t>
-            </a:r>
-          </a:p>
-        </p:txBody>
-      </p:sp>
-      <p:sp>
-        <p:nvSpPr>
-          <p:cNvPr id="5" name="TextBox 4"/>
+              <a:t>Architecture</a:t>
+            </a:r>
+          </a:p>
+        </p:txBody>
+      </p:sp>
+      <p:sp>
+        <p:nvSpPr>
+          <p:cNvPr id="5" name="Rounded Rectangle 4"/>
+          <p:cNvSpPr/>
+          <p:nvPr/>
+        </p:nvSpPr>
+        <p:spPr>
+          <a:xfrm>
+            <a:off x="4480560" y="1371600"/>
+            <a:ext cx="3200400" cy="640080"/>
+          </a:xfrm>
+          <a:prstGeom prst="roundRect">
+            <a:avLst>
+              <a:gd name="adj" fmla="val 15000"/>
+            </a:avLst>
+          </a:prstGeom>
+          <a:solidFill>
+            <a:srgbClr val="FF4B4B"/>
+          </a:solidFill>
+          <a:ln>
+            <a:noFill/>
+          </a:ln>
+          <a:effectLst/>
+        </p:spPr>
+        <p:style>
+          <a:lnRef idx="1">
+            <a:schemeClr val="accent1"/>
+          </a:lnRef>
+          <a:fillRef idx="3">
+            <a:schemeClr val="accent1"/>
+          </a:fillRef>
+          <a:effectRef idx="2">
+            <a:schemeClr val="accent1"/>
+          </a:effectRef>
+          <a:fontRef idx="minor">
+            <a:schemeClr val="lt1"/>
+          </a:fontRef>
+        </p:style>
+        <p:txBody>
+          <a:bodyPr rtlCol="0" anchor="ctr"/>
+          <a:lstStyle/>
+          <a:p>
+            <a:pPr algn="ctr"/>
+          </a:p>
+        </p:txBody>
+      </p:sp>
+      <p:sp>
+        <p:nvSpPr>
+          <p:cNvPr id="6" name="TextBox 5"/>
           <p:cNvSpPr txBox="1"/>
           <p:nvPr/>
         </p:nvSpPr>
         <p:spPr>
           <a:xfrm>
-            <a:off x="731520" y="1325880"/>
-            <a:ext cx="10698480" cy="822960"/>
+            <a:off x="4480560" y="1508760"/>
+            <a:ext cx="3200400" cy="365760"/>
           </a:xfrm>
           <a:prstGeom prst="rect">
             <a:avLst/>
@@ -8057,52 +8566,706 @@
           </a:bodyPr>
           <a:lstStyle/>
           <a:p>
-            <a:pPr algn="l">
-              <a:lnSpc>
-                <a:spcPct val="130000"/>
-              </a:lnSpc>
-            </a:pPr>
-            <a:r>
-              <a:rPr sz="1900" b="1" i="0">
-                <a:solidFill>
-                  <a:srgbClr val="1A1A1A"/>
-                </a:solidFill>
-                <a:latin typeface="Calibri"/>
-              </a:rPr>
-              <a:t>One conversational agent that replaces all three specialists —</a:t>
-            </a:r>
-          </a:p>
-          <a:p>
-            <a:pPr algn="l">
-              <a:lnSpc>
-                <a:spcPct val="130000"/>
-              </a:lnSpc>
-            </a:pPr>
-            <a:r>
-              <a:rPr sz="1900" b="1" i="0">
-                <a:solidFill>
-                  <a:srgbClr val="1A1A1A"/>
-                </a:solidFill>
-                <a:latin typeface="Calibri"/>
-              </a:rPr>
-              <a:t>built entirely with native Snowflake Cortex features.</a:t>
-            </a:r>
-          </a:p>
-        </p:txBody>
-      </p:sp>
-      <p:sp>
-        <p:nvSpPr>
-          <p:cNvPr id="6" name="Rectangle 5"/>
+            <a:pPr algn="ctr">
+              <a:lnSpc>
+                <a:spcPct val="100000"/>
+              </a:lnSpc>
+            </a:pPr>
+            <a:r>
+              <a:rPr sz="1300" b="1" i="0">
+                <a:solidFill>
+                  <a:srgbClr val="FFFFFF"/>
+                </a:solidFill>
+                <a:latin typeface="Calibri"/>
+              </a:rPr>
+              <a:t>Streamlit-in-Snowflake  —  Chat UI</a:t>
+            </a:r>
+          </a:p>
+        </p:txBody>
+      </p:sp>
+      <p:cxnSp>
+        <p:nvCxnSpPr>
+          <p:cNvPr id="7" name="Connector 6"/>
+          <p:cNvCxnSpPr/>
+          <p:nvPr/>
+        </p:nvCxnSpPr>
+        <p:spPr>
+          <a:xfrm>
+            <a:off x="6080760" y="2011680"/>
+            <a:ext cx="0" cy="365760"/>
+          </a:xfrm>
+          <a:prstGeom prst="bentConnector3">
+            <a:avLst/>
+          </a:prstGeom>
+          <a:ln w="25400">
+            <a:solidFill>
+              <a:srgbClr val="5A6370"/>
+            </a:solidFill>
+          </a:ln>
+        </p:spPr>
+        <p:style>
+          <a:lnRef idx="2">
+            <a:schemeClr val="accent1"/>
+          </a:lnRef>
+          <a:fillRef idx="0">
+            <a:schemeClr val="accent1"/>
+          </a:fillRef>
+          <a:effectRef idx="1">
+            <a:schemeClr val="accent1"/>
+          </a:effectRef>
+          <a:fontRef idx="minor">
+            <a:schemeClr val="tx1"/>
+          </a:fontRef>
+        </p:style>
+      </p:cxnSp>
+      <p:sp>
+        <p:nvSpPr>
+          <p:cNvPr id="8" name="Rounded Rectangle 7"/>
           <p:cNvSpPr/>
           <p:nvPr/>
         </p:nvSpPr>
         <p:spPr>
           <a:xfrm>
-            <a:off x="731520" y="2468880"/>
-            <a:ext cx="109728" cy="960120"/>
-          </a:xfrm>
-          <a:prstGeom prst="rect">
-            <a:avLst/>
+            <a:off x="4023360" y="2377440"/>
+            <a:ext cx="4114800" cy="777240"/>
+          </a:xfrm>
+          <a:prstGeom prst="roundRect">
+            <a:avLst>
+              <a:gd name="adj" fmla="val 15000"/>
+            </a:avLst>
+          </a:prstGeom>
+          <a:solidFill>
+            <a:srgbClr val="0B1F3A"/>
+          </a:solidFill>
+          <a:ln>
+            <a:noFill/>
+          </a:ln>
+          <a:effectLst/>
+        </p:spPr>
+        <p:style>
+          <a:lnRef idx="1">
+            <a:schemeClr val="accent1"/>
+          </a:lnRef>
+          <a:fillRef idx="3">
+            <a:schemeClr val="accent1"/>
+          </a:fillRef>
+          <a:effectRef idx="2">
+            <a:schemeClr val="accent1"/>
+          </a:effectRef>
+          <a:fontRef idx="minor">
+            <a:schemeClr val="lt1"/>
+          </a:fontRef>
+        </p:style>
+        <p:txBody>
+          <a:bodyPr rtlCol="0" anchor="ctr"/>
+          <a:lstStyle/>
+          <a:p>
+            <a:pPr algn="ctr"/>
+          </a:p>
+        </p:txBody>
+      </p:sp>
+      <p:sp>
+        <p:nvSpPr>
+          <p:cNvPr id="9" name="TextBox 8"/>
+          <p:cNvSpPr txBox="1"/>
+          <p:nvPr/>
+        </p:nvSpPr>
+        <p:spPr>
+          <a:xfrm>
+            <a:off x="4023360" y="2487168"/>
+            <a:ext cx="4114800" cy="320040"/>
+          </a:xfrm>
+          <a:prstGeom prst="rect">
+            <a:avLst/>
+          </a:prstGeom>
+          <a:noFill/>
+        </p:spPr>
+        <p:txBody>
+          <a:bodyPr wrap="square" anchor="t">
+            <a:spAutoFit/>
+          </a:bodyPr>
+          <a:lstStyle/>
+          <a:p>
+            <a:pPr algn="ctr">
+              <a:lnSpc>
+                <a:spcPct val="100000"/>
+              </a:lnSpc>
+            </a:pPr>
+            <a:r>
+              <a:rPr sz="1500" b="1" i="0">
+                <a:solidFill>
+                  <a:srgbClr val="FFFFFF"/>
+                </a:solidFill>
+                <a:latin typeface="Calibri"/>
+              </a:rPr>
+              <a:t>ENTERPRISE_AI_AGENT</a:t>
+            </a:r>
+          </a:p>
+        </p:txBody>
+      </p:sp>
+      <p:sp>
+        <p:nvSpPr>
+          <p:cNvPr id="10" name="TextBox 9"/>
+          <p:cNvSpPr txBox="1"/>
+          <p:nvPr/>
+        </p:nvSpPr>
+        <p:spPr>
+          <a:xfrm>
+            <a:off x="4023360" y="2798064"/>
+            <a:ext cx="4114800" cy="320040"/>
+          </a:xfrm>
+          <a:prstGeom prst="rect">
+            <a:avLst/>
+          </a:prstGeom>
+          <a:noFill/>
+        </p:spPr>
+        <p:txBody>
+          <a:bodyPr wrap="square" anchor="t">
+            <a:spAutoFit/>
+          </a:bodyPr>
+          <a:lstStyle/>
+          <a:p>
+            <a:pPr algn="ctr">
+              <a:lnSpc>
+                <a:spcPct val="100000"/>
+              </a:lnSpc>
+            </a:pPr>
+            <a:r>
+              <a:rPr sz="1100" b="0" i="0">
+                <a:solidFill>
+                  <a:srgbClr val="29B5E8"/>
+                </a:solidFill>
+                <a:latin typeface="Calibri"/>
+              </a:rPr>
+              <a:t>Snowflake Cortex Agent  •  auto-orchestration</a:t>
+            </a:r>
+          </a:p>
+        </p:txBody>
+      </p:sp>
+      <p:cxnSp>
+        <p:nvCxnSpPr>
+          <p:cNvPr id="11" name="Connector 10"/>
+          <p:cNvCxnSpPr/>
+          <p:nvPr/>
+        </p:nvCxnSpPr>
+        <p:spPr>
+          <a:xfrm flipH="1">
+            <a:off x="2331720" y="3154680"/>
+            <a:ext cx="3749040" cy="411480"/>
+          </a:xfrm>
+          <a:prstGeom prst="bentConnector3">
+            <a:avLst/>
+          </a:prstGeom>
+          <a:ln w="19050">
+            <a:solidFill>
+              <a:srgbClr val="5A6370"/>
+            </a:solidFill>
+          </a:ln>
+        </p:spPr>
+        <p:style>
+          <a:lnRef idx="2">
+            <a:schemeClr val="accent1"/>
+          </a:lnRef>
+          <a:fillRef idx="0">
+            <a:schemeClr val="accent1"/>
+          </a:fillRef>
+          <a:effectRef idx="1">
+            <a:schemeClr val="accent1"/>
+          </a:effectRef>
+          <a:fontRef idx="minor">
+            <a:schemeClr val="tx1"/>
+          </a:fontRef>
+        </p:style>
+      </p:cxnSp>
+      <p:sp>
+        <p:nvSpPr>
+          <p:cNvPr id="12" name="Rounded Rectangle 11"/>
+          <p:cNvSpPr/>
+          <p:nvPr/>
+        </p:nvSpPr>
+        <p:spPr>
+          <a:xfrm>
+            <a:off x="685800" y="3566160"/>
+            <a:ext cx="3291840" cy="868680"/>
+          </a:xfrm>
+          <a:prstGeom prst="roundRect">
+            <a:avLst>
+              <a:gd name="adj" fmla="val 10000"/>
+            </a:avLst>
+          </a:prstGeom>
+          <a:solidFill>
+            <a:srgbClr val="F4F6F9"/>
+          </a:solidFill>
+          <a:ln w="19050">
+            <a:solidFill>
+              <a:srgbClr val="0070AD"/>
+            </a:solidFill>
+          </a:ln>
+          <a:effectLst/>
+        </p:spPr>
+        <p:style>
+          <a:lnRef idx="1">
+            <a:schemeClr val="accent1"/>
+          </a:lnRef>
+          <a:fillRef idx="3">
+            <a:schemeClr val="accent1"/>
+          </a:fillRef>
+          <a:effectRef idx="2">
+            <a:schemeClr val="accent1"/>
+          </a:effectRef>
+          <a:fontRef idx="minor">
+            <a:schemeClr val="lt1"/>
+          </a:fontRef>
+        </p:style>
+        <p:txBody>
+          <a:bodyPr rtlCol="0" anchor="ctr"/>
+          <a:lstStyle/>
+          <a:p>
+            <a:pPr algn="ctr"/>
+          </a:p>
+        </p:txBody>
+      </p:sp>
+      <p:sp>
+        <p:nvSpPr>
+          <p:cNvPr id="13" name="TextBox 12"/>
+          <p:cNvSpPr txBox="1"/>
+          <p:nvPr/>
+        </p:nvSpPr>
+        <p:spPr>
+          <a:xfrm>
+            <a:off x="685800" y="3639312"/>
+            <a:ext cx="3291840" cy="320040"/>
+          </a:xfrm>
+          <a:prstGeom prst="rect">
+            <a:avLst/>
+          </a:prstGeom>
+          <a:noFill/>
+        </p:spPr>
+        <p:txBody>
+          <a:bodyPr wrap="square" anchor="t">
+            <a:spAutoFit/>
+          </a:bodyPr>
+          <a:lstStyle/>
+          <a:p>
+            <a:pPr algn="ctr">
+              <a:lnSpc>
+                <a:spcPct val="100000"/>
+              </a:lnSpc>
+            </a:pPr>
+            <a:r>
+              <a:rPr sz="1400" b="1" i="0">
+                <a:solidFill>
+                  <a:srgbClr val="0B1F3A"/>
+                </a:solidFill>
+                <a:latin typeface="Calibri"/>
+              </a:rPr>
+              <a:t>AnalyticsAgent</a:t>
+            </a:r>
+          </a:p>
+        </p:txBody>
+      </p:sp>
+      <p:sp>
+        <p:nvSpPr>
+          <p:cNvPr id="14" name="TextBox 13"/>
+          <p:cNvSpPr txBox="1"/>
+          <p:nvPr/>
+        </p:nvSpPr>
+        <p:spPr>
+          <a:xfrm>
+            <a:off x="685800" y="3950208"/>
+            <a:ext cx="3291840" cy="457200"/>
+          </a:xfrm>
+          <a:prstGeom prst="rect">
+            <a:avLst/>
+          </a:prstGeom>
+          <a:noFill/>
+        </p:spPr>
+        <p:txBody>
+          <a:bodyPr wrap="square" anchor="t">
+            <a:spAutoFit/>
+          </a:bodyPr>
+          <a:lstStyle/>
+          <a:p>
+            <a:pPr algn="ctr">
+              <a:lnSpc>
+                <a:spcPct val="110000"/>
+              </a:lnSpc>
+            </a:pPr>
+            <a:r>
+              <a:rPr sz="1100" b="0" i="0">
+                <a:solidFill>
+                  <a:srgbClr val="5A6370"/>
+                </a:solidFill>
+                <a:latin typeface="Calibri"/>
+              </a:rPr>
+              <a:t>Cortex Analyst</a:t>
+            </a:r>
+          </a:p>
+          <a:p>
+            <a:pPr algn="ctr">
+              <a:lnSpc>
+                <a:spcPct val="110000"/>
+              </a:lnSpc>
+            </a:pPr>
+            <a:r>
+              <a:rPr sz="1100" b="0" i="0">
+                <a:solidFill>
+                  <a:srgbClr val="5A6370"/>
+                </a:solidFill>
+                <a:latin typeface="Calibri"/>
+              </a:rPr>
+              <a:t>(text-to-SQL)</a:t>
+            </a:r>
+          </a:p>
+        </p:txBody>
+      </p:sp>
+      <p:cxnSp>
+        <p:nvCxnSpPr>
+          <p:cNvPr id="15" name="Connector 14"/>
+          <p:cNvCxnSpPr/>
+          <p:nvPr/>
+        </p:nvCxnSpPr>
+        <p:spPr>
+          <a:xfrm>
+            <a:off x="2331720" y="4434840"/>
+            <a:ext cx="0" cy="274320"/>
+          </a:xfrm>
+          <a:prstGeom prst="bentConnector3">
+            <a:avLst/>
+          </a:prstGeom>
+          <a:ln w="19050">
+            <a:solidFill>
+              <a:srgbClr val="5A6370"/>
+            </a:solidFill>
+          </a:ln>
+        </p:spPr>
+        <p:style>
+          <a:lnRef idx="2">
+            <a:schemeClr val="accent1"/>
+          </a:lnRef>
+          <a:fillRef idx="0">
+            <a:schemeClr val="accent1"/>
+          </a:fillRef>
+          <a:effectRef idx="1">
+            <a:schemeClr val="accent1"/>
+          </a:effectRef>
+          <a:fontRef idx="minor">
+            <a:schemeClr val="tx1"/>
+          </a:fontRef>
+        </p:style>
+      </p:cxnSp>
+      <p:sp>
+        <p:nvSpPr>
+          <p:cNvPr id="16" name="Rounded Rectangle 15"/>
+          <p:cNvSpPr/>
+          <p:nvPr/>
+        </p:nvSpPr>
+        <p:spPr>
+          <a:xfrm>
+            <a:off x="685800" y="4709160"/>
+            <a:ext cx="3291840" cy="548640"/>
+          </a:xfrm>
+          <a:prstGeom prst="roundRect">
+            <a:avLst>
+              <a:gd name="adj" fmla="val 10000"/>
+            </a:avLst>
+          </a:prstGeom>
+          <a:solidFill>
+            <a:srgbClr val="0070AD"/>
+          </a:solidFill>
+          <a:ln>
+            <a:noFill/>
+          </a:ln>
+          <a:effectLst/>
+        </p:spPr>
+        <p:style>
+          <a:lnRef idx="1">
+            <a:schemeClr val="accent1"/>
+          </a:lnRef>
+          <a:fillRef idx="3">
+            <a:schemeClr val="accent1"/>
+          </a:fillRef>
+          <a:effectRef idx="2">
+            <a:schemeClr val="accent1"/>
+          </a:effectRef>
+          <a:fontRef idx="minor">
+            <a:schemeClr val="lt1"/>
+          </a:fontRef>
+        </p:style>
+        <p:txBody>
+          <a:bodyPr rtlCol="0" anchor="ctr"/>
+          <a:lstStyle/>
+          <a:p>
+            <a:pPr algn="ctr"/>
+          </a:p>
+        </p:txBody>
+      </p:sp>
+      <p:sp>
+        <p:nvSpPr>
+          <p:cNvPr id="17" name="TextBox 16"/>
+          <p:cNvSpPr txBox="1"/>
+          <p:nvPr/>
+        </p:nvSpPr>
+        <p:spPr>
+          <a:xfrm>
+            <a:off x="685800" y="4828032"/>
+            <a:ext cx="3291840" cy="365760"/>
+          </a:xfrm>
+          <a:prstGeom prst="rect">
+            <a:avLst/>
+          </a:prstGeom>
+          <a:noFill/>
+        </p:spPr>
+        <p:txBody>
+          <a:bodyPr wrap="square" anchor="t">
+            <a:spAutoFit/>
+          </a:bodyPr>
+          <a:lstStyle/>
+          <a:p>
+            <a:pPr algn="ctr">
+              <a:lnSpc>
+                <a:spcPct val="100000"/>
+              </a:lnSpc>
+            </a:pPr>
+            <a:r>
+              <a:rPr sz="1100" b="1" i="0">
+                <a:solidFill>
+                  <a:srgbClr val="FFFFFF"/>
+                </a:solidFill>
+                <a:latin typeface="Calibri"/>
+              </a:rPr>
+              <a:t>ANALYTICS_SEMANTIC_VIEW</a:t>
+            </a:r>
+          </a:p>
+        </p:txBody>
+      </p:sp>
+      <p:cxnSp>
+        <p:nvCxnSpPr>
+          <p:cNvPr id="18" name="Connector 17"/>
+          <p:cNvCxnSpPr/>
+          <p:nvPr/>
+        </p:nvCxnSpPr>
+        <p:spPr>
+          <a:xfrm>
+            <a:off x="6080760" y="3154680"/>
+            <a:ext cx="18288" cy="411480"/>
+          </a:xfrm>
+          <a:prstGeom prst="bentConnector3">
+            <a:avLst/>
+          </a:prstGeom>
+          <a:ln w="19050">
+            <a:solidFill>
+              <a:srgbClr val="5A6370"/>
+            </a:solidFill>
+          </a:ln>
+        </p:spPr>
+        <p:style>
+          <a:lnRef idx="2">
+            <a:schemeClr val="accent1"/>
+          </a:lnRef>
+          <a:fillRef idx="0">
+            <a:schemeClr val="accent1"/>
+          </a:fillRef>
+          <a:effectRef idx="1">
+            <a:schemeClr val="accent1"/>
+          </a:effectRef>
+          <a:fontRef idx="minor">
+            <a:schemeClr val="tx1"/>
+          </a:fontRef>
+        </p:style>
+      </p:cxnSp>
+      <p:sp>
+        <p:nvSpPr>
+          <p:cNvPr id="19" name="Rounded Rectangle 18"/>
+          <p:cNvSpPr/>
+          <p:nvPr/>
+        </p:nvSpPr>
+        <p:spPr>
+          <a:xfrm>
+            <a:off x="4453128" y="3566160"/>
+            <a:ext cx="3291840" cy="868680"/>
+          </a:xfrm>
+          <a:prstGeom prst="roundRect">
+            <a:avLst>
+              <a:gd name="adj" fmla="val 10000"/>
+            </a:avLst>
+          </a:prstGeom>
+          <a:solidFill>
+            <a:srgbClr val="F4F6F9"/>
+          </a:solidFill>
+          <a:ln w="19050">
+            <a:solidFill>
+              <a:srgbClr val="29B5E8"/>
+            </a:solidFill>
+          </a:ln>
+          <a:effectLst/>
+        </p:spPr>
+        <p:style>
+          <a:lnRef idx="1">
+            <a:schemeClr val="accent1"/>
+          </a:lnRef>
+          <a:fillRef idx="3">
+            <a:schemeClr val="accent1"/>
+          </a:fillRef>
+          <a:effectRef idx="2">
+            <a:schemeClr val="accent1"/>
+          </a:effectRef>
+          <a:fontRef idx="minor">
+            <a:schemeClr val="lt1"/>
+          </a:fontRef>
+        </p:style>
+        <p:txBody>
+          <a:bodyPr rtlCol="0" anchor="ctr"/>
+          <a:lstStyle/>
+          <a:p>
+            <a:pPr algn="ctr"/>
+          </a:p>
+        </p:txBody>
+      </p:sp>
+      <p:sp>
+        <p:nvSpPr>
+          <p:cNvPr id="20" name="TextBox 19"/>
+          <p:cNvSpPr txBox="1"/>
+          <p:nvPr/>
+        </p:nvSpPr>
+        <p:spPr>
+          <a:xfrm>
+            <a:off x="4453128" y="3639312"/>
+            <a:ext cx="3291840" cy="320040"/>
+          </a:xfrm>
+          <a:prstGeom prst="rect">
+            <a:avLst/>
+          </a:prstGeom>
+          <a:noFill/>
+        </p:spPr>
+        <p:txBody>
+          <a:bodyPr wrap="square" anchor="t">
+            <a:spAutoFit/>
+          </a:bodyPr>
+          <a:lstStyle/>
+          <a:p>
+            <a:pPr algn="ctr">
+              <a:lnSpc>
+                <a:spcPct val="100000"/>
+              </a:lnSpc>
+            </a:pPr>
+            <a:r>
+              <a:rPr sz="1400" b="1" i="0">
+                <a:solidFill>
+                  <a:srgbClr val="0B1F3A"/>
+                </a:solidFill>
+                <a:latin typeface="Calibri"/>
+              </a:rPr>
+              <a:t>DocumentQA</a:t>
+            </a:r>
+          </a:p>
+        </p:txBody>
+      </p:sp>
+      <p:sp>
+        <p:nvSpPr>
+          <p:cNvPr id="21" name="TextBox 20"/>
+          <p:cNvSpPr txBox="1"/>
+          <p:nvPr/>
+        </p:nvSpPr>
+        <p:spPr>
+          <a:xfrm>
+            <a:off x="4453128" y="3950208"/>
+            <a:ext cx="3291840" cy="457200"/>
+          </a:xfrm>
+          <a:prstGeom prst="rect">
+            <a:avLst/>
+          </a:prstGeom>
+          <a:noFill/>
+        </p:spPr>
+        <p:txBody>
+          <a:bodyPr wrap="square" anchor="t">
+            <a:spAutoFit/>
+          </a:bodyPr>
+          <a:lstStyle/>
+          <a:p>
+            <a:pPr algn="ctr">
+              <a:lnSpc>
+                <a:spcPct val="110000"/>
+              </a:lnSpc>
+            </a:pPr>
+            <a:r>
+              <a:rPr sz="1100" b="0" i="0">
+                <a:solidFill>
+                  <a:srgbClr val="5A6370"/>
+                </a:solidFill>
+                <a:latin typeface="Calibri"/>
+              </a:rPr>
+              <a:t>Cortex Search</a:t>
+            </a:r>
+          </a:p>
+          <a:p>
+            <a:pPr algn="ctr">
+              <a:lnSpc>
+                <a:spcPct val="110000"/>
+              </a:lnSpc>
+            </a:pPr>
+            <a:r>
+              <a:rPr sz="1100" b="0" i="0">
+                <a:solidFill>
+                  <a:srgbClr val="5A6370"/>
+                </a:solidFill>
+                <a:latin typeface="Calibri"/>
+              </a:rPr>
+              <a:t>(RAG)</a:t>
+            </a:r>
+          </a:p>
+        </p:txBody>
+      </p:sp>
+      <p:cxnSp>
+        <p:nvCxnSpPr>
+          <p:cNvPr id="22" name="Connector 21"/>
+          <p:cNvCxnSpPr/>
+          <p:nvPr/>
+        </p:nvCxnSpPr>
+        <p:spPr>
+          <a:xfrm>
+            <a:off x="6099048" y="4434840"/>
+            <a:ext cx="0" cy="274320"/>
+          </a:xfrm>
+          <a:prstGeom prst="bentConnector3">
+            <a:avLst/>
+          </a:prstGeom>
+          <a:ln w="19050">
+            <a:solidFill>
+              <a:srgbClr val="5A6370"/>
+            </a:solidFill>
+          </a:ln>
+        </p:spPr>
+        <p:style>
+          <a:lnRef idx="2">
+            <a:schemeClr val="accent1"/>
+          </a:lnRef>
+          <a:fillRef idx="0">
+            <a:schemeClr val="accent1"/>
+          </a:fillRef>
+          <a:effectRef idx="1">
+            <a:schemeClr val="accent1"/>
+          </a:effectRef>
+          <a:fontRef idx="minor">
+            <a:schemeClr val="tx1"/>
+          </a:fontRef>
+        </p:style>
+      </p:cxnSp>
+      <p:sp>
+        <p:nvSpPr>
+          <p:cNvPr id="23" name="Rounded Rectangle 22"/>
+          <p:cNvSpPr/>
+          <p:nvPr/>
+        </p:nvSpPr>
+        <p:spPr>
+          <a:xfrm>
+            <a:off x="4453128" y="4709160"/>
+            <a:ext cx="3291840" cy="548640"/>
+          </a:xfrm>
+          <a:prstGeom prst="roundRect">
+            <a:avLst>
+              <a:gd name="adj" fmla="val 10000"/>
+            </a:avLst>
           </a:prstGeom>
           <a:solidFill>
             <a:srgbClr val="29B5E8"/>
@@ -8136,14 +9299,14 @@
       </p:sp>
       <p:sp>
         <p:nvSpPr>
-          <p:cNvPr id="7" name="TextBox 6"/>
+          <p:cNvPr id="24" name="TextBox 23"/>
           <p:cNvSpPr txBox="1"/>
           <p:nvPr/>
         </p:nvSpPr>
         <p:spPr>
           <a:xfrm>
-            <a:off x="1005840" y="2423160"/>
-            <a:ext cx="10058400" cy="411480"/>
+            <a:off x="4453128" y="4828032"/>
+            <a:ext cx="3291840" cy="365760"/>
           </a:xfrm>
           <a:prstGeom prst="rect">
             <a:avLst/>
@@ -8156,33 +9319,116 @@
           </a:bodyPr>
           <a:lstStyle/>
           <a:p>
-            <a:pPr algn="l">
+            <a:pPr algn="ctr">
               <a:lnSpc>
                 <a:spcPct val="100000"/>
               </a:lnSpc>
             </a:pPr>
             <a:r>
-              <a:rPr sz="1900" b="1" i="0">
-                <a:solidFill>
-                  <a:srgbClr val="0B1F3A"/>
-                </a:solidFill>
-                <a:latin typeface="Calibri"/>
-              </a:rPr>
-              <a:t>📊  Self-Service Analytics</a:t>
-            </a:r>
-          </a:p>
-        </p:txBody>
-      </p:sp>
-      <p:sp>
-        <p:nvSpPr>
-          <p:cNvPr id="8" name="TextBox 7"/>
+              <a:rPr sz="1100" b="1" i="0">
+                <a:solidFill>
+                  <a:srgbClr val="FFFFFF"/>
+                </a:solidFill>
+                <a:latin typeface="Calibri"/>
+              </a:rPr>
+              <a:t>POLICY_DOCUMENT_SEARCH_SVC</a:t>
+            </a:r>
+          </a:p>
+        </p:txBody>
+      </p:sp>
+      <p:cxnSp>
+        <p:nvCxnSpPr>
+          <p:cNvPr id="25" name="Connector 24"/>
+          <p:cNvCxnSpPr/>
+          <p:nvPr/>
+        </p:nvCxnSpPr>
+        <p:spPr>
+          <a:xfrm>
+            <a:off x="6080760" y="3154680"/>
+            <a:ext cx="3776472" cy="411480"/>
+          </a:xfrm>
+          <a:prstGeom prst="bentConnector3">
+            <a:avLst/>
+          </a:prstGeom>
+          <a:ln w="19050">
+            <a:solidFill>
+              <a:srgbClr val="5A6370"/>
+            </a:solidFill>
+          </a:ln>
+        </p:spPr>
+        <p:style>
+          <a:lnRef idx="2">
+            <a:schemeClr val="accent1"/>
+          </a:lnRef>
+          <a:fillRef idx="0">
+            <a:schemeClr val="accent1"/>
+          </a:fillRef>
+          <a:effectRef idx="1">
+            <a:schemeClr val="accent1"/>
+          </a:effectRef>
+          <a:fontRef idx="minor">
+            <a:schemeClr val="tx1"/>
+          </a:fontRef>
+        </p:style>
+      </p:cxnSp>
+      <p:sp>
+        <p:nvSpPr>
+          <p:cNvPr id="26" name="Rounded Rectangle 25"/>
+          <p:cNvSpPr/>
+          <p:nvPr/>
+        </p:nvSpPr>
+        <p:spPr>
+          <a:xfrm>
+            <a:off x="8211312" y="3566160"/>
+            <a:ext cx="3291840" cy="868680"/>
+          </a:xfrm>
+          <a:prstGeom prst="roundRect">
+            <a:avLst>
+              <a:gd name="adj" fmla="val 10000"/>
+            </a:avLst>
+          </a:prstGeom>
+          <a:solidFill>
+            <a:srgbClr val="F4F6F9"/>
+          </a:solidFill>
+          <a:ln w="19050">
+            <a:solidFill>
+              <a:srgbClr val="E8A82A"/>
+            </a:solidFill>
+          </a:ln>
+          <a:effectLst/>
+        </p:spPr>
+        <p:style>
+          <a:lnRef idx="1">
+            <a:schemeClr val="accent1"/>
+          </a:lnRef>
+          <a:fillRef idx="3">
+            <a:schemeClr val="accent1"/>
+          </a:fillRef>
+          <a:effectRef idx="2">
+            <a:schemeClr val="accent1"/>
+          </a:effectRef>
+          <a:fontRef idx="minor">
+            <a:schemeClr val="lt1"/>
+          </a:fontRef>
+        </p:style>
+        <p:txBody>
+          <a:bodyPr rtlCol="0" anchor="ctr"/>
+          <a:lstStyle/>
+          <a:p>
+            <a:pPr algn="ctr"/>
+          </a:p>
+        </p:txBody>
+      </p:sp>
+      <p:sp>
+        <p:nvSpPr>
+          <p:cNvPr id="27" name="TextBox 26"/>
           <p:cNvSpPr txBox="1"/>
           <p:nvPr/>
         </p:nvSpPr>
         <p:spPr>
           <a:xfrm>
-            <a:off x="1005840" y="2852928"/>
-            <a:ext cx="10058400" cy="594360"/>
+            <a:off x="8211312" y="3639312"/>
+            <a:ext cx="3291840" cy="320040"/>
           </a:xfrm>
           <a:prstGeom prst="rect">
             <a:avLst/>
@@ -8195,55 +9441,131 @@
           </a:bodyPr>
           <a:lstStyle/>
           <a:p>
-            <a:pPr algn="l">
-              <a:lnSpc>
-                <a:spcPct val="125000"/>
-              </a:lnSpc>
-            </a:pPr>
-            <a:r>
-              <a:rPr sz="1400" b="0" i="0">
+            <a:pPr algn="ctr">
+              <a:lnSpc>
+                <a:spcPct val="100000"/>
+              </a:lnSpc>
+            </a:pPr>
+            <a:r>
+              <a:rPr sz="1400" b="1" i="0">
+                <a:solidFill>
+                  <a:srgbClr val="0B1F3A"/>
+                </a:solidFill>
+                <a:latin typeface="Calibri"/>
+              </a:rPr>
+              <a:t>DataQualityAgent</a:t>
+            </a:r>
+          </a:p>
+        </p:txBody>
+      </p:sp>
+      <p:sp>
+        <p:nvSpPr>
+          <p:cNvPr id="28" name="TextBox 27"/>
+          <p:cNvSpPr txBox="1"/>
+          <p:nvPr/>
+        </p:nvSpPr>
+        <p:spPr>
+          <a:xfrm>
+            <a:off x="8211312" y="3950208"/>
+            <a:ext cx="3291840" cy="457200"/>
+          </a:xfrm>
+          <a:prstGeom prst="rect">
+            <a:avLst/>
+          </a:prstGeom>
+          <a:noFill/>
+        </p:spPr>
+        <p:txBody>
+          <a:bodyPr wrap="square" anchor="t">
+            <a:spAutoFit/>
+          </a:bodyPr>
+          <a:lstStyle/>
+          <a:p>
+            <a:pPr algn="ctr">
+              <a:lnSpc>
+                <a:spcPct val="110000"/>
+              </a:lnSpc>
+            </a:pPr>
+            <a:r>
+              <a:rPr sz="1100" b="0" i="0">
                 <a:solidFill>
                   <a:srgbClr val="5A6370"/>
                 </a:solidFill>
                 <a:latin typeface="Calibri"/>
               </a:rPr>
-              <a:t>Cortex Analyst turns plain English into governed SQL</a:t>
-            </a:r>
-          </a:p>
-          <a:p>
-            <a:pPr algn="l">
-              <a:lnSpc>
-                <a:spcPct val="125000"/>
-              </a:lnSpc>
-            </a:pPr>
-            <a:r>
-              <a:rPr sz="1400" b="0" i="0">
+              <a:t>Cortex Analyst</a:t>
+            </a:r>
+          </a:p>
+          <a:p>
+            <a:pPr algn="ctr">
+              <a:lnSpc>
+                <a:spcPct val="110000"/>
+              </a:lnSpc>
+            </a:pPr>
+            <a:r>
+              <a:rPr sz="1100" b="0" i="0">
                 <a:solidFill>
                   <a:srgbClr val="5A6370"/>
                 </a:solidFill>
                 <a:latin typeface="Calibri"/>
               </a:rPr>
-              <a:t>against a native SEMANTIC VIEW.</a:t>
-            </a:r>
-          </a:p>
-        </p:txBody>
-      </p:sp>
-      <p:sp>
-        <p:nvSpPr>
-          <p:cNvPr id="9" name="Rectangle 8"/>
+              <a:t>(text-to-SQL)</a:t>
+            </a:r>
+          </a:p>
+        </p:txBody>
+      </p:sp>
+      <p:cxnSp>
+        <p:nvCxnSpPr>
+          <p:cNvPr id="29" name="Connector 28"/>
+          <p:cNvCxnSpPr/>
+          <p:nvPr/>
+        </p:nvCxnSpPr>
+        <p:spPr>
+          <a:xfrm>
+            <a:off x="9857232" y="4434840"/>
+            <a:ext cx="0" cy="274320"/>
+          </a:xfrm>
+          <a:prstGeom prst="bentConnector3">
+            <a:avLst/>
+          </a:prstGeom>
+          <a:ln w="19050">
+            <a:solidFill>
+              <a:srgbClr val="5A6370"/>
+            </a:solidFill>
+          </a:ln>
+        </p:spPr>
+        <p:style>
+          <a:lnRef idx="2">
+            <a:schemeClr val="accent1"/>
+          </a:lnRef>
+          <a:fillRef idx="0">
+            <a:schemeClr val="accent1"/>
+          </a:fillRef>
+          <a:effectRef idx="1">
+            <a:schemeClr val="accent1"/>
+          </a:effectRef>
+          <a:fontRef idx="minor">
+            <a:schemeClr val="tx1"/>
+          </a:fontRef>
+        </p:style>
+      </p:cxnSp>
+      <p:sp>
+        <p:nvSpPr>
+          <p:cNvPr id="30" name="Rounded Rectangle 29"/>
           <p:cNvSpPr/>
           <p:nvPr/>
         </p:nvSpPr>
         <p:spPr>
           <a:xfrm>
-            <a:off x="731520" y="3657600"/>
-            <a:ext cx="109728" cy="960120"/>
-          </a:xfrm>
-          <a:prstGeom prst="rect">
-            <a:avLst/>
+            <a:off x="8211312" y="4709160"/>
+            <a:ext cx="3291840" cy="548640"/>
+          </a:xfrm>
+          <a:prstGeom prst="roundRect">
+            <a:avLst>
+              <a:gd name="adj" fmla="val 10000"/>
+            </a:avLst>
           </a:prstGeom>
           <a:solidFill>
-            <a:srgbClr val="29B5E8"/>
+            <a:srgbClr val="E8A82A"/>
           </a:solidFill>
           <a:ln>
             <a:noFill/>
@@ -8274,14 +9596,14 @@
       </p:sp>
       <p:sp>
         <p:nvSpPr>
-          <p:cNvPr id="10" name="TextBox 9"/>
+          <p:cNvPr id="31" name="TextBox 30"/>
           <p:cNvSpPr txBox="1"/>
           <p:nvPr/>
         </p:nvSpPr>
         <p:spPr>
           <a:xfrm>
-            <a:off x="1005840" y="3611880"/>
-            <a:ext cx="10058400" cy="411480"/>
+            <a:off x="8211312" y="4828032"/>
+            <a:ext cx="3291840" cy="365760"/>
           </a:xfrm>
           <a:prstGeom prst="rect">
             <a:avLst/>
@@ -8294,33 +9616,33 @@
           </a:bodyPr>
           <a:lstStyle/>
           <a:p>
-            <a:pPr algn="l">
+            <a:pPr algn="ctr">
               <a:lnSpc>
                 <a:spcPct val="100000"/>
               </a:lnSpc>
             </a:pPr>
             <a:r>
-              <a:rPr sz="1900" b="1" i="0">
-                <a:solidFill>
-                  <a:srgbClr val="0B1F3A"/>
-                </a:solidFill>
-                <a:latin typeface="Calibri"/>
-              </a:rPr>
-              <a:t>📄  Document Q&amp;A (RAG)</a:t>
-            </a:r>
-          </a:p>
-        </p:txBody>
-      </p:sp>
-      <p:sp>
-        <p:nvSpPr>
-          <p:cNvPr id="11" name="TextBox 10"/>
+              <a:rPr sz="1100" b="1" i="0">
+                <a:solidFill>
+                  <a:srgbClr val="FFFFFF"/>
+                </a:solidFill>
+                <a:latin typeface="Calibri"/>
+              </a:rPr>
+              <a:t>DQ_SEMANTIC_VIEW</a:t>
+            </a:r>
+          </a:p>
+        </p:txBody>
+      </p:sp>
+      <p:sp>
+        <p:nvSpPr>
+          <p:cNvPr id="32" name="TextBox 31"/>
           <p:cNvSpPr txBox="1"/>
           <p:nvPr/>
         </p:nvSpPr>
         <p:spPr>
           <a:xfrm>
-            <a:off x="1005840" y="4041648"/>
-            <a:ext cx="10058400" cy="594360"/>
+            <a:off x="731520" y="5486400"/>
+            <a:ext cx="10698480" cy="822960"/>
           </a:xfrm>
           <a:prstGeom prst="rect">
             <a:avLst/>
@@ -8333,93 +9655,49 @@
           </a:bodyPr>
           <a:lstStyle/>
           <a:p>
-            <a:pPr algn="l">
-              <a:lnSpc>
-                <a:spcPct val="125000"/>
-              </a:lnSpc>
-            </a:pPr>
-            <a:r>
-              <a:rPr sz="1400" b="0" i="0">
+            <a:pPr algn="ctr">
+              <a:lnSpc>
+                <a:spcPct val="130000"/>
+              </a:lnSpc>
+            </a:pPr>
+            <a:r>
+              <a:rPr sz="1400" b="0" i="1">
                 <a:solidFill>
                   <a:srgbClr val="5A6370"/>
                 </a:solidFill>
                 <a:latin typeface="Calibri"/>
               </a:rPr>
-              <a:t>Cortex Search auto-embeds and indexes policy documents</a:t>
-            </a:r>
-          </a:p>
-          <a:p>
-            <a:pPr algn="l">
-              <a:lnSpc>
-                <a:spcPct val="125000"/>
-              </a:lnSpc>
-            </a:pPr>
-            <a:r>
-              <a:rPr sz="1400" b="0" i="0">
+              <a:t>Everything runs natively inside Snowflake — one governance boundary, no data leaves the</a:t>
+            </a:r>
+          </a:p>
+          <a:p>
+            <a:pPr algn="ctr">
+              <a:lnSpc>
+                <a:spcPct val="130000"/>
+              </a:lnSpc>
+            </a:pPr>
+            <a:r>
+              <a:rPr sz="1400" b="0" i="1">
                 <a:solidFill>
                   <a:srgbClr val="5A6370"/>
                 </a:solidFill>
                 <a:latin typeface="Calibri"/>
               </a:rPr>
-              <a:t>— no external vector database.</a:t>
-            </a:r>
-          </a:p>
-        </p:txBody>
-      </p:sp>
-      <p:sp>
-        <p:nvSpPr>
-          <p:cNvPr id="12" name="Rectangle 11"/>
-          <p:cNvSpPr/>
-          <p:nvPr/>
-        </p:nvSpPr>
-        <p:spPr>
-          <a:xfrm>
-            <a:off x="731520" y="4846320"/>
-            <a:ext cx="109728" cy="960120"/>
-          </a:xfrm>
-          <a:prstGeom prst="rect">
-            <a:avLst/>
-          </a:prstGeom>
-          <a:solidFill>
-            <a:srgbClr val="29B5E8"/>
-          </a:solidFill>
-          <a:ln>
-            <a:noFill/>
-          </a:ln>
-          <a:effectLst/>
-        </p:spPr>
-        <p:style>
-          <a:lnRef idx="1">
-            <a:schemeClr val="accent1"/>
-          </a:lnRef>
-          <a:fillRef idx="3">
-            <a:schemeClr val="accent1"/>
-          </a:fillRef>
-          <a:effectRef idx="2">
-            <a:schemeClr val="accent1"/>
-          </a:effectRef>
-          <a:fontRef idx="minor">
-            <a:schemeClr val="lt1"/>
-          </a:fontRef>
-        </p:style>
-        <p:txBody>
-          <a:bodyPr rtlCol="0" anchor="ctr"/>
-          <a:lstStyle/>
-          <a:p>
-            <a:pPr algn="ctr"/>
-          </a:p>
-        </p:txBody>
-      </p:sp>
-      <p:sp>
-        <p:nvSpPr>
-          <p:cNvPr id="13" name="TextBox 12"/>
+              <a:t>account, no external vector DB or orchestration service required.</a:t>
+            </a:r>
+          </a:p>
+        </p:txBody>
+      </p:sp>
+      <p:sp>
+        <p:nvSpPr>
+          <p:cNvPr id="33" name="TextBox 32"/>
           <p:cNvSpPr txBox="1"/>
           <p:nvPr/>
         </p:nvSpPr>
         <p:spPr>
           <a:xfrm>
-            <a:off x="1005840" y="4800600"/>
-            <a:ext cx="10058400" cy="411480"/>
+            <a:off x="457200" y="6473952"/>
+            <a:ext cx="5486400" cy="320040"/>
           </a:xfrm>
           <a:prstGeom prst="rect">
             <a:avLst/>
@@ -8438,27 +9716,27 @@
               </a:lnSpc>
             </a:pPr>
             <a:r>
-              <a:rPr sz="1900" b="1" i="0">
-                <a:solidFill>
-                  <a:srgbClr val="0B1F3A"/>
-                </a:solidFill>
-                <a:latin typeface="Calibri"/>
-              </a:rPr>
-              <a:t>🛡  Data Quality Root Cause</a:t>
-            </a:r>
-          </a:p>
-        </p:txBody>
-      </p:sp>
-      <p:sp>
-        <p:nvSpPr>
-          <p:cNvPr id="14" name="TextBox 13"/>
+              <a:rPr sz="900" b="0" i="1">
+                <a:solidFill>
+                  <a:srgbClr val="5A6370"/>
+                </a:solidFill>
+                <a:latin typeface="Calibri"/>
+              </a:rPr>
+              <a:t>Unified Enterprise AI Agents Platform  |  Capgemini × Snowflake Hackathon</a:t>
+            </a:r>
+          </a:p>
+        </p:txBody>
+      </p:sp>
+      <p:sp>
+        <p:nvSpPr>
+          <p:cNvPr id="34" name="TextBox 33"/>
           <p:cNvSpPr txBox="1"/>
           <p:nvPr/>
         </p:nvSpPr>
         <p:spPr>
           <a:xfrm>
-            <a:off x="1005840" y="5230368"/>
-            <a:ext cx="10058400" cy="594360"/>
+            <a:off x="11247120" y="6473952"/>
+            <a:ext cx="731520" cy="320040"/>
           </a:xfrm>
           <a:prstGeom prst="rect">
             <a:avLst/>
@@ -8471,120 +9749,19 @@
           </a:bodyPr>
           <a:lstStyle/>
           <a:p>
-            <a:pPr algn="l">
-              <a:lnSpc>
-                <a:spcPct val="125000"/>
-              </a:lnSpc>
-            </a:pPr>
-            <a:r>
-              <a:rPr sz="1400" b="0" i="0">
+            <a:pPr algn="r">
+              <a:lnSpc>
+                <a:spcPct val="100000"/>
+              </a:lnSpc>
+            </a:pPr>
+            <a:r>
+              <a:rPr sz="900" b="0" i="0">
                 <a:solidFill>
                   <a:srgbClr val="5A6370"/>
                 </a:solidFill>
                 <a:latin typeface="Calibri"/>
               </a:rPr>
-              <a:t>A second semantic view lets business users ask “why did</a:t>
-            </a:r>
-          </a:p>
-          <a:p>
-            <a:pPr algn="l">
-              <a:lnSpc>
-                <a:spcPct val="125000"/>
-              </a:lnSpc>
-            </a:pPr>
-            <a:r>
-              <a:rPr sz="1400" b="0" i="0">
-                <a:solidFill>
-                  <a:srgbClr val="5A6370"/>
-                </a:solidFill>
-                <a:latin typeface="Calibri"/>
-              </a:rPr>
-              <a:t>this fail?” and get a real answer.</a:t>
-            </a:r>
-          </a:p>
-        </p:txBody>
-      </p:sp>
-      <p:sp>
-        <p:nvSpPr>
-          <p:cNvPr id="15" name="Rounded Rectangle 14"/>
-          <p:cNvSpPr/>
-          <p:nvPr/>
-        </p:nvSpPr>
-        <p:spPr>
-          <a:xfrm>
-            <a:off x="731520" y="5989320"/>
-            <a:ext cx="10698480" cy="502920"/>
-          </a:xfrm>
-          <a:prstGeom prst="roundRect">
-            <a:avLst>
-              <a:gd name="adj" fmla="val 15000"/>
-            </a:avLst>
-          </a:prstGeom>
-          <a:solidFill>
-            <a:srgbClr val="0B1F3A"/>
-          </a:solidFill>
-          <a:ln>
-            <a:noFill/>
-          </a:ln>
-          <a:effectLst/>
-        </p:spPr>
-        <p:style>
-          <a:lnRef idx="1">
-            <a:schemeClr val="accent1"/>
-          </a:lnRef>
-          <a:fillRef idx="3">
-            <a:schemeClr val="accent1"/>
-          </a:fillRef>
-          <a:effectRef idx="2">
-            <a:schemeClr val="accent1"/>
-          </a:effectRef>
-          <a:fontRef idx="minor">
-            <a:schemeClr val="lt1"/>
-          </a:fontRef>
-        </p:style>
-        <p:txBody>
-          <a:bodyPr rtlCol="0" anchor="ctr"/>
-          <a:lstStyle/>
-          <a:p>
-            <a:pPr algn="ctr"/>
-          </a:p>
-        </p:txBody>
-      </p:sp>
-      <p:sp>
-        <p:nvSpPr>
-          <p:cNvPr id="16" name="TextBox 15"/>
-          <p:cNvSpPr txBox="1"/>
-          <p:nvPr/>
-        </p:nvSpPr>
-        <p:spPr>
-          <a:xfrm>
-            <a:off x="731520" y="6053328"/>
-            <a:ext cx="10698480" cy="365760"/>
-          </a:xfrm>
-          <a:prstGeom prst="rect">
-            <a:avLst/>
-          </a:prstGeom>
-          <a:noFill/>
-        </p:spPr>
-        <p:txBody>
-          <a:bodyPr wrap="square" anchor="t">
-            <a:spAutoFit/>
-          </a:bodyPr>
-          <a:lstStyle/>
-          <a:p>
-            <a:pPr algn="ctr">
-              <a:lnSpc>
-                <a:spcPct val="100000"/>
-              </a:lnSpc>
-            </a:pPr>
-            <a:r>
-              <a:rPr sz="1500" b="1" i="0">
-                <a:solidFill>
-                  <a:srgbClr val="FFFFFF"/>
-                </a:solidFill>
-                <a:latin typeface="Calibri"/>
-              </a:rPr>
-              <a:t>One chat box.  One agent.  Automatic routing between all three.</a:t>
+              <a:t>5</a:t>
             </a:r>
           </a:p>
         </p:txBody>
@@ -8597,7 +9774,7 @@
 </p:sld>
 </file>
 
-<file path=ppt\slides\slide5.xml><?xml version="1.0" encoding="utf-8"?>
+<file path=ppt/slides/slide6.xml><?xml version="1.0" encoding="utf-8"?>
 <p:sld xmlns:a="http://schemas.openxmlformats.org/drawingml/2006/main" xmlns:p="http://schemas.openxmlformats.org/presentationml/2006/main" xmlns:r="http://schemas.openxmlformats.org/officeDocument/2006/relationships">
   <p:cSld>
     <p:spTree>
@@ -8703,8 +9880,8 @@
         </p:nvSpPr>
         <p:spPr>
           <a:xfrm>
-            <a:off x="548640" y="256032"/>
-            <a:ext cx="8229600" cy="548640"/>
+            <a:off x="548640" y="137160"/>
+            <a:ext cx="822960" cy="822960"/>
           </a:xfrm>
           <a:prstGeom prst="rect">
             <a:avLst/>
@@ -8717,79 +9894,33 @@
           </a:bodyPr>
           <a:lstStyle/>
           <a:p>
-            <a:pPr algn="l">
+            <a:pPr algn="ctr">
               <a:lnSpc>
                 <a:spcPct val="100000"/>
               </a:lnSpc>
             </a:pPr>
             <a:r>
-              <a:rPr sz="3000" b="1" i="0">
-                <a:solidFill>
-                  <a:srgbClr val="FFFFFF"/>
-                </a:solidFill>
-                <a:latin typeface="Georgia"/>
-              </a:rPr>
-              <a:t>Architecture</a:t>
-            </a:r>
-          </a:p>
-        </p:txBody>
-      </p:sp>
-      <p:sp>
-        <p:nvSpPr>
-          <p:cNvPr id="5" name="Rounded Rectangle 4"/>
-          <p:cNvSpPr/>
-          <p:nvPr/>
-        </p:nvSpPr>
-        <p:spPr>
-          <a:xfrm>
-            <a:off x="4480560" y="1371600"/>
-            <a:ext cx="3200400" cy="640080"/>
-          </a:xfrm>
-          <a:prstGeom prst="roundRect">
-            <a:avLst>
-              <a:gd name="adj" fmla="val 15000"/>
-            </a:avLst>
-          </a:prstGeom>
-          <a:solidFill>
-            <a:srgbClr val="FF4B4B"/>
-          </a:solidFill>
-          <a:ln>
-            <a:noFill/>
-          </a:ln>
-          <a:effectLst/>
-        </p:spPr>
-        <p:style>
-          <a:lnRef idx="1">
-            <a:schemeClr val="accent1"/>
-          </a:lnRef>
-          <a:fillRef idx="3">
-            <a:schemeClr val="accent1"/>
-          </a:fillRef>
-          <a:effectRef idx="2">
-            <a:schemeClr val="accent1"/>
-          </a:effectRef>
-          <a:fontRef idx="minor">
-            <a:schemeClr val="lt1"/>
-          </a:fontRef>
-        </p:style>
-        <p:txBody>
-          <a:bodyPr rtlCol="0" anchor="ctr"/>
-          <a:lstStyle/>
-          <a:p>
-            <a:pPr algn="ctr"/>
-          </a:p>
-        </p:txBody>
-      </p:sp>
-      <p:sp>
-        <p:nvSpPr>
-          <p:cNvPr id="6" name="TextBox 5"/>
+              <a:rPr sz="4200" b="0" i="0">
+                <a:solidFill>
+                  <a:srgbClr val="1A1A1A"/>
+                </a:solidFill>
+                <a:latin typeface="Calibri"/>
+              </a:rPr>
+              <a:t>📊</a:t>
+            </a:r>
+          </a:p>
+        </p:txBody>
+      </p:sp>
+      <p:sp>
+        <p:nvSpPr>
+          <p:cNvPr id="5" name="TextBox 4"/>
           <p:cNvSpPr txBox="1"/>
           <p:nvPr/>
         </p:nvSpPr>
         <p:spPr>
           <a:xfrm>
-            <a:off x="4480560" y="1508760"/>
-            <a:ext cx="3200400" cy="365760"/>
+            <a:off x="1371600" y="164592"/>
+            <a:ext cx="8686800" cy="457200"/>
           </a:xfrm>
           <a:prstGeom prst="rect">
             <a:avLst/>
@@ -8802,58 +9933,149 @@
           </a:bodyPr>
           <a:lstStyle/>
           <a:p>
-            <a:pPr algn="ctr">
+            <a:pPr algn="l">
               <a:lnSpc>
                 <a:spcPct val="100000"/>
               </a:lnSpc>
             </a:pPr>
             <a:r>
-              <a:rPr sz="1300" b="1" i="0">
+              <a:rPr sz="2600" b="1" i="0">
                 <a:solidFill>
                   <a:srgbClr val="FFFFFF"/>
                 </a:solidFill>
-                <a:latin typeface="Calibri"/>
-              </a:rPr>
-              <a:t>Streamlit-in-Snowflake  —  Chat UI</a:t>
-            </a:r>
-          </a:p>
-        </p:txBody>
-      </p:sp>
-      <p:cxnSp>
-        <p:nvCxnSpPr>
-          <p:cNvPr id="7" name="Connector 6"/>
-          <p:cNvCxnSpPr/>
-          <p:nvPr/>
-        </p:nvCxnSpPr>
-        <p:spPr>
-          <a:xfrm>
-            <a:off x="6080760" y="2011680"/>
-            <a:ext cx="0" cy="365760"/>
-          </a:xfrm>
-          <a:prstGeom prst="bentConnector3">
-            <a:avLst/>
-          </a:prstGeom>
-          <a:ln w="25400">
-            <a:solidFill>
-              <a:srgbClr val="5A6370"/>
-            </a:solidFill>
-          </a:ln>
-        </p:spPr>
-        <p:style>
-          <a:lnRef idx="2">
-            <a:schemeClr val="accent1"/>
-          </a:lnRef>
-          <a:fillRef idx="0">
-            <a:schemeClr val="accent1"/>
-          </a:fillRef>
-          <a:effectRef idx="1">
-            <a:schemeClr val="accent1"/>
-          </a:effectRef>
-          <a:fontRef idx="minor">
-            <a:schemeClr val="tx1"/>
-          </a:fontRef>
-        </p:style>
-      </p:cxnSp>
+                <a:latin typeface="Georgia"/>
+              </a:rPr>
+              <a:t>Agent 1 — Self-Service Analytics</a:t>
+            </a:r>
+          </a:p>
+        </p:txBody>
+      </p:sp>
+      <p:sp>
+        <p:nvSpPr>
+          <p:cNvPr id="6" name="TextBox 5"/>
+          <p:cNvSpPr txBox="1"/>
+          <p:nvPr/>
+        </p:nvSpPr>
+        <p:spPr>
+          <a:xfrm>
+            <a:off x="1371600" y="621792"/>
+            <a:ext cx="8686800" cy="365760"/>
+          </a:xfrm>
+          <a:prstGeom prst="rect">
+            <a:avLst/>
+          </a:prstGeom>
+          <a:noFill/>
+        </p:spPr>
+        <p:txBody>
+          <a:bodyPr wrap="square" anchor="t">
+            <a:spAutoFit/>
+          </a:bodyPr>
+          <a:lstStyle/>
+          <a:p>
+            <a:pPr algn="l">
+              <a:lnSpc>
+                <a:spcPct val="100000"/>
+              </a:lnSpc>
+            </a:pPr>
+            <a:r>
+              <a:rPr sz="1300" b="0" i="0">
+                <a:solidFill>
+                  <a:srgbClr val="29B5E8"/>
+                </a:solidFill>
+                <a:latin typeface="Calibri"/>
+              </a:rPr>
+              <a:t>Structured data, answered in plain English</a:t>
+            </a:r>
+          </a:p>
+        </p:txBody>
+      </p:sp>
+      <p:sp>
+        <p:nvSpPr>
+          <p:cNvPr id="7" name="TextBox 6"/>
+          <p:cNvSpPr txBox="1"/>
+          <p:nvPr/>
+        </p:nvSpPr>
+        <p:spPr>
+          <a:xfrm>
+            <a:off x="731520" y="1554480"/>
+            <a:ext cx="6217920" cy="3840480"/>
+          </a:xfrm>
+          <a:prstGeom prst="rect">
+            <a:avLst/>
+          </a:prstGeom>
+          <a:noFill/>
+        </p:spPr>
+        <p:txBody>
+          <a:bodyPr wrap="square">
+            <a:spAutoFit/>
+          </a:bodyPr>
+          <a:lstStyle/>
+          <a:p>
+            <a:pPr>
+              <a:spcAft>
+                <a:spcPts val="1400"/>
+              </a:spcAft>
+            </a:pPr>
+            <a:r>
+              <a:rPr sz="1600">
+                <a:solidFill>
+                  <a:srgbClr val="1A1A1A"/>
+                </a:solidFill>
+                <a:latin typeface="Calibri"/>
+              </a:rPr>
+              <a:t>▸  Native SEMANTIC VIEW over 6 operational tables — customers, policies, claims, billing, agents, at-risk policies</a:t>
+            </a:r>
+          </a:p>
+          <a:p>
+            <a:pPr>
+              <a:spcAft>
+                <a:spcPts val="1400"/>
+              </a:spcAft>
+            </a:pPr>
+            <a:r>
+              <a:rPr sz="1600">
+                <a:solidFill>
+                  <a:srgbClr val="1A1A1A"/>
+                </a:solidFill>
+                <a:latin typeface="Calibri"/>
+              </a:rPr>
+              <a:t>▸  Business-friendly metrics: loss ratio, total premium, fraud claim count, revenue at risk, churn probability</a:t>
+            </a:r>
+          </a:p>
+          <a:p>
+            <a:pPr>
+              <a:spcAft>
+                <a:spcPts val="1400"/>
+              </a:spcAft>
+            </a:pPr>
+            <a:r>
+              <a:rPr sz="1600">
+                <a:solidFill>
+                  <a:srgbClr val="1A1A1A"/>
+                </a:solidFill>
+                <a:latin typeface="Calibri"/>
+              </a:rPr>
+              <a:t>▸  Cortex Analyst translates the question into governed SQL — shown inline for full transparency</a:t>
+            </a:r>
+          </a:p>
+          <a:p>
+            <a:pPr>
+              <a:spcAft>
+                <a:spcPts val="1400"/>
+              </a:spcAft>
+            </a:pPr>
+            <a:r>
+              <a:rPr sz="1600">
+                <a:solidFill>
+                  <a:srgbClr val="1A1A1A"/>
+                </a:solidFill>
+                <a:latin typeface="Calibri"/>
+              </a:rPr>
+              <a:t>▸  Relationships declared explicitly, so joins are always correct</a:t>
+            </a:r>
+          </a:p>
+        </p:txBody>
+      </p:sp>
       <p:sp>
         <p:nvSpPr>
           <p:cNvPr id="8" name="Rounded Rectangle 7"/>
@@ -8862,12 +10084,12 @@
         </p:nvSpPr>
         <p:spPr>
           <a:xfrm>
-            <a:off x="4023360" y="2377440"/>
-            <a:ext cx="4114800" cy="777240"/>
+            <a:off x="7315200" y="1554480"/>
+            <a:ext cx="4114800" cy="3200400"/>
           </a:xfrm>
           <a:prstGeom prst="roundRect">
             <a:avLst>
-              <a:gd name="adj" fmla="val 15000"/>
+              <a:gd name="adj" fmla="val 8000"/>
             </a:avLst>
           </a:prstGeom>
           <a:solidFill>
@@ -8908,8 +10130,8 @@
         </p:nvSpPr>
         <p:spPr>
           <a:xfrm>
-            <a:off x="4023360" y="2487168"/>
-            <a:ext cx="4114800" cy="320040"/>
+            <a:off x="7589520" y="1737360"/>
+            <a:ext cx="3566160" cy="365760"/>
           </a:xfrm>
           <a:prstGeom prst="rect">
             <a:avLst/>
@@ -8922,19 +10144,19 @@
           </a:bodyPr>
           <a:lstStyle/>
           <a:p>
-            <a:pPr algn="ctr">
+            <a:pPr algn="l">
               <a:lnSpc>
                 <a:spcPct val="100000"/>
               </a:lnSpc>
             </a:pPr>
             <a:r>
-              <a:rPr sz="1500" b="1" i="0">
-                <a:solidFill>
-                  <a:srgbClr val="FFFFFF"/>
-                </a:solidFill>
-                <a:latin typeface="Calibri"/>
-              </a:rPr>
-              <a:t>ENTERPRISE_AI_AGENT</a:t>
+              <a:rPr sz="1200" b="1" i="0">
+                <a:solidFill>
+                  <a:srgbClr val="29B5E8"/>
+                </a:solidFill>
+                <a:latin typeface="Calibri"/>
+              </a:rPr>
+              <a:t>Example question</a:t>
             </a:r>
           </a:p>
         </p:txBody>
@@ -8947,8 +10169,8 @@
         </p:nvSpPr>
         <p:spPr>
           <a:xfrm>
-            <a:off x="4023360" y="2798064"/>
-            <a:ext cx="4114800" cy="320040"/>
+            <a:off x="7589520" y="2148840"/>
+            <a:ext cx="3566160" cy="1097280"/>
           </a:xfrm>
           <a:prstGeom prst="rect">
             <a:avLst/>
@@ -8961,547 +10183,36 @@
           </a:bodyPr>
           <a:lstStyle/>
           <a:p>
-            <a:pPr algn="ctr">
-              <a:lnSpc>
-                <a:spcPct val="100000"/>
-              </a:lnSpc>
-            </a:pPr>
-            <a:r>
-              <a:rPr sz="1100" b="0" i="0">
-                <a:solidFill>
-                  <a:srgbClr val="29B5E8"/>
-                </a:solidFill>
-                <a:latin typeface="Calibri"/>
-              </a:rPr>
-              <a:t>Snowflake Cortex Agent  •  auto-orchestration</a:t>
-            </a:r>
-          </a:p>
-        </p:txBody>
-      </p:sp>
-      <p:cxnSp>
-        <p:nvCxnSpPr>
-          <p:cNvPr id="11" name="Connector 10"/>
-          <p:cNvCxnSpPr/>
-          <p:nvPr/>
-        </p:nvCxnSpPr>
-        <p:spPr>
-          <a:xfrm flipH="1">
-            <a:off x="2331720.0" y="3154680"/>
-            <a:ext cx="3749040.0" cy="411480"/>
-          </a:xfrm>
-          <a:prstGeom prst="bentConnector3">
-            <a:avLst/>
-          </a:prstGeom>
-          <a:ln w="19050">
-            <a:solidFill>
-              <a:srgbClr val="5A6370"/>
-            </a:solidFill>
-          </a:ln>
-        </p:spPr>
-        <p:style>
-          <a:lnRef idx="2">
-            <a:schemeClr val="accent1"/>
-          </a:lnRef>
-          <a:fillRef idx="0">
-            <a:schemeClr val="accent1"/>
-          </a:fillRef>
-          <a:effectRef idx="1">
-            <a:schemeClr val="accent1"/>
-          </a:effectRef>
-          <a:fontRef idx="minor">
-            <a:schemeClr val="tx1"/>
-          </a:fontRef>
-        </p:style>
-      </p:cxnSp>
-      <p:sp>
-        <p:nvSpPr>
-          <p:cNvPr id="12" name="Rounded Rectangle 11"/>
+            <a:pPr algn="l">
+              <a:lnSpc>
+                <a:spcPct val="130000"/>
+              </a:lnSpc>
+            </a:pPr>
+            <a:r>
+              <a:rPr sz="1500" b="0" i="1">
+                <a:solidFill>
+                  <a:srgbClr val="FFFFFF"/>
+                </a:solidFill>
+                <a:latin typeface="Calibri"/>
+              </a:rPr>
+              <a:t>“What's our average loss ratio by policy type?”</a:t>
+            </a:r>
+          </a:p>
+        </p:txBody>
+      </p:sp>
+      <p:sp>
+        <p:nvSpPr>
+          <p:cNvPr id="11" name="Rectangle 10"/>
           <p:cNvSpPr/>
           <p:nvPr/>
         </p:nvSpPr>
         <p:spPr>
           <a:xfrm>
-            <a:off x="685800" y="3566160"/>
-            <a:ext cx="3291840" cy="868680"/>
-          </a:xfrm>
-          <a:prstGeom prst="roundRect">
-            <a:avLst>
-              <a:gd name="adj" fmla="val 10000"/>
-            </a:avLst>
-          </a:prstGeom>
-          <a:solidFill>
-            <a:srgbClr val="F4F6F9"/>
-          </a:solidFill>
-          <a:ln w="19050">
-            <a:solidFill>
-              <a:srgbClr val="0070AD"/>
-            </a:solidFill>
-          </a:ln>
-          <a:effectLst/>
-        </p:spPr>
-        <p:style>
-          <a:lnRef idx="1">
-            <a:schemeClr val="accent1"/>
-          </a:lnRef>
-          <a:fillRef idx="3">
-            <a:schemeClr val="accent1"/>
-          </a:fillRef>
-          <a:effectRef idx="2">
-            <a:schemeClr val="accent1"/>
-          </a:effectRef>
-          <a:fontRef idx="minor">
-            <a:schemeClr val="lt1"/>
-          </a:fontRef>
-        </p:style>
-        <p:txBody>
-          <a:bodyPr rtlCol="0" anchor="ctr"/>
-          <a:lstStyle/>
-          <a:p>
-            <a:pPr algn="ctr"/>
-          </a:p>
-        </p:txBody>
-      </p:sp>
-      <p:sp>
-        <p:nvSpPr>
-          <p:cNvPr id="13" name="TextBox 12"/>
-          <p:cNvSpPr txBox="1"/>
-          <p:nvPr/>
-        </p:nvSpPr>
-        <p:spPr>
-          <a:xfrm>
-            <a:off x="685800" y="3639312"/>
-            <a:ext cx="3291840" cy="320040"/>
-          </a:xfrm>
-          <a:prstGeom prst="rect">
-            <a:avLst/>
-          </a:prstGeom>
-          <a:noFill/>
-        </p:spPr>
-        <p:txBody>
-          <a:bodyPr wrap="square" anchor="t">
-            <a:spAutoFit/>
-          </a:bodyPr>
-          <a:lstStyle/>
-          <a:p>
-            <a:pPr algn="ctr">
-              <a:lnSpc>
-                <a:spcPct val="100000"/>
-              </a:lnSpc>
-            </a:pPr>
-            <a:r>
-              <a:rPr sz="1400" b="1" i="0">
-                <a:solidFill>
-                  <a:srgbClr val="0B1F3A"/>
-                </a:solidFill>
-                <a:latin typeface="Calibri"/>
-              </a:rPr>
-              <a:t>AnalyticsAgent</a:t>
-            </a:r>
-          </a:p>
-        </p:txBody>
-      </p:sp>
-      <p:sp>
-        <p:nvSpPr>
-          <p:cNvPr id="14" name="TextBox 13"/>
-          <p:cNvSpPr txBox="1"/>
-          <p:nvPr/>
-        </p:nvSpPr>
-        <p:spPr>
-          <a:xfrm>
-            <a:off x="685800" y="3950208"/>
-            <a:ext cx="3291840" cy="457200"/>
-          </a:xfrm>
-          <a:prstGeom prst="rect">
-            <a:avLst/>
-          </a:prstGeom>
-          <a:noFill/>
-        </p:spPr>
-        <p:txBody>
-          <a:bodyPr wrap="square" anchor="t">
-            <a:spAutoFit/>
-          </a:bodyPr>
-          <a:lstStyle/>
-          <a:p>
-            <a:pPr algn="ctr">
-              <a:lnSpc>
-                <a:spcPct val="110000"/>
-              </a:lnSpc>
-            </a:pPr>
-            <a:r>
-              <a:rPr sz="1100" b="0" i="0">
-                <a:solidFill>
-                  <a:srgbClr val="5A6370"/>
-                </a:solidFill>
-                <a:latin typeface="Calibri"/>
-              </a:rPr>
-              <a:t>Cortex Analyst</a:t>
-            </a:r>
-          </a:p>
-          <a:p>
-            <a:pPr algn="ctr">
-              <a:lnSpc>
-                <a:spcPct val="110000"/>
-              </a:lnSpc>
-            </a:pPr>
-            <a:r>
-              <a:rPr sz="1100" b="0" i="0">
-                <a:solidFill>
-                  <a:srgbClr val="5A6370"/>
-                </a:solidFill>
-                <a:latin typeface="Calibri"/>
-              </a:rPr>
-              <a:t>(text-to-SQL)</a:t>
-            </a:r>
-          </a:p>
-        </p:txBody>
-      </p:sp>
-      <p:cxnSp>
-        <p:nvCxnSpPr>
-          <p:cNvPr id="15" name="Connector 14"/>
-          <p:cNvCxnSpPr/>
-          <p:nvPr/>
-        </p:nvCxnSpPr>
-        <p:spPr>
-          <a:xfrm>
-            <a:off x="2331720.0" y="4434840"/>
-            <a:ext cx="0.0" cy="274320"/>
-          </a:xfrm>
-          <a:prstGeom prst="bentConnector3">
-            <a:avLst/>
-          </a:prstGeom>
-          <a:ln w="19050">
-            <a:solidFill>
-              <a:srgbClr val="5A6370"/>
-            </a:solidFill>
-          </a:ln>
-        </p:spPr>
-        <p:style>
-          <a:lnRef idx="2">
-            <a:schemeClr val="accent1"/>
-          </a:lnRef>
-          <a:fillRef idx="0">
-            <a:schemeClr val="accent1"/>
-          </a:fillRef>
-          <a:effectRef idx="1">
-            <a:schemeClr val="accent1"/>
-          </a:effectRef>
-          <a:fontRef idx="minor">
-            <a:schemeClr val="tx1"/>
-          </a:fontRef>
-        </p:style>
-      </p:cxnSp>
-      <p:sp>
-        <p:nvSpPr>
-          <p:cNvPr id="16" name="Rounded Rectangle 15"/>
-          <p:cNvSpPr/>
-          <p:nvPr/>
-        </p:nvSpPr>
-        <p:spPr>
-          <a:xfrm>
-            <a:off x="685800" y="4709160"/>
-            <a:ext cx="3291840" cy="548640"/>
-          </a:xfrm>
-          <a:prstGeom prst="roundRect">
-            <a:avLst>
-              <a:gd name="adj" fmla="val 10000"/>
-            </a:avLst>
-          </a:prstGeom>
-          <a:solidFill>
-            <a:srgbClr val="0070AD"/>
-          </a:solidFill>
-          <a:ln>
-            <a:noFill/>
-          </a:ln>
-          <a:effectLst/>
-        </p:spPr>
-        <p:style>
-          <a:lnRef idx="1">
-            <a:schemeClr val="accent1"/>
-          </a:lnRef>
-          <a:fillRef idx="3">
-            <a:schemeClr val="accent1"/>
-          </a:fillRef>
-          <a:effectRef idx="2">
-            <a:schemeClr val="accent1"/>
-          </a:effectRef>
-          <a:fontRef idx="minor">
-            <a:schemeClr val="lt1"/>
-          </a:fontRef>
-        </p:style>
-        <p:txBody>
-          <a:bodyPr rtlCol="0" anchor="ctr"/>
-          <a:lstStyle/>
-          <a:p>
-            <a:pPr algn="ctr"/>
-          </a:p>
-        </p:txBody>
-      </p:sp>
-      <p:sp>
-        <p:nvSpPr>
-          <p:cNvPr id="17" name="TextBox 16"/>
-          <p:cNvSpPr txBox="1"/>
-          <p:nvPr/>
-        </p:nvSpPr>
-        <p:spPr>
-          <a:xfrm>
-            <a:off x="685800" y="4828032"/>
-            <a:ext cx="3291840" cy="365760"/>
-          </a:xfrm>
-          <a:prstGeom prst="rect">
-            <a:avLst/>
-          </a:prstGeom>
-          <a:noFill/>
-        </p:spPr>
-        <p:txBody>
-          <a:bodyPr wrap="square" anchor="t">
-            <a:spAutoFit/>
-          </a:bodyPr>
-          <a:lstStyle/>
-          <a:p>
-            <a:pPr algn="ctr">
-              <a:lnSpc>
-                <a:spcPct val="100000"/>
-              </a:lnSpc>
-            </a:pPr>
-            <a:r>
-              <a:rPr sz="1100" b="1" i="0">
-                <a:solidFill>
-                  <a:srgbClr val="FFFFFF"/>
-                </a:solidFill>
-                <a:latin typeface="Calibri"/>
-              </a:rPr>
-              <a:t>ANALYTICS_SEMANTIC_VIEW</a:t>
-            </a:r>
-          </a:p>
-        </p:txBody>
-      </p:sp>
-      <p:cxnSp>
-        <p:nvCxnSpPr>
-          <p:cNvPr id="18" name="Connector 17"/>
-          <p:cNvCxnSpPr/>
-          <p:nvPr/>
-        </p:nvCxnSpPr>
-        <p:spPr>
-          <a:xfrm>
-            <a:off x="6080760" y="3154680"/>
-            <a:ext cx="18288.0" cy="411480"/>
-          </a:xfrm>
-          <a:prstGeom prst="bentConnector3">
-            <a:avLst/>
-          </a:prstGeom>
-          <a:ln w="19050">
-            <a:solidFill>
-              <a:srgbClr val="5A6370"/>
-            </a:solidFill>
-          </a:ln>
-        </p:spPr>
-        <p:style>
-          <a:lnRef idx="2">
-            <a:schemeClr val="accent1"/>
-          </a:lnRef>
-          <a:fillRef idx="0">
-            <a:schemeClr val="accent1"/>
-          </a:fillRef>
-          <a:effectRef idx="1">
-            <a:schemeClr val="accent1"/>
-          </a:effectRef>
-          <a:fontRef idx="minor">
-            <a:schemeClr val="tx1"/>
-          </a:fontRef>
-        </p:style>
-      </p:cxnSp>
-      <p:sp>
-        <p:nvSpPr>
-          <p:cNvPr id="19" name="Rounded Rectangle 18"/>
-          <p:cNvSpPr/>
-          <p:nvPr/>
-        </p:nvSpPr>
-        <p:spPr>
-          <a:xfrm>
-            <a:off x="4453128" y="3566160"/>
-            <a:ext cx="3291840" cy="868680"/>
-          </a:xfrm>
-          <a:prstGeom prst="roundRect">
-            <a:avLst>
-              <a:gd name="adj" fmla="val 10000"/>
-            </a:avLst>
-          </a:prstGeom>
-          <a:solidFill>
-            <a:srgbClr val="F4F6F9"/>
-          </a:solidFill>
-          <a:ln w="19050">
-            <a:solidFill>
-              <a:srgbClr val="29B5E8"/>
-            </a:solidFill>
-          </a:ln>
-          <a:effectLst/>
-        </p:spPr>
-        <p:style>
-          <a:lnRef idx="1">
-            <a:schemeClr val="accent1"/>
-          </a:lnRef>
-          <a:fillRef idx="3">
-            <a:schemeClr val="accent1"/>
-          </a:fillRef>
-          <a:effectRef idx="2">
-            <a:schemeClr val="accent1"/>
-          </a:effectRef>
-          <a:fontRef idx="minor">
-            <a:schemeClr val="lt1"/>
-          </a:fontRef>
-        </p:style>
-        <p:txBody>
-          <a:bodyPr rtlCol="0" anchor="ctr"/>
-          <a:lstStyle/>
-          <a:p>
-            <a:pPr algn="ctr"/>
-          </a:p>
-        </p:txBody>
-      </p:sp>
-      <p:sp>
-        <p:nvSpPr>
-          <p:cNvPr id="20" name="TextBox 19"/>
-          <p:cNvSpPr txBox="1"/>
-          <p:nvPr/>
-        </p:nvSpPr>
-        <p:spPr>
-          <a:xfrm>
-            <a:off x="4453128" y="3639312"/>
-            <a:ext cx="3291840" cy="320040"/>
-          </a:xfrm>
-          <a:prstGeom prst="rect">
-            <a:avLst/>
-          </a:prstGeom>
-          <a:noFill/>
-        </p:spPr>
-        <p:txBody>
-          <a:bodyPr wrap="square" anchor="t">
-            <a:spAutoFit/>
-          </a:bodyPr>
-          <a:lstStyle/>
-          <a:p>
-            <a:pPr algn="ctr">
-              <a:lnSpc>
-                <a:spcPct val="100000"/>
-              </a:lnSpc>
-            </a:pPr>
-            <a:r>
-              <a:rPr sz="1400" b="1" i="0">
-                <a:solidFill>
-                  <a:srgbClr val="0B1F3A"/>
-                </a:solidFill>
-                <a:latin typeface="Calibri"/>
-              </a:rPr>
-              <a:t>DocumentQA</a:t>
-            </a:r>
-          </a:p>
-        </p:txBody>
-      </p:sp>
-      <p:sp>
-        <p:nvSpPr>
-          <p:cNvPr id="21" name="TextBox 20"/>
-          <p:cNvSpPr txBox="1"/>
-          <p:nvPr/>
-        </p:nvSpPr>
-        <p:spPr>
-          <a:xfrm>
-            <a:off x="4453128" y="3950208"/>
-            <a:ext cx="3291840" cy="457200"/>
-          </a:xfrm>
-          <a:prstGeom prst="rect">
-            <a:avLst/>
-          </a:prstGeom>
-          <a:noFill/>
-        </p:spPr>
-        <p:txBody>
-          <a:bodyPr wrap="square" anchor="t">
-            <a:spAutoFit/>
-          </a:bodyPr>
-          <a:lstStyle/>
-          <a:p>
-            <a:pPr algn="ctr">
-              <a:lnSpc>
-                <a:spcPct val="110000"/>
-              </a:lnSpc>
-            </a:pPr>
-            <a:r>
-              <a:rPr sz="1100" b="0" i="0">
-                <a:solidFill>
-                  <a:srgbClr val="5A6370"/>
-                </a:solidFill>
-                <a:latin typeface="Calibri"/>
-              </a:rPr>
-              <a:t>Cortex Search</a:t>
-            </a:r>
-          </a:p>
-          <a:p>
-            <a:pPr algn="ctr">
-              <a:lnSpc>
-                <a:spcPct val="110000"/>
-              </a:lnSpc>
-            </a:pPr>
-            <a:r>
-              <a:rPr sz="1100" b="0" i="0">
-                <a:solidFill>
-                  <a:srgbClr val="5A6370"/>
-                </a:solidFill>
-                <a:latin typeface="Calibri"/>
-              </a:rPr>
-              <a:t>(RAG)</a:t>
-            </a:r>
-          </a:p>
-        </p:txBody>
-      </p:sp>
-      <p:cxnSp>
-        <p:nvCxnSpPr>
-          <p:cNvPr id="22" name="Connector 21"/>
-          <p:cNvCxnSpPr/>
-          <p:nvPr/>
-        </p:nvCxnSpPr>
-        <p:spPr>
-          <a:xfrm>
-            <a:off x="6099048.0" y="4434840"/>
-            <a:ext cx="0.0" cy="274320"/>
-          </a:xfrm>
-          <a:prstGeom prst="bentConnector3">
-            <a:avLst/>
-          </a:prstGeom>
-          <a:ln w="19050">
-            <a:solidFill>
-              <a:srgbClr val="5A6370"/>
-            </a:solidFill>
-          </a:ln>
-        </p:spPr>
-        <p:style>
-          <a:lnRef idx="2">
-            <a:schemeClr val="accent1"/>
-          </a:lnRef>
-          <a:fillRef idx="0">
-            <a:schemeClr val="accent1"/>
-          </a:fillRef>
-          <a:effectRef idx="1">
-            <a:schemeClr val="accent1"/>
-          </a:effectRef>
-          <a:fontRef idx="minor">
-            <a:schemeClr val="tx1"/>
-          </a:fontRef>
-        </p:style>
-      </p:cxnSp>
-      <p:sp>
-        <p:nvSpPr>
-          <p:cNvPr id="23" name="Rounded Rectangle 22"/>
-          <p:cNvSpPr/>
-          <p:nvPr/>
-        </p:nvSpPr>
-        <p:spPr>
-          <a:xfrm>
-            <a:off x="4453128" y="4709160"/>
-            <a:ext cx="3291840" cy="548640"/>
-          </a:xfrm>
-          <a:prstGeom prst="roundRect">
-            <a:avLst>
-              <a:gd name="adj" fmla="val 10000"/>
-            </a:avLst>
+            <a:off x="7589520" y="3383280"/>
+            <a:ext cx="3566160" cy="19050"/>
+          </a:xfrm>
+          <a:prstGeom prst="rect">
+            <a:avLst/>
           </a:prstGeom>
           <a:solidFill>
             <a:srgbClr val="29B5E8"/>
@@ -9535,14 +10246,14 @@
       </p:sp>
       <p:sp>
         <p:nvSpPr>
-          <p:cNvPr id="24" name="TextBox 23"/>
+          <p:cNvPr id="12" name="TextBox 11"/>
           <p:cNvSpPr txBox="1"/>
           <p:nvPr/>
         </p:nvSpPr>
         <p:spPr>
           <a:xfrm>
-            <a:off x="4453128" y="4828032"/>
-            <a:ext cx="3291840" cy="365760"/>
+            <a:off x="7589520" y="3520440"/>
+            <a:ext cx="3566160" cy="1097280"/>
           </a:xfrm>
           <a:prstGeom prst="rect">
             <a:avLst/>
@@ -9555,116 +10266,49 @@
           </a:bodyPr>
           <a:lstStyle/>
           <a:p>
-            <a:pPr algn="ctr">
-              <a:lnSpc>
-                <a:spcPct val="100000"/>
-              </a:lnSpc>
-            </a:pPr>
-            <a:r>
-              <a:rPr sz="1100" b="1" i="0">
-                <a:solidFill>
-                  <a:srgbClr val="FFFFFF"/>
-                </a:solidFill>
-                <a:latin typeface="Calibri"/>
-              </a:rPr>
-              <a:t>POLICY_DOCUMENT_SEARCH_SVC</a:t>
-            </a:r>
-          </a:p>
-        </p:txBody>
-      </p:sp>
-      <p:cxnSp>
-        <p:nvCxnSpPr>
-          <p:cNvPr id="25" name="Connector 24"/>
-          <p:cNvCxnSpPr/>
-          <p:nvPr/>
-        </p:nvCxnSpPr>
-        <p:spPr>
-          <a:xfrm>
-            <a:off x="6080760" y="3154680"/>
-            <a:ext cx="3776472.0" cy="411480"/>
-          </a:xfrm>
-          <a:prstGeom prst="bentConnector3">
-            <a:avLst/>
-          </a:prstGeom>
-          <a:ln w="19050">
-            <a:solidFill>
-              <a:srgbClr val="5A6370"/>
-            </a:solidFill>
-          </a:ln>
-        </p:spPr>
-        <p:style>
-          <a:lnRef idx="2">
-            <a:schemeClr val="accent1"/>
-          </a:lnRef>
-          <a:fillRef idx="0">
-            <a:schemeClr val="accent1"/>
-          </a:fillRef>
-          <a:effectRef idx="1">
-            <a:schemeClr val="accent1"/>
-          </a:effectRef>
-          <a:fontRef idx="minor">
-            <a:schemeClr val="tx1"/>
-          </a:fontRef>
-        </p:style>
-      </p:cxnSp>
-      <p:sp>
-        <p:nvSpPr>
-          <p:cNvPr id="26" name="Rounded Rectangle 25"/>
-          <p:cNvSpPr/>
-          <p:nvPr/>
-        </p:nvSpPr>
-        <p:spPr>
-          <a:xfrm>
-            <a:off x="8211312" y="3566160"/>
-            <a:ext cx="3291840" cy="868680"/>
-          </a:xfrm>
-          <a:prstGeom prst="roundRect">
-            <a:avLst>
-              <a:gd name="adj" fmla="val 10000"/>
-            </a:avLst>
-          </a:prstGeom>
-          <a:solidFill>
-            <a:srgbClr val="F4F6F9"/>
-          </a:solidFill>
-          <a:ln w="19050">
-            <a:solidFill>
-              <a:srgbClr val="E8A82A"/>
-            </a:solidFill>
-          </a:ln>
-          <a:effectLst/>
-        </p:spPr>
-        <p:style>
-          <a:lnRef idx="1">
-            <a:schemeClr val="accent1"/>
-          </a:lnRef>
-          <a:fillRef idx="3">
-            <a:schemeClr val="accent1"/>
-          </a:fillRef>
-          <a:effectRef idx="2">
-            <a:schemeClr val="accent1"/>
-          </a:effectRef>
-          <a:fontRef idx="minor">
-            <a:schemeClr val="lt1"/>
-          </a:fontRef>
-        </p:style>
-        <p:txBody>
-          <a:bodyPr rtlCol="0" anchor="ctr"/>
-          <a:lstStyle/>
-          <a:p>
-            <a:pPr algn="ctr"/>
-          </a:p>
-        </p:txBody>
-      </p:sp>
-      <p:sp>
-        <p:nvSpPr>
-          <p:cNvPr id="27" name="TextBox 26"/>
+            <a:pPr algn="l">
+              <a:lnSpc>
+                <a:spcPct val="125000"/>
+              </a:lnSpc>
+            </a:pPr>
+            <a:r>
+              <a:rPr sz="1100" b="0" i="0">
+                <a:solidFill>
+                  <a:srgbClr val="C7D6E8"/>
+                </a:solidFill>
+                <a:latin typeface="Calibri"/>
+              </a:rPr>
+              <a:t>Verified live: Life ~57.5%, Health/Home ~55.4%, Auto ~53.1%</a:t>
+            </a:r>
+          </a:p>
+          <a:p>
+            <a:pPr algn="l">
+              <a:lnSpc>
+                <a:spcPct val="125000"/>
+              </a:lnSpc>
+            </a:pPr>
+            <a:r>
+              <a:rPr sz="1100" b="0" i="0">
+                <a:solidFill>
+                  <a:srgbClr val="C7D6E8"/>
+                </a:solidFill>
+                <a:latin typeface="Calibri"/>
+              </a:rPr>
+              <a:t>— all computed from real generated SQL, not canned data.</a:t>
+            </a:r>
+          </a:p>
+        </p:txBody>
+      </p:sp>
+      <p:sp>
+        <p:nvSpPr>
+          <p:cNvPr id="13" name="TextBox 12"/>
           <p:cNvSpPr txBox="1"/>
           <p:nvPr/>
         </p:nvSpPr>
         <p:spPr>
           <a:xfrm>
-            <a:off x="8211312" y="3639312"/>
-            <a:ext cx="3291840" cy="320040"/>
+            <a:off x="457200" y="6473952"/>
+            <a:ext cx="5486400" cy="320040"/>
           </a:xfrm>
           <a:prstGeom prst="rect">
             <a:avLst/>
@@ -9677,33 +10321,33 @@
           </a:bodyPr>
           <a:lstStyle/>
           <a:p>
-            <a:pPr algn="ctr">
+            <a:pPr algn="l">
               <a:lnSpc>
                 <a:spcPct val="100000"/>
               </a:lnSpc>
             </a:pPr>
             <a:r>
-              <a:rPr sz="1400" b="1" i="0">
-                <a:solidFill>
-                  <a:srgbClr val="0B1F3A"/>
-                </a:solidFill>
-                <a:latin typeface="Calibri"/>
-              </a:rPr>
-              <a:t>DataQualityAgent</a:t>
-            </a:r>
-          </a:p>
-        </p:txBody>
-      </p:sp>
-      <p:sp>
-        <p:nvSpPr>
-          <p:cNvPr id="28" name="TextBox 27"/>
+              <a:rPr sz="900" b="0" i="1">
+                <a:solidFill>
+                  <a:srgbClr val="5A6370"/>
+                </a:solidFill>
+                <a:latin typeface="Calibri"/>
+              </a:rPr>
+              <a:t>Unified Enterprise AI Agents Platform  |  Capgemini × Snowflake Hackathon</a:t>
+            </a:r>
+          </a:p>
+        </p:txBody>
+      </p:sp>
+      <p:sp>
+        <p:nvSpPr>
+          <p:cNvPr id="14" name="TextBox 13"/>
           <p:cNvSpPr txBox="1"/>
           <p:nvPr/>
         </p:nvSpPr>
         <p:spPr>
           <a:xfrm>
-            <a:off x="8211312" y="3950208"/>
-            <a:ext cx="3291840" cy="457200"/>
+            <a:off x="11247120" y="6473952"/>
+            <a:ext cx="731520" cy="320040"/>
           </a:xfrm>
           <a:prstGeom prst="rect">
             <a:avLst/>
@@ -9716,288 +10360,19 @@
           </a:bodyPr>
           <a:lstStyle/>
           <a:p>
-            <a:pPr algn="ctr">
-              <a:lnSpc>
-                <a:spcPct val="110000"/>
-              </a:lnSpc>
-            </a:pPr>
-            <a:r>
-              <a:rPr sz="1100" b="0" i="0">
+            <a:pPr algn="r">
+              <a:lnSpc>
+                <a:spcPct val="100000"/>
+              </a:lnSpc>
+            </a:pPr>
+            <a:r>
+              <a:rPr sz="900" b="0" i="0">
                 <a:solidFill>
                   <a:srgbClr val="5A6370"/>
                 </a:solidFill>
                 <a:latin typeface="Calibri"/>
               </a:rPr>
-              <a:t>Cortex Analyst</a:t>
-            </a:r>
-          </a:p>
-          <a:p>
-            <a:pPr algn="ctr">
-              <a:lnSpc>
-                <a:spcPct val="110000"/>
-              </a:lnSpc>
-            </a:pPr>
-            <a:r>
-              <a:rPr sz="1100" b="0" i="0">
-                <a:solidFill>
-                  <a:srgbClr val="5A6370"/>
-                </a:solidFill>
-                <a:latin typeface="Calibri"/>
-              </a:rPr>
-              <a:t>(text-to-SQL)</a:t>
-            </a:r>
-          </a:p>
-        </p:txBody>
-      </p:sp>
-      <p:cxnSp>
-        <p:nvCxnSpPr>
-          <p:cNvPr id="29" name="Connector 28"/>
-          <p:cNvCxnSpPr/>
-          <p:nvPr/>
-        </p:nvCxnSpPr>
-        <p:spPr>
-          <a:xfrm>
-            <a:off x="9857232.0" y="4434840"/>
-            <a:ext cx="0.0" cy="274320"/>
-          </a:xfrm>
-          <a:prstGeom prst="bentConnector3">
-            <a:avLst/>
-          </a:prstGeom>
-          <a:ln w="19050">
-            <a:solidFill>
-              <a:srgbClr val="5A6370"/>
-            </a:solidFill>
-          </a:ln>
-        </p:spPr>
-        <p:style>
-          <a:lnRef idx="2">
-            <a:schemeClr val="accent1"/>
-          </a:lnRef>
-          <a:fillRef idx="0">
-            <a:schemeClr val="accent1"/>
-          </a:fillRef>
-          <a:effectRef idx="1">
-            <a:schemeClr val="accent1"/>
-          </a:effectRef>
-          <a:fontRef idx="minor">
-            <a:schemeClr val="tx1"/>
-          </a:fontRef>
-        </p:style>
-      </p:cxnSp>
-      <p:sp>
-        <p:nvSpPr>
-          <p:cNvPr id="30" name="Rounded Rectangle 29"/>
-          <p:cNvSpPr/>
-          <p:nvPr/>
-        </p:nvSpPr>
-        <p:spPr>
-          <a:xfrm>
-            <a:off x="8211312" y="4709160"/>
-            <a:ext cx="3291840" cy="548640"/>
-          </a:xfrm>
-          <a:prstGeom prst="roundRect">
-            <a:avLst>
-              <a:gd name="adj" fmla="val 10000"/>
-            </a:avLst>
-          </a:prstGeom>
-          <a:solidFill>
-            <a:srgbClr val="E8A82A"/>
-          </a:solidFill>
-          <a:ln>
-            <a:noFill/>
-          </a:ln>
-          <a:effectLst/>
-        </p:spPr>
-        <p:style>
-          <a:lnRef idx="1">
-            <a:schemeClr val="accent1"/>
-          </a:lnRef>
-          <a:fillRef idx="3">
-            <a:schemeClr val="accent1"/>
-          </a:fillRef>
-          <a:effectRef idx="2">
-            <a:schemeClr val="accent1"/>
-          </a:effectRef>
-          <a:fontRef idx="minor">
-            <a:schemeClr val="lt1"/>
-          </a:fontRef>
-        </p:style>
-        <p:txBody>
-          <a:bodyPr rtlCol="0" anchor="ctr"/>
-          <a:lstStyle/>
-          <a:p>
-            <a:pPr algn="ctr"/>
-          </a:p>
-        </p:txBody>
-      </p:sp>
-      <p:sp>
-        <p:nvSpPr>
-          <p:cNvPr id="31" name="TextBox 30"/>
-          <p:cNvSpPr txBox="1"/>
-          <p:nvPr/>
-        </p:nvSpPr>
-        <p:spPr>
-          <a:xfrm>
-            <a:off x="8211312" y="4828032"/>
-            <a:ext cx="3291840" cy="365760"/>
-          </a:xfrm>
-          <a:prstGeom prst="rect">
-            <a:avLst/>
-          </a:prstGeom>
-          <a:noFill/>
-        </p:spPr>
-        <p:txBody>
-          <a:bodyPr wrap="square" anchor="t">
-            <a:spAutoFit/>
-          </a:bodyPr>
-          <a:lstStyle/>
-          <a:p>
-            <a:pPr algn="ctr">
-              <a:lnSpc>
-                <a:spcPct val="100000"/>
-              </a:lnSpc>
-            </a:pPr>
-            <a:r>
-              <a:rPr sz="1100" b="1" i="0">
-                <a:solidFill>
-                  <a:srgbClr val="FFFFFF"/>
-                </a:solidFill>
-                <a:latin typeface="Calibri"/>
-              </a:rPr>
-              <a:t>DQ_SEMANTIC_VIEW</a:t>
-            </a:r>
-          </a:p>
-        </p:txBody>
-      </p:sp>
-      <p:sp>
-        <p:nvSpPr>
-          <p:cNvPr id="32" name="TextBox 31"/>
-          <p:cNvSpPr txBox="1"/>
-          <p:nvPr/>
-        </p:nvSpPr>
-        <p:spPr>
-          <a:xfrm>
-            <a:off x="731520" y="5486400"/>
-            <a:ext cx="10698480" cy="822960"/>
-          </a:xfrm>
-          <a:prstGeom prst="rect">
-            <a:avLst/>
-          </a:prstGeom>
-          <a:noFill/>
-        </p:spPr>
-        <p:txBody>
-          <a:bodyPr wrap="square" anchor="t">
-            <a:spAutoFit/>
-          </a:bodyPr>
-          <a:lstStyle/>
-          <a:p>
-            <a:pPr algn="ctr">
-              <a:lnSpc>
-                <a:spcPct val="130000"/>
-              </a:lnSpc>
-            </a:pPr>
-            <a:r>
-              <a:rPr sz="1400" b="0" i="1">
-                <a:solidFill>
-                  <a:srgbClr val="5A6370"/>
-                </a:solidFill>
-                <a:latin typeface="Calibri"/>
-              </a:rPr>
-              <a:t>Everything runs natively inside Snowflake — one governance boundary, no data leaves the</a:t>
-            </a:r>
-          </a:p>
-          <a:p>
-            <a:pPr algn="ctr">
-              <a:lnSpc>
-                <a:spcPct val="130000"/>
-              </a:lnSpc>
-            </a:pPr>
-            <a:r>
-              <a:rPr sz="1400" b="0" i="1">
-                <a:solidFill>
-                  <a:srgbClr val="5A6370"/>
-                </a:solidFill>
-                <a:latin typeface="Calibri"/>
-              </a:rPr>
-              <a:t>account, no external vector DB or orchestration service required.</a:t>
-            </a:r>
-          </a:p>
-        </p:txBody>
-      </p:sp>
-      <p:sp>
-        <p:nvSpPr>
-          <p:cNvPr id="33" name="TextBox 32"/>
-          <p:cNvSpPr txBox="1"/>
-          <p:nvPr/>
-        </p:nvSpPr>
-        <p:spPr>
-          <a:xfrm>
-            <a:off x="457200" y="6473952"/>
-            <a:ext cx="5486400" cy="320040"/>
-          </a:xfrm>
-          <a:prstGeom prst="rect">
-            <a:avLst/>
-          </a:prstGeom>
-          <a:noFill/>
-        </p:spPr>
-        <p:txBody>
-          <a:bodyPr wrap="square" anchor="t">
-            <a:spAutoFit/>
-          </a:bodyPr>
-          <a:lstStyle/>
-          <a:p>
-            <a:pPr algn="l">
-              <a:lnSpc>
-                <a:spcPct val="100000"/>
-              </a:lnSpc>
-            </a:pPr>
-            <a:r>
-              <a:rPr sz="900" b="0" i="1">
-                <a:solidFill>
-                  <a:srgbClr val="5A6370"/>
-                </a:solidFill>
-                <a:latin typeface="Calibri"/>
-              </a:rPr>
-              <a:t>Unified Enterprise AI Agents Platform  |  Capgemini x Snowflake Hackathon</a:t>
-            </a:r>
-          </a:p>
-        </p:txBody>
-      </p:sp>
-      <p:sp>
-        <p:nvSpPr>
-          <p:cNvPr id="34" name="TextBox 33"/>
-          <p:cNvSpPr txBox="1"/>
-          <p:nvPr/>
-        </p:nvSpPr>
-        <p:spPr>
-          <a:xfrm>
-            <a:off x="11247120" y="6473952"/>
-            <a:ext cx="731520" cy="320040"/>
-          </a:xfrm>
-          <a:prstGeom prst="rect">
-            <a:avLst/>
-          </a:prstGeom>
-          <a:noFill/>
-        </p:spPr>
-        <p:txBody>
-          <a:bodyPr wrap="square" anchor="t">
-            <a:spAutoFit/>
-          </a:bodyPr>
-          <a:lstStyle/>
-          <a:p>
-            <a:pPr algn="r">
-              <a:lnSpc>
-                <a:spcPct val="100000"/>
-              </a:lnSpc>
-            </a:pPr>
-            <a:r>
-              <a:rPr sz="900" b="0" i="0">
-                <a:solidFill>
-                  <a:srgbClr val="5A6370"/>
-                </a:solidFill>
-                <a:latin typeface="Calibri"/>
-              </a:rPr>
-              <a:t>5</a:t>
+              <a:t>6</a:t>
             </a:r>
           </a:p>
         </p:txBody>
@@ -10010,7 +10385,7 @@
 </p:sld>
 </file>
 
-<file path=ppt\slides\slide6.xml><?xml version="1.0" encoding="utf-8"?>
+<file path=ppt/slides/slide7.xml><?xml version="1.0" encoding="utf-8"?>
 <p:sld xmlns:a="http://schemas.openxmlformats.org/drawingml/2006/main" xmlns:p="http://schemas.openxmlformats.org/presentationml/2006/main" xmlns:r="http://schemas.openxmlformats.org/officeDocument/2006/relationships">
   <p:cSld>
     <p:spTree>
@@ -10142,7 +10517,7 @@
                 </a:solidFill>
                 <a:latin typeface="Calibri"/>
               </a:rPr>
-              <a:t>📊</a:t>
+              <a:t>📄</a:t>
             </a:r>
           </a:p>
         </p:txBody>
@@ -10181,7 +10556,7 @@
                 </a:solidFill>
                 <a:latin typeface="Georgia"/>
               </a:rPr>
-              <a:t>Agent 1 — Self-Service Analytics</a:t>
+              <a:t>Agent 2 — Document Q&amp;A (RAG)</a:t>
             </a:r>
           </a:p>
         </p:txBody>
@@ -10220,7 +10595,7 @@
                 </a:solidFill>
                 <a:latin typeface="Calibri"/>
               </a:rPr>
-              <a:t>Structured data, answered in plain English</a:t>
+              <a:t>Ask questions of unstructured policy documents</a:t>
             </a:r>
           </a:p>
         </p:txBody>
@@ -10259,8 +10634,7 @@
                 </a:solidFill>
                 <a:latin typeface="Calibri"/>
               </a:rPr>
-              <a:t>▸  Native SEMANTIC VIEW over 6 operational tables — customers,
-policies, claims, billing, agents, at-risk policies</a:t>
+              <a:t>▸  Policy documents chunked with SNOWFLAKE.CORTEX.SPLIT_TEXT_RECURSIVE_CHARACTER</a:t>
             </a:r>
           </a:p>
           <a:p>
@@ -10276,8 +10650,7 @@
                 </a:solidFill>
                 <a:latin typeface="Calibri"/>
               </a:rPr>
-              <a:t>▸  Business-friendly metrics: loss ratio, total premium, fraud
-claim count, revenue at risk, churn probability</a:t>
+              <a:t>▸  A CORTEX SEARCH SERVICE indexes chunk text with auto-managed embeddings — no external vector DB</a:t>
             </a:r>
           </a:p>
           <a:p>
@@ -10293,8 +10666,7 @@
                 </a:solidFill>
                 <a:latin typeface="Calibri"/>
               </a:rPr>
-              <a:t>▸  Cortex Analyst translates the question into governed SQL —
-shown inline for full transparency</a:t>
+              <a:t>▸  Answers cite the source document, so business users can verify, not just trust</a:t>
             </a:r>
           </a:p>
           <a:p>
@@ -10310,7 +10682,7 @@
                 </a:solidFill>
                 <a:latin typeface="Calibri"/>
               </a:rPr>
-              <a:t>▸  Relationships declared explicitly, so joins are always correct</a:t>
+              <a:t>▸  Filterable by policy ID, document type, and title</a:t>
             </a:r>
           </a:p>
         </p:txBody>
@@ -10324,7 +10696,7 @@
         <p:spPr>
           <a:xfrm>
             <a:off x="7315200" y="1554480"/>
-            <a:ext cx="4114800" cy="2743200"/>
+            <a:ext cx="4114800" cy="3200400"/>
           </a:xfrm>
           <a:prstGeom prst="roundRect">
             <a:avLst>
@@ -10434,7 +10806,7 @@
                 </a:solidFill>
                 <a:latin typeface="Calibri"/>
               </a:rPr>
-              <a:t>“What's our average loss ratio by policy type?”</a:t>
+              <a:t>“What are the exclusion clauses for water damage in the Homeowners policy?”</a:t>
             </a:r>
           </a:p>
         </p:txBody>
@@ -10492,7 +10864,7 @@
         <p:spPr>
           <a:xfrm>
             <a:off x="7589520" y="3520440"/>
-            <a:ext cx="3566160" cy="685800"/>
+            <a:ext cx="3566160" cy="1097280"/>
           </a:xfrm>
           <a:prstGeom prst="rect">
             <a:avLst/>
@@ -10517,7 +10889,7 @@
                 </a:solidFill>
                 <a:latin typeface="Calibri"/>
               </a:rPr>
-              <a:t>Verified live: Life ~57.5%, Health/Home ~55.4%, Auto ~53.1%</a:t>
+              <a:t>Verified live: correctly distinguished that flood is excluded,</a:t>
             </a:r>
           </a:p>
           <a:p>
@@ -10533,7 +10905,7 @@
                 </a:solidFill>
                 <a:latin typeface="Calibri"/>
               </a:rPr>
-              <a:t>— all computed from real generated SQL, not canned data.</a:t>
+              <a:t>while general water damage (e.g. burst pipes) is not.</a:t>
             </a:r>
           </a:p>
         </p:txBody>
@@ -10572,7 +10944,7 @@
                 </a:solidFill>
                 <a:latin typeface="Calibri"/>
               </a:rPr>
-              <a:t>Unified Enterprise AI Agents Platform  |  Capgemini x Snowflake Hackathon</a:t>
+              <a:t>Unified Enterprise AI Agents Platform  |  Capgemini × Snowflake Hackathon</a:t>
             </a:r>
           </a:p>
         </p:txBody>
@@ -10611,7 +10983,7 @@
                 </a:solidFill>
                 <a:latin typeface="Calibri"/>
               </a:rPr>
-              <a:t>6</a:t>
+              <a:t>7</a:t>
             </a:r>
           </a:p>
         </p:txBody>
@@ -10624,7 +10996,7 @@
 </p:sld>
 </file>
 
-<file path=ppt\slides\slide7.xml><?xml version="1.0" encoding="utf-8"?>
+<file path=ppt/slides/slide8.xml><?xml version="1.0" encoding="utf-8"?>
 <p:sld xmlns:a="http://schemas.openxmlformats.org/drawingml/2006/main" xmlns:p="http://schemas.openxmlformats.org/presentationml/2006/main" xmlns:r="http://schemas.openxmlformats.org/officeDocument/2006/relationships">
   <p:cSld>
     <p:spTree>
@@ -10756,7 +11128,7 @@
                 </a:solidFill>
                 <a:latin typeface="Calibri"/>
               </a:rPr>
-              <a:t>📄</a:t>
+              <a:t>🛡</a:t>
             </a:r>
           </a:p>
         </p:txBody>
@@ -10795,7 +11167,7 @@
                 </a:solidFill>
                 <a:latin typeface="Georgia"/>
               </a:rPr>
-              <a:t>Agent 2 — Document Q&amp;A (RAG)</a:t>
+              <a:t>Agent 3 — Data Quality Root Cause</a:t>
             </a:r>
           </a:p>
         </p:txBody>
@@ -10834,7 +11206,7 @@
                 </a:solidFill>
                 <a:latin typeface="Calibri"/>
               </a:rPr>
-              <a:t>Ask questions of unstructured policy documents</a:t>
+              <a:t>Conversational root-cause analysis, not a dashboard</a:t>
             </a:r>
           </a:p>
         </p:txBody>
@@ -10873,8 +11245,7 @@
                 </a:solidFill>
                 <a:latin typeface="Calibri"/>
               </a:rPr>
-              <a:t>▸  Policy documents chunked with
-SNOWFLAKE.CORTEX.SPLIT_TEXT_RECURSIVE_CHARACTER</a:t>
+              <a:t>▸  A second SEMANTIC VIEW over DQ_RULES, DQ_RESULTS, DQ_COLUMN_HEALTH, and DQ_SCORES</a:t>
             </a:r>
           </a:p>
           <a:p>
@@ -10890,8 +11261,7 @@
                 </a:solidFill>
                 <a:latin typeface="Calibri"/>
               </a:rPr>
-              <a:t>▸  A CORTEX SEARCH SERVICE indexes chunk text with
-auto-managed embeddings — no external vector DB</a:t>
+              <a:t>▸  Turns “why did this fail?” into an evidence-backed answer, not a support ticket</a:t>
             </a:r>
           </a:p>
           <a:p>
@@ -10907,8 +11277,7 @@
                 </a:solidFill>
                 <a:latin typeface="Calibri"/>
               </a:rPr>
-              <a:t>▸  Answers cite the source document, so business users can
-verify, not just trust</a:t>
+              <a:t>▸  Cites the exact rule, pass rate, and threshold that triggered the failure</a:t>
             </a:r>
           </a:p>
           <a:p>
@@ -10924,7 +11293,7 @@
                 </a:solidFill>
                 <a:latin typeface="Calibri"/>
               </a:rPr>
-              <a:t>▸  Filterable by policy ID, document type, and title</a:t>
+              <a:t>▸  Replaces manually opening a DQ dashboard and cross-referencing rule logs</a:t>
             </a:r>
           </a:p>
         </p:txBody>
@@ -10938,7 +11307,7 @@
         <p:spPr>
           <a:xfrm>
             <a:off x="7315200" y="1554480"/>
-            <a:ext cx="4114800" cy="2743200"/>
+            <a:ext cx="4114800" cy="3200400"/>
           </a:xfrm>
           <a:prstGeom prst="roundRect">
             <a:avLst>
@@ -11048,7 +11417,7 @@
                 </a:solidFill>
                 <a:latin typeface="Calibri"/>
               </a:rPr>
-              <a:t>“What are the exclusion clauses for water damage in the Homeowners policy?”</a:t>
+              <a:t>“Why did the DQ check on CUSTOMERS.EMAIL fail?”</a:t>
             </a:r>
           </a:p>
         </p:txBody>
@@ -11106,7 +11475,7 @@
         <p:spPr>
           <a:xfrm>
             <a:off x="7589520" y="3520440"/>
-            <a:ext cx="3566160" cy="685800"/>
+            <a:ext cx="3566160" cy="1097280"/>
           </a:xfrm>
           <a:prstGeom prst="rect">
             <a:avLst/>
@@ -11131,7 +11500,7 @@
                 </a:solidFill>
                 <a:latin typeface="Calibri"/>
               </a:rPr>
-              <a:t>Verified live: correctly distinguished that flood is excluded,</a:t>
+              <a:t>Verified live: identified the UNIQUE_CUSTOMER_EMAIL rule,</a:t>
             </a:r>
           </a:p>
           <a:p>
@@ -11147,7 +11516,7 @@
                 </a:solidFill>
                 <a:latin typeface="Calibri"/>
               </a:rPr>
-              <a:t>while general water damage (e.g. burst pipes) is not.</a:t>
+              <a:t>94% pass rate vs. 99% threshold, root cause = duplicate emails.</a:t>
             </a:r>
           </a:p>
         </p:txBody>
@@ -11186,7 +11555,7 @@
                 </a:solidFill>
                 <a:latin typeface="Calibri"/>
               </a:rPr>
-              <a:t>Unified Enterprise AI Agents Platform  |  Capgemini x Snowflake Hackathon</a:t>
+              <a:t>Unified Enterprise AI Agents Platform  |  Capgemini × Snowflake Hackathon</a:t>
             </a:r>
           </a:p>
         </p:txBody>
@@ -11225,7 +11594,7 @@
                 </a:solidFill>
                 <a:latin typeface="Calibri"/>
               </a:rPr>
-              <a:t>7</a:t>
+              <a:t>8</a:t>
             </a:r>
           </a:p>
         </p:txBody>
@@ -11238,7 +11607,7 @@
 </p:sld>
 </file>
 
-<file path=ppt\slides\slide8.xml><?xml version="1.0" encoding="utf-8"?>
+<file path=ppt/slides/slide9.xml><?xml version="1.0" encoding="utf-8"?>
 <p:sld xmlns:a="http://schemas.openxmlformats.org/drawingml/2006/main" xmlns:p="http://schemas.openxmlformats.org/presentationml/2006/main" xmlns:r="http://schemas.openxmlformats.org/officeDocument/2006/relationships">
   <p:cSld>
     <p:spTree>
@@ -11344,8 +11713,8 @@
         </p:nvSpPr>
         <p:spPr>
           <a:xfrm>
-            <a:off x="548640" y="137160"/>
-            <a:ext cx="822960" cy="822960"/>
+            <a:off x="548640" y="256032"/>
+            <a:ext cx="9144000" cy="548640"/>
           </a:xfrm>
           <a:prstGeom prst="rect">
             <a:avLst/>
@@ -11358,33 +11727,57 @@
           </a:bodyPr>
           <a:lstStyle/>
           <a:p>
-            <a:pPr algn="ctr">
+            <a:pPr algn="l">
               <a:lnSpc>
                 <a:spcPct val="100000"/>
               </a:lnSpc>
             </a:pPr>
             <a:r>
-              <a:rPr sz="4200" b="0" i="0">
-                <a:solidFill>
-                  <a:srgbClr val="1A1A1A"/>
-                </a:solidFill>
-                <a:latin typeface="Calibri"/>
-              </a:rPr>
-              <a:t>🛡</a:t>
-            </a:r>
-          </a:p>
-        </p:txBody>
-      </p:sp>
-      <p:sp>
-        <p:nvSpPr>
-          <p:cNvPr id="5" name="TextBox 4"/>
+              <a:rPr sz="2600" b="1" i="0">
+                <a:solidFill>
+                  <a:srgbClr val="FFFFFF"/>
+                </a:solidFill>
+                <a:latin typeface="Georgia"/>
+              </a:rPr>
+              <a:t>Live Proof — Data Quality Root Cause</a:t>
+            </a:r>
+          </a:p>
+        </p:txBody>
+      </p:sp>
+      <p:pic>
+        <p:nvPicPr>
+          <p:cNvPr id="5" name="Picture 4" descr="stream10.png"/>
+          <p:cNvPicPr>
+            <a:picLocks noChangeAspect="1"/>
+          </p:cNvPicPr>
+          <p:nvPr/>
+        </p:nvPicPr>
+        <p:blipFill>
+          <a:blip r:embed="rId2"/>
+          <a:stretch>
+            <a:fillRect/>
+          </a:stretch>
+        </p:blipFill>
+        <p:spPr>
+          <a:xfrm>
+            <a:off x="731520" y="1638348"/>
+            <a:ext cx="10698480" cy="4404263"/>
+          </a:xfrm>
+          <a:prstGeom prst="rect">
+            <a:avLst/>
+          </a:prstGeom>
+        </p:spPr>
+      </p:pic>
+      <p:sp>
+        <p:nvSpPr>
+          <p:cNvPr id="6" name="TextBox 5"/>
           <p:cNvSpPr txBox="1"/>
           <p:nvPr/>
         </p:nvSpPr>
         <p:spPr>
           <a:xfrm>
-            <a:off x="1371600" y="164592"/>
-            <a:ext cx="8686800" cy="457200"/>
+            <a:off x="457200" y="6473952"/>
+            <a:ext cx="5486400" cy="320040"/>
           </a:xfrm>
           <a:prstGeom prst="rect">
             <a:avLst/>
@@ -11403,27 +11796,27 @@
               </a:lnSpc>
             </a:pPr>
             <a:r>
-              <a:rPr sz="2600" b="1" i="0">
-                <a:solidFill>
-                  <a:srgbClr val="FFFFFF"/>
-                </a:solidFill>
-                <a:latin typeface="Georgia"/>
-              </a:rPr>
-              <a:t>Agent 3 — Data Quality Root Cause</a:t>
-            </a:r>
-          </a:p>
-        </p:txBody>
-      </p:sp>
-      <p:sp>
-        <p:nvSpPr>
-          <p:cNvPr id="6" name="TextBox 5"/>
+              <a:rPr sz="900" b="0" i="1">
+                <a:solidFill>
+                  <a:srgbClr val="5A6370"/>
+                </a:solidFill>
+                <a:latin typeface="Calibri"/>
+              </a:rPr>
+              <a:t>Unified Enterprise AI Agents Platform  |  Capgemini × Snowflake Hackathon</a:t>
+            </a:r>
+          </a:p>
+        </p:txBody>
+      </p:sp>
+      <p:sp>
+        <p:nvSpPr>
+          <p:cNvPr id="7" name="TextBox 6"/>
           <p:cNvSpPr txBox="1"/>
           <p:nvPr/>
         </p:nvSpPr>
         <p:spPr>
           <a:xfrm>
-            <a:off x="1371600" y="621792"/>
-            <a:ext cx="8686800" cy="365760"/>
+            <a:off x="11247120" y="6473952"/>
+            <a:ext cx="731520" cy="320040"/>
           </a:xfrm>
           <a:prstGeom prst="rect">
             <a:avLst/>
@@ -11436,411 +11829,19 @@
           </a:bodyPr>
           <a:lstStyle/>
           <a:p>
-            <a:pPr algn="l">
+            <a:pPr algn="r">
               <a:lnSpc>
                 <a:spcPct val="100000"/>
               </a:lnSpc>
             </a:pPr>
             <a:r>
-              <a:rPr sz="1300" b="0" i="0">
-                <a:solidFill>
-                  <a:srgbClr val="29B5E8"/>
-                </a:solidFill>
-                <a:latin typeface="Calibri"/>
-              </a:rPr>
-              <a:t>Conversational root-cause analysis, not a dashboard</a:t>
-            </a:r>
-          </a:p>
-        </p:txBody>
-      </p:sp>
-      <p:sp>
-        <p:nvSpPr>
-          <p:cNvPr id="7" name="TextBox 6"/>
-          <p:cNvSpPr txBox="1"/>
-          <p:nvPr/>
-        </p:nvSpPr>
-        <p:spPr>
-          <a:xfrm>
-            <a:off x="731520" y="1554480"/>
-            <a:ext cx="6217920" cy="3840480"/>
-          </a:xfrm>
-          <a:prstGeom prst="rect">
-            <a:avLst/>
-          </a:prstGeom>
-          <a:noFill/>
-        </p:spPr>
-        <p:txBody>
-          <a:bodyPr wrap="square">
-            <a:spAutoFit/>
-          </a:bodyPr>
-          <a:lstStyle/>
-          <a:p>
-            <a:pPr>
-              <a:spcAft>
-                <a:spcPts val="1400"/>
-              </a:spcAft>
-            </a:pPr>
-            <a:r>
-              <a:rPr sz="1600">
-                <a:solidFill>
-                  <a:srgbClr val="1A1A1A"/>
-                </a:solidFill>
-                <a:latin typeface="Calibri"/>
-              </a:rPr>
-              <a:t>▸  A second SEMANTIC VIEW over DQ_RULES, DQ_RESULTS,
-DQ_COLUMN_HEALTH, and DQ_SCORES</a:t>
-            </a:r>
-          </a:p>
-          <a:p>
-            <a:pPr>
-              <a:spcAft>
-                <a:spcPts val="1400"/>
-              </a:spcAft>
-            </a:pPr>
-            <a:r>
-              <a:rPr sz="1600">
-                <a:solidFill>
-                  <a:srgbClr val="1A1A1A"/>
-                </a:solidFill>
-                <a:latin typeface="Calibri"/>
-              </a:rPr>
-              <a:t>▸  Turns “why did this fail?” into an evidence-backed answer,
-not a support ticket</a:t>
-            </a:r>
-          </a:p>
-          <a:p>
-            <a:pPr>
-              <a:spcAft>
-                <a:spcPts val="1400"/>
-              </a:spcAft>
-            </a:pPr>
-            <a:r>
-              <a:rPr sz="1600">
-                <a:solidFill>
-                  <a:srgbClr val="1A1A1A"/>
-                </a:solidFill>
-                <a:latin typeface="Calibri"/>
-              </a:rPr>
-              <a:t>▸  Cites the exact rule, pass rate, and threshold that triggered
-the failure</a:t>
-            </a:r>
-          </a:p>
-          <a:p>
-            <a:pPr>
-              <a:spcAft>
-                <a:spcPts val="1400"/>
-              </a:spcAft>
-            </a:pPr>
-            <a:r>
-              <a:rPr sz="1600">
-                <a:solidFill>
-                  <a:srgbClr val="1A1A1A"/>
-                </a:solidFill>
-                <a:latin typeface="Calibri"/>
-              </a:rPr>
-              <a:t>▸  Replaces manually opening a DQ dashboard and
-cross-referencing rule logs</a:t>
-            </a:r>
-          </a:p>
-        </p:txBody>
-      </p:sp>
-      <p:sp>
-        <p:nvSpPr>
-          <p:cNvPr id="8" name="Rounded Rectangle 7"/>
-          <p:cNvSpPr/>
-          <p:nvPr/>
-        </p:nvSpPr>
-        <p:spPr>
-          <a:xfrm>
-            <a:off x="7315200" y="1554480"/>
-            <a:ext cx="4114800" cy="2743200"/>
-          </a:xfrm>
-          <a:prstGeom prst="roundRect">
-            <a:avLst>
-              <a:gd name="adj" fmla="val 8000"/>
-            </a:avLst>
-          </a:prstGeom>
-          <a:solidFill>
-            <a:srgbClr val="0B1F3A"/>
-          </a:solidFill>
-          <a:ln>
-            <a:noFill/>
-          </a:ln>
-          <a:effectLst/>
-        </p:spPr>
-        <p:style>
-          <a:lnRef idx="1">
-            <a:schemeClr val="accent1"/>
-          </a:lnRef>
-          <a:fillRef idx="3">
-            <a:schemeClr val="accent1"/>
-          </a:fillRef>
-          <a:effectRef idx="2">
-            <a:schemeClr val="accent1"/>
-          </a:effectRef>
-          <a:fontRef idx="minor">
-            <a:schemeClr val="lt1"/>
-          </a:fontRef>
-        </p:style>
-        <p:txBody>
-          <a:bodyPr rtlCol="0" anchor="ctr"/>
-          <a:lstStyle/>
-          <a:p>
-            <a:pPr algn="ctr"/>
-          </a:p>
-        </p:txBody>
-      </p:sp>
-      <p:sp>
-        <p:nvSpPr>
-          <p:cNvPr id="9" name="TextBox 8"/>
-          <p:cNvSpPr txBox="1"/>
-          <p:nvPr/>
-        </p:nvSpPr>
-        <p:spPr>
-          <a:xfrm>
-            <a:off x="7589520" y="1737360"/>
-            <a:ext cx="3566160" cy="365760"/>
-          </a:xfrm>
-          <a:prstGeom prst="rect">
-            <a:avLst/>
-          </a:prstGeom>
-          <a:noFill/>
-        </p:spPr>
-        <p:txBody>
-          <a:bodyPr wrap="square" anchor="t">
-            <a:spAutoFit/>
-          </a:bodyPr>
-          <a:lstStyle/>
-          <a:p>
-            <a:pPr algn="l">
-              <a:lnSpc>
-                <a:spcPct val="100000"/>
-              </a:lnSpc>
-            </a:pPr>
-            <a:r>
-              <a:rPr sz="1200" b="1" i="0">
-                <a:solidFill>
-                  <a:srgbClr val="29B5E8"/>
-                </a:solidFill>
-                <a:latin typeface="Calibri"/>
-              </a:rPr>
-              <a:t>Example question</a:t>
-            </a:r>
-          </a:p>
-        </p:txBody>
-      </p:sp>
-      <p:sp>
-        <p:nvSpPr>
-          <p:cNvPr id="10" name="TextBox 9"/>
-          <p:cNvSpPr txBox="1"/>
-          <p:nvPr/>
-        </p:nvSpPr>
-        <p:spPr>
-          <a:xfrm>
-            <a:off x="7589520" y="2148840"/>
-            <a:ext cx="3566160" cy="1097280"/>
-          </a:xfrm>
-          <a:prstGeom prst="rect">
-            <a:avLst/>
-          </a:prstGeom>
-          <a:noFill/>
-        </p:spPr>
-        <p:txBody>
-          <a:bodyPr wrap="square" anchor="t">
-            <a:spAutoFit/>
-          </a:bodyPr>
-          <a:lstStyle/>
-          <a:p>
-            <a:pPr algn="l">
-              <a:lnSpc>
-                <a:spcPct val="130000"/>
-              </a:lnSpc>
-            </a:pPr>
-            <a:r>
-              <a:rPr sz="1500" b="0" i="1">
-                <a:solidFill>
-                  <a:srgbClr val="FFFFFF"/>
-                </a:solidFill>
-                <a:latin typeface="Calibri"/>
-              </a:rPr>
-              <a:t>“Why did the DQ check on CUSTOMERS.EMAIL fail?”</a:t>
-            </a:r>
-          </a:p>
-        </p:txBody>
-      </p:sp>
-      <p:sp>
-        <p:nvSpPr>
-          <p:cNvPr id="11" name="Rectangle 10"/>
-          <p:cNvSpPr/>
-          <p:nvPr/>
-        </p:nvSpPr>
-        <p:spPr>
-          <a:xfrm>
-            <a:off x="7589520" y="3383280"/>
-            <a:ext cx="3566160" cy="19050"/>
-          </a:xfrm>
-          <a:prstGeom prst="rect">
-            <a:avLst/>
-          </a:prstGeom>
-          <a:solidFill>
-            <a:srgbClr val="29B5E8"/>
-          </a:solidFill>
-          <a:ln>
-            <a:noFill/>
-          </a:ln>
-          <a:effectLst/>
-        </p:spPr>
-        <p:style>
-          <a:lnRef idx="1">
-            <a:schemeClr val="accent1"/>
-          </a:lnRef>
-          <a:fillRef idx="3">
-            <a:schemeClr val="accent1"/>
-          </a:fillRef>
-          <a:effectRef idx="2">
-            <a:schemeClr val="accent1"/>
-          </a:effectRef>
-          <a:fontRef idx="minor">
-            <a:schemeClr val="lt1"/>
-          </a:fontRef>
-        </p:style>
-        <p:txBody>
-          <a:bodyPr rtlCol="0" anchor="ctr"/>
-          <a:lstStyle/>
-          <a:p>
-            <a:pPr algn="ctr"/>
-          </a:p>
-        </p:txBody>
-      </p:sp>
-      <p:sp>
-        <p:nvSpPr>
-          <p:cNvPr id="12" name="TextBox 11"/>
-          <p:cNvSpPr txBox="1"/>
-          <p:nvPr/>
-        </p:nvSpPr>
-        <p:spPr>
-          <a:xfrm>
-            <a:off x="7589520" y="3520440"/>
-            <a:ext cx="3566160" cy="685800"/>
-          </a:xfrm>
-          <a:prstGeom prst="rect">
-            <a:avLst/>
-          </a:prstGeom>
-          <a:noFill/>
-        </p:spPr>
-        <p:txBody>
-          <a:bodyPr wrap="square" anchor="t">
-            <a:spAutoFit/>
-          </a:bodyPr>
-          <a:lstStyle/>
-          <a:p>
-            <a:pPr algn="l">
-              <a:lnSpc>
-                <a:spcPct val="125000"/>
-              </a:lnSpc>
-            </a:pPr>
-            <a:r>
-              <a:rPr sz="1100" b="0" i="0">
-                <a:solidFill>
-                  <a:srgbClr val="C7D6E8"/>
-                </a:solidFill>
-                <a:latin typeface="Calibri"/>
-              </a:rPr>
-              <a:t>Verified live: identified the UNIQUE_CUSTOMER_EMAIL rule,</a:t>
-            </a:r>
-          </a:p>
-          <a:p>
-            <a:pPr algn="l">
-              <a:lnSpc>
-                <a:spcPct val="125000"/>
-              </a:lnSpc>
-            </a:pPr>
-            <a:r>
-              <a:rPr sz="1100" b="0" i="0">
-                <a:solidFill>
-                  <a:srgbClr val="C7D6E8"/>
-                </a:solidFill>
-                <a:latin typeface="Calibri"/>
-              </a:rPr>
-              <a:t>94% pass rate vs. 99% threshold, root cause = duplicate emails.</a:t>
-            </a:r>
-          </a:p>
-        </p:txBody>
-      </p:sp>
-      <p:sp>
-        <p:nvSpPr>
-          <p:cNvPr id="13" name="TextBox 12"/>
-          <p:cNvSpPr txBox="1"/>
-          <p:nvPr/>
-        </p:nvSpPr>
-        <p:spPr>
-          <a:xfrm>
-            <a:off x="457200" y="6473952"/>
-            <a:ext cx="5486400" cy="320040"/>
-          </a:xfrm>
-          <a:prstGeom prst="rect">
-            <a:avLst/>
-          </a:prstGeom>
-          <a:noFill/>
-        </p:spPr>
-        <p:txBody>
-          <a:bodyPr wrap="square" anchor="t">
-            <a:spAutoFit/>
-          </a:bodyPr>
-          <a:lstStyle/>
-          <a:p>
-            <a:pPr algn="l">
-              <a:lnSpc>
-                <a:spcPct val="100000"/>
-              </a:lnSpc>
-            </a:pPr>
-            <a:r>
-              <a:rPr sz="900" b="0" i="1">
+              <a:rPr sz="900" b="0" i="0">
                 <a:solidFill>
                   <a:srgbClr val="5A6370"/>
                 </a:solidFill>
                 <a:latin typeface="Calibri"/>
               </a:rPr>
-              <a:t>Unified Enterprise AI Agents Platform  |  Capgemini x Snowflake Hackathon</a:t>
-            </a:r>
-          </a:p>
-        </p:txBody>
-      </p:sp>
-      <p:sp>
-        <p:nvSpPr>
-          <p:cNvPr id="14" name="TextBox 13"/>
-          <p:cNvSpPr txBox="1"/>
-          <p:nvPr/>
-        </p:nvSpPr>
-        <p:spPr>
-          <a:xfrm>
-            <a:off x="11247120" y="6473952"/>
-            <a:ext cx="731520" cy="320040"/>
-          </a:xfrm>
-          <a:prstGeom prst="rect">
-            <a:avLst/>
-          </a:prstGeom>
-          <a:noFill/>
-        </p:spPr>
-        <p:txBody>
-          <a:bodyPr wrap="square" anchor="t">
-            <a:spAutoFit/>
-          </a:bodyPr>
-          <a:lstStyle/>
-          <a:p>
-            <a:pPr algn="r">
-              <a:lnSpc>
-                <a:spcPct val="100000"/>
-              </a:lnSpc>
-            </a:pPr>
-            <a:r>
-              <a:rPr sz="900" b="0" i="0">
-                <a:solidFill>
-                  <a:srgbClr val="5A6370"/>
-                </a:solidFill>
-                <a:latin typeface="Calibri"/>
-              </a:rPr>
-              <a:t>8</a:t>
+              <a:t>9</a:t>
             </a:r>
           </a:p>
         </p:txBody>
@@ -11853,258 +11854,7 @@
 </p:sld>
 </file>
 
-<file path=ppt\slides\slide9.xml><?xml version="1.0" encoding="utf-8"?>
-<p:sld xmlns:a="http://schemas.openxmlformats.org/drawingml/2006/main" xmlns:p="http://schemas.openxmlformats.org/presentationml/2006/main" xmlns:r="http://schemas.openxmlformats.org/officeDocument/2006/relationships">
-  <p:cSld>
-    <p:spTree>
-      <p:nvGrpSpPr>
-        <p:cNvPr id="1" name=""/>
-        <p:cNvGrpSpPr/>
-        <p:nvPr/>
-      </p:nvGrpSpPr>
-      <p:grpSpPr/>
-      <p:sp>
-        <p:nvSpPr>
-          <p:cNvPr id="2" name="Rectangle 1"/>
-          <p:cNvSpPr/>
-          <p:nvPr/>
-        </p:nvSpPr>
-        <p:spPr>
-          <a:xfrm>
-            <a:off x="0" y="0"/>
-            <a:ext cx="12191695" cy="6858000"/>
-          </a:xfrm>
-          <a:prstGeom prst="rect">
-            <a:avLst/>
-          </a:prstGeom>
-          <a:solidFill>
-            <a:srgbClr val="FFFFFF"/>
-          </a:solidFill>
-          <a:ln>
-            <a:noFill/>
-          </a:ln>
-          <a:effectLst/>
-        </p:spPr>
-        <p:style>
-          <a:lnRef idx="1">
-            <a:schemeClr val="accent1"/>
-          </a:lnRef>
-          <a:fillRef idx="3">
-            <a:schemeClr val="accent1"/>
-          </a:fillRef>
-          <a:effectRef idx="2">
-            <a:schemeClr val="accent1"/>
-          </a:effectRef>
-          <a:fontRef idx="minor">
-            <a:schemeClr val="lt1"/>
-          </a:fontRef>
-        </p:style>
-        <p:txBody>
-          <a:bodyPr rtlCol="0" anchor="ctr"/>
-          <a:lstStyle/>
-          <a:p>
-            <a:pPr algn="ctr"/>
-          </a:p>
-        </p:txBody>
-      </p:sp>
-      <p:sp>
-        <p:nvSpPr>
-          <p:cNvPr id="3" name="Rectangle 2"/>
-          <p:cNvSpPr/>
-          <p:nvPr/>
-        </p:nvSpPr>
-        <p:spPr>
-          <a:xfrm>
-            <a:off x="0" y="0"/>
-            <a:ext cx="12191695" cy="1051560"/>
-          </a:xfrm>
-          <a:prstGeom prst="rect">
-            <a:avLst/>
-          </a:prstGeom>
-          <a:solidFill>
-            <a:srgbClr val="0B1F3A"/>
-          </a:solidFill>
-          <a:ln>
-            <a:noFill/>
-          </a:ln>
-          <a:effectLst/>
-        </p:spPr>
-        <p:style>
-          <a:lnRef idx="1">
-            <a:schemeClr val="accent1"/>
-          </a:lnRef>
-          <a:fillRef idx="3">
-            <a:schemeClr val="accent1"/>
-          </a:fillRef>
-          <a:effectRef idx="2">
-            <a:schemeClr val="accent1"/>
-          </a:effectRef>
-          <a:fontRef idx="minor">
-            <a:schemeClr val="lt1"/>
-          </a:fontRef>
-        </p:style>
-        <p:txBody>
-          <a:bodyPr rtlCol="0" anchor="ctr"/>
-          <a:lstStyle/>
-          <a:p>
-            <a:pPr algn="ctr"/>
-          </a:p>
-        </p:txBody>
-      </p:sp>
-      <p:sp>
-        <p:nvSpPr>
-          <p:cNvPr id="4" name="TextBox 3"/>
-          <p:cNvSpPr txBox="1"/>
-          <p:nvPr/>
-        </p:nvSpPr>
-        <p:spPr>
-          <a:xfrm>
-            <a:off x="548640" y="256032"/>
-            <a:ext cx="9144000" cy="548640"/>
-          </a:xfrm>
-          <a:prstGeom prst="rect">
-            <a:avLst/>
-          </a:prstGeom>
-          <a:noFill/>
-        </p:spPr>
-        <p:txBody>
-          <a:bodyPr wrap="square" anchor="t">
-            <a:spAutoFit/>
-          </a:bodyPr>
-          <a:lstStyle/>
-          <a:p>
-            <a:pPr algn="l">
-              <a:lnSpc>
-                <a:spcPct val="100000"/>
-              </a:lnSpc>
-            </a:pPr>
-            <a:r>
-              <a:rPr sz="2600" b="1" i="0">
-                <a:solidFill>
-                  <a:srgbClr val="FFFFFF"/>
-                </a:solidFill>
-                <a:latin typeface="Georgia"/>
-              </a:rPr>
-              <a:t>Live Proof — Data Quality Root Cause</a:t>
-            </a:r>
-          </a:p>
-        </p:txBody>
-      </p:sp>
-      <p:pic>
-        <p:nvPicPr>
-          <p:cNvPr id="5" name="Picture 4" descr="stream10.png"/>
-          <p:cNvPicPr>
-            <a:picLocks noChangeAspect="1"/>
-          </p:cNvPicPr>
-          <p:nvPr/>
-        </p:nvPicPr>
-        <p:blipFill>
-          <a:blip r:embed="rId2"/>
-          <a:stretch>
-            <a:fillRect/>
-          </a:stretch>
-        </p:blipFill>
-        <p:spPr>
-          <a:xfrm>
-            <a:off x="731520" y="1638348"/>
-            <a:ext cx="10698480" cy="4404263"/>
-          </a:xfrm>
-          <a:prstGeom prst="rect">
-            <a:avLst/>
-          </a:prstGeom>
-        </p:spPr>
-      </p:pic>
-      <p:sp>
-        <p:nvSpPr>
-          <p:cNvPr id="6" name="TextBox 5"/>
-          <p:cNvSpPr txBox="1"/>
-          <p:nvPr/>
-        </p:nvSpPr>
-        <p:spPr>
-          <a:xfrm>
-            <a:off x="457200" y="6473952"/>
-            <a:ext cx="5486400" cy="320040"/>
-          </a:xfrm>
-          <a:prstGeom prst="rect">
-            <a:avLst/>
-          </a:prstGeom>
-          <a:noFill/>
-        </p:spPr>
-        <p:txBody>
-          <a:bodyPr wrap="square" anchor="t">
-            <a:spAutoFit/>
-          </a:bodyPr>
-          <a:lstStyle/>
-          <a:p>
-            <a:pPr algn="l">
-              <a:lnSpc>
-                <a:spcPct val="100000"/>
-              </a:lnSpc>
-            </a:pPr>
-            <a:r>
-              <a:rPr sz="900" b="0" i="1">
-                <a:solidFill>
-                  <a:srgbClr val="5A6370"/>
-                </a:solidFill>
-                <a:latin typeface="Calibri"/>
-              </a:rPr>
-              <a:t>Unified Enterprise AI Agents Platform  |  Capgemini x Snowflake Hackathon</a:t>
-            </a:r>
-          </a:p>
-        </p:txBody>
-      </p:sp>
-      <p:sp>
-        <p:nvSpPr>
-          <p:cNvPr id="7" name="TextBox 6"/>
-          <p:cNvSpPr txBox="1"/>
-          <p:nvPr/>
-        </p:nvSpPr>
-        <p:spPr>
-          <a:xfrm>
-            <a:off x="11247120" y="6473952"/>
-            <a:ext cx="731520" cy="320040"/>
-          </a:xfrm>
-          <a:prstGeom prst="rect">
-            <a:avLst/>
-          </a:prstGeom>
-          <a:noFill/>
-        </p:spPr>
-        <p:txBody>
-          <a:bodyPr wrap="square" anchor="t">
-            <a:spAutoFit/>
-          </a:bodyPr>
-          <a:lstStyle/>
-          <a:p>
-            <a:pPr algn="r">
-              <a:lnSpc>
-                <a:spcPct val="100000"/>
-              </a:lnSpc>
-            </a:pPr>
-            <a:r>
-              <a:rPr sz="900" b="0" i="0">
-                <a:solidFill>
-                  <a:srgbClr val="5A6370"/>
-                </a:solidFill>
-                <a:latin typeface="Calibri"/>
-              </a:rPr>
-              <a:t>9</a:t>
-            </a:r>
-          </a:p>
-        </p:txBody>
-      </p:sp>
-    </p:spTree>
-  </p:cSld>
-  <p:clrMapOvr>
-    <a:masterClrMapping/>
-  </p:clrMapOvr>
-</p:sld>
-</file>
-
-<file path=ppt\tableStyles.xml><?xml version="1.0" encoding="utf-8"?>
-<a:tblStyleLst xmlns:a="http://schemas.openxmlformats.org/drawingml/2006/main" def="{5C22544A-7EE6-4342-B048-85BDC9FD1C3A}"/>
-</file>
-
-<file path=ppt\theme\theme1.xml><?xml version="1.0" encoding="utf-8"?>
+<file path=ppt/theme/theme1.xml><?xml version="1.0" encoding="utf-8"?>
 <a:theme xmlns:a="http://schemas.openxmlformats.org/drawingml/2006/main" name="Office Theme">
   <a:themeElements>
     <a:clrScheme name="Office">
@@ -12422,38 +12172,4 @@
   </a:objectDefaults>
   <a:extraClrSchemeLst/>
 </a:theme>
-</file>
-
-<file path=ppt\viewProps.xml><?xml version="1.0" encoding="utf-8"?>
-<p:viewPr xmlns:a="http://schemas.openxmlformats.org/drawingml/2006/main" xmlns:r="http://schemas.openxmlformats.org/officeDocument/2006/relationships" xmlns:p="http://schemas.openxmlformats.org/presentationml/2006/main" lastView="sldThumbnailView">
-  <p:normalViewPr>
-    <p:restoredLeft sz="15620"/>
-    <p:restoredTop sz="94660"/>
-  </p:normalViewPr>
-  <p:slideViewPr>
-    <p:cSldViewPr snapToGrid="0" snapToObjects="1">
-      <p:cViewPr varScale="1">
-        <p:scale>
-          <a:sx n="124" d="100"/>
-          <a:sy n="124" d="100"/>
-        </p:scale>
-        <p:origin x="-1512" y="-112"/>
-      </p:cViewPr>
-      <p:guideLst>
-        <p:guide orient="horz" pos="2160"/>
-        <p:guide pos="2880"/>
-      </p:guideLst>
-    </p:cSldViewPr>
-  </p:slideViewPr>
-  <p:notesTextViewPr>
-    <p:cViewPr>
-      <p:scale>
-        <a:sx n="100" d="100"/>
-        <a:sy n="100" d="100"/>
-      </p:scale>
-      <p:origin x="0" y="0"/>
-    </p:cViewPr>
-  </p:notesTextViewPr>
-  <p:gridSpacing cx="76200" cy="76200"/>
-</p:viewPr>
 </file>
--- a/docs/Unified_Enterprise_AI_Agents_Platform.pptx
+++ b/docs/Unified_Enterprise_AI_Agents_Platform.pptx
@@ -3289,7 +3289,7 @@
                 </a:solidFill>
                 <a:latin typeface="Georgia"/>
               </a:rPr>
-              <a:t>Unified Enterprise AI Agents Platform</a:t>
+              <a:t>Ansura</a:t>
             </a:r>
           </a:p>
         </p:txBody>
@@ -3311,6 +3311,17 @@
           <a:noFill/>
         </p:spPr>
         <p:txBody>
+          <a:p>
+            <a:r>
+              <a:rPr b="1" sz="1700">
+                <a:solidFill>
+                  <a:srgbClr val="29B5E8"/>
+                </a:solidFill>
+                <a:latin typeface="Calibri"/>
+              </a:rPr>
+              <a:t>Unified Enterprise AI Agents Platform</a:t>
+            </a:r>
+          </a:p>
           <a:bodyPr wrap="square" anchor="t">
             <a:spAutoFit/>
           </a:bodyPr>
@@ -3666,7 +3677,7 @@
                 </a:solidFill>
                 <a:latin typeface="Calibri"/>
               </a:rPr>
-              <a:t>This is the “Unified” in the project name — not three separate demos, but one agent</a:t>
+              <a:t>This is Ansura — not three separate demos, but one agent</a:t>
             </a:r>
           </a:p>
           <a:p>
@@ -4241,7 +4252,7 @@
                 </a:solidFill>
                 <a:latin typeface="Calibri"/>
               </a:rPr>
-              <a:t>Unified Enterprise AI Agents Platform  |  Capgemini × Snowflake Hackathon</a:t>
+              <a:t>Ansura  |  Capgemini × Snowflake Hackathon</a:t>
             </a:r>
           </a:p>
         </p:txBody>
@@ -4828,7 +4839,7 @@
                 </a:solidFill>
                 <a:latin typeface="Calibri"/>
               </a:rPr>
-              <a:t>Unified Enterprise AI Agents Platform  |  Capgemini × Snowflake Hackathon</a:t>
+              <a:t>Ansura  |  Capgemini × Snowflake Hackathon</a:t>
             </a:r>
           </a:p>
         </p:txBody>
@@ -4868,6 +4879,905 @@
                 <a:latin typeface="Calibri"/>
               </a:rPr>
               <a:t>11</a:t>
+            </a:r>
+          </a:p>
+        </p:txBody>
+      </p:sp>
+    </p:spTree>
+  </p:cSld>
+  <p:clrMapOvr>
+    <a:masterClrMapping/>
+  </p:clrMapOvr>
+</p:sld>
+</file>
+
+<file path=ppt/slides/slide12.xml><?xml version="1.0" encoding="utf-8"?>
+<p:sld xmlns:a="http://schemas.openxmlformats.org/drawingml/2006/main" xmlns:p="http://schemas.openxmlformats.org/presentationml/2006/main" xmlns:r="http://schemas.openxmlformats.org/officeDocument/2006/relationships">
+  <p:cSld>
+    <p:spTree>
+      <p:nvGrpSpPr>
+        <p:cNvPr id="1" name=""/>
+        <p:cNvGrpSpPr/>
+        <p:nvPr/>
+      </p:nvGrpSpPr>
+      <p:grpSpPr/>
+      <p:sp>
+        <p:nvSpPr>
+          <p:cNvPr id="2" name="Rectangle 1"/>
+          <p:cNvSpPr/>
+          <p:nvPr/>
+        </p:nvSpPr>
+        <p:spPr>
+          <a:xfrm>
+            <a:off x="0" y="0"/>
+            <a:ext cx="12191695" cy="6858000"/>
+          </a:xfrm>
+          <a:prstGeom prst="rect">
+            <a:avLst/>
+          </a:prstGeom>
+          <a:solidFill>
+            <a:srgbClr val="FFFFFF"/>
+          </a:solidFill>
+          <a:ln>
+            <a:noFill/>
+          </a:ln>
+          <a:effectLst/>
+        </p:spPr>
+        <p:style>
+          <a:lnRef idx="1">
+            <a:schemeClr val="accent1"/>
+          </a:lnRef>
+          <a:fillRef idx="3">
+            <a:schemeClr val="accent1"/>
+          </a:fillRef>
+          <a:effectRef idx="2">
+            <a:schemeClr val="accent1"/>
+          </a:effectRef>
+          <a:fontRef idx="minor">
+            <a:schemeClr val="lt1"/>
+          </a:fontRef>
+        </p:style>
+        <p:txBody>
+          <a:bodyPr rtlCol="0" anchor="ctr"/>
+          <a:lstStyle/>
+          <a:p>
+            <a:pPr algn="ctr"/>
+          </a:p>
+        </p:txBody>
+      </p:sp>
+      <p:sp>
+        <p:nvSpPr>
+          <p:cNvPr id="3" name="Rectangle 2"/>
+          <p:cNvSpPr/>
+          <p:nvPr/>
+        </p:nvSpPr>
+        <p:spPr>
+          <a:xfrm>
+            <a:off x="0" y="0"/>
+            <a:ext cx="12191695" cy="1051560"/>
+          </a:xfrm>
+          <a:prstGeom prst="rect">
+            <a:avLst/>
+          </a:prstGeom>
+          <a:solidFill>
+            <a:srgbClr val="0B1F3A"/>
+          </a:solidFill>
+          <a:ln>
+            <a:noFill/>
+          </a:ln>
+          <a:effectLst/>
+        </p:spPr>
+        <p:style>
+          <a:lnRef idx="1">
+            <a:schemeClr val="accent1"/>
+          </a:lnRef>
+          <a:fillRef idx="3">
+            <a:schemeClr val="accent1"/>
+          </a:fillRef>
+          <a:effectRef idx="2">
+            <a:schemeClr val="accent1"/>
+          </a:effectRef>
+          <a:fontRef idx="minor">
+            <a:schemeClr val="lt1"/>
+          </a:fontRef>
+        </p:style>
+        <p:txBody>
+          <a:bodyPr rtlCol="0" anchor="ctr"/>
+          <a:lstStyle/>
+          <a:p>
+            <a:pPr algn="ctr"/>
+          </a:p>
+        </p:txBody>
+      </p:sp>
+      <p:sp>
+        <p:nvSpPr>
+          <p:cNvPr id="4" name="TextBox 3"/>
+          <p:cNvSpPr txBox="1"/>
+          <p:nvPr/>
+        </p:nvSpPr>
+        <p:spPr>
+          <a:xfrm>
+            <a:off x="548640" y="256032"/>
+            <a:ext cx="7315200" cy="548640"/>
+          </a:xfrm>
+          <a:prstGeom prst="rect">
+            <a:avLst/>
+          </a:prstGeom>
+          <a:noFill/>
+        </p:spPr>
+        <p:txBody>
+          <a:bodyPr wrap="square" anchor="t">
+            <a:spAutoFit/>
+          </a:bodyPr>
+          <a:lstStyle/>
+          <a:p>
+            <a:pPr algn="l">
+              <a:lnSpc>
+                <a:spcPct val="100000"/>
+              </a:lnSpc>
+            </a:pPr>
+            <a:r>
+              <a:rPr sz="3000" b="1" i="0">
+                <a:solidFill>
+                  <a:srgbClr val="FFFFFF"/>
+                </a:solidFill>
+                <a:latin typeface="Georgia"/>
+              </a:rPr>
+              <a:t>Benefits</a:t>
+            </a:r>
+          </a:p>
+        </p:txBody>
+      </p:sp>
+      <p:sp>
+        <p:nvSpPr>
+          <p:cNvPr id="20" name="Benefit Card 1"/>
+          <p:cNvSpPr/>
+          <p:nvPr/>
+        </p:nvSpPr>
+        <p:spPr>
+          <a:xfrm>
+            <a:off x="731520" y="1417320"/>
+            <a:ext cx="5212080" cy="1920240"/>
+          </a:xfrm>
+          <a:prstGeom prst="roundRect">
+            <a:avLst>
+              <a:gd name="adj" fmla="val 8000"/>
+            </a:avLst>
+          </a:prstGeom>
+          <a:solidFill>
+            <a:srgbClr val="F4F6F9"/>
+          </a:solidFill>
+          <a:ln>
+            <a:noFill/>
+          </a:ln>
+          <a:effectLst/>
+        </p:spPr>
+        <p:style>
+          <a:lnRef idx="1">
+            <a:schemeClr val="accent1"/>
+          </a:lnRef>
+          <a:fillRef idx="3">
+            <a:schemeClr val="accent1"/>
+          </a:fillRef>
+          <a:effectRef idx="2">
+            <a:schemeClr val="accent1"/>
+          </a:effectRef>
+          <a:fontRef idx="minor">
+            <a:schemeClr val="lt1"/>
+          </a:fontRef>
+        </p:style>
+        <p:txBody>
+          <a:bodyPr wrap="square" lIns="0" tIns="0" rIns="0" bIns="0" anchor="t"/>
+          <a:lstStyle/>
+          <a:p>
+            <a:pPr algn="l"/>
+          </a:p>
+        </p:txBody>
+      </p:sp>
+      <p:sp>
+        <p:nvSpPr>
+          <p:cNvPr id="21" name="Benefit Num 1"/>
+          <p:cNvSpPr/>
+          <p:nvPr/>
+        </p:nvSpPr>
+        <p:spPr>
+          <a:xfrm>
+            <a:off x="1097280" y="1828800"/>
+            <a:ext cx="731520" cy="731520"/>
+          </a:xfrm>
+          <a:prstGeom prst="ellipse">
+            <a:avLst/>
+          </a:prstGeom>
+          <a:solidFill>
+            <a:srgbClr val="0B1F3A"/>
+          </a:solidFill>
+          <a:ln>
+            <a:noFill/>
+          </a:ln>
+          <a:effectLst/>
+        </p:spPr>
+        <p:style>
+          <a:lnRef idx="1">
+            <a:schemeClr val="accent1"/>
+          </a:lnRef>
+          <a:fillRef idx="3">
+            <a:schemeClr val="accent1"/>
+          </a:fillRef>
+          <a:effectRef idx="2">
+            <a:schemeClr val="accent1"/>
+          </a:effectRef>
+          <a:fontRef idx="minor">
+            <a:schemeClr val="lt1"/>
+          </a:fontRef>
+        </p:style>
+        <p:txBody>
+          <a:bodyPr wrap="square" lIns="0" tIns="0" rIns="0" bIns="0" anchor="ctr"/>
+          <a:lstStyle/>
+          <a:p>
+            <a:pPr algn="ctr"/>
+            <a:r>
+              <a:rPr lang="en-US" sz="2400" b="1">
+                <a:solidFill>
+                  <a:srgbClr val="FFFFFF"/>
+                </a:solidFill>
+                <a:latin typeface="Calibri"/>
+              </a:rPr>
+              <a:t>1</a:t>
+            </a:r>
+          </a:p>
+        </p:txBody>
+      </p:sp>
+      <p:sp>
+        <p:nvSpPr>
+          <p:cNvPr id="22" name="Benefit Title 1"/>
+          <p:cNvSpPr txBox="1"/>
+          <p:nvPr/>
+        </p:nvSpPr>
+        <p:spPr>
+          <a:xfrm>
+            <a:off x="2103120" y="1828800"/>
+            <a:ext cx="3474720" cy="411480"/>
+          </a:xfrm>
+          <a:prstGeom prst="rect">
+            <a:avLst/>
+          </a:prstGeom>
+          <a:noFill/>
+        </p:spPr>
+        <p:txBody>
+          <a:bodyPr wrap="square" lIns="0" tIns="0" rIns="0" bIns="0" anchor="t"/>
+          <a:lstStyle/>
+          <a:p>
+            <a:pPr algn="l"/>
+            <a:r>
+              <a:rPr lang="en-US" sz="1800" b="1">
+                <a:solidFill>
+                  <a:srgbClr val="0B1F3A"/>
+                </a:solidFill>
+                <a:latin typeface="Calibri"/>
+              </a:rPr>
+              <a:t>Faster answers</a:t>
+            </a:r>
+          </a:p>
+        </p:txBody>
+      </p:sp>
+      <p:sp>
+        <p:nvSpPr>
+          <p:cNvPr id="23" name="Benefit Desc 1"/>
+          <p:cNvSpPr txBox="1"/>
+          <p:nvPr/>
+        </p:nvSpPr>
+        <p:spPr>
+          <a:xfrm>
+            <a:off x="2103120" y="2286000"/>
+            <a:ext cx="3474720" cy="822960"/>
+          </a:xfrm>
+          <a:prstGeom prst="rect">
+            <a:avLst/>
+          </a:prstGeom>
+          <a:noFill/>
+        </p:spPr>
+        <p:txBody>
+          <a:bodyPr wrap="square" lIns="0" tIns="0" rIns="0" bIns="0" anchor="t"/>
+          <a:lstStyle/>
+          <a:p>
+            <a:pPr algn="l">
+              <a:lnSpc>
+                <a:spcPct val="115000"/>
+              </a:lnSpc>
+            </a:pPr>
+            <a:r>
+              <a:rPr lang="en-US" sz="1400" b="0">
+                <a:solidFill>
+                  <a:srgbClr val="5A6370"/>
+                </a:solidFill>
+                <a:latin typeface="Calibri"/>
+              </a:rPr>
+              <a:t>Hours of waiting on a specialist collapse into a single conversation.</a:t>
+            </a:r>
+          </a:p>
+        </p:txBody>
+      </p:sp>
+      <p:sp>
+        <p:nvSpPr>
+          <p:cNvPr id="24" name="Benefit Card 2"/>
+          <p:cNvSpPr/>
+          <p:nvPr/>
+        </p:nvSpPr>
+        <p:spPr>
+          <a:xfrm>
+            <a:off x="6263640" y="1417320"/>
+            <a:ext cx="5212080" cy="1920240"/>
+          </a:xfrm>
+          <a:prstGeom prst="roundRect">
+            <a:avLst>
+              <a:gd name="adj" fmla="val 8000"/>
+            </a:avLst>
+          </a:prstGeom>
+          <a:solidFill>
+            <a:srgbClr val="F4F6F9"/>
+          </a:solidFill>
+          <a:ln>
+            <a:noFill/>
+          </a:ln>
+          <a:effectLst/>
+        </p:spPr>
+        <p:style>
+          <a:lnRef idx="1">
+            <a:schemeClr val="accent1"/>
+          </a:lnRef>
+          <a:fillRef idx="3">
+            <a:schemeClr val="accent1"/>
+          </a:fillRef>
+          <a:effectRef idx="2">
+            <a:schemeClr val="accent1"/>
+          </a:effectRef>
+          <a:fontRef idx="minor">
+            <a:schemeClr val="lt1"/>
+          </a:fontRef>
+        </p:style>
+        <p:txBody>
+          <a:bodyPr wrap="square" lIns="0" tIns="0" rIns="0" bIns="0" anchor="t"/>
+          <a:lstStyle/>
+          <a:p>
+            <a:pPr algn="l"/>
+          </a:p>
+        </p:txBody>
+      </p:sp>
+      <p:sp>
+        <p:nvSpPr>
+          <p:cNvPr id="25" name="Benefit Num 2"/>
+          <p:cNvSpPr/>
+          <p:nvPr/>
+        </p:nvSpPr>
+        <p:spPr>
+          <a:xfrm>
+            <a:off x="6629400" y="1828800"/>
+            <a:ext cx="731520" cy="731520"/>
+          </a:xfrm>
+          <a:prstGeom prst="ellipse">
+            <a:avLst/>
+          </a:prstGeom>
+          <a:solidFill>
+            <a:srgbClr val="0B1F3A"/>
+          </a:solidFill>
+          <a:ln>
+            <a:noFill/>
+          </a:ln>
+          <a:effectLst/>
+        </p:spPr>
+        <p:style>
+          <a:lnRef idx="1">
+            <a:schemeClr val="accent1"/>
+          </a:lnRef>
+          <a:fillRef idx="3">
+            <a:schemeClr val="accent1"/>
+          </a:fillRef>
+          <a:effectRef idx="2">
+            <a:schemeClr val="accent1"/>
+          </a:effectRef>
+          <a:fontRef idx="minor">
+            <a:schemeClr val="lt1"/>
+          </a:fontRef>
+        </p:style>
+        <p:txBody>
+          <a:bodyPr wrap="square" lIns="0" tIns="0" rIns="0" bIns="0" anchor="ctr"/>
+          <a:lstStyle/>
+          <a:p>
+            <a:pPr algn="ctr"/>
+            <a:r>
+              <a:rPr lang="en-US" sz="2400" b="1">
+                <a:solidFill>
+                  <a:srgbClr val="FFFFFF"/>
+                </a:solidFill>
+                <a:latin typeface="Calibri"/>
+              </a:rPr>
+              <a:t>2</a:t>
+            </a:r>
+          </a:p>
+        </p:txBody>
+      </p:sp>
+      <p:sp>
+        <p:nvSpPr>
+          <p:cNvPr id="26" name="Benefit Title 2"/>
+          <p:cNvSpPr txBox="1"/>
+          <p:nvPr/>
+        </p:nvSpPr>
+        <p:spPr>
+          <a:xfrm>
+            <a:off x="7635240" y="1828800"/>
+            <a:ext cx="3474720" cy="411480"/>
+          </a:xfrm>
+          <a:prstGeom prst="rect">
+            <a:avLst/>
+          </a:prstGeom>
+          <a:noFill/>
+        </p:spPr>
+        <p:txBody>
+          <a:bodyPr wrap="square" lIns="0" tIns="0" rIns="0" bIns="0" anchor="t"/>
+          <a:lstStyle/>
+          <a:p>
+            <a:pPr algn="l"/>
+            <a:r>
+              <a:rPr lang="en-US" sz="1800" b="1">
+                <a:solidFill>
+                  <a:srgbClr val="0B1F3A"/>
+                </a:solidFill>
+                <a:latin typeface="Calibri"/>
+              </a:rPr>
+              <a:t>No new tools to learn</a:t>
+            </a:r>
+          </a:p>
+        </p:txBody>
+      </p:sp>
+      <p:sp>
+        <p:nvSpPr>
+          <p:cNvPr id="27" name="Benefit Desc 2"/>
+          <p:cNvSpPr txBox="1"/>
+          <p:nvPr/>
+        </p:nvSpPr>
+        <p:spPr>
+          <a:xfrm>
+            <a:off x="7635240" y="2286000"/>
+            <a:ext cx="3474720" cy="822960"/>
+          </a:xfrm>
+          <a:prstGeom prst="rect">
+            <a:avLst/>
+          </a:prstGeom>
+          <a:noFill/>
+        </p:spPr>
+        <p:txBody>
+          <a:bodyPr wrap="square" lIns="0" tIns="0" rIns="0" bIns="0" anchor="t"/>
+          <a:lstStyle/>
+          <a:p>
+            <a:pPr algn="l">
+              <a:lnSpc>
+                <a:spcPct val="115000"/>
+              </a:lnSpc>
+            </a:pPr>
+            <a:r>
+              <a:rPr lang="en-US" sz="1400" b="0">
+                <a:solidFill>
+                  <a:srgbClr val="5A6370"/>
+                </a:solidFill>
+                <a:latin typeface="Calibri"/>
+              </a:rPr>
+              <a:t>Plain English in — no SQL, no BI dashboards, no ticket queue.</a:t>
+            </a:r>
+          </a:p>
+        </p:txBody>
+      </p:sp>
+      <p:sp>
+        <p:nvSpPr>
+          <p:cNvPr id="28" name="Benefit Card 3"/>
+          <p:cNvSpPr/>
+          <p:nvPr/>
+        </p:nvSpPr>
+        <p:spPr>
+          <a:xfrm>
+            <a:off x="731520" y="3657600"/>
+            <a:ext cx="5212080" cy="1920240"/>
+          </a:xfrm>
+          <a:prstGeom prst="roundRect">
+            <a:avLst>
+              <a:gd name="adj" fmla="val 8000"/>
+            </a:avLst>
+          </a:prstGeom>
+          <a:solidFill>
+            <a:srgbClr val="F4F6F9"/>
+          </a:solidFill>
+          <a:ln>
+            <a:noFill/>
+          </a:ln>
+          <a:effectLst/>
+        </p:spPr>
+        <p:style>
+          <a:lnRef idx="1">
+            <a:schemeClr val="accent1"/>
+          </a:lnRef>
+          <a:fillRef idx="3">
+            <a:schemeClr val="accent1"/>
+          </a:fillRef>
+          <a:effectRef idx="2">
+            <a:schemeClr val="accent1"/>
+          </a:effectRef>
+          <a:fontRef idx="minor">
+            <a:schemeClr val="lt1"/>
+          </a:fontRef>
+        </p:style>
+        <p:txBody>
+          <a:bodyPr wrap="square" lIns="0" tIns="0" rIns="0" bIns="0" anchor="t"/>
+          <a:lstStyle/>
+          <a:p>
+            <a:pPr algn="l"/>
+          </a:p>
+        </p:txBody>
+      </p:sp>
+      <p:sp>
+        <p:nvSpPr>
+          <p:cNvPr id="29" name="Benefit Num 3"/>
+          <p:cNvSpPr/>
+          <p:nvPr/>
+        </p:nvSpPr>
+        <p:spPr>
+          <a:xfrm>
+            <a:off x="1097280" y="4069080"/>
+            <a:ext cx="731520" cy="731520"/>
+          </a:xfrm>
+          <a:prstGeom prst="ellipse">
+            <a:avLst/>
+          </a:prstGeom>
+          <a:solidFill>
+            <a:srgbClr val="0B1F3A"/>
+          </a:solidFill>
+          <a:ln>
+            <a:noFill/>
+          </a:ln>
+          <a:effectLst/>
+        </p:spPr>
+        <p:style>
+          <a:lnRef idx="1">
+            <a:schemeClr val="accent1"/>
+          </a:lnRef>
+          <a:fillRef idx="3">
+            <a:schemeClr val="accent1"/>
+          </a:fillRef>
+          <a:effectRef idx="2">
+            <a:schemeClr val="accent1"/>
+          </a:effectRef>
+          <a:fontRef idx="minor">
+            <a:schemeClr val="lt1"/>
+          </a:fontRef>
+        </p:style>
+        <p:txBody>
+          <a:bodyPr wrap="square" lIns="0" tIns="0" rIns="0" bIns="0" anchor="ctr"/>
+          <a:lstStyle/>
+          <a:p>
+            <a:pPr algn="ctr"/>
+            <a:r>
+              <a:rPr lang="en-US" sz="2400" b="1">
+                <a:solidFill>
+                  <a:srgbClr val="FFFFFF"/>
+                </a:solidFill>
+                <a:latin typeface="Calibri"/>
+              </a:rPr>
+              <a:t>3</a:t>
+            </a:r>
+          </a:p>
+        </p:txBody>
+      </p:sp>
+      <p:sp>
+        <p:nvSpPr>
+          <p:cNvPr id="30" name="Benefit Title 3"/>
+          <p:cNvSpPr txBox="1"/>
+          <p:nvPr/>
+        </p:nvSpPr>
+        <p:spPr>
+          <a:xfrm>
+            <a:off x="2103120" y="4069080"/>
+            <a:ext cx="3474720" cy="411480"/>
+          </a:xfrm>
+          <a:prstGeom prst="rect">
+            <a:avLst/>
+          </a:prstGeom>
+          <a:noFill/>
+        </p:spPr>
+        <p:txBody>
+          <a:bodyPr wrap="square" lIns="0" tIns="0" rIns="0" bIns="0" anchor="t"/>
+          <a:lstStyle/>
+          <a:p>
+            <a:pPr algn="l"/>
+            <a:r>
+              <a:rPr lang="en-US" sz="1800" b="1">
+                <a:solidFill>
+                  <a:srgbClr val="0B1F3A"/>
+                </a:solidFill>
+                <a:latin typeface="Calibri"/>
+              </a:rPr>
+              <a:t>Trustworthy by design</a:t>
+            </a:r>
+          </a:p>
+        </p:txBody>
+      </p:sp>
+      <p:sp>
+        <p:nvSpPr>
+          <p:cNvPr id="31" name="Benefit Desc 3"/>
+          <p:cNvSpPr txBox="1"/>
+          <p:nvPr/>
+        </p:nvSpPr>
+        <p:spPr>
+          <a:xfrm>
+            <a:off x="2103120" y="4526280"/>
+            <a:ext cx="3474720" cy="822960"/>
+          </a:xfrm>
+          <a:prstGeom prst="rect">
+            <a:avLst/>
+          </a:prstGeom>
+          <a:noFill/>
+        </p:spPr>
+        <p:txBody>
+          <a:bodyPr wrap="square" lIns="0" tIns="0" rIns="0" bIns="0" anchor="t"/>
+          <a:lstStyle/>
+          <a:p>
+            <a:pPr algn="l">
+              <a:lnSpc>
+                <a:spcPct val="115000"/>
+              </a:lnSpc>
+            </a:pPr>
+            <a:r>
+              <a:rPr lang="en-US" sz="1400" b="0">
+                <a:solidFill>
+                  <a:srgbClr val="5A6370"/>
+                </a:solidFill>
+                <a:latin typeface="Calibri"/>
+              </a:rPr>
+              <a:t>Every answer shows its SQL or source citation, so it can be verified.</a:t>
+            </a:r>
+          </a:p>
+        </p:txBody>
+      </p:sp>
+      <p:sp>
+        <p:nvSpPr>
+          <p:cNvPr id="32" name="Benefit Card 4"/>
+          <p:cNvSpPr/>
+          <p:nvPr/>
+        </p:nvSpPr>
+        <p:spPr>
+          <a:xfrm>
+            <a:off x="6263640" y="3657600"/>
+            <a:ext cx="5212080" cy="1920240"/>
+          </a:xfrm>
+          <a:prstGeom prst="roundRect">
+            <a:avLst>
+              <a:gd name="adj" fmla="val 8000"/>
+            </a:avLst>
+          </a:prstGeom>
+          <a:solidFill>
+            <a:srgbClr val="F4F6F9"/>
+          </a:solidFill>
+          <a:ln>
+            <a:noFill/>
+          </a:ln>
+          <a:effectLst/>
+        </p:spPr>
+        <p:style>
+          <a:lnRef idx="1">
+            <a:schemeClr val="accent1"/>
+          </a:lnRef>
+          <a:fillRef idx="3">
+            <a:schemeClr val="accent1"/>
+          </a:fillRef>
+          <a:effectRef idx="2">
+            <a:schemeClr val="accent1"/>
+          </a:effectRef>
+          <a:fontRef idx="minor">
+            <a:schemeClr val="lt1"/>
+          </a:fontRef>
+        </p:style>
+        <p:txBody>
+          <a:bodyPr wrap="square" lIns="0" tIns="0" rIns="0" bIns="0" anchor="t"/>
+          <a:lstStyle/>
+          <a:p>
+            <a:pPr algn="l"/>
+          </a:p>
+        </p:txBody>
+      </p:sp>
+      <p:sp>
+        <p:nvSpPr>
+          <p:cNvPr id="33" name="Benefit Num 4"/>
+          <p:cNvSpPr/>
+          <p:nvPr/>
+        </p:nvSpPr>
+        <p:spPr>
+          <a:xfrm>
+            <a:off x="6629400" y="4069080"/>
+            <a:ext cx="731520" cy="731520"/>
+          </a:xfrm>
+          <a:prstGeom prst="ellipse">
+            <a:avLst/>
+          </a:prstGeom>
+          <a:solidFill>
+            <a:srgbClr val="0B1F3A"/>
+          </a:solidFill>
+          <a:ln>
+            <a:noFill/>
+          </a:ln>
+          <a:effectLst/>
+        </p:spPr>
+        <p:style>
+          <a:lnRef idx="1">
+            <a:schemeClr val="accent1"/>
+          </a:lnRef>
+          <a:fillRef idx="3">
+            <a:schemeClr val="accent1"/>
+          </a:fillRef>
+          <a:effectRef idx="2">
+            <a:schemeClr val="accent1"/>
+          </a:effectRef>
+          <a:fontRef idx="minor">
+            <a:schemeClr val="lt1"/>
+          </a:fontRef>
+        </p:style>
+        <p:txBody>
+          <a:bodyPr wrap="square" lIns="0" tIns="0" rIns="0" bIns="0" anchor="ctr"/>
+          <a:lstStyle/>
+          <a:p>
+            <a:pPr algn="ctr"/>
+            <a:r>
+              <a:rPr lang="en-US" sz="2400" b="1">
+                <a:solidFill>
+                  <a:srgbClr val="FFFFFF"/>
+                </a:solidFill>
+                <a:latin typeface="Calibri"/>
+              </a:rPr>
+              <a:t>4</a:t>
+            </a:r>
+          </a:p>
+        </p:txBody>
+      </p:sp>
+      <p:sp>
+        <p:nvSpPr>
+          <p:cNvPr id="34" name="Benefit Title 4"/>
+          <p:cNvSpPr txBox="1"/>
+          <p:nvPr/>
+        </p:nvSpPr>
+        <p:spPr>
+          <a:xfrm>
+            <a:off x="7635240" y="4069080"/>
+            <a:ext cx="3474720" cy="411480"/>
+          </a:xfrm>
+          <a:prstGeom prst="rect">
+            <a:avLst/>
+          </a:prstGeom>
+          <a:noFill/>
+        </p:spPr>
+        <p:txBody>
+          <a:bodyPr wrap="square" lIns="0" tIns="0" rIns="0" bIns="0" anchor="t"/>
+          <a:lstStyle/>
+          <a:p>
+            <a:pPr algn="l"/>
+            <a:r>
+              <a:rPr lang="en-US" sz="1800" b="1">
+                <a:solidFill>
+                  <a:srgbClr val="0B1F3A"/>
+                </a:solidFill>
+                <a:latin typeface="Calibri"/>
+              </a:rPr>
+              <a:t>One integration, many channels</a:t>
+            </a:r>
+          </a:p>
+        </p:txBody>
+      </p:sp>
+      <p:sp>
+        <p:nvSpPr>
+          <p:cNvPr id="35" name="Benefit Desc 4"/>
+          <p:cNvSpPr txBox="1"/>
+          <p:nvPr/>
+        </p:nvSpPr>
+        <p:spPr>
+          <a:xfrm>
+            <a:off x="7635240" y="4526280"/>
+            <a:ext cx="3474720" cy="822960"/>
+          </a:xfrm>
+          <a:prstGeom prst="rect">
+            <a:avLst/>
+          </a:prstGeom>
+          <a:noFill/>
+        </p:spPr>
+        <p:txBody>
+          <a:bodyPr wrap="square" lIns="0" tIns="0" rIns="0" bIns="0" anchor="t"/>
+          <a:lstStyle/>
+          <a:p>
+            <a:pPr algn="l">
+              <a:lnSpc>
+                <a:spcPct val="115000"/>
+              </a:lnSpc>
+            </a:pPr>
+            <a:r>
+              <a:rPr lang="en-US" sz="1400" b="0">
+                <a:solidFill>
+                  <a:srgbClr val="5A6370"/>
+                </a:solidFill>
+                <a:latin typeface="Calibri"/>
+              </a:rPr>
+              <a:t>The same agent serves Streamlit today and any MCP client tomorrow.</a:t>
+            </a:r>
+          </a:p>
+        </p:txBody>
+      </p:sp>
+      <p:sp>
+        <p:nvSpPr>
+          <p:cNvPr id="9" name="TextBox 8"/>
+          <p:cNvSpPr txBox="1"/>
+          <p:nvPr/>
+        </p:nvSpPr>
+        <p:spPr>
+          <a:xfrm>
+            <a:off x="457200" y="6473952"/>
+            <a:ext cx="5486400" cy="320040"/>
+          </a:xfrm>
+          <a:prstGeom prst="rect">
+            <a:avLst/>
+          </a:prstGeom>
+          <a:noFill/>
+        </p:spPr>
+        <p:txBody>
+          <a:bodyPr wrap="square" anchor="t">
+            <a:spAutoFit/>
+          </a:bodyPr>
+          <a:lstStyle/>
+          <a:p>
+            <a:pPr algn="l">
+              <a:lnSpc>
+                <a:spcPct val="100000"/>
+              </a:lnSpc>
+            </a:pPr>
+            <a:r>
+              <a:rPr sz="900" b="0" i="1">
+                <a:solidFill>
+                  <a:srgbClr val="5A6370"/>
+                </a:solidFill>
+                <a:latin typeface="Calibri"/>
+              </a:rPr>
+              <a:t>Ansura  |  Capgemini × Snowflake Hackathon</a:t>
+            </a:r>
+          </a:p>
+        </p:txBody>
+      </p:sp>
+      <p:sp>
+        <p:nvSpPr>
+          <p:cNvPr id="10" name="TextBox 9"/>
+          <p:cNvSpPr txBox="1"/>
+          <p:nvPr/>
+        </p:nvSpPr>
+        <p:spPr>
+          <a:xfrm>
+            <a:off x="11247120" y="6473952"/>
+            <a:ext cx="731520" cy="320040"/>
+          </a:xfrm>
+          <a:prstGeom prst="rect">
+            <a:avLst/>
+          </a:prstGeom>
+          <a:noFill/>
+        </p:spPr>
+        <p:txBody>
+          <a:bodyPr wrap="square" anchor="t">
+            <a:spAutoFit/>
+          </a:bodyPr>
+          <a:lstStyle/>
+          <a:p>
+            <a:pPr algn="r">
+              <a:lnSpc>
+                <a:spcPct val="100000"/>
+              </a:lnSpc>
+            </a:pPr>
+            <a:r>
+              <a:rPr sz="900" b="0" i="0">
+                <a:solidFill>
+                  <a:srgbClr val="5A6370"/>
+                </a:solidFill>
+                <a:latin typeface="Calibri"/>
+              </a:rPr>
+              <a:t>12</a:t>
             </a:r>
           </a:p>
         </p:txBody>
@@ -5269,905 +6179,6 @@
 </p:sld>
 </file>
 
-<file path=ppt/slides/slide15.xml><?xml version="1.0" encoding="utf-8"?>
-<p:sld xmlns:a="http://schemas.openxmlformats.org/drawingml/2006/main" xmlns:p="http://schemas.openxmlformats.org/presentationml/2006/main" xmlns:r="http://schemas.openxmlformats.org/officeDocument/2006/relationships">
-  <p:cSld>
-    <p:spTree>
-      <p:nvGrpSpPr>
-        <p:cNvPr id="1" name=""/>
-        <p:cNvGrpSpPr/>
-        <p:nvPr/>
-      </p:nvGrpSpPr>
-      <p:grpSpPr/>
-      <p:sp>
-        <p:nvSpPr>
-          <p:cNvPr id="2" name="Rectangle 1"/>
-          <p:cNvSpPr/>
-          <p:nvPr/>
-        </p:nvSpPr>
-        <p:spPr>
-          <a:xfrm>
-            <a:off x="0" y="0"/>
-            <a:ext cx="12191695" cy="6858000"/>
-          </a:xfrm>
-          <a:prstGeom prst="rect">
-            <a:avLst/>
-          </a:prstGeom>
-          <a:solidFill>
-            <a:srgbClr val="FFFFFF"/>
-          </a:solidFill>
-          <a:ln>
-            <a:noFill/>
-          </a:ln>
-          <a:effectLst/>
-        </p:spPr>
-        <p:style>
-          <a:lnRef idx="1">
-            <a:schemeClr val="accent1"/>
-          </a:lnRef>
-          <a:fillRef idx="3">
-            <a:schemeClr val="accent1"/>
-          </a:fillRef>
-          <a:effectRef idx="2">
-            <a:schemeClr val="accent1"/>
-          </a:effectRef>
-          <a:fontRef idx="minor">
-            <a:schemeClr val="lt1"/>
-          </a:fontRef>
-        </p:style>
-        <p:txBody>
-          <a:bodyPr rtlCol="0" anchor="ctr"/>
-          <a:lstStyle/>
-          <a:p>
-            <a:pPr algn="ctr"/>
-          </a:p>
-        </p:txBody>
-      </p:sp>
-      <p:sp>
-        <p:nvSpPr>
-          <p:cNvPr id="3" name="Rectangle 2"/>
-          <p:cNvSpPr/>
-          <p:nvPr/>
-        </p:nvSpPr>
-        <p:spPr>
-          <a:xfrm>
-            <a:off x="0" y="0"/>
-            <a:ext cx="12191695" cy="1051560"/>
-          </a:xfrm>
-          <a:prstGeom prst="rect">
-            <a:avLst/>
-          </a:prstGeom>
-          <a:solidFill>
-            <a:srgbClr val="0B1F3A"/>
-          </a:solidFill>
-          <a:ln>
-            <a:noFill/>
-          </a:ln>
-          <a:effectLst/>
-        </p:spPr>
-        <p:style>
-          <a:lnRef idx="1">
-            <a:schemeClr val="accent1"/>
-          </a:lnRef>
-          <a:fillRef idx="3">
-            <a:schemeClr val="accent1"/>
-          </a:fillRef>
-          <a:effectRef idx="2">
-            <a:schemeClr val="accent1"/>
-          </a:effectRef>
-          <a:fontRef idx="minor">
-            <a:schemeClr val="lt1"/>
-          </a:fontRef>
-        </p:style>
-        <p:txBody>
-          <a:bodyPr rtlCol="0" anchor="ctr"/>
-          <a:lstStyle/>
-          <a:p>
-            <a:pPr algn="ctr"/>
-          </a:p>
-        </p:txBody>
-      </p:sp>
-      <p:sp>
-        <p:nvSpPr>
-          <p:cNvPr id="4" name="TextBox 3"/>
-          <p:cNvSpPr txBox="1"/>
-          <p:nvPr/>
-        </p:nvSpPr>
-        <p:spPr>
-          <a:xfrm>
-            <a:off x="548640" y="256032"/>
-            <a:ext cx="7315200" cy="548640"/>
-          </a:xfrm>
-          <a:prstGeom prst="rect">
-            <a:avLst/>
-          </a:prstGeom>
-          <a:noFill/>
-        </p:spPr>
-        <p:txBody>
-          <a:bodyPr wrap="square" anchor="t">
-            <a:spAutoFit/>
-          </a:bodyPr>
-          <a:lstStyle/>
-          <a:p>
-            <a:pPr algn="l">
-              <a:lnSpc>
-                <a:spcPct val="100000"/>
-              </a:lnSpc>
-            </a:pPr>
-            <a:r>
-              <a:rPr sz="3000" b="1" i="0">
-                <a:solidFill>
-                  <a:srgbClr val="FFFFFF"/>
-                </a:solidFill>
-                <a:latin typeface="Georgia"/>
-              </a:rPr>
-              <a:t>Benefits</a:t>
-            </a:r>
-          </a:p>
-        </p:txBody>
-      </p:sp>
-      <p:sp>
-        <p:nvSpPr>
-          <p:cNvPr id="20" name="Benefit Card 1"/>
-          <p:cNvSpPr/>
-          <p:nvPr/>
-        </p:nvSpPr>
-        <p:spPr>
-          <a:xfrm>
-            <a:off x="731520" y="1417320"/>
-            <a:ext cx="5212080" cy="1920240"/>
-          </a:xfrm>
-          <a:prstGeom prst="roundRect">
-            <a:avLst>
-              <a:gd name="adj" fmla="val 8000"/>
-            </a:avLst>
-          </a:prstGeom>
-          <a:solidFill>
-            <a:srgbClr val="F4F6F9"/>
-          </a:solidFill>
-          <a:ln>
-            <a:noFill/>
-          </a:ln>
-          <a:effectLst/>
-        </p:spPr>
-        <p:style>
-          <a:lnRef idx="1">
-            <a:schemeClr val="accent1"/>
-          </a:lnRef>
-          <a:fillRef idx="3">
-            <a:schemeClr val="accent1"/>
-          </a:fillRef>
-          <a:effectRef idx="2">
-            <a:schemeClr val="accent1"/>
-          </a:effectRef>
-          <a:fontRef idx="minor">
-            <a:schemeClr val="lt1"/>
-          </a:fontRef>
-        </p:style>
-        <p:txBody>
-          <a:bodyPr wrap="square" lIns="0" tIns="0" rIns="0" bIns="0" anchor="t"/>
-          <a:lstStyle/>
-          <a:p>
-            <a:pPr algn="l"/>
-          </a:p>
-        </p:txBody>
-      </p:sp>
-      <p:sp>
-        <p:nvSpPr>
-          <p:cNvPr id="21" name="Benefit Num 1"/>
-          <p:cNvSpPr/>
-          <p:nvPr/>
-        </p:nvSpPr>
-        <p:spPr>
-          <a:xfrm>
-            <a:off x="1097280" y="1828800"/>
-            <a:ext cx="731520" cy="731520"/>
-          </a:xfrm>
-          <a:prstGeom prst="ellipse">
-            <a:avLst/>
-          </a:prstGeom>
-          <a:solidFill>
-            <a:srgbClr val="0B1F3A"/>
-          </a:solidFill>
-          <a:ln>
-            <a:noFill/>
-          </a:ln>
-          <a:effectLst/>
-        </p:spPr>
-        <p:style>
-          <a:lnRef idx="1">
-            <a:schemeClr val="accent1"/>
-          </a:lnRef>
-          <a:fillRef idx="3">
-            <a:schemeClr val="accent1"/>
-          </a:fillRef>
-          <a:effectRef idx="2">
-            <a:schemeClr val="accent1"/>
-          </a:effectRef>
-          <a:fontRef idx="minor">
-            <a:schemeClr val="lt1"/>
-          </a:fontRef>
-        </p:style>
-        <p:txBody>
-          <a:bodyPr wrap="square" lIns="0" tIns="0" rIns="0" bIns="0" anchor="ctr"/>
-          <a:lstStyle/>
-          <a:p>
-            <a:pPr algn="ctr"/>
-            <a:r>
-              <a:rPr lang="en-US" sz="2400" b="1">
-                <a:solidFill>
-                  <a:srgbClr val="FFFFFF"/>
-                </a:solidFill>
-                <a:latin typeface="Calibri"/>
-              </a:rPr>
-              <a:t>1</a:t>
-            </a:r>
-          </a:p>
-        </p:txBody>
-      </p:sp>
-      <p:sp>
-        <p:nvSpPr>
-          <p:cNvPr id="22" name="Benefit Title 1"/>
-          <p:cNvSpPr txBox="1"/>
-          <p:nvPr/>
-        </p:nvSpPr>
-        <p:spPr>
-          <a:xfrm>
-            <a:off x="2103120" y="1828800"/>
-            <a:ext cx="3474720" cy="411480"/>
-          </a:xfrm>
-          <a:prstGeom prst="rect">
-            <a:avLst/>
-          </a:prstGeom>
-          <a:noFill/>
-        </p:spPr>
-        <p:txBody>
-          <a:bodyPr wrap="square" lIns="0" tIns="0" rIns="0" bIns="0" anchor="t"/>
-          <a:lstStyle/>
-          <a:p>
-            <a:pPr algn="l"/>
-            <a:r>
-              <a:rPr lang="en-US" sz="1800" b="1">
-                <a:solidFill>
-                  <a:srgbClr val="0B1F3A"/>
-                </a:solidFill>
-                <a:latin typeface="Calibri"/>
-              </a:rPr>
-              <a:t>Faster answers</a:t>
-            </a:r>
-          </a:p>
-        </p:txBody>
-      </p:sp>
-      <p:sp>
-        <p:nvSpPr>
-          <p:cNvPr id="23" name="Benefit Desc 1"/>
-          <p:cNvSpPr txBox="1"/>
-          <p:nvPr/>
-        </p:nvSpPr>
-        <p:spPr>
-          <a:xfrm>
-            <a:off x="2103120" y="2286000"/>
-            <a:ext cx="3474720" cy="822960"/>
-          </a:xfrm>
-          <a:prstGeom prst="rect">
-            <a:avLst/>
-          </a:prstGeom>
-          <a:noFill/>
-        </p:spPr>
-        <p:txBody>
-          <a:bodyPr wrap="square" lIns="0" tIns="0" rIns="0" bIns="0" anchor="t"/>
-          <a:lstStyle/>
-          <a:p>
-            <a:pPr algn="l">
-              <a:lnSpc>
-                <a:spcPct val="115000"/>
-              </a:lnSpc>
-            </a:pPr>
-            <a:r>
-              <a:rPr lang="en-US" sz="1400" b="0">
-                <a:solidFill>
-                  <a:srgbClr val="5A6370"/>
-                </a:solidFill>
-                <a:latin typeface="Calibri"/>
-              </a:rPr>
-              <a:t>Hours of waiting on a specialist collapse into a single conversation.</a:t>
-            </a:r>
-          </a:p>
-        </p:txBody>
-      </p:sp>
-      <p:sp>
-        <p:nvSpPr>
-          <p:cNvPr id="24" name="Benefit Card 2"/>
-          <p:cNvSpPr/>
-          <p:nvPr/>
-        </p:nvSpPr>
-        <p:spPr>
-          <a:xfrm>
-            <a:off x="6263640" y="1417320"/>
-            <a:ext cx="5212080" cy="1920240"/>
-          </a:xfrm>
-          <a:prstGeom prst="roundRect">
-            <a:avLst>
-              <a:gd name="adj" fmla="val 8000"/>
-            </a:avLst>
-          </a:prstGeom>
-          <a:solidFill>
-            <a:srgbClr val="F4F6F9"/>
-          </a:solidFill>
-          <a:ln>
-            <a:noFill/>
-          </a:ln>
-          <a:effectLst/>
-        </p:spPr>
-        <p:style>
-          <a:lnRef idx="1">
-            <a:schemeClr val="accent1"/>
-          </a:lnRef>
-          <a:fillRef idx="3">
-            <a:schemeClr val="accent1"/>
-          </a:fillRef>
-          <a:effectRef idx="2">
-            <a:schemeClr val="accent1"/>
-          </a:effectRef>
-          <a:fontRef idx="minor">
-            <a:schemeClr val="lt1"/>
-          </a:fontRef>
-        </p:style>
-        <p:txBody>
-          <a:bodyPr wrap="square" lIns="0" tIns="0" rIns="0" bIns="0" anchor="t"/>
-          <a:lstStyle/>
-          <a:p>
-            <a:pPr algn="l"/>
-          </a:p>
-        </p:txBody>
-      </p:sp>
-      <p:sp>
-        <p:nvSpPr>
-          <p:cNvPr id="25" name="Benefit Num 2"/>
-          <p:cNvSpPr/>
-          <p:nvPr/>
-        </p:nvSpPr>
-        <p:spPr>
-          <a:xfrm>
-            <a:off x="6629400" y="1828800"/>
-            <a:ext cx="731520" cy="731520"/>
-          </a:xfrm>
-          <a:prstGeom prst="ellipse">
-            <a:avLst/>
-          </a:prstGeom>
-          <a:solidFill>
-            <a:srgbClr val="0B1F3A"/>
-          </a:solidFill>
-          <a:ln>
-            <a:noFill/>
-          </a:ln>
-          <a:effectLst/>
-        </p:spPr>
-        <p:style>
-          <a:lnRef idx="1">
-            <a:schemeClr val="accent1"/>
-          </a:lnRef>
-          <a:fillRef idx="3">
-            <a:schemeClr val="accent1"/>
-          </a:fillRef>
-          <a:effectRef idx="2">
-            <a:schemeClr val="accent1"/>
-          </a:effectRef>
-          <a:fontRef idx="minor">
-            <a:schemeClr val="lt1"/>
-          </a:fontRef>
-        </p:style>
-        <p:txBody>
-          <a:bodyPr wrap="square" lIns="0" tIns="0" rIns="0" bIns="0" anchor="ctr"/>
-          <a:lstStyle/>
-          <a:p>
-            <a:pPr algn="ctr"/>
-            <a:r>
-              <a:rPr lang="en-US" sz="2400" b="1">
-                <a:solidFill>
-                  <a:srgbClr val="FFFFFF"/>
-                </a:solidFill>
-                <a:latin typeface="Calibri"/>
-              </a:rPr>
-              <a:t>2</a:t>
-            </a:r>
-          </a:p>
-        </p:txBody>
-      </p:sp>
-      <p:sp>
-        <p:nvSpPr>
-          <p:cNvPr id="26" name="Benefit Title 2"/>
-          <p:cNvSpPr txBox="1"/>
-          <p:nvPr/>
-        </p:nvSpPr>
-        <p:spPr>
-          <a:xfrm>
-            <a:off x="7635240" y="1828800"/>
-            <a:ext cx="3474720" cy="411480"/>
-          </a:xfrm>
-          <a:prstGeom prst="rect">
-            <a:avLst/>
-          </a:prstGeom>
-          <a:noFill/>
-        </p:spPr>
-        <p:txBody>
-          <a:bodyPr wrap="square" lIns="0" tIns="0" rIns="0" bIns="0" anchor="t"/>
-          <a:lstStyle/>
-          <a:p>
-            <a:pPr algn="l"/>
-            <a:r>
-              <a:rPr lang="en-US" sz="1800" b="1">
-                <a:solidFill>
-                  <a:srgbClr val="0B1F3A"/>
-                </a:solidFill>
-                <a:latin typeface="Calibri"/>
-              </a:rPr>
-              <a:t>No new tools to learn</a:t>
-            </a:r>
-          </a:p>
-        </p:txBody>
-      </p:sp>
-      <p:sp>
-        <p:nvSpPr>
-          <p:cNvPr id="27" name="Benefit Desc 2"/>
-          <p:cNvSpPr txBox="1"/>
-          <p:nvPr/>
-        </p:nvSpPr>
-        <p:spPr>
-          <a:xfrm>
-            <a:off x="7635240" y="2286000"/>
-            <a:ext cx="3474720" cy="822960"/>
-          </a:xfrm>
-          <a:prstGeom prst="rect">
-            <a:avLst/>
-          </a:prstGeom>
-          <a:noFill/>
-        </p:spPr>
-        <p:txBody>
-          <a:bodyPr wrap="square" lIns="0" tIns="0" rIns="0" bIns="0" anchor="t"/>
-          <a:lstStyle/>
-          <a:p>
-            <a:pPr algn="l">
-              <a:lnSpc>
-                <a:spcPct val="115000"/>
-              </a:lnSpc>
-            </a:pPr>
-            <a:r>
-              <a:rPr lang="en-US" sz="1400" b="0">
-                <a:solidFill>
-                  <a:srgbClr val="5A6370"/>
-                </a:solidFill>
-                <a:latin typeface="Calibri"/>
-              </a:rPr>
-              <a:t>Plain English in — no SQL, no BI dashboards, no ticket queue.</a:t>
-            </a:r>
-          </a:p>
-        </p:txBody>
-      </p:sp>
-      <p:sp>
-        <p:nvSpPr>
-          <p:cNvPr id="28" name="Benefit Card 3"/>
-          <p:cNvSpPr/>
-          <p:nvPr/>
-        </p:nvSpPr>
-        <p:spPr>
-          <a:xfrm>
-            <a:off x="731520" y="3657600"/>
-            <a:ext cx="5212080" cy="1920240"/>
-          </a:xfrm>
-          <a:prstGeom prst="roundRect">
-            <a:avLst>
-              <a:gd name="adj" fmla="val 8000"/>
-            </a:avLst>
-          </a:prstGeom>
-          <a:solidFill>
-            <a:srgbClr val="F4F6F9"/>
-          </a:solidFill>
-          <a:ln>
-            <a:noFill/>
-          </a:ln>
-          <a:effectLst/>
-        </p:spPr>
-        <p:style>
-          <a:lnRef idx="1">
-            <a:schemeClr val="accent1"/>
-          </a:lnRef>
-          <a:fillRef idx="3">
-            <a:schemeClr val="accent1"/>
-          </a:fillRef>
-          <a:effectRef idx="2">
-            <a:schemeClr val="accent1"/>
-          </a:effectRef>
-          <a:fontRef idx="minor">
-            <a:schemeClr val="lt1"/>
-          </a:fontRef>
-        </p:style>
-        <p:txBody>
-          <a:bodyPr wrap="square" lIns="0" tIns="0" rIns="0" bIns="0" anchor="t"/>
-          <a:lstStyle/>
-          <a:p>
-            <a:pPr algn="l"/>
-          </a:p>
-        </p:txBody>
-      </p:sp>
-      <p:sp>
-        <p:nvSpPr>
-          <p:cNvPr id="29" name="Benefit Num 3"/>
-          <p:cNvSpPr/>
-          <p:nvPr/>
-        </p:nvSpPr>
-        <p:spPr>
-          <a:xfrm>
-            <a:off x="1097280" y="4069080"/>
-            <a:ext cx="731520" cy="731520"/>
-          </a:xfrm>
-          <a:prstGeom prst="ellipse">
-            <a:avLst/>
-          </a:prstGeom>
-          <a:solidFill>
-            <a:srgbClr val="0B1F3A"/>
-          </a:solidFill>
-          <a:ln>
-            <a:noFill/>
-          </a:ln>
-          <a:effectLst/>
-        </p:spPr>
-        <p:style>
-          <a:lnRef idx="1">
-            <a:schemeClr val="accent1"/>
-          </a:lnRef>
-          <a:fillRef idx="3">
-            <a:schemeClr val="accent1"/>
-          </a:fillRef>
-          <a:effectRef idx="2">
-            <a:schemeClr val="accent1"/>
-          </a:effectRef>
-          <a:fontRef idx="minor">
-            <a:schemeClr val="lt1"/>
-          </a:fontRef>
-        </p:style>
-        <p:txBody>
-          <a:bodyPr wrap="square" lIns="0" tIns="0" rIns="0" bIns="0" anchor="ctr"/>
-          <a:lstStyle/>
-          <a:p>
-            <a:pPr algn="ctr"/>
-            <a:r>
-              <a:rPr lang="en-US" sz="2400" b="1">
-                <a:solidFill>
-                  <a:srgbClr val="FFFFFF"/>
-                </a:solidFill>
-                <a:latin typeface="Calibri"/>
-              </a:rPr>
-              <a:t>3</a:t>
-            </a:r>
-          </a:p>
-        </p:txBody>
-      </p:sp>
-      <p:sp>
-        <p:nvSpPr>
-          <p:cNvPr id="30" name="Benefit Title 3"/>
-          <p:cNvSpPr txBox="1"/>
-          <p:nvPr/>
-        </p:nvSpPr>
-        <p:spPr>
-          <a:xfrm>
-            <a:off x="2103120" y="4069080"/>
-            <a:ext cx="3474720" cy="411480"/>
-          </a:xfrm>
-          <a:prstGeom prst="rect">
-            <a:avLst/>
-          </a:prstGeom>
-          <a:noFill/>
-        </p:spPr>
-        <p:txBody>
-          <a:bodyPr wrap="square" lIns="0" tIns="0" rIns="0" bIns="0" anchor="t"/>
-          <a:lstStyle/>
-          <a:p>
-            <a:pPr algn="l"/>
-            <a:r>
-              <a:rPr lang="en-US" sz="1800" b="1">
-                <a:solidFill>
-                  <a:srgbClr val="0B1F3A"/>
-                </a:solidFill>
-                <a:latin typeface="Calibri"/>
-              </a:rPr>
-              <a:t>Trustworthy by design</a:t>
-            </a:r>
-          </a:p>
-        </p:txBody>
-      </p:sp>
-      <p:sp>
-        <p:nvSpPr>
-          <p:cNvPr id="31" name="Benefit Desc 3"/>
-          <p:cNvSpPr txBox="1"/>
-          <p:nvPr/>
-        </p:nvSpPr>
-        <p:spPr>
-          <a:xfrm>
-            <a:off x="2103120" y="4526280"/>
-            <a:ext cx="3474720" cy="822960"/>
-          </a:xfrm>
-          <a:prstGeom prst="rect">
-            <a:avLst/>
-          </a:prstGeom>
-          <a:noFill/>
-        </p:spPr>
-        <p:txBody>
-          <a:bodyPr wrap="square" lIns="0" tIns="0" rIns="0" bIns="0" anchor="t"/>
-          <a:lstStyle/>
-          <a:p>
-            <a:pPr algn="l">
-              <a:lnSpc>
-                <a:spcPct val="115000"/>
-              </a:lnSpc>
-            </a:pPr>
-            <a:r>
-              <a:rPr lang="en-US" sz="1400" b="0">
-                <a:solidFill>
-                  <a:srgbClr val="5A6370"/>
-                </a:solidFill>
-                <a:latin typeface="Calibri"/>
-              </a:rPr>
-              <a:t>Every answer shows its SQL or source citation, so it can be verified.</a:t>
-            </a:r>
-          </a:p>
-        </p:txBody>
-      </p:sp>
-      <p:sp>
-        <p:nvSpPr>
-          <p:cNvPr id="32" name="Benefit Card 4"/>
-          <p:cNvSpPr/>
-          <p:nvPr/>
-        </p:nvSpPr>
-        <p:spPr>
-          <a:xfrm>
-            <a:off x="6263640" y="3657600"/>
-            <a:ext cx="5212080" cy="1920240"/>
-          </a:xfrm>
-          <a:prstGeom prst="roundRect">
-            <a:avLst>
-              <a:gd name="adj" fmla="val 8000"/>
-            </a:avLst>
-          </a:prstGeom>
-          <a:solidFill>
-            <a:srgbClr val="F4F6F9"/>
-          </a:solidFill>
-          <a:ln>
-            <a:noFill/>
-          </a:ln>
-          <a:effectLst/>
-        </p:spPr>
-        <p:style>
-          <a:lnRef idx="1">
-            <a:schemeClr val="accent1"/>
-          </a:lnRef>
-          <a:fillRef idx="3">
-            <a:schemeClr val="accent1"/>
-          </a:fillRef>
-          <a:effectRef idx="2">
-            <a:schemeClr val="accent1"/>
-          </a:effectRef>
-          <a:fontRef idx="minor">
-            <a:schemeClr val="lt1"/>
-          </a:fontRef>
-        </p:style>
-        <p:txBody>
-          <a:bodyPr wrap="square" lIns="0" tIns="0" rIns="0" bIns="0" anchor="t"/>
-          <a:lstStyle/>
-          <a:p>
-            <a:pPr algn="l"/>
-          </a:p>
-        </p:txBody>
-      </p:sp>
-      <p:sp>
-        <p:nvSpPr>
-          <p:cNvPr id="33" name="Benefit Num 4"/>
-          <p:cNvSpPr/>
-          <p:nvPr/>
-        </p:nvSpPr>
-        <p:spPr>
-          <a:xfrm>
-            <a:off x="6629400" y="4069080"/>
-            <a:ext cx="731520" cy="731520"/>
-          </a:xfrm>
-          <a:prstGeom prst="ellipse">
-            <a:avLst/>
-          </a:prstGeom>
-          <a:solidFill>
-            <a:srgbClr val="0B1F3A"/>
-          </a:solidFill>
-          <a:ln>
-            <a:noFill/>
-          </a:ln>
-          <a:effectLst/>
-        </p:spPr>
-        <p:style>
-          <a:lnRef idx="1">
-            <a:schemeClr val="accent1"/>
-          </a:lnRef>
-          <a:fillRef idx="3">
-            <a:schemeClr val="accent1"/>
-          </a:fillRef>
-          <a:effectRef idx="2">
-            <a:schemeClr val="accent1"/>
-          </a:effectRef>
-          <a:fontRef idx="minor">
-            <a:schemeClr val="lt1"/>
-          </a:fontRef>
-        </p:style>
-        <p:txBody>
-          <a:bodyPr wrap="square" lIns="0" tIns="0" rIns="0" bIns="0" anchor="ctr"/>
-          <a:lstStyle/>
-          <a:p>
-            <a:pPr algn="ctr"/>
-            <a:r>
-              <a:rPr lang="en-US" sz="2400" b="1">
-                <a:solidFill>
-                  <a:srgbClr val="FFFFFF"/>
-                </a:solidFill>
-                <a:latin typeface="Calibri"/>
-              </a:rPr>
-              <a:t>4</a:t>
-            </a:r>
-          </a:p>
-        </p:txBody>
-      </p:sp>
-      <p:sp>
-        <p:nvSpPr>
-          <p:cNvPr id="34" name="Benefit Title 4"/>
-          <p:cNvSpPr txBox="1"/>
-          <p:nvPr/>
-        </p:nvSpPr>
-        <p:spPr>
-          <a:xfrm>
-            <a:off x="7635240" y="4069080"/>
-            <a:ext cx="3474720" cy="411480"/>
-          </a:xfrm>
-          <a:prstGeom prst="rect">
-            <a:avLst/>
-          </a:prstGeom>
-          <a:noFill/>
-        </p:spPr>
-        <p:txBody>
-          <a:bodyPr wrap="square" lIns="0" tIns="0" rIns="0" bIns="0" anchor="t"/>
-          <a:lstStyle/>
-          <a:p>
-            <a:pPr algn="l"/>
-            <a:r>
-              <a:rPr lang="en-US" sz="1800" b="1">
-                <a:solidFill>
-                  <a:srgbClr val="0B1F3A"/>
-                </a:solidFill>
-                <a:latin typeface="Calibri"/>
-              </a:rPr>
-              <a:t>One integration, many channels</a:t>
-            </a:r>
-          </a:p>
-        </p:txBody>
-      </p:sp>
-      <p:sp>
-        <p:nvSpPr>
-          <p:cNvPr id="35" name="Benefit Desc 4"/>
-          <p:cNvSpPr txBox="1"/>
-          <p:nvPr/>
-        </p:nvSpPr>
-        <p:spPr>
-          <a:xfrm>
-            <a:off x="7635240" y="4526280"/>
-            <a:ext cx="3474720" cy="822960"/>
-          </a:xfrm>
-          <a:prstGeom prst="rect">
-            <a:avLst/>
-          </a:prstGeom>
-          <a:noFill/>
-        </p:spPr>
-        <p:txBody>
-          <a:bodyPr wrap="square" lIns="0" tIns="0" rIns="0" bIns="0" anchor="t"/>
-          <a:lstStyle/>
-          <a:p>
-            <a:pPr algn="l">
-              <a:lnSpc>
-                <a:spcPct val="115000"/>
-              </a:lnSpc>
-            </a:pPr>
-            <a:r>
-              <a:rPr lang="en-US" sz="1400" b="0">
-                <a:solidFill>
-                  <a:srgbClr val="5A6370"/>
-                </a:solidFill>
-                <a:latin typeface="Calibri"/>
-              </a:rPr>
-              <a:t>The same agent serves Streamlit today and any MCP client tomorrow.</a:t>
-            </a:r>
-          </a:p>
-        </p:txBody>
-      </p:sp>
-      <p:sp>
-        <p:nvSpPr>
-          <p:cNvPr id="9" name="TextBox 8"/>
-          <p:cNvSpPr txBox="1"/>
-          <p:nvPr/>
-        </p:nvSpPr>
-        <p:spPr>
-          <a:xfrm>
-            <a:off x="457200" y="6473952"/>
-            <a:ext cx="5486400" cy="320040"/>
-          </a:xfrm>
-          <a:prstGeom prst="rect">
-            <a:avLst/>
-          </a:prstGeom>
-          <a:noFill/>
-        </p:spPr>
-        <p:txBody>
-          <a:bodyPr wrap="square" anchor="t">
-            <a:spAutoFit/>
-          </a:bodyPr>
-          <a:lstStyle/>
-          <a:p>
-            <a:pPr algn="l">
-              <a:lnSpc>
-                <a:spcPct val="100000"/>
-              </a:lnSpc>
-            </a:pPr>
-            <a:r>
-              <a:rPr sz="900" b="0" i="1">
-                <a:solidFill>
-                  <a:srgbClr val="5A6370"/>
-                </a:solidFill>
-                <a:latin typeface="Calibri"/>
-              </a:rPr>
-              <a:t>Unified Enterprise AI Agents Platform  |  Capgemini × Snowflake Hackathon</a:t>
-            </a:r>
-          </a:p>
-        </p:txBody>
-      </p:sp>
-      <p:sp>
-        <p:nvSpPr>
-          <p:cNvPr id="10" name="TextBox 9"/>
-          <p:cNvSpPr txBox="1"/>
-          <p:nvPr/>
-        </p:nvSpPr>
-        <p:spPr>
-          <a:xfrm>
-            <a:off x="11247120" y="6473952"/>
-            <a:ext cx="731520" cy="320040"/>
-          </a:xfrm>
-          <a:prstGeom prst="rect">
-            <a:avLst/>
-          </a:prstGeom>
-          <a:noFill/>
-        </p:spPr>
-        <p:txBody>
-          <a:bodyPr wrap="square" anchor="t">
-            <a:spAutoFit/>
-          </a:bodyPr>
-          <a:lstStyle/>
-          <a:p>
-            <a:pPr algn="r">
-              <a:lnSpc>
-                <a:spcPct val="100000"/>
-              </a:lnSpc>
-            </a:pPr>
-            <a:r>
-              <a:rPr sz="900" b="0" i="0">
-                <a:solidFill>
-                  <a:srgbClr val="5A6370"/>
-                </a:solidFill>
-                <a:latin typeface="Calibri"/>
-              </a:rPr>
-              <a:t>12</a:t>
-            </a:r>
-          </a:p>
-        </p:txBody>
-      </p:sp>
-    </p:spTree>
-  </p:cSld>
-  <p:clrMapOvr>
-    <a:masterClrMapping/>
-  </p:clrMapOvr>
-</p:sld>
-</file>
-
 <file path=ppt/slides/slide2.xml><?xml version="1.0" encoding="utf-8"?>
 <p:sld xmlns:a="http://schemas.openxmlformats.org/drawingml/2006/main" xmlns:p="http://schemas.openxmlformats.org/presentationml/2006/main" xmlns:r="http://schemas.openxmlformats.org/officeDocument/2006/relationships">
   <p:cSld>
@@ -6474,7 +6485,7 @@
                 </a:solidFill>
                 <a:latin typeface="Calibri"/>
               </a:rPr>
-              <a:t>Unified Enterprise AI Agents Platform  |  Capgemini × Snowflake Hackathon</a:t>
+              <a:t>Ansura  |  Capgemini × Snowflake Hackathon</a:t>
             </a:r>
           </a:p>
         </p:txBody>
@@ -7532,7 +7543,7 @@
                 </a:solidFill>
                 <a:latin typeface="Calibri"/>
               </a:rPr>
-              <a:t>Unified Enterprise AI Agents Platform  |  Capgemini × Snowflake Hackathon</a:t>
+              <a:t>Ansura  |  Capgemini × Snowflake Hackathon</a:t>
             </a:r>
           </a:p>
         </p:txBody>
@@ -8309,7 +8320,7 @@
                 </a:solidFill>
                 <a:latin typeface="Calibri"/>
               </a:rPr>
-              <a:t>Unified Enterprise AI Agents Platform  |  Capgemini × Snowflake Hackathon</a:t>
+              <a:t>Ansura  |  Capgemini × Snowflake Hackathon</a:t>
             </a:r>
           </a:p>
         </p:txBody>
@@ -9722,7 +9733,7 @@
                 </a:solidFill>
                 <a:latin typeface="Calibri"/>
               </a:rPr>
-              <a:t>Unified Enterprise AI Agents Platform  |  Capgemini × Snowflake Hackathon</a:t>
+              <a:t>Ansura  |  Capgemini × Snowflake Hackathon</a:t>
             </a:r>
           </a:p>
         </p:txBody>
@@ -10333,7 +10344,7 @@
                 </a:solidFill>
                 <a:latin typeface="Calibri"/>
               </a:rPr>
-              <a:t>Unified Enterprise AI Agents Platform  |  Capgemini × Snowflake Hackathon</a:t>
+              <a:t>Ansura  |  Capgemini × Snowflake Hackathon</a:t>
             </a:r>
           </a:p>
         </p:txBody>
@@ -10944,7 +10955,7 @@
                 </a:solidFill>
                 <a:latin typeface="Calibri"/>
               </a:rPr>
-              <a:t>Unified Enterprise AI Agents Platform  |  Capgemini × Snowflake Hackathon</a:t>
+              <a:t>Ansura  |  Capgemini × Snowflake Hackathon</a:t>
             </a:r>
           </a:p>
         </p:txBody>
@@ -11555,7 +11566,7 @@
                 </a:solidFill>
                 <a:latin typeface="Calibri"/>
               </a:rPr>
-              <a:t>Unified Enterprise AI Agents Platform  |  Capgemini × Snowflake Hackathon</a:t>
+              <a:t>Ansura  |  Capgemini × Snowflake Hackathon</a:t>
             </a:r>
           </a:p>
         </p:txBody>
@@ -11802,7 +11813,7 @@
                 </a:solidFill>
                 <a:latin typeface="Calibri"/>
               </a:rPr>
-              <a:t>Unified Enterprise AI Agents Platform  |  Capgemini × Snowflake Hackathon</a:t>
+              <a:t>Ansura  |  Capgemini × Snowflake Hackathon</a:t>
             </a:r>
           </a:p>
         </p:txBody>

--- a/docs/Unified_Enterprise_AI_Agents_Platform.pptx
+++ b/docs/Unified_Enterprise_AI_Agents_Platform.pptx
@@ -3498,6 +3498,30 @@
           </a:p>
         </p:txBody>
       </p:sp>
+      <p:pic>
+        <p:nvPicPr>
+          <p:cNvPr id="11" name="Picture 10" descr="ansura_avatar.png"/>
+          <p:cNvPicPr>
+            <a:picLocks noChangeAspect="1"/>
+          </p:cNvPicPr>
+          <p:nvPr/>
+        </p:nvPicPr>
+        <p:blipFill>
+          <a:blip r:embed="rId3"/>
+          <a:stretch>
+            <a:fillRect/>
+          </a:stretch>
+        </p:blipFill>
+        <p:spPr>
+          <a:xfrm>
+            <a:off x="5645847" y="1120000"/>
+            <a:ext cx="900000" cy="900000"/>
+          </a:xfrm>
+          <a:prstGeom prst="rect">
+            <a:avLst/>
+          </a:prstGeom>
+        </p:spPr>
+      </p:pic>
     </p:spTree>
   </p:cSld>
   <p:clrMapOvr>
